--- a/exe2/presentation.pptx
+++ b/exe2/presentation.pptx
@@ -2,7 +2,7 @@
 <file path=ppt/presentation.xml><?xml version="1.0" encoding="utf-8"?>
 <p:presentation xmlns:a="http://schemas.openxmlformats.org/drawingml/2006/main" xmlns:r="http://schemas.openxmlformats.org/officeDocument/2006/relationships" xmlns:p="http://schemas.openxmlformats.org/presentationml/2006/main" saveSubsetFonts="1">
   <p:sldMasterIdLst>
-    <p:sldMasterId id="2147483648" r:id="rId1"/>
+    <p:sldMasterId id="2147483829" r:id="rId1"/>
   </p:sldMasterIdLst>
   <p:sldIdLst>
     <p:sldId id="256" r:id="rId2"/>
@@ -15,7 +15,7 @@
     <a:defPPr>
       <a:defRPr lang="en-US"/>
     </a:defPPr>
-    <a:lvl1pPr marL="0" algn="l" defTabSz="914400" rtl="0" eaLnBrk="1" latinLnBrk="0" hangingPunct="1">
+    <a:lvl1pPr marL="0" algn="l" defTabSz="457200" rtl="0" eaLnBrk="1" latinLnBrk="0" hangingPunct="1">
       <a:defRPr sz="1800" kern="1200">
         <a:solidFill>
           <a:schemeClr val="tx1"/>
@@ -25,7 +25,7 @@
         <a:cs typeface="+mn-cs"/>
       </a:defRPr>
     </a:lvl1pPr>
-    <a:lvl2pPr marL="457200" algn="l" defTabSz="914400" rtl="0" eaLnBrk="1" latinLnBrk="0" hangingPunct="1">
+    <a:lvl2pPr marL="457200" algn="l" defTabSz="457200" rtl="0" eaLnBrk="1" latinLnBrk="0" hangingPunct="1">
       <a:defRPr sz="1800" kern="1200">
         <a:solidFill>
           <a:schemeClr val="tx1"/>
@@ -35,7 +35,7 @@
         <a:cs typeface="+mn-cs"/>
       </a:defRPr>
     </a:lvl2pPr>
-    <a:lvl3pPr marL="914400" algn="l" defTabSz="914400" rtl="0" eaLnBrk="1" latinLnBrk="0" hangingPunct="1">
+    <a:lvl3pPr marL="914400" algn="l" defTabSz="457200" rtl="0" eaLnBrk="1" latinLnBrk="0" hangingPunct="1">
       <a:defRPr sz="1800" kern="1200">
         <a:solidFill>
           <a:schemeClr val="tx1"/>
@@ -45,7 +45,7 @@
         <a:cs typeface="+mn-cs"/>
       </a:defRPr>
     </a:lvl3pPr>
-    <a:lvl4pPr marL="1371600" algn="l" defTabSz="914400" rtl="0" eaLnBrk="1" latinLnBrk="0" hangingPunct="1">
+    <a:lvl4pPr marL="1371600" algn="l" defTabSz="457200" rtl="0" eaLnBrk="1" latinLnBrk="0" hangingPunct="1">
       <a:defRPr sz="1800" kern="1200">
         <a:solidFill>
           <a:schemeClr val="tx1"/>
@@ -55,7 +55,7 @@
         <a:cs typeface="+mn-cs"/>
       </a:defRPr>
     </a:lvl4pPr>
-    <a:lvl5pPr marL="1828800" algn="l" defTabSz="914400" rtl="0" eaLnBrk="1" latinLnBrk="0" hangingPunct="1">
+    <a:lvl5pPr marL="1828800" algn="l" defTabSz="457200" rtl="0" eaLnBrk="1" latinLnBrk="0" hangingPunct="1">
       <a:defRPr sz="1800" kern="1200">
         <a:solidFill>
           <a:schemeClr val="tx1"/>
@@ -65,7 +65,7 @@
         <a:cs typeface="+mn-cs"/>
       </a:defRPr>
     </a:lvl5pPr>
-    <a:lvl6pPr marL="2286000" algn="l" defTabSz="914400" rtl="0" eaLnBrk="1" latinLnBrk="0" hangingPunct="1">
+    <a:lvl6pPr marL="2286000" algn="l" defTabSz="457200" rtl="0" eaLnBrk="1" latinLnBrk="0" hangingPunct="1">
       <a:defRPr sz="1800" kern="1200">
         <a:solidFill>
           <a:schemeClr val="tx1"/>
@@ -75,7 +75,7 @@
         <a:cs typeface="+mn-cs"/>
       </a:defRPr>
     </a:lvl6pPr>
-    <a:lvl7pPr marL="2743200" algn="l" defTabSz="914400" rtl="0" eaLnBrk="1" latinLnBrk="0" hangingPunct="1">
+    <a:lvl7pPr marL="2743200" algn="l" defTabSz="457200" rtl="0" eaLnBrk="1" latinLnBrk="0" hangingPunct="1">
       <a:defRPr sz="1800" kern="1200">
         <a:solidFill>
           <a:schemeClr val="tx1"/>
@@ -85,7 +85,7 @@
         <a:cs typeface="+mn-cs"/>
       </a:defRPr>
     </a:lvl7pPr>
-    <a:lvl8pPr marL="3200400" algn="l" defTabSz="914400" rtl="0" eaLnBrk="1" latinLnBrk="0" hangingPunct="1">
+    <a:lvl8pPr marL="3200400" algn="l" defTabSz="457200" rtl="0" eaLnBrk="1" latinLnBrk="0" hangingPunct="1">
       <a:defRPr sz="1800" kern="1200">
         <a:solidFill>
           <a:schemeClr val="tx1"/>
@@ -95,7 +95,7 @@
         <a:cs typeface="+mn-cs"/>
       </a:defRPr>
     </a:lvl8pPr>
-    <a:lvl9pPr marL="3657600" algn="l" defTabSz="914400" rtl="0" eaLnBrk="1" latinLnBrk="0" hangingPunct="1">
+    <a:lvl9pPr marL="3657600" algn="l" defTabSz="457200" rtl="0" eaLnBrk="1" latinLnBrk="0" hangingPunct="1">
       <a:defRPr sz="1800" kern="1200">
         <a:solidFill>
           <a:schemeClr val="tx1"/>
@@ -128,13 +128,7 @@
       </p:grpSpPr>
       <p:sp>
         <p:nvSpPr>
-          <p:cNvPr id="2" name="Title 1">
-            <a:extLst>
-              <a:ext uri="{FF2B5EF4-FFF2-40B4-BE49-F238E27FC236}">
-                <a16:creationId xmlns:a16="http://schemas.microsoft.com/office/drawing/2014/main" id="{5AB5CB9F-E5C3-9969-B762-A301D4AD0A97}"/>
-              </a:ext>
-            </a:extLst>
-          </p:cNvPr>
+          <p:cNvPr id="2" name="Title 1"/>
           <p:cNvSpPr>
             <a:spLocks noGrp="1"/>
           </p:cNvSpPr>
@@ -144,15 +138,32 @@
         </p:nvSpPr>
         <p:spPr>
           <a:xfrm>
-            <a:off x="1524000" y="1122363"/>
-            <a:ext cx="9144000" cy="2387600"/>
+            <a:off x="1751012" y="609601"/>
+            <a:ext cx="8676222" cy="3200400"/>
           </a:xfrm>
         </p:spPr>
         <p:txBody>
-          <a:bodyPr anchor="b"/>
+          <a:bodyPr anchor="b">
+            <a:normAutofit/>
+          </a:bodyPr>
           <a:lstStyle>
             <a:lvl1pPr algn="ctr">
-              <a:defRPr sz="6000"/>
+              <a:defRPr sz="4800">
+                <a:effectLst>
+                  <a:glow rad="38100">
+                    <a:schemeClr val="bg1">
+                      <a:lumMod val="65000"/>
+                      <a:lumOff val="35000"/>
+                      <a:alpha val="50000"/>
+                    </a:schemeClr>
+                  </a:glow>
+                  <a:outerShdw blurRad="28575" dist="31750" dir="13200000" algn="tl" rotWithShape="0">
+                    <a:srgbClr val="000000">
+                      <a:alpha val="25000"/>
+                    </a:srgbClr>
+                  </a:outerShdw>
+                </a:effectLst>
+              </a:defRPr>
             </a:lvl1pPr>
           </a:lstStyle>
           <a:p>
@@ -160,19 +171,13 @@
               <a:rPr lang="en-US"/>
               <a:t>Click to edit Master title style</a:t>
             </a:r>
-            <a:endParaRPr lang="en-GB"/>
-          </a:p>
-        </p:txBody>
-      </p:sp>
-      <p:sp>
-        <p:nvSpPr>
-          <p:cNvPr id="3" name="Subtitle 2">
-            <a:extLst>
-              <a:ext uri="{FF2B5EF4-FFF2-40B4-BE49-F238E27FC236}">
-                <a16:creationId xmlns:a16="http://schemas.microsoft.com/office/drawing/2014/main" id="{FF1C9B08-8470-98B2-FD9C-0E84FA4A467C}"/>
-              </a:ext>
-            </a:extLst>
-          </p:cNvPr>
+            <a:endParaRPr lang="en-US" dirty="0"/>
+          </a:p>
+        </p:txBody>
+      </p:sp>
+      <p:sp>
+        <p:nvSpPr>
+          <p:cNvPr id="3" name="Subtitle 2"/>
           <p:cNvSpPr>
             <a:spLocks noGrp="1"/>
           </p:cNvSpPr>
@@ -182,48 +187,113 @@
         </p:nvSpPr>
         <p:spPr>
           <a:xfrm>
-            <a:off x="1524000" y="3602038"/>
-            <a:ext cx="9144000" cy="1655762"/>
+            <a:off x="1751012" y="3886200"/>
+            <a:ext cx="8676222" cy="1905000"/>
           </a:xfrm>
         </p:spPr>
         <p:txBody>
-          <a:bodyPr/>
+          <a:bodyPr anchor="t">
+            <a:normAutofit/>
+          </a:bodyPr>
           <a:lstStyle>
             <a:lvl1pPr marL="0" indent="0" algn="ctr">
               <a:buNone/>
-              <a:defRPr sz="2400"/>
+              <a:defRPr sz="2100">
+                <a:gradFill flip="none" rotWithShape="1">
+                  <a:gsLst>
+                    <a:gs pos="0">
+                      <a:schemeClr val="tx1"/>
+                    </a:gs>
+                    <a:gs pos="100000">
+                      <a:schemeClr val="tx1">
+                        <a:lumMod val="75000"/>
+                      </a:schemeClr>
+                    </a:gs>
+                  </a:gsLst>
+                  <a:lin ang="5400000" scaled="0"/>
+                  <a:tileRect/>
+                </a:gradFill>
+              </a:defRPr>
             </a:lvl1pPr>
             <a:lvl2pPr marL="457200" indent="0" algn="ctr">
               <a:buNone/>
-              <a:defRPr sz="2000"/>
+              <a:defRPr>
+                <a:solidFill>
+                  <a:schemeClr val="tx1">
+                    <a:tint val="75000"/>
+                  </a:schemeClr>
+                </a:solidFill>
+              </a:defRPr>
             </a:lvl2pPr>
             <a:lvl3pPr marL="914400" indent="0" algn="ctr">
               <a:buNone/>
-              <a:defRPr sz="1800"/>
+              <a:defRPr>
+                <a:solidFill>
+                  <a:schemeClr val="tx1">
+                    <a:tint val="75000"/>
+                  </a:schemeClr>
+                </a:solidFill>
+              </a:defRPr>
             </a:lvl3pPr>
             <a:lvl4pPr marL="1371600" indent="0" algn="ctr">
               <a:buNone/>
-              <a:defRPr sz="1600"/>
+              <a:defRPr>
+                <a:solidFill>
+                  <a:schemeClr val="tx1">
+                    <a:tint val="75000"/>
+                  </a:schemeClr>
+                </a:solidFill>
+              </a:defRPr>
             </a:lvl4pPr>
             <a:lvl5pPr marL="1828800" indent="0" algn="ctr">
               <a:buNone/>
-              <a:defRPr sz="1600"/>
+              <a:defRPr>
+                <a:solidFill>
+                  <a:schemeClr val="tx1">
+                    <a:tint val="75000"/>
+                  </a:schemeClr>
+                </a:solidFill>
+              </a:defRPr>
             </a:lvl5pPr>
             <a:lvl6pPr marL="2286000" indent="0" algn="ctr">
               <a:buNone/>
-              <a:defRPr sz="1600"/>
+              <a:defRPr>
+                <a:solidFill>
+                  <a:schemeClr val="tx1">
+                    <a:tint val="75000"/>
+                  </a:schemeClr>
+                </a:solidFill>
+              </a:defRPr>
             </a:lvl6pPr>
             <a:lvl7pPr marL="2743200" indent="0" algn="ctr">
               <a:buNone/>
-              <a:defRPr sz="1600"/>
+              <a:defRPr>
+                <a:solidFill>
+                  <a:schemeClr val="tx1">
+                    <a:tint val="75000"/>
+                  </a:schemeClr>
+                </a:solidFill>
+              </a:defRPr>
             </a:lvl7pPr>
             <a:lvl8pPr marL="3200400" indent="0" algn="ctr">
               <a:buNone/>
-              <a:defRPr sz="1600"/>
+              <a:defRPr>
+                <a:solidFill>
+                  <a:schemeClr val="tx1">
+                    <a:tint val="75000"/>
+                  </a:schemeClr>
+                </a:solidFill>
+              </a:defRPr>
             </a:lvl8pPr>
             <a:lvl9pPr marL="3657600" indent="0" algn="ctr">
               <a:buNone/>
-              <a:defRPr sz="1600"/>
+              <a:defRPr>
+                <a:solidFill>
+                  <a:schemeClr val="tx1">
+                    <a:tint val="75000"/>
+                  </a:schemeClr>
+                </a:solidFill>
+              </a:defRPr>
             </a:lvl9pPr>
           </a:lstStyle>
           <a:p>
@@ -231,19 +301,13 @@
               <a:rPr lang="en-US"/>
               <a:t>Click to edit Master subtitle style</a:t>
             </a:r>
-            <a:endParaRPr lang="en-GB"/>
-          </a:p>
-        </p:txBody>
-      </p:sp>
-      <p:sp>
-        <p:nvSpPr>
-          <p:cNvPr id="4" name="Date Placeholder 3">
-            <a:extLst>
-              <a:ext uri="{FF2B5EF4-FFF2-40B4-BE49-F238E27FC236}">
-                <a16:creationId xmlns:a16="http://schemas.microsoft.com/office/drawing/2014/main" id="{85C26CAA-E060-5C03-0750-6EC8DCB2122E}"/>
-              </a:ext>
-            </a:extLst>
-          </p:cNvPr>
+            <a:endParaRPr lang="en-US" dirty="0"/>
+          </a:p>
+        </p:txBody>
+      </p:sp>
+      <p:sp>
+        <p:nvSpPr>
+          <p:cNvPr id="4" name="Date Placeholder 3"/>
           <p:cNvSpPr>
             <a:spLocks noGrp="1"/>
           </p:cNvSpPr>
@@ -266,13 +330,7 @@
       </p:sp>
       <p:sp>
         <p:nvSpPr>
-          <p:cNvPr id="5" name="Footer Placeholder 4">
-            <a:extLst>
-              <a:ext uri="{FF2B5EF4-FFF2-40B4-BE49-F238E27FC236}">
-                <a16:creationId xmlns:a16="http://schemas.microsoft.com/office/drawing/2014/main" id="{22D3DF1E-4C25-B179-45BA-A38367498FC0}"/>
-              </a:ext>
-            </a:extLst>
-          </p:cNvPr>
+          <p:cNvPr id="5" name="Footer Placeholder 4"/>
           <p:cNvSpPr>
             <a:spLocks noGrp="1"/>
           </p:cNvSpPr>
@@ -291,13 +349,7 @@
       </p:sp>
       <p:sp>
         <p:nvSpPr>
-          <p:cNvPr id="6" name="Slide Number Placeholder 5">
-            <a:extLst>
-              <a:ext uri="{FF2B5EF4-FFF2-40B4-BE49-F238E27FC236}">
-                <a16:creationId xmlns:a16="http://schemas.microsoft.com/office/drawing/2014/main" id="{07E2D2EB-005A-C13C-926C-2AFE7BDC510A}"/>
-              </a:ext>
-            </a:extLst>
-          </p:cNvPr>
+          <p:cNvPr id="6" name="Slide Number Placeholder 5"/>
           <p:cNvSpPr>
             <a:spLocks noGrp="1"/>
           </p:cNvSpPr>
@@ -321,7 +373,7 @@
     </p:spTree>
     <p:extLst>
       <p:ext uri="{BB962C8B-B14F-4D97-AF65-F5344CB8AC3E}">
-        <p14:creationId xmlns:p14="http://schemas.microsoft.com/office/powerpoint/2010/main" val="1878947203"/>
+        <p14:creationId xmlns:p14="http://schemas.microsoft.com/office/powerpoint/2010/main" val="2047996644"/>
       </p:ext>
     </p:extLst>
   </p:cSld>
@@ -332,6 +384,2113 @@
 </file>
 
 <file path=ppt/slideLayouts/slideLayout10.xml><?xml version="1.0" encoding="utf-8"?>
+<p:sldLayout xmlns:a="http://schemas.openxmlformats.org/drawingml/2006/main" xmlns:r="http://schemas.openxmlformats.org/officeDocument/2006/relationships" xmlns:p="http://schemas.openxmlformats.org/presentationml/2006/main" preserve="1">
+  <p:cSld name="Panoramic Picture with Caption">
+    <p:spTree>
+      <p:nvGrpSpPr>
+        <p:cNvPr id="1" name=""/>
+        <p:cNvGrpSpPr/>
+        <p:nvPr/>
+      </p:nvGrpSpPr>
+      <p:grpSpPr>
+        <a:xfrm>
+          <a:off x="0" y="0"/>
+          <a:ext cx="0" cy="0"/>
+          <a:chOff x="0" y="0"/>
+          <a:chExt cx="0" cy="0"/>
+        </a:xfrm>
+      </p:grpSpPr>
+      <p:sp>
+        <p:nvSpPr>
+          <p:cNvPr id="2" name="Title 1"/>
+          <p:cNvSpPr>
+            <a:spLocks noGrp="1"/>
+          </p:cNvSpPr>
+          <p:nvPr>
+            <p:ph type="title"/>
+          </p:nvPr>
+        </p:nvSpPr>
+        <p:spPr>
+          <a:xfrm>
+            <a:off x="1141413" y="4732865"/>
+            <a:ext cx="9906000" cy="566738"/>
+          </a:xfrm>
+        </p:spPr>
+        <p:txBody>
+          <a:bodyPr anchor="b">
+            <a:normAutofit/>
+          </a:bodyPr>
+          <a:lstStyle>
+            <a:lvl1pPr algn="l">
+              <a:defRPr sz="2400" b="0"/>
+            </a:lvl1pPr>
+          </a:lstStyle>
+          <a:p>
+            <a:r>
+              <a:rPr lang="en-US"/>
+              <a:t>Click to edit Master title style</a:t>
+            </a:r>
+            <a:endParaRPr lang="en-US" dirty="0"/>
+          </a:p>
+        </p:txBody>
+      </p:sp>
+      <p:sp>
+        <p:nvSpPr>
+          <p:cNvPr id="3" name="Picture Placeholder 2"/>
+          <p:cNvSpPr>
+            <a:spLocks noGrp="1" noChangeAspect="1"/>
+          </p:cNvSpPr>
+          <p:nvPr>
+            <p:ph type="pic" idx="1"/>
+          </p:nvPr>
+        </p:nvSpPr>
+        <p:spPr>
+          <a:xfrm>
+            <a:off x="1979612" y="932112"/>
+            <a:ext cx="8225944" cy="3164976"/>
+          </a:xfrm>
+          <a:prstGeom prst="roundRect">
+            <a:avLst>
+              <a:gd name="adj" fmla="val 4380"/>
+            </a:avLst>
+          </a:prstGeom>
+          <a:ln w="38100">
+            <a:gradFill flip="none" rotWithShape="1">
+              <a:gsLst>
+                <a:gs pos="0">
+                  <a:schemeClr val="bg2"/>
+                </a:gs>
+                <a:gs pos="100000">
+                  <a:schemeClr val="bg2">
+                    <a:lumMod val="75000"/>
+                  </a:schemeClr>
+                </a:gs>
+              </a:gsLst>
+              <a:lin ang="5400000" scaled="0"/>
+              <a:tileRect/>
+            </a:gradFill>
+          </a:ln>
+          <a:effectLst>
+            <a:innerShdw blurRad="57150" dist="38100" dir="14460000">
+              <a:srgbClr val="000000">
+                <a:alpha val="70000"/>
+              </a:srgbClr>
+            </a:innerShdw>
+          </a:effectLst>
+        </p:spPr>
+        <p:txBody>
+          <a:bodyPr anchor="t">
+            <a:normAutofit/>
+          </a:bodyPr>
+          <a:lstStyle>
+            <a:lvl1pPr marL="0" indent="0" algn="ctr">
+              <a:buNone/>
+              <a:defRPr sz="1600"/>
+            </a:lvl1pPr>
+            <a:lvl2pPr marL="457200" indent="0">
+              <a:buNone/>
+              <a:defRPr sz="1600"/>
+            </a:lvl2pPr>
+            <a:lvl3pPr marL="914400" indent="0">
+              <a:buNone/>
+              <a:defRPr sz="1600"/>
+            </a:lvl3pPr>
+            <a:lvl4pPr marL="1371600" indent="0">
+              <a:buNone/>
+              <a:defRPr sz="1600"/>
+            </a:lvl4pPr>
+            <a:lvl5pPr marL="1828800" indent="0">
+              <a:buNone/>
+              <a:defRPr sz="1600"/>
+            </a:lvl5pPr>
+            <a:lvl6pPr marL="2286000" indent="0">
+              <a:buNone/>
+              <a:defRPr sz="1600"/>
+            </a:lvl6pPr>
+            <a:lvl7pPr marL="2743200" indent="0">
+              <a:buNone/>
+              <a:defRPr sz="1600"/>
+            </a:lvl7pPr>
+            <a:lvl8pPr marL="3200400" indent="0">
+              <a:buNone/>
+              <a:defRPr sz="1600"/>
+            </a:lvl8pPr>
+            <a:lvl9pPr marL="3657600" indent="0">
+              <a:buNone/>
+              <a:defRPr sz="1600"/>
+            </a:lvl9pPr>
+          </a:lstStyle>
+          <a:p>
+            <a:r>
+              <a:rPr lang="en-US"/>
+              <a:t>Click icon to add picture</a:t>
+            </a:r>
+            <a:endParaRPr lang="en-US" dirty="0"/>
+          </a:p>
+        </p:txBody>
+      </p:sp>
+      <p:sp>
+        <p:nvSpPr>
+          <p:cNvPr id="4" name="Text Placeholder 3"/>
+          <p:cNvSpPr>
+            <a:spLocks noGrp="1"/>
+          </p:cNvSpPr>
+          <p:nvPr>
+            <p:ph type="body" sz="half" idx="2"/>
+          </p:nvPr>
+        </p:nvSpPr>
+        <p:spPr>
+          <a:xfrm>
+            <a:off x="1141413" y="5299603"/>
+            <a:ext cx="9906000" cy="493712"/>
+          </a:xfrm>
+        </p:spPr>
+        <p:txBody>
+          <a:bodyPr>
+            <a:normAutofit/>
+          </a:bodyPr>
+          <a:lstStyle>
+            <a:lvl1pPr marL="0" indent="0">
+              <a:buNone/>
+              <a:defRPr sz="1400"/>
+            </a:lvl1pPr>
+            <a:lvl2pPr marL="457200" indent="0">
+              <a:buNone/>
+              <a:defRPr sz="1200"/>
+            </a:lvl2pPr>
+            <a:lvl3pPr marL="914400" indent="0">
+              <a:buNone/>
+              <a:defRPr sz="1000"/>
+            </a:lvl3pPr>
+            <a:lvl4pPr marL="1371600" indent="0">
+              <a:buNone/>
+              <a:defRPr sz="900"/>
+            </a:lvl4pPr>
+            <a:lvl5pPr marL="1828800" indent="0">
+              <a:buNone/>
+              <a:defRPr sz="900"/>
+            </a:lvl5pPr>
+            <a:lvl6pPr marL="2286000" indent="0">
+              <a:buNone/>
+              <a:defRPr sz="900"/>
+            </a:lvl6pPr>
+            <a:lvl7pPr marL="2743200" indent="0">
+              <a:buNone/>
+              <a:defRPr sz="900"/>
+            </a:lvl7pPr>
+            <a:lvl8pPr marL="3200400" indent="0">
+              <a:buNone/>
+              <a:defRPr sz="900"/>
+            </a:lvl8pPr>
+            <a:lvl9pPr marL="3657600" indent="0">
+              <a:buNone/>
+              <a:defRPr sz="900"/>
+            </a:lvl9pPr>
+          </a:lstStyle>
+          <a:p>
+            <a:pPr lvl="0"/>
+            <a:r>
+              <a:rPr lang="en-US"/>
+              <a:t>Click to edit Master text styles</a:t>
+            </a:r>
+          </a:p>
+        </p:txBody>
+      </p:sp>
+      <p:sp>
+        <p:nvSpPr>
+          <p:cNvPr id="5" name="Date Placeholder 4"/>
+          <p:cNvSpPr>
+            <a:spLocks noGrp="1"/>
+          </p:cNvSpPr>
+          <p:nvPr>
+            <p:ph type="dt" sz="half" idx="10"/>
+          </p:nvPr>
+        </p:nvSpPr>
+        <p:spPr/>
+        <p:txBody>
+          <a:bodyPr/>
+          <a:lstStyle/>
+          <a:p>
+            <a:fld id="{B4EF5C61-CB00-400A-8D60-8D67D86CAF2F}" type="datetimeFigureOut">
+              <a:rPr lang="en-GB" smtClean="0"/>
+              <a:t>07/06/2026</a:t>
+            </a:fld>
+            <a:endParaRPr lang="en-GB"/>
+          </a:p>
+        </p:txBody>
+      </p:sp>
+      <p:sp>
+        <p:nvSpPr>
+          <p:cNvPr id="6" name="Footer Placeholder 5"/>
+          <p:cNvSpPr>
+            <a:spLocks noGrp="1"/>
+          </p:cNvSpPr>
+          <p:nvPr>
+            <p:ph type="ftr" sz="quarter" idx="11"/>
+          </p:nvPr>
+        </p:nvSpPr>
+        <p:spPr/>
+        <p:txBody>
+          <a:bodyPr/>
+          <a:lstStyle/>
+          <a:p>
+            <a:endParaRPr lang="en-GB"/>
+          </a:p>
+        </p:txBody>
+      </p:sp>
+      <p:sp>
+        <p:nvSpPr>
+          <p:cNvPr id="7" name="Slide Number Placeholder 6"/>
+          <p:cNvSpPr>
+            <a:spLocks noGrp="1"/>
+          </p:cNvSpPr>
+          <p:nvPr>
+            <p:ph type="sldNum" sz="quarter" idx="12"/>
+          </p:nvPr>
+        </p:nvSpPr>
+        <p:spPr/>
+        <p:txBody>
+          <a:bodyPr/>
+          <a:lstStyle/>
+          <a:p>
+            <a:fld id="{2FA875AF-D0E4-42BF-8E1E-4B38B400B47E}" type="slidenum">
+              <a:rPr lang="en-GB" smtClean="0"/>
+              <a:t>‹#›</a:t>
+            </a:fld>
+            <a:endParaRPr lang="en-GB"/>
+          </a:p>
+        </p:txBody>
+      </p:sp>
+    </p:spTree>
+    <p:extLst>
+      <p:ext uri="{BB962C8B-B14F-4D97-AF65-F5344CB8AC3E}">
+        <p14:creationId xmlns:p14="http://schemas.microsoft.com/office/powerpoint/2010/main" val="2657382113"/>
+      </p:ext>
+    </p:extLst>
+  </p:cSld>
+  <p:clrMapOvr>
+    <a:masterClrMapping/>
+  </p:clrMapOvr>
+</p:sldLayout>
+</file>
+
+<file path=ppt/slideLayouts/slideLayout11.xml><?xml version="1.0" encoding="utf-8"?>
+<p:sldLayout xmlns:a="http://schemas.openxmlformats.org/drawingml/2006/main" xmlns:r="http://schemas.openxmlformats.org/officeDocument/2006/relationships" xmlns:p="http://schemas.openxmlformats.org/presentationml/2006/main" preserve="1">
+  <p:cSld name="Title and Caption">
+    <p:spTree>
+      <p:nvGrpSpPr>
+        <p:cNvPr id="1" name=""/>
+        <p:cNvGrpSpPr/>
+        <p:nvPr/>
+      </p:nvGrpSpPr>
+      <p:grpSpPr>
+        <a:xfrm>
+          <a:off x="0" y="0"/>
+          <a:ext cx="0" cy="0"/>
+          <a:chOff x="0" y="0"/>
+          <a:chExt cx="0" cy="0"/>
+        </a:xfrm>
+      </p:grpSpPr>
+      <p:sp>
+        <p:nvSpPr>
+          <p:cNvPr id="2" name="Title 1"/>
+          <p:cNvSpPr>
+            <a:spLocks noGrp="1"/>
+          </p:cNvSpPr>
+          <p:nvPr>
+            <p:ph type="title"/>
+          </p:nvPr>
+        </p:nvSpPr>
+        <p:spPr>
+          <a:xfrm>
+            <a:off x="1141412" y="609601"/>
+            <a:ext cx="9905999" cy="3124199"/>
+          </a:xfrm>
+        </p:spPr>
+        <p:txBody>
+          <a:bodyPr anchor="ctr">
+            <a:normAutofit/>
+          </a:bodyPr>
+          <a:lstStyle>
+            <a:lvl1pPr algn="l">
+              <a:defRPr sz="3200" b="0" cap="all"/>
+            </a:lvl1pPr>
+          </a:lstStyle>
+          <a:p>
+            <a:r>
+              <a:rPr lang="en-US"/>
+              <a:t>Click to edit Master title style</a:t>
+            </a:r>
+            <a:endParaRPr lang="en-US" dirty="0"/>
+          </a:p>
+        </p:txBody>
+      </p:sp>
+      <p:sp>
+        <p:nvSpPr>
+          <p:cNvPr id="3" name="Text Placeholder 2"/>
+          <p:cNvSpPr>
+            <a:spLocks noGrp="1"/>
+          </p:cNvSpPr>
+          <p:nvPr>
+            <p:ph type="body" idx="1"/>
+          </p:nvPr>
+        </p:nvSpPr>
+        <p:spPr>
+          <a:xfrm>
+            <a:off x="1141411" y="4343400"/>
+            <a:ext cx="9906000" cy="1447800"/>
+          </a:xfrm>
+        </p:spPr>
+        <p:txBody>
+          <a:bodyPr anchor="ctr">
+            <a:normAutofit/>
+          </a:bodyPr>
+          <a:lstStyle>
+            <a:lvl1pPr marL="0" indent="0" algn="l">
+              <a:buNone/>
+              <a:defRPr sz="2000">
+                <a:gradFill flip="none" rotWithShape="1">
+                  <a:gsLst>
+                    <a:gs pos="0">
+                      <a:schemeClr val="tx1"/>
+                    </a:gs>
+                    <a:gs pos="100000">
+                      <a:schemeClr val="tx1">
+                        <a:lumMod val="75000"/>
+                      </a:schemeClr>
+                    </a:gs>
+                  </a:gsLst>
+                  <a:lin ang="5400000" scaled="0"/>
+                  <a:tileRect/>
+                </a:gradFill>
+              </a:defRPr>
+            </a:lvl1pPr>
+            <a:lvl2pPr marL="457200" indent="0">
+              <a:buNone/>
+              <a:defRPr sz="1800">
+                <a:solidFill>
+                  <a:schemeClr val="tx1">
+                    <a:tint val="75000"/>
+                  </a:schemeClr>
+                </a:solidFill>
+              </a:defRPr>
+            </a:lvl2pPr>
+            <a:lvl3pPr marL="914400" indent="0">
+              <a:buNone/>
+              <a:defRPr sz="1600">
+                <a:solidFill>
+                  <a:schemeClr val="tx1">
+                    <a:tint val="75000"/>
+                  </a:schemeClr>
+                </a:solidFill>
+              </a:defRPr>
+            </a:lvl3pPr>
+            <a:lvl4pPr marL="1371600" indent="0">
+              <a:buNone/>
+              <a:defRPr sz="1400">
+                <a:solidFill>
+                  <a:schemeClr val="tx1">
+                    <a:tint val="75000"/>
+                  </a:schemeClr>
+                </a:solidFill>
+              </a:defRPr>
+            </a:lvl4pPr>
+            <a:lvl5pPr marL="1828800" indent="0">
+              <a:buNone/>
+              <a:defRPr sz="1400">
+                <a:solidFill>
+                  <a:schemeClr val="tx1">
+                    <a:tint val="75000"/>
+                  </a:schemeClr>
+                </a:solidFill>
+              </a:defRPr>
+            </a:lvl5pPr>
+            <a:lvl6pPr marL="2286000" indent="0">
+              <a:buNone/>
+              <a:defRPr sz="1400">
+                <a:solidFill>
+                  <a:schemeClr val="tx1">
+                    <a:tint val="75000"/>
+                  </a:schemeClr>
+                </a:solidFill>
+              </a:defRPr>
+            </a:lvl6pPr>
+            <a:lvl7pPr marL="2743200" indent="0">
+              <a:buNone/>
+              <a:defRPr sz="1400">
+                <a:solidFill>
+                  <a:schemeClr val="tx1">
+                    <a:tint val="75000"/>
+                  </a:schemeClr>
+                </a:solidFill>
+              </a:defRPr>
+            </a:lvl7pPr>
+            <a:lvl8pPr marL="3200400" indent="0">
+              <a:buNone/>
+              <a:defRPr sz="1400">
+                <a:solidFill>
+                  <a:schemeClr val="tx1">
+                    <a:tint val="75000"/>
+                  </a:schemeClr>
+                </a:solidFill>
+              </a:defRPr>
+            </a:lvl8pPr>
+            <a:lvl9pPr marL="3657600" indent="0">
+              <a:buNone/>
+              <a:defRPr sz="1400">
+                <a:solidFill>
+                  <a:schemeClr val="tx1">
+                    <a:tint val="75000"/>
+                  </a:schemeClr>
+                </a:solidFill>
+              </a:defRPr>
+            </a:lvl9pPr>
+          </a:lstStyle>
+          <a:p>
+            <a:pPr lvl="0"/>
+            <a:r>
+              <a:rPr lang="en-US"/>
+              <a:t>Click to edit Master text styles</a:t>
+            </a:r>
+          </a:p>
+        </p:txBody>
+      </p:sp>
+      <p:sp>
+        <p:nvSpPr>
+          <p:cNvPr id="4" name="Date Placeholder 3"/>
+          <p:cNvSpPr>
+            <a:spLocks noGrp="1"/>
+          </p:cNvSpPr>
+          <p:nvPr>
+            <p:ph type="dt" sz="half" idx="10"/>
+          </p:nvPr>
+        </p:nvSpPr>
+        <p:spPr/>
+        <p:txBody>
+          <a:bodyPr/>
+          <a:lstStyle/>
+          <a:p>
+            <a:fld id="{B4EF5C61-CB00-400A-8D60-8D67D86CAF2F}" type="datetimeFigureOut">
+              <a:rPr lang="en-GB" smtClean="0"/>
+              <a:t>07/06/2026</a:t>
+            </a:fld>
+            <a:endParaRPr lang="en-GB"/>
+          </a:p>
+        </p:txBody>
+      </p:sp>
+      <p:sp>
+        <p:nvSpPr>
+          <p:cNvPr id="5" name="Footer Placeholder 4"/>
+          <p:cNvSpPr>
+            <a:spLocks noGrp="1"/>
+          </p:cNvSpPr>
+          <p:nvPr>
+            <p:ph type="ftr" sz="quarter" idx="11"/>
+          </p:nvPr>
+        </p:nvSpPr>
+        <p:spPr/>
+        <p:txBody>
+          <a:bodyPr/>
+          <a:lstStyle/>
+          <a:p>
+            <a:endParaRPr lang="en-GB"/>
+          </a:p>
+        </p:txBody>
+      </p:sp>
+      <p:sp>
+        <p:nvSpPr>
+          <p:cNvPr id="6" name="Slide Number Placeholder 5"/>
+          <p:cNvSpPr>
+            <a:spLocks noGrp="1"/>
+          </p:cNvSpPr>
+          <p:nvPr>
+            <p:ph type="sldNum" sz="quarter" idx="12"/>
+          </p:nvPr>
+        </p:nvSpPr>
+        <p:spPr/>
+        <p:txBody>
+          <a:bodyPr/>
+          <a:lstStyle/>
+          <a:p>
+            <a:fld id="{2FA875AF-D0E4-42BF-8E1E-4B38B400B47E}" type="slidenum">
+              <a:rPr lang="en-GB" smtClean="0"/>
+              <a:t>‹#›</a:t>
+            </a:fld>
+            <a:endParaRPr lang="en-GB"/>
+          </a:p>
+        </p:txBody>
+      </p:sp>
+    </p:spTree>
+    <p:extLst>
+      <p:ext uri="{BB962C8B-B14F-4D97-AF65-F5344CB8AC3E}">
+        <p14:creationId xmlns:p14="http://schemas.microsoft.com/office/powerpoint/2010/main" val="2763990481"/>
+      </p:ext>
+    </p:extLst>
+  </p:cSld>
+  <p:clrMapOvr>
+    <a:masterClrMapping/>
+  </p:clrMapOvr>
+</p:sldLayout>
+</file>
+
+<file path=ppt/slideLayouts/slideLayout12.xml><?xml version="1.0" encoding="utf-8"?>
+<p:sldLayout xmlns:a="http://schemas.openxmlformats.org/drawingml/2006/main" xmlns:r="http://schemas.openxmlformats.org/officeDocument/2006/relationships" xmlns:p="http://schemas.openxmlformats.org/presentationml/2006/main" preserve="1">
+  <p:cSld name="Quote with Caption">
+    <p:spTree>
+      <p:nvGrpSpPr>
+        <p:cNvPr id="1" name=""/>
+        <p:cNvGrpSpPr/>
+        <p:nvPr/>
+      </p:nvGrpSpPr>
+      <p:grpSpPr>
+        <a:xfrm>
+          <a:off x="0" y="0"/>
+          <a:ext cx="0" cy="0"/>
+          <a:chOff x="0" y="0"/>
+          <a:chExt cx="0" cy="0"/>
+        </a:xfrm>
+      </p:grpSpPr>
+      <p:sp>
+        <p:nvSpPr>
+          <p:cNvPr id="14" name="TextBox 13"/>
+          <p:cNvSpPr txBox="1"/>
+          <p:nvPr/>
+        </p:nvSpPr>
+        <p:spPr>
+          <a:xfrm>
+            <a:off x="836612" y="786824"/>
+            <a:ext cx="609600" cy="584776"/>
+          </a:xfrm>
+          <a:prstGeom prst="rect">
+            <a:avLst/>
+          </a:prstGeom>
+        </p:spPr>
+        <p:txBody>
+          <a:bodyPr vert="horz" lIns="91440" tIns="45720" rIns="91440" bIns="45720" rtlCol="0" anchor="ctr">
+            <a:noAutofit/>
+          </a:bodyPr>
+          <a:lstStyle>
+            <a:lvl1pPr>
+              <a:spcBef>
+                <a:spcPct val="0"/>
+              </a:spcBef>
+              <a:buNone/>
+              <a:defRPr sz="3200" b="0" cap="all">
+                <a:ln w="3175" cmpd="sng">
+                  <a:noFill/>
+                </a:ln>
+                <a:effectLst>
+                  <a:glow rad="38100">
+                    <a:schemeClr val="bg1">
+                      <a:lumMod val="65000"/>
+                      <a:lumOff val="35000"/>
+                      <a:alpha val="40000"/>
+                    </a:schemeClr>
+                  </a:glow>
+                  <a:outerShdw blurRad="28575" dist="38100" dir="14040000" algn="tl" rotWithShape="0">
+                    <a:srgbClr val="000000">
+                      <a:alpha val="25000"/>
+                    </a:srgbClr>
+                  </a:outerShdw>
+                </a:effectLst>
+              </a:defRPr>
+            </a:lvl1pPr>
+            <a:lvl2pPr>
+              <a:defRPr>
+                <a:solidFill>
+                  <a:schemeClr val="tx2"/>
+                </a:solidFill>
+              </a:defRPr>
+            </a:lvl2pPr>
+            <a:lvl3pPr>
+              <a:defRPr>
+                <a:solidFill>
+                  <a:schemeClr val="tx2"/>
+                </a:solidFill>
+              </a:defRPr>
+            </a:lvl3pPr>
+            <a:lvl4pPr>
+              <a:defRPr>
+                <a:solidFill>
+                  <a:schemeClr val="tx2"/>
+                </a:solidFill>
+              </a:defRPr>
+            </a:lvl4pPr>
+            <a:lvl5pPr>
+              <a:defRPr>
+                <a:solidFill>
+                  <a:schemeClr val="tx2"/>
+                </a:solidFill>
+              </a:defRPr>
+            </a:lvl5pPr>
+            <a:lvl6pPr>
+              <a:defRPr>
+                <a:solidFill>
+                  <a:schemeClr val="tx2"/>
+                </a:solidFill>
+              </a:defRPr>
+            </a:lvl6pPr>
+            <a:lvl7pPr>
+              <a:defRPr>
+                <a:solidFill>
+                  <a:schemeClr val="tx2"/>
+                </a:solidFill>
+              </a:defRPr>
+            </a:lvl7pPr>
+            <a:lvl8pPr>
+              <a:defRPr>
+                <a:solidFill>
+                  <a:schemeClr val="tx2"/>
+                </a:solidFill>
+              </a:defRPr>
+            </a:lvl8pPr>
+            <a:lvl9pPr>
+              <a:defRPr>
+                <a:solidFill>
+                  <a:schemeClr val="tx2"/>
+                </a:solidFill>
+              </a:defRPr>
+            </a:lvl9pPr>
+          </a:lstStyle>
+          <a:p>
+            <a:pPr lvl="0"/>
+            <a:r>
+              <a:rPr lang="en-US" sz="8000" dirty="0">
+                <a:solidFill>
+                  <a:schemeClr val="accent1"/>
+                </a:solidFill>
+              </a:rPr>
+              <a:t>“</a:t>
+            </a:r>
+          </a:p>
+        </p:txBody>
+      </p:sp>
+      <p:sp>
+        <p:nvSpPr>
+          <p:cNvPr id="15" name="TextBox 14"/>
+          <p:cNvSpPr txBox="1"/>
+          <p:nvPr/>
+        </p:nvSpPr>
+        <p:spPr>
+          <a:xfrm>
+            <a:off x="10437812" y="2743200"/>
+            <a:ext cx="609600" cy="584776"/>
+          </a:xfrm>
+          <a:prstGeom prst="rect">
+            <a:avLst/>
+          </a:prstGeom>
+        </p:spPr>
+        <p:txBody>
+          <a:bodyPr vert="horz" lIns="91440" tIns="45720" rIns="91440" bIns="45720" rtlCol="0" anchor="ctr">
+            <a:noAutofit/>
+          </a:bodyPr>
+          <a:lstStyle>
+            <a:lvl1pPr>
+              <a:spcBef>
+                <a:spcPct val="0"/>
+              </a:spcBef>
+              <a:buNone/>
+              <a:defRPr sz="3200" b="0" cap="all">
+                <a:ln w="3175" cmpd="sng">
+                  <a:noFill/>
+                </a:ln>
+                <a:effectLst>
+                  <a:glow rad="38100">
+                    <a:schemeClr val="bg1">
+                      <a:lumMod val="65000"/>
+                      <a:lumOff val="35000"/>
+                      <a:alpha val="40000"/>
+                    </a:schemeClr>
+                  </a:glow>
+                  <a:outerShdw blurRad="28575" dist="38100" dir="14040000" algn="tl" rotWithShape="0">
+                    <a:srgbClr val="000000">
+                      <a:alpha val="25000"/>
+                    </a:srgbClr>
+                  </a:outerShdw>
+                </a:effectLst>
+              </a:defRPr>
+            </a:lvl1pPr>
+            <a:lvl2pPr>
+              <a:defRPr>
+                <a:solidFill>
+                  <a:schemeClr val="tx2"/>
+                </a:solidFill>
+              </a:defRPr>
+            </a:lvl2pPr>
+            <a:lvl3pPr>
+              <a:defRPr>
+                <a:solidFill>
+                  <a:schemeClr val="tx2"/>
+                </a:solidFill>
+              </a:defRPr>
+            </a:lvl3pPr>
+            <a:lvl4pPr>
+              <a:defRPr>
+                <a:solidFill>
+                  <a:schemeClr val="tx2"/>
+                </a:solidFill>
+              </a:defRPr>
+            </a:lvl4pPr>
+            <a:lvl5pPr>
+              <a:defRPr>
+                <a:solidFill>
+                  <a:schemeClr val="tx2"/>
+                </a:solidFill>
+              </a:defRPr>
+            </a:lvl5pPr>
+            <a:lvl6pPr>
+              <a:defRPr>
+                <a:solidFill>
+                  <a:schemeClr val="tx2"/>
+                </a:solidFill>
+              </a:defRPr>
+            </a:lvl6pPr>
+            <a:lvl7pPr>
+              <a:defRPr>
+                <a:solidFill>
+                  <a:schemeClr val="tx2"/>
+                </a:solidFill>
+              </a:defRPr>
+            </a:lvl7pPr>
+            <a:lvl8pPr>
+              <a:defRPr>
+                <a:solidFill>
+                  <a:schemeClr val="tx2"/>
+                </a:solidFill>
+              </a:defRPr>
+            </a:lvl8pPr>
+            <a:lvl9pPr>
+              <a:defRPr>
+                <a:solidFill>
+                  <a:schemeClr val="tx2"/>
+                </a:solidFill>
+              </a:defRPr>
+            </a:lvl9pPr>
+          </a:lstStyle>
+          <a:p>
+            <a:pPr lvl="0" algn="r"/>
+            <a:r>
+              <a:rPr lang="en-US" sz="8000" dirty="0">
+                <a:solidFill>
+                  <a:schemeClr val="accent1"/>
+                </a:solidFill>
+              </a:rPr>
+              <a:t>”</a:t>
+            </a:r>
+          </a:p>
+        </p:txBody>
+      </p:sp>
+      <p:sp>
+        <p:nvSpPr>
+          <p:cNvPr id="2" name="Title 1"/>
+          <p:cNvSpPr>
+            <a:spLocks noGrp="1"/>
+          </p:cNvSpPr>
+          <p:nvPr>
+            <p:ph type="title"/>
+          </p:nvPr>
+        </p:nvSpPr>
+        <p:spPr>
+          <a:xfrm>
+            <a:off x="1446213" y="609601"/>
+            <a:ext cx="9296398" cy="2743199"/>
+          </a:xfrm>
+        </p:spPr>
+        <p:txBody>
+          <a:bodyPr anchor="ctr">
+            <a:normAutofit/>
+          </a:bodyPr>
+          <a:lstStyle>
+            <a:lvl1pPr algn="l">
+              <a:defRPr sz="3200" b="0" cap="all">
+                <a:solidFill>
+                  <a:schemeClr val="tx1"/>
+                </a:solidFill>
+              </a:defRPr>
+            </a:lvl1pPr>
+          </a:lstStyle>
+          <a:p>
+            <a:r>
+              <a:rPr lang="en-US"/>
+              <a:t>Click to edit Master title style</a:t>
+            </a:r>
+            <a:endParaRPr lang="en-US" dirty="0"/>
+          </a:p>
+        </p:txBody>
+      </p:sp>
+      <p:sp>
+        <p:nvSpPr>
+          <p:cNvPr id="10" name="Text Placeholder 9"/>
+          <p:cNvSpPr>
+            <a:spLocks noGrp="1"/>
+          </p:cNvSpPr>
+          <p:nvPr>
+            <p:ph type="body" sz="quarter" idx="13"/>
+          </p:nvPr>
+        </p:nvSpPr>
+        <p:spPr>
+          <a:xfrm>
+            <a:off x="1674812" y="3352800"/>
+            <a:ext cx="8839202" cy="381000"/>
+          </a:xfrm>
+        </p:spPr>
+        <p:txBody>
+          <a:bodyPr anchor="ctr"/>
+          <a:lstStyle>
+            <a:lvl1pPr marL="0" indent="0">
+              <a:buFontTx/>
+              <a:buNone/>
+              <a:defRPr/>
+            </a:lvl1pPr>
+            <a:lvl2pPr marL="457200" indent="0">
+              <a:buFontTx/>
+              <a:buNone/>
+              <a:defRPr/>
+            </a:lvl2pPr>
+            <a:lvl3pPr marL="914400" indent="0">
+              <a:buFontTx/>
+              <a:buNone/>
+              <a:defRPr/>
+            </a:lvl3pPr>
+            <a:lvl4pPr marL="1371600" indent="0">
+              <a:buFontTx/>
+              <a:buNone/>
+              <a:defRPr/>
+            </a:lvl4pPr>
+            <a:lvl5pPr marL="1828800" indent="0">
+              <a:buFontTx/>
+              <a:buNone/>
+              <a:defRPr/>
+            </a:lvl5pPr>
+          </a:lstStyle>
+          <a:p>
+            <a:pPr lvl="0"/>
+            <a:r>
+              <a:rPr lang="en-US"/>
+              <a:t>Click to edit Master text styles</a:t>
+            </a:r>
+          </a:p>
+        </p:txBody>
+      </p:sp>
+      <p:sp>
+        <p:nvSpPr>
+          <p:cNvPr id="3" name="Text Placeholder 2"/>
+          <p:cNvSpPr>
+            <a:spLocks noGrp="1"/>
+          </p:cNvSpPr>
+          <p:nvPr>
+            <p:ph type="body" idx="1"/>
+          </p:nvPr>
+        </p:nvSpPr>
+        <p:spPr>
+          <a:xfrm>
+            <a:off x="1141411" y="4343400"/>
+            <a:ext cx="9906000" cy="1447800"/>
+          </a:xfrm>
+        </p:spPr>
+        <p:txBody>
+          <a:bodyPr vert="horz" lIns="91440" tIns="45720" rIns="91440" bIns="45720" rtlCol="0" anchor="ctr">
+            <a:normAutofit/>
+          </a:bodyPr>
+          <a:lstStyle>
+            <a:lvl1pPr>
+              <a:buNone/>
+              <a:defRPr lang="en-US" sz="2000">
+                <a:gradFill flip="none" rotWithShape="1">
+                  <a:gsLst>
+                    <a:gs pos="0">
+                      <a:schemeClr val="tx1"/>
+                    </a:gs>
+                    <a:gs pos="100000">
+                      <a:schemeClr val="tx1">
+                        <a:lumMod val="75000"/>
+                      </a:schemeClr>
+                    </a:gs>
+                  </a:gsLst>
+                  <a:lin ang="5400000" scaled="0"/>
+                  <a:tileRect/>
+                </a:gradFill>
+              </a:defRPr>
+            </a:lvl1pPr>
+          </a:lstStyle>
+          <a:p>
+            <a:pPr marL="0" lvl="0" indent="0">
+              <a:buNone/>
+            </a:pPr>
+            <a:r>
+              <a:rPr lang="en-US"/>
+              <a:t>Click to edit Master text styles</a:t>
+            </a:r>
+          </a:p>
+        </p:txBody>
+      </p:sp>
+      <p:sp>
+        <p:nvSpPr>
+          <p:cNvPr id="4" name="Date Placeholder 3"/>
+          <p:cNvSpPr>
+            <a:spLocks noGrp="1"/>
+          </p:cNvSpPr>
+          <p:nvPr>
+            <p:ph type="dt" sz="half" idx="10"/>
+          </p:nvPr>
+        </p:nvSpPr>
+        <p:spPr/>
+        <p:txBody>
+          <a:bodyPr/>
+          <a:lstStyle/>
+          <a:p>
+            <a:fld id="{B4EF5C61-CB00-400A-8D60-8D67D86CAF2F}" type="datetimeFigureOut">
+              <a:rPr lang="en-GB" smtClean="0"/>
+              <a:t>07/06/2026</a:t>
+            </a:fld>
+            <a:endParaRPr lang="en-GB"/>
+          </a:p>
+        </p:txBody>
+      </p:sp>
+      <p:sp>
+        <p:nvSpPr>
+          <p:cNvPr id="5" name="Footer Placeholder 4"/>
+          <p:cNvSpPr>
+            <a:spLocks noGrp="1"/>
+          </p:cNvSpPr>
+          <p:nvPr>
+            <p:ph type="ftr" sz="quarter" idx="11"/>
+          </p:nvPr>
+        </p:nvSpPr>
+        <p:spPr/>
+        <p:txBody>
+          <a:bodyPr/>
+          <a:lstStyle/>
+          <a:p>
+            <a:endParaRPr lang="en-GB"/>
+          </a:p>
+        </p:txBody>
+      </p:sp>
+      <p:sp>
+        <p:nvSpPr>
+          <p:cNvPr id="6" name="Slide Number Placeholder 5"/>
+          <p:cNvSpPr>
+            <a:spLocks noGrp="1"/>
+          </p:cNvSpPr>
+          <p:nvPr>
+            <p:ph type="sldNum" sz="quarter" idx="12"/>
+          </p:nvPr>
+        </p:nvSpPr>
+        <p:spPr/>
+        <p:txBody>
+          <a:bodyPr/>
+          <a:lstStyle/>
+          <a:p>
+            <a:fld id="{2FA875AF-D0E4-42BF-8E1E-4B38B400B47E}" type="slidenum">
+              <a:rPr lang="en-GB" smtClean="0"/>
+              <a:t>‹#›</a:t>
+            </a:fld>
+            <a:endParaRPr lang="en-GB"/>
+          </a:p>
+        </p:txBody>
+      </p:sp>
+    </p:spTree>
+    <p:extLst>
+      <p:ext uri="{BB962C8B-B14F-4D97-AF65-F5344CB8AC3E}">
+        <p14:creationId xmlns:p14="http://schemas.microsoft.com/office/powerpoint/2010/main" val="399883790"/>
+      </p:ext>
+    </p:extLst>
+  </p:cSld>
+  <p:clrMapOvr>
+    <a:masterClrMapping/>
+  </p:clrMapOvr>
+</p:sldLayout>
+</file>
+
+<file path=ppt/slideLayouts/slideLayout13.xml><?xml version="1.0" encoding="utf-8"?>
+<p:sldLayout xmlns:a="http://schemas.openxmlformats.org/drawingml/2006/main" xmlns:r="http://schemas.openxmlformats.org/officeDocument/2006/relationships" xmlns:p="http://schemas.openxmlformats.org/presentationml/2006/main" preserve="1">
+  <p:cSld name="Name Card">
+    <p:spTree>
+      <p:nvGrpSpPr>
+        <p:cNvPr id="1" name=""/>
+        <p:cNvGrpSpPr/>
+        <p:nvPr/>
+      </p:nvGrpSpPr>
+      <p:grpSpPr>
+        <a:xfrm>
+          <a:off x="0" y="0"/>
+          <a:ext cx="0" cy="0"/>
+          <a:chOff x="0" y="0"/>
+          <a:chExt cx="0" cy="0"/>
+        </a:xfrm>
+      </p:grpSpPr>
+      <p:sp>
+        <p:nvSpPr>
+          <p:cNvPr id="2" name="Title 1"/>
+          <p:cNvSpPr>
+            <a:spLocks noGrp="1"/>
+          </p:cNvSpPr>
+          <p:nvPr>
+            <p:ph type="title"/>
+          </p:nvPr>
+        </p:nvSpPr>
+        <p:spPr>
+          <a:xfrm>
+            <a:off x="1141412" y="3308581"/>
+            <a:ext cx="9906000" cy="1468800"/>
+          </a:xfrm>
+        </p:spPr>
+        <p:txBody>
+          <a:bodyPr anchor="b">
+            <a:normAutofit/>
+          </a:bodyPr>
+          <a:lstStyle>
+            <a:lvl1pPr algn="l">
+              <a:defRPr sz="3200" b="0" cap="all"/>
+            </a:lvl1pPr>
+          </a:lstStyle>
+          <a:p>
+            <a:r>
+              <a:rPr lang="en-US"/>
+              <a:t>Click to edit Master title style</a:t>
+            </a:r>
+            <a:endParaRPr lang="en-US" dirty="0"/>
+          </a:p>
+        </p:txBody>
+      </p:sp>
+      <p:sp>
+        <p:nvSpPr>
+          <p:cNvPr id="3" name="Text Placeholder 2"/>
+          <p:cNvSpPr>
+            <a:spLocks noGrp="1"/>
+          </p:cNvSpPr>
+          <p:nvPr>
+            <p:ph type="body" idx="1"/>
+          </p:nvPr>
+        </p:nvSpPr>
+        <p:spPr>
+          <a:xfrm>
+            <a:off x="1141410" y="4777381"/>
+            <a:ext cx="9906001" cy="860400"/>
+          </a:xfrm>
+        </p:spPr>
+        <p:txBody>
+          <a:bodyPr vert="horz" lIns="91440" tIns="45720" rIns="91440" bIns="45720" rtlCol="0" anchor="t">
+            <a:normAutofit/>
+          </a:bodyPr>
+          <a:lstStyle>
+            <a:lvl1pPr>
+              <a:defRPr lang="en-US" sz="2000">
+                <a:gradFill flip="none" rotWithShape="1">
+                  <a:gsLst>
+                    <a:gs pos="0">
+                      <a:schemeClr val="tx1"/>
+                    </a:gs>
+                    <a:gs pos="100000">
+                      <a:schemeClr val="tx1">
+                        <a:lumMod val="75000"/>
+                      </a:schemeClr>
+                    </a:gs>
+                  </a:gsLst>
+                  <a:lin ang="5400000" scaled="0"/>
+                  <a:tileRect/>
+                </a:gradFill>
+              </a:defRPr>
+            </a:lvl1pPr>
+          </a:lstStyle>
+          <a:p>
+            <a:pPr marL="0" lvl="0" indent="0">
+              <a:buNone/>
+            </a:pPr>
+            <a:r>
+              <a:rPr lang="en-US"/>
+              <a:t>Click to edit Master text styles</a:t>
+            </a:r>
+          </a:p>
+        </p:txBody>
+      </p:sp>
+      <p:sp>
+        <p:nvSpPr>
+          <p:cNvPr id="4" name="Date Placeholder 3"/>
+          <p:cNvSpPr>
+            <a:spLocks noGrp="1"/>
+          </p:cNvSpPr>
+          <p:nvPr>
+            <p:ph type="dt" sz="half" idx="10"/>
+          </p:nvPr>
+        </p:nvSpPr>
+        <p:spPr/>
+        <p:txBody>
+          <a:bodyPr/>
+          <a:lstStyle/>
+          <a:p>
+            <a:fld id="{B4EF5C61-CB00-400A-8D60-8D67D86CAF2F}" type="datetimeFigureOut">
+              <a:rPr lang="en-GB" smtClean="0"/>
+              <a:t>07/06/2026</a:t>
+            </a:fld>
+            <a:endParaRPr lang="en-GB"/>
+          </a:p>
+        </p:txBody>
+      </p:sp>
+      <p:sp>
+        <p:nvSpPr>
+          <p:cNvPr id="5" name="Footer Placeholder 4"/>
+          <p:cNvSpPr>
+            <a:spLocks noGrp="1"/>
+          </p:cNvSpPr>
+          <p:nvPr>
+            <p:ph type="ftr" sz="quarter" idx="11"/>
+          </p:nvPr>
+        </p:nvSpPr>
+        <p:spPr/>
+        <p:txBody>
+          <a:bodyPr/>
+          <a:lstStyle/>
+          <a:p>
+            <a:endParaRPr lang="en-GB"/>
+          </a:p>
+        </p:txBody>
+      </p:sp>
+      <p:sp>
+        <p:nvSpPr>
+          <p:cNvPr id="6" name="Slide Number Placeholder 5"/>
+          <p:cNvSpPr>
+            <a:spLocks noGrp="1"/>
+          </p:cNvSpPr>
+          <p:nvPr>
+            <p:ph type="sldNum" sz="quarter" idx="12"/>
+          </p:nvPr>
+        </p:nvSpPr>
+        <p:spPr/>
+        <p:txBody>
+          <a:bodyPr/>
+          <a:lstStyle/>
+          <a:p>
+            <a:fld id="{2FA875AF-D0E4-42BF-8E1E-4B38B400B47E}" type="slidenum">
+              <a:rPr lang="en-GB" smtClean="0"/>
+              <a:t>‹#›</a:t>
+            </a:fld>
+            <a:endParaRPr lang="en-GB"/>
+          </a:p>
+        </p:txBody>
+      </p:sp>
+    </p:spTree>
+    <p:extLst>
+      <p:ext uri="{BB962C8B-B14F-4D97-AF65-F5344CB8AC3E}">
+        <p14:creationId xmlns:p14="http://schemas.microsoft.com/office/powerpoint/2010/main" val="783039407"/>
+      </p:ext>
+    </p:extLst>
+  </p:cSld>
+  <p:clrMapOvr>
+    <a:masterClrMapping/>
+  </p:clrMapOvr>
+</p:sldLayout>
+</file>
+
+<file path=ppt/slideLayouts/slideLayout14.xml><?xml version="1.0" encoding="utf-8"?>
+<p:sldLayout xmlns:a="http://schemas.openxmlformats.org/drawingml/2006/main" xmlns:r="http://schemas.openxmlformats.org/officeDocument/2006/relationships" xmlns:p="http://schemas.openxmlformats.org/presentationml/2006/main" preserve="1">
+  <p:cSld name="Quote Name Card">
+    <p:spTree>
+      <p:nvGrpSpPr>
+        <p:cNvPr id="1" name=""/>
+        <p:cNvGrpSpPr/>
+        <p:nvPr/>
+      </p:nvGrpSpPr>
+      <p:grpSpPr>
+        <a:xfrm>
+          <a:off x="0" y="0"/>
+          <a:ext cx="0" cy="0"/>
+          <a:chOff x="0" y="0"/>
+          <a:chExt cx="0" cy="0"/>
+        </a:xfrm>
+      </p:grpSpPr>
+      <p:sp>
+        <p:nvSpPr>
+          <p:cNvPr id="14" name="TextBox 13"/>
+          <p:cNvSpPr txBox="1"/>
+          <p:nvPr/>
+        </p:nvSpPr>
+        <p:spPr>
+          <a:xfrm>
+            <a:off x="836612" y="786824"/>
+            <a:ext cx="609600" cy="584776"/>
+          </a:xfrm>
+          <a:prstGeom prst="rect">
+            <a:avLst/>
+          </a:prstGeom>
+        </p:spPr>
+        <p:txBody>
+          <a:bodyPr vert="horz" lIns="91440" tIns="45720" rIns="91440" bIns="45720" rtlCol="0" anchor="ctr">
+            <a:noAutofit/>
+          </a:bodyPr>
+          <a:lstStyle>
+            <a:lvl1pPr>
+              <a:spcBef>
+                <a:spcPct val="0"/>
+              </a:spcBef>
+              <a:buNone/>
+              <a:defRPr sz="3200" b="0" cap="all">
+                <a:ln w="3175" cmpd="sng">
+                  <a:noFill/>
+                </a:ln>
+                <a:effectLst>
+                  <a:glow rad="38100">
+                    <a:schemeClr val="bg1">
+                      <a:lumMod val="65000"/>
+                      <a:lumOff val="35000"/>
+                      <a:alpha val="40000"/>
+                    </a:schemeClr>
+                  </a:glow>
+                  <a:outerShdw blurRad="28575" dist="38100" dir="14040000" algn="tl" rotWithShape="0">
+                    <a:srgbClr val="000000">
+                      <a:alpha val="25000"/>
+                    </a:srgbClr>
+                  </a:outerShdw>
+                </a:effectLst>
+              </a:defRPr>
+            </a:lvl1pPr>
+            <a:lvl2pPr>
+              <a:defRPr>
+                <a:solidFill>
+                  <a:schemeClr val="tx2"/>
+                </a:solidFill>
+              </a:defRPr>
+            </a:lvl2pPr>
+            <a:lvl3pPr>
+              <a:defRPr>
+                <a:solidFill>
+                  <a:schemeClr val="tx2"/>
+                </a:solidFill>
+              </a:defRPr>
+            </a:lvl3pPr>
+            <a:lvl4pPr>
+              <a:defRPr>
+                <a:solidFill>
+                  <a:schemeClr val="tx2"/>
+                </a:solidFill>
+              </a:defRPr>
+            </a:lvl4pPr>
+            <a:lvl5pPr>
+              <a:defRPr>
+                <a:solidFill>
+                  <a:schemeClr val="tx2"/>
+                </a:solidFill>
+              </a:defRPr>
+            </a:lvl5pPr>
+            <a:lvl6pPr>
+              <a:defRPr>
+                <a:solidFill>
+                  <a:schemeClr val="tx2"/>
+                </a:solidFill>
+              </a:defRPr>
+            </a:lvl6pPr>
+            <a:lvl7pPr>
+              <a:defRPr>
+                <a:solidFill>
+                  <a:schemeClr val="tx2"/>
+                </a:solidFill>
+              </a:defRPr>
+            </a:lvl7pPr>
+            <a:lvl8pPr>
+              <a:defRPr>
+                <a:solidFill>
+                  <a:schemeClr val="tx2"/>
+                </a:solidFill>
+              </a:defRPr>
+            </a:lvl8pPr>
+            <a:lvl9pPr>
+              <a:defRPr>
+                <a:solidFill>
+                  <a:schemeClr val="tx2"/>
+                </a:solidFill>
+              </a:defRPr>
+            </a:lvl9pPr>
+          </a:lstStyle>
+          <a:p>
+            <a:pPr lvl="0"/>
+            <a:r>
+              <a:rPr lang="en-US" sz="8000" dirty="0">
+                <a:solidFill>
+                  <a:schemeClr val="accent1"/>
+                </a:solidFill>
+              </a:rPr>
+              <a:t>“</a:t>
+            </a:r>
+          </a:p>
+        </p:txBody>
+      </p:sp>
+      <p:sp>
+        <p:nvSpPr>
+          <p:cNvPr id="15" name="TextBox 14"/>
+          <p:cNvSpPr txBox="1"/>
+          <p:nvPr/>
+        </p:nvSpPr>
+        <p:spPr>
+          <a:xfrm>
+            <a:off x="10437812" y="2743200"/>
+            <a:ext cx="609600" cy="584776"/>
+          </a:xfrm>
+          <a:prstGeom prst="rect">
+            <a:avLst/>
+          </a:prstGeom>
+        </p:spPr>
+        <p:txBody>
+          <a:bodyPr vert="horz" lIns="91440" tIns="45720" rIns="91440" bIns="45720" rtlCol="0" anchor="ctr">
+            <a:noAutofit/>
+          </a:bodyPr>
+          <a:lstStyle>
+            <a:lvl1pPr>
+              <a:spcBef>
+                <a:spcPct val="0"/>
+              </a:spcBef>
+              <a:buNone/>
+              <a:defRPr sz="3200" b="0" cap="all">
+                <a:ln w="3175" cmpd="sng">
+                  <a:noFill/>
+                </a:ln>
+                <a:effectLst>
+                  <a:glow rad="38100">
+                    <a:schemeClr val="bg1">
+                      <a:lumMod val="65000"/>
+                      <a:lumOff val="35000"/>
+                      <a:alpha val="40000"/>
+                    </a:schemeClr>
+                  </a:glow>
+                  <a:outerShdw blurRad="28575" dist="38100" dir="14040000" algn="tl" rotWithShape="0">
+                    <a:srgbClr val="000000">
+                      <a:alpha val="25000"/>
+                    </a:srgbClr>
+                  </a:outerShdw>
+                </a:effectLst>
+              </a:defRPr>
+            </a:lvl1pPr>
+            <a:lvl2pPr>
+              <a:defRPr>
+                <a:solidFill>
+                  <a:schemeClr val="tx2"/>
+                </a:solidFill>
+              </a:defRPr>
+            </a:lvl2pPr>
+            <a:lvl3pPr>
+              <a:defRPr>
+                <a:solidFill>
+                  <a:schemeClr val="tx2"/>
+                </a:solidFill>
+              </a:defRPr>
+            </a:lvl3pPr>
+            <a:lvl4pPr>
+              <a:defRPr>
+                <a:solidFill>
+                  <a:schemeClr val="tx2"/>
+                </a:solidFill>
+              </a:defRPr>
+            </a:lvl4pPr>
+            <a:lvl5pPr>
+              <a:defRPr>
+                <a:solidFill>
+                  <a:schemeClr val="tx2"/>
+                </a:solidFill>
+              </a:defRPr>
+            </a:lvl5pPr>
+            <a:lvl6pPr>
+              <a:defRPr>
+                <a:solidFill>
+                  <a:schemeClr val="tx2"/>
+                </a:solidFill>
+              </a:defRPr>
+            </a:lvl6pPr>
+            <a:lvl7pPr>
+              <a:defRPr>
+                <a:solidFill>
+                  <a:schemeClr val="tx2"/>
+                </a:solidFill>
+              </a:defRPr>
+            </a:lvl7pPr>
+            <a:lvl8pPr>
+              <a:defRPr>
+                <a:solidFill>
+                  <a:schemeClr val="tx2"/>
+                </a:solidFill>
+              </a:defRPr>
+            </a:lvl8pPr>
+            <a:lvl9pPr>
+              <a:defRPr>
+                <a:solidFill>
+                  <a:schemeClr val="tx2"/>
+                </a:solidFill>
+              </a:defRPr>
+            </a:lvl9pPr>
+          </a:lstStyle>
+          <a:p>
+            <a:pPr lvl="0" algn="r"/>
+            <a:r>
+              <a:rPr lang="en-US" sz="8000" dirty="0">
+                <a:solidFill>
+                  <a:schemeClr val="accent1"/>
+                </a:solidFill>
+              </a:rPr>
+              <a:t>”</a:t>
+            </a:r>
+          </a:p>
+        </p:txBody>
+      </p:sp>
+      <p:sp>
+        <p:nvSpPr>
+          <p:cNvPr id="2" name="Title 1"/>
+          <p:cNvSpPr>
+            <a:spLocks noGrp="1"/>
+          </p:cNvSpPr>
+          <p:nvPr>
+            <p:ph type="title"/>
+          </p:nvPr>
+        </p:nvSpPr>
+        <p:spPr>
+          <a:xfrm>
+            <a:off x="1446213" y="609601"/>
+            <a:ext cx="9296398" cy="2743199"/>
+          </a:xfrm>
+        </p:spPr>
+        <p:txBody>
+          <a:bodyPr anchor="ctr">
+            <a:normAutofit/>
+          </a:bodyPr>
+          <a:lstStyle>
+            <a:lvl1pPr algn="l">
+              <a:defRPr sz="3200" b="0" cap="all">
+                <a:gradFill flip="none" rotWithShape="1">
+                  <a:gsLst>
+                    <a:gs pos="0">
+                      <a:schemeClr val="tx1"/>
+                    </a:gs>
+                    <a:gs pos="100000">
+                      <a:schemeClr val="tx1">
+                        <a:lumMod val="75000"/>
+                      </a:schemeClr>
+                    </a:gs>
+                  </a:gsLst>
+                  <a:lin ang="5400000" scaled="0"/>
+                  <a:tileRect/>
+                </a:gradFill>
+              </a:defRPr>
+            </a:lvl1pPr>
+          </a:lstStyle>
+          <a:p>
+            <a:r>
+              <a:rPr lang="en-US"/>
+              <a:t>Click to edit Master title style</a:t>
+            </a:r>
+            <a:endParaRPr lang="en-US" dirty="0"/>
+          </a:p>
+        </p:txBody>
+      </p:sp>
+      <p:sp>
+        <p:nvSpPr>
+          <p:cNvPr id="10" name="Text Placeholder 9"/>
+          <p:cNvSpPr>
+            <a:spLocks noGrp="1"/>
+          </p:cNvSpPr>
+          <p:nvPr>
+            <p:ph type="body" sz="quarter" idx="13"/>
+          </p:nvPr>
+        </p:nvSpPr>
+        <p:spPr>
+          <a:xfrm>
+            <a:off x="1141412" y="3886200"/>
+            <a:ext cx="9906000" cy="889000"/>
+          </a:xfrm>
+        </p:spPr>
+        <p:txBody>
+          <a:bodyPr vert="horz" lIns="91440" tIns="45720" rIns="91440" bIns="45720" rtlCol="0" anchor="b">
+            <a:normAutofit/>
+          </a:bodyPr>
+          <a:lstStyle>
+            <a:lvl1pPr>
+              <a:buNone/>
+              <a:defRPr lang="en-US" sz="2400" b="0" cap="all" dirty="0">
+                <a:ln w="3175" cmpd="sng">
+                  <a:noFill/>
+                </a:ln>
+                <a:gradFill flip="none" rotWithShape="1">
+                  <a:gsLst>
+                    <a:gs pos="0">
+                      <a:schemeClr val="tx1"/>
+                    </a:gs>
+                    <a:gs pos="100000">
+                      <a:schemeClr val="tx1">
+                        <a:lumMod val="75000"/>
+                      </a:schemeClr>
+                    </a:gs>
+                  </a:gsLst>
+                  <a:lin ang="5400000" scaled="0"/>
+                  <a:tileRect/>
+                </a:gradFill>
+                <a:effectLst>
+                  <a:glow rad="38100">
+                    <a:schemeClr val="bg1">
+                      <a:lumMod val="65000"/>
+                      <a:lumOff val="35000"/>
+                      <a:alpha val="40000"/>
+                    </a:schemeClr>
+                  </a:glow>
+                  <a:outerShdw blurRad="28575" dist="38100" dir="14040000" algn="tl" rotWithShape="0">
+                    <a:srgbClr val="000000">
+                      <a:alpha val="25000"/>
+                    </a:srgbClr>
+                  </a:outerShdw>
+                </a:effectLst>
+              </a:defRPr>
+            </a:lvl1pPr>
+          </a:lstStyle>
+          <a:p>
+            <a:pPr marL="0" lvl="0">
+              <a:spcBef>
+                <a:spcPct val="0"/>
+              </a:spcBef>
+              <a:buNone/>
+            </a:pPr>
+            <a:r>
+              <a:rPr lang="en-US"/>
+              <a:t>Click to edit Master text styles</a:t>
+            </a:r>
+          </a:p>
+        </p:txBody>
+      </p:sp>
+      <p:sp>
+        <p:nvSpPr>
+          <p:cNvPr id="3" name="Text Placeholder 2"/>
+          <p:cNvSpPr>
+            <a:spLocks noGrp="1"/>
+          </p:cNvSpPr>
+          <p:nvPr>
+            <p:ph type="body" idx="1"/>
+          </p:nvPr>
+        </p:nvSpPr>
+        <p:spPr>
+          <a:xfrm>
+            <a:off x="1141411" y="4775200"/>
+            <a:ext cx="9906000" cy="1016000"/>
+          </a:xfrm>
+        </p:spPr>
+        <p:txBody>
+          <a:bodyPr anchor="t">
+            <a:normAutofit/>
+          </a:bodyPr>
+          <a:lstStyle>
+            <a:lvl1pPr marL="0" indent="0" algn="l">
+              <a:buNone/>
+              <a:defRPr sz="1800">
+                <a:gradFill flip="none" rotWithShape="1">
+                  <a:gsLst>
+                    <a:gs pos="0">
+                      <a:schemeClr val="tx1"/>
+                    </a:gs>
+                    <a:gs pos="100000">
+                      <a:schemeClr val="tx1">
+                        <a:lumMod val="75000"/>
+                      </a:schemeClr>
+                    </a:gs>
+                  </a:gsLst>
+                  <a:lin ang="5400000" scaled="0"/>
+                  <a:tileRect/>
+                </a:gradFill>
+              </a:defRPr>
+            </a:lvl1pPr>
+            <a:lvl2pPr marL="457200" indent="0">
+              <a:buNone/>
+              <a:defRPr sz="1800">
+                <a:solidFill>
+                  <a:schemeClr val="tx1">
+                    <a:tint val="75000"/>
+                  </a:schemeClr>
+                </a:solidFill>
+              </a:defRPr>
+            </a:lvl2pPr>
+            <a:lvl3pPr marL="914400" indent="0">
+              <a:buNone/>
+              <a:defRPr sz="1600">
+                <a:solidFill>
+                  <a:schemeClr val="tx1">
+                    <a:tint val="75000"/>
+                  </a:schemeClr>
+                </a:solidFill>
+              </a:defRPr>
+            </a:lvl3pPr>
+            <a:lvl4pPr marL="1371600" indent="0">
+              <a:buNone/>
+              <a:defRPr sz="1400">
+                <a:solidFill>
+                  <a:schemeClr val="tx1">
+                    <a:tint val="75000"/>
+                  </a:schemeClr>
+                </a:solidFill>
+              </a:defRPr>
+            </a:lvl4pPr>
+            <a:lvl5pPr marL="1828800" indent="0">
+              <a:buNone/>
+              <a:defRPr sz="1400">
+                <a:solidFill>
+                  <a:schemeClr val="tx1">
+                    <a:tint val="75000"/>
+                  </a:schemeClr>
+                </a:solidFill>
+              </a:defRPr>
+            </a:lvl5pPr>
+            <a:lvl6pPr marL="2286000" indent="0">
+              <a:buNone/>
+              <a:defRPr sz="1400">
+                <a:solidFill>
+                  <a:schemeClr val="tx1">
+                    <a:tint val="75000"/>
+                  </a:schemeClr>
+                </a:solidFill>
+              </a:defRPr>
+            </a:lvl6pPr>
+            <a:lvl7pPr marL="2743200" indent="0">
+              <a:buNone/>
+              <a:defRPr sz="1400">
+                <a:solidFill>
+                  <a:schemeClr val="tx1">
+                    <a:tint val="75000"/>
+                  </a:schemeClr>
+                </a:solidFill>
+              </a:defRPr>
+            </a:lvl7pPr>
+            <a:lvl8pPr marL="3200400" indent="0">
+              <a:buNone/>
+              <a:defRPr sz="1400">
+                <a:solidFill>
+                  <a:schemeClr val="tx1">
+                    <a:tint val="75000"/>
+                  </a:schemeClr>
+                </a:solidFill>
+              </a:defRPr>
+            </a:lvl8pPr>
+            <a:lvl9pPr marL="3657600" indent="0">
+              <a:buNone/>
+              <a:defRPr sz="1400">
+                <a:solidFill>
+                  <a:schemeClr val="tx1">
+                    <a:tint val="75000"/>
+                  </a:schemeClr>
+                </a:solidFill>
+              </a:defRPr>
+            </a:lvl9pPr>
+          </a:lstStyle>
+          <a:p>
+            <a:pPr lvl="0"/>
+            <a:r>
+              <a:rPr lang="en-US"/>
+              <a:t>Click to edit Master text styles</a:t>
+            </a:r>
+          </a:p>
+        </p:txBody>
+      </p:sp>
+      <p:sp>
+        <p:nvSpPr>
+          <p:cNvPr id="4" name="Date Placeholder 3"/>
+          <p:cNvSpPr>
+            <a:spLocks noGrp="1"/>
+          </p:cNvSpPr>
+          <p:nvPr>
+            <p:ph type="dt" sz="half" idx="10"/>
+          </p:nvPr>
+        </p:nvSpPr>
+        <p:spPr/>
+        <p:txBody>
+          <a:bodyPr/>
+          <a:lstStyle/>
+          <a:p>
+            <a:fld id="{B4EF5C61-CB00-400A-8D60-8D67D86CAF2F}" type="datetimeFigureOut">
+              <a:rPr lang="en-GB" smtClean="0"/>
+              <a:t>07/06/2026</a:t>
+            </a:fld>
+            <a:endParaRPr lang="en-GB"/>
+          </a:p>
+        </p:txBody>
+      </p:sp>
+      <p:sp>
+        <p:nvSpPr>
+          <p:cNvPr id="5" name="Footer Placeholder 4"/>
+          <p:cNvSpPr>
+            <a:spLocks noGrp="1"/>
+          </p:cNvSpPr>
+          <p:nvPr>
+            <p:ph type="ftr" sz="quarter" idx="11"/>
+          </p:nvPr>
+        </p:nvSpPr>
+        <p:spPr/>
+        <p:txBody>
+          <a:bodyPr/>
+          <a:lstStyle/>
+          <a:p>
+            <a:endParaRPr lang="en-GB"/>
+          </a:p>
+        </p:txBody>
+      </p:sp>
+      <p:sp>
+        <p:nvSpPr>
+          <p:cNvPr id="6" name="Slide Number Placeholder 5"/>
+          <p:cNvSpPr>
+            <a:spLocks noGrp="1"/>
+          </p:cNvSpPr>
+          <p:nvPr>
+            <p:ph type="sldNum" sz="quarter" idx="12"/>
+          </p:nvPr>
+        </p:nvSpPr>
+        <p:spPr/>
+        <p:txBody>
+          <a:bodyPr/>
+          <a:lstStyle/>
+          <a:p>
+            <a:fld id="{2FA875AF-D0E4-42BF-8E1E-4B38B400B47E}" type="slidenum">
+              <a:rPr lang="en-GB" smtClean="0"/>
+              <a:t>‹#›</a:t>
+            </a:fld>
+            <a:endParaRPr lang="en-GB"/>
+          </a:p>
+        </p:txBody>
+      </p:sp>
+    </p:spTree>
+    <p:extLst>
+      <p:ext uri="{BB962C8B-B14F-4D97-AF65-F5344CB8AC3E}">
+        <p14:creationId xmlns:p14="http://schemas.microsoft.com/office/powerpoint/2010/main" val="2821221752"/>
+      </p:ext>
+    </p:extLst>
+  </p:cSld>
+  <p:clrMapOvr>
+    <a:masterClrMapping/>
+  </p:clrMapOvr>
+</p:sldLayout>
+</file>
+
+<file path=ppt/slideLayouts/slideLayout15.xml><?xml version="1.0" encoding="utf-8"?>
+<p:sldLayout xmlns:a="http://schemas.openxmlformats.org/drawingml/2006/main" xmlns:r="http://schemas.openxmlformats.org/officeDocument/2006/relationships" xmlns:p="http://schemas.openxmlformats.org/presentationml/2006/main" preserve="1">
+  <p:cSld name="True or False">
+    <p:spTree>
+      <p:nvGrpSpPr>
+        <p:cNvPr id="1" name=""/>
+        <p:cNvGrpSpPr/>
+        <p:nvPr/>
+      </p:nvGrpSpPr>
+      <p:grpSpPr>
+        <a:xfrm>
+          <a:off x="0" y="0"/>
+          <a:ext cx="0" cy="0"/>
+          <a:chOff x="0" y="0"/>
+          <a:chExt cx="0" cy="0"/>
+        </a:xfrm>
+      </p:grpSpPr>
+      <p:sp>
+        <p:nvSpPr>
+          <p:cNvPr id="2" name="Title 1"/>
+          <p:cNvSpPr>
+            <a:spLocks noGrp="1"/>
+          </p:cNvSpPr>
+          <p:nvPr>
+            <p:ph type="title"/>
+          </p:nvPr>
+        </p:nvSpPr>
+        <p:spPr>
+          <a:xfrm>
+            <a:off x="1141412" y="609601"/>
+            <a:ext cx="9905999" cy="2743199"/>
+          </a:xfrm>
+        </p:spPr>
+        <p:txBody>
+          <a:bodyPr vert="horz" lIns="91440" tIns="45720" rIns="91440" bIns="45720" rtlCol="0" anchor="ctr">
+            <a:normAutofit/>
+          </a:bodyPr>
+          <a:lstStyle>
+            <a:lvl1pPr>
+              <a:defRPr lang="en-US" b="0" dirty="0"/>
+            </a:lvl1pPr>
+          </a:lstStyle>
+          <a:p>
+            <a:pPr marL="0" lvl="0"/>
+            <a:r>
+              <a:rPr lang="en-US"/>
+              <a:t>Click to edit Master title style</a:t>
+            </a:r>
+            <a:endParaRPr lang="en-US" dirty="0"/>
+          </a:p>
+        </p:txBody>
+      </p:sp>
+      <p:sp>
+        <p:nvSpPr>
+          <p:cNvPr id="10" name="Text Placeholder 9"/>
+          <p:cNvSpPr>
+            <a:spLocks noGrp="1"/>
+          </p:cNvSpPr>
+          <p:nvPr>
+            <p:ph type="body" sz="quarter" idx="13"/>
+          </p:nvPr>
+        </p:nvSpPr>
+        <p:spPr>
+          <a:xfrm>
+            <a:off x="1141412" y="3505200"/>
+            <a:ext cx="9906000" cy="838200"/>
+          </a:xfrm>
+        </p:spPr>
+        <p:txBody>
+          <a:bodyPr vert="horz" lIns="91440" tIns="45720" rIns="91440" bIns="45720" rtlCol="0" anchor="b">
+            <a:normAutofit/>
+          </a:bodyPr>
+          <a:lstStyle>
+            <a:lvl1pPr>
+              <a:buNone/>
+              <a:defRPr lang="en-US" sz="2800" b="0" cap="all" dirty="0">
+                <a:ln w="3175" cmpd="sng">
+                  <a:noFill/>
+                </a:ln>
+                <a:gradFill flip="none" rotWithShape="1">
+                  <a:gsLst>
+                    <a:gs pos="0">
+                      <a:schemeClr val="tx1"/>
+                    </a:gs>
+                    <a:gs pos="100000">
+                      <a:schemeClr val="tx1">
+                        <a:lumMod val="75000"/>
+                      </a:schemeClr>
+                    </a:gs>
+                  </a:gsLst>
+                  <a:lin ang="5400000" scaled="0"/>
+                  <a:tileRect/>
+                </a:gradFill>
+                <a:effectLst>
+                  <a:glow rad="38100">
+                    <a:schemeClr val="bg1">
+                      <a:lumMod val="65000"/>
+                      <a:lumOff val="35000"/>
+                      <a:alpha val="40000"/>
+                    </a:schemeClr>
+                  </a:glow>
+                  <a:outerShdw blurRad="28575" dist="38100" dir="14040000" algn="tl" rotWithShape="0">
+                    <a:srgbClr val="000000">
+                      <a:alpha val="25000"/>
+                    </a:srgbClr>
+                  </a:outerShdw>
+                </a:effectLst>
+              </a:defRPr>
+            </a:lvl1pPr>
+          </a:lstStyle>
+          <a:p>
+            <a:pPr marL="0" lvl="0">
+              <a:spcBef>
+                <a:spcPct val="0"/>
+              </a:spcBef>
+              <a:buNone/>
+            </a:pPr>
+            <a:r>
+              <a:rPr lang="en-US"/>
+              <a:t>Click to edit Master text styles</a:t>
+            </a:r>
+          </a:p>
+        </p:txBody>
+      </p:sp>
+      <p:sp>
+        <p:nvSpPr>
+          <p:cNvPr id="3" name="Text Placeholder 2"/>
+          <p:cNvSpPr>
+            <a:spLocks noGrp="1"/>
+          </p:cNvSpPr>
+          <p:nvPr>
+            <p:ph type="body" idx="1"/>
+          </p:nvPr>
+        </p:nvSpPr>
+        <p:spPr>
+          <a:xfrm>
+            <a:off x="1141411" y="4343400"/>
+            <a:ext cx="9906000" cy="1447800"/>
+          </a:xfrm>
+        </p:spPr>
+        <p:txBody>
+          <a:bodyPr anchor="t">
+            <a:normAutofit/>
+          </a:bodyPr>
+          <a:lstStyle>
+            <a:lvl1pPr marL="0" indent="0" algn="l">
+              <a:buNone/>
+              <a:defRPr sz="1800">
+                <a:gradFill flip="none" rotWithShape="1">
+                  <a:gsLst>
+                    <a:gs pos="0">
+                      <a:schemeClr val="tx1"/>
+                    </a:gs>
+                    <a:gs pos="100000">
+                      <a:schemeClr val="tx1">
+                        <a:lumMod val="75000"/>
+                      </a:schemeClr>
+                    </a:gs>
+                  </a:gsLst>
+                  <a:lin ang="5400000" scaled="0"/>
+                  <a:tileRect/>
+                </a:gradFill>
+              </a:defRPr>
+            </a:lvl1pPr>
+            <a:lvl2pPr marL="457200" indent="0">
+              <a:buNone/>
+              <a:defRPr sz="1800">
+                <a:solidFill>
+                  <a:schemeClr val="tx1">
+                    <a:tint val="75000"/>
+                  </a:schemeClr>
+                </a:solidFill>
+              </a:defRPr>
+            </a:lvl2pPr>
+            <a:lvl3pPr marL="914400" indent="0">
+              <a:buNone/>
+              <a:defRPr sz="1600">
+                <a:solidFill>
+                  <a:schemeClr val="tx1">
+                    <a:tint val="75000"/>
+                  </a:schemeClr>
+                </a:solidFill>
+              </a:defRPr>
+            </a:lvl3pPr>
+            <a:lvl4pPr marL="1371600" indent="0">
+              <a:buNone/>
+              <a:defRPr sz="1400">
+                <a:solidFill>
+                  <a:schemeClr val="tx1">
+                    <a:tint val="75000"/>
+                  </a:schemeClr>
+                </a:solidFill>
+              </a:defRPr>
+            </a:lvl4pPr>
+            <a:lvl5pPr marL="1828800" indent="0">
+              <a:buNone/>
+              <a:defRPr sz="1400">
+                <a:solidFill>
+                  <a:schemeClr val="tx1">
+                    <a:tint val="75000"/>
+                  </a:schemeClr>
+                </a:solidFill>
+              </a:defRPr>
+            </a:lvl5pPr>
+            <a:lvl6pPr marL="2286000" indent="0">
+              <a:buNone/>
+              <a:defRPr sz="1400">
+                <a:solidFill>
+                  <a:schemeClr val="tx1">
+                    <a:tint val="75000"/>
+                  </a:schemeClr>
+                </a:solidFill>
+              </a:defRPr>
+            </a:lvl6pPr>
+            <a:lvl7pPr marL="2743200" indent="0">
+              <a:buNone/>
+              <a:defRPr sz="1400">
+                <a:solidFill>
+                  <a:schemeClr val="tx1">
+                    <a:tint val="75000"/>
+                  </a:schemeClr>
+                </a:solidFill>
+              </a:defRPr>
+            </a:lvl7pPr>
+            <a:lvl8pPr marL="3200400" indent="0">
+              <a:buNone/>
+              <a:defRPr sz="1400">
+                <a:solidFill>
+                  <a:schemeClr val="tx1">
+                    <a:tint val="75000"/>
+                  </a:schemeClr>
+                </a:solidFill>
+              </a:defRPr>
+            </a:lvl8pPr>
+            <a:lvl9pPr marL="3657600" indent="0">
+              <a:buNone/>
+              <a:defRPr sz="1400">
+                <a:solidFill>
+                  <a:schemeClr val="tx1">
+                    <a:tint val="75000"/>
+                  </a:schemeClr>
+                </a:solidFill>
+              </a:defRPr>
+            </a:lvl9pPr>
+          </a:lstStyle>
+          <a:p>
+            <a:pPr lvl="0"/>
+            <a:r>
+              <a:rPr lang="en-US"/>
+              <a:t>Click to edit Master text styles</a:t>
+            </a:r>
+          </a:p>
+        </p:txBody>
+      </p:sp>
+      <p:sp>
+        <p:nvSpPr>
+          <p:cNvPr id="4" name="Date Placeholder 3"/>
+          <p:cNvSpPr>
+            <a:spLocks noGrp="1"/>
+          </p:cNvSpPr>
+          <p:nvPr>
+            <p:ph type="dt" sz="half" idx="10"/>
+          </p:nvPr>
+        </p:nvSpPr>
+        <p:spPr/>
+        <p:txBody>
+          <a:bodyPr/>
+          <a:lstStyle/>
+          <a:p>
+            <a:fld id="{B4EF5C61-CB00-400A-8D60-8D67D86CAF2F}" type="datetimeFigureOut">
+              <a:rPr lang="en-GB" smtClean="0"/>
+              <a:t>07/06/2026</a:t>
+            </a:fld>
+            <a:endParaRPr lang="en-GB"/>
+          </a:p>
+        </p:txBody>
+      </p:sp>
+      <p:sp>
+        <p:nvSpPr>
+          <p:cNvPr id="5" name="Footer Placeholder 4"/>
+          <p:cNvSpPr>
+            <a:spLocks noGrp="1"/>
+          </p:cNvSpPr>
+          <p:nvPr>
+            <p:ph type="ftr" sz="quarter" idx="11"/>
+          </p:nvPr>
+        </p:nvSpPr>
+        <p:spPr/>
+        <p:txBody>
+          <a:bodyPr/>
+          <a:lstStyle/>
+          <a:p>
+            <a:endParaRPr lang="en-GB"/>
+          </a:p>
+        </p:txBody>
+      </p:sp>
+      <p:sp>
+        <p:nvSpPr>
+          <p:cNvPr id="6" name="Slide Number Placeholder 5"/>
+          <p:cNvSpPr>
+            <a:spLocks noGrp="1"/>
+          </p:cNvSpPr>
+          <p:nvPr>
+            <p:ph type="sldNum" sz="quarter" idx="12"/>
+          </p:nvPr>
+        </p:nvSpPr>
+        <p:spPr/>
+        <p:txBody>
+          <a:bodyPr/>
+          <a:lstStyle/>
+          <a:p>
+            <a:fld id="{2FA875AF-D0E4-42BF-8E1E-4B38B400B47E}" type="slidenum">
+              <a:rPr lang="en-GB" smtClean="0"/>
+              <a:t>‹#›</a:t>
+            </a:fld>
+            <a:endParaRPr lang="en-GB"/>
+          </a:p>
+        </p:txBody>
+      </p:sp>
+    </p:spTree>
+    <p:extLst>
+      <p:ext uri="{BB962C8B-B14F-4D97-AF65-F5344CB8AC3E}">
+        <p14:creationId xmlns:p14="http://schemas.microsoft.com/office/powerpoint/2010/main" val="1981940801"/>
+      </p:ext>
+    </p:extLst>
+  </p:cSld>
+  <p:clrMapOvr>
+    <a:masterClrMapping/>
+  </p:clrMapOvr>
+</p:sldLayout>
+</file>
+
+<file path=ppt/slideLayouts/slideLayout16.xml><?xml version="1.0" encoding="utf-8"?>
 <p:sldLayout xmlns:a="http://schemas.openxmlformats.org/drawingml/2006/main" xmlns:r="http://schemas.openxmlformats.org/officeDocument/2006/relationships" xmlns:p="http://schemas.openxmlformats.org/presentationml/2006/main" type="vertTx" preserve="1">
   <p:cSld name="Title and Vertical Text">
     <p:spTree>
@@ -350,13 +2509,7 @@
       </p:grpSpPr>
       <p:sp>
         <p:nvSpPr>
-          <p:cNvPr id="2" name="Title 1">
-            <a:extLst>
-              <a:ext uri="{FF2B5EF4-FFF2-40B4-BE49-F238E27FC236}">
-                <a16:creationId xmlns:a16="http://schemas.microsoft.com/office/drawing/2014/main" id="{02263FC5-A4AF-1C3B-3787-45AD3CD58C7F}"/>
-              </a:ext>
-            </a:extLst>
-          </p:cNvPr>
+          <p:cNvPr id="7" name="Title 1"/>
           <p:cNvSpPr>
             <a:spLocks noGrp="1"/>
           </p:cNvSpPr>
@@ -364,7 +2517,12 @@
             <p:ph type="title"/>
           </p:nvPr>
         </p:nvSpPr>
-        <p:spPr/>
+        <p:spPr>
+          <a:xfrm>
+            <a:off x="1141413" y="609600"/>
+            <a:ext cx="9905998" cy="1905000"/>
+          </a:xfrm>
+        </p:spPr>
         <p:txBody>
           <a:bodyPr/>
           <a:lstStyle/>
@@ -373,19 +2531,13 @@
               <a:rPr lang="en-US"/>
               <a:t>Click to edit Master title style</a:t>
             </a:r>
-            <a:endParaRPr lang="en-GB"/>
-          </a:p>
-        </p:txBody>
-      </p:sp>
-      <p:sp>
-        <p:nvSpPr>
-          <p:cNvPr id="3" name="Vertical Text Placeholder 2">
-            <a:extLst>
-              <a:ext uri="{FF2B5EF4-FFF2-40B4-BE49-F238E27FC236}">
-                <a16:creationId xmlns:a16="http://schemas.microsoft.com/office/drawing/2014/main" id="{5C2E1CD3-867B-4AED-D417-36BCBEFB2B65}"/>
-              </a:ext>
-            </a:extLst>
-          </p:cNvPr>
+            <a:endParaRPr lang="en-US" dirty="0"/>
+          </a:p>
+        </p:txBody>
+      </p:sp>
+      <p:sp>
+        <p:nvSpPr>
+          <p:cNvPr id="3" name="Vertical Text Placeholder 2"/>
           <p:cNvSpPr>
             <a:spLocks noGrp="1"/>
           </p:cNvSpPr>
@@ -395,7 +2547,7 @@
         </p:nvSpPr>
         <p:spPr/>
         <p:txBody>
-          <a:bodyPr vert="eaVert"/>
+          <a:bodyPr vert="eaVert" anchor="t"/>
           <a:lstStyle/>
           <a:p>
             <a:pPr lvl="0"/>
@@ -431,19 +2583,13 @@
               <a:rPr lang="en-US"/>
               <a:t>Fifth level</a:t>
             </a:r>
-            <a:endParaRPr lang="en-GB"/>
-          </a:p>
-        </p:txBody>
-      </p:sp>
-      <p:sp>
-        <p:nvSpPr>
-          <p:cNvPr id="4" name="Date Placeholder 3">
-            <a:extLst>
-              <a:ext uri="{FF2B5EF4-FFF2-40B4-BE49-F238E27FC236}">
-                <a16:creationId xmlns:a16="http://schemas.microsoft.com/office/drawing/2014/main" id="{28902D94-AF25-4098-C4D7-B4E55E496D5E}"/>
-              </a:ext>
-            </a:extLst>
-          </p:cNvPr>
+            <a:endParaRPr lang="en-US" dirty="0"/>
+          </a:p>
+        </p:txBody>
+      </p:sp>
+      <p:sp>
+        <p:nvSpPr>
+          <p:cNvPr id="4" name="Date Placeholder 3"/>
           <p:cNvSpPr>
             <a:spLocks noGrp="1"/>
           </p:cNvSpPr>
@@ -466,13 +2612,7 @@
       </p:sp>
       <p:sp>
         <p:nvSpPr>
-          <p:cNvPr id="5" name="Footer Placeholder 4">
-            <a:extLst>
-              <a:ext uri="{FF2B5EF4-FFF2-40B4-BE49-F238E27FC236}">
-                <a16:creationId xmlns:a16="http://schemas.microsoft.com/office/drawing/2014/main" id="{3F70DD71-9FE4-617A-6D0F-6C8066D241BF}"/>
-              </a:ext>
-            </a:extLst>
-          </p:cNvPr>
+          <p:cNvPr id="5" name="Footer Placeholder 4"/>
           <p:cNvSpPr>
             <a:spLocks noGrp="1"/>
           </p:cNvSpPr>
@@ -491,13 +2631,7 @@
       </p:sp>
       <p:sp>
         <p:nvSpPr>
-          <p:cNvPr id="6" name="Slide Number Placeholder 5">
-            <a:extLst>
-              <a:ext uri="{FF2B5EF4-FFF2-40B4-BE49-F238E27FC236}">
-                <a16:creationId xmlns:a16="http://schemas.microsoft.com/office/drawing/2014/main" id="{5E47DC5E-F305-6B9A-9FA0-D4736713E4FC}"/>
-              </a:ext>
-            </a:extLst>
-          </p:cNvPr>
+          <p:cNvPr id="6" name="Slide Number Placeholder 5"/>
           <p:cNvSpPr>
             <a:spLocks noGrp="1"/>
           </p:cNvSpPr>
@@ -521,7 +2655,7 @@
     </p:spTree>
     <p:extLst>
       <p:ext uri="{BB962C8B-B14F-4D97-AF65-F5344CB8AC3E}">
-        <p14:creationId xmlns:p14="http://schemas.microsoft.com/office/powerpoint/2010/main" val="4163324061"/>
+        <p14:creationId xmlns:p14="http://schemas.microsoft.com/office/powerpoint/2010/main" val="1493802099"/>
       </p:ext>
     </p:extLst>
   </p:cSld>
@@ -531,7 +2665,7 @@
 </p:sldLayout>
 </file>
 
-<file path=ppt/slideLayouts/slideLayout11.xml><?xml version="1.0" encoding="utf-8"?>
+<file path=ppt/slideLayouts/slideLayout17.xml><?xml version="1.0" encoding="utf-8"?>
 <p:sldLayout xmlns:a="http://schemas.openxmlformats.org/drawingml/2006/main" xmlns:r="http://schemas.openxmlformats.org/officeDocument/2006/relationships" xmlns:p="http://schemas.openxmlformats.org/presentationml/2006/main" type="vertTitleAndTx" preserve="1">
   <p:cSld name="Vertical Title and Text">
     <p:spTree>
@@ -550,13 +2684,7 @@
       </p:grpSpPr>
       <p:sp>
         <p:nvSpPr>
-          <p:cNvPr id="2" name="Vertical Title 1">
-            <a:extLst>
-              <a:ext uri="{FF2B5EF4-FFF2-40B4-BE49-F238E27FC236}">
-                <a16:creationId xmlns:a16="http://schemas.microsoft.com/office/drawing/2014/main" id="{943962EE-477B-4ED2-0AAB-6EBE01D58F7A}"/>
-              </a:ext>
-            </a:extLst>
-          </p:cNvPr>
+          <p:cNvPr id="2" name="Vertical Title 1"/>
           <p:cNvSpPr>
             <a:spLocks noGrp="1"/>
           </p:cNvSpPr>
@@ -566,8 +2694,8 @@
         </p:nvSpPr>
         <p:spPr>
           <a:xfrm>
-            <a:off x="8724900" y="365125"/>
-            <a:ext cx="2628900" cy="5811838"/>
+            <a:off x="8836898" y="609599"/>
+            <a:ext cx="2210514" cy="5181601"/>
           </a:xfrm>
         </p:spPr>
         <p:txBody>
@@ -578,19 +2706,13 @@
               <a:rPr lang="en-US"/>
               <a:t>Click to edit Master title style</a:t>
             </a:r>
-            <a:endParaRPr lang="en-GB"/>
-          </a:p>
-        </p:txBody>
-      </p:sp>
-      <p:sp>
-        <p:nvSpPr>
-          <p:cNvPr id="3" name="Vertical Text Placeholder 2">
-            <a:extLst>
-              <a:ext uri="{FF2B5EF4-FFF2-40B4-BE49-F238E27FC236}">
-                <a16:creationId xmlns:a16="http://schemas.microsoft.com/office/drawing/2014/main" id="{973110AE-A2EC-141C-8221-EE4D995F48BF}"/>
-              </a:ext>
-            </a:extLst>
-          </p:cNvPr>
+            <a:endParaRPr lang="en-US" dirty="0"/>
+          </a:p>
+        </p:txBody>
+      </p:sp>
+      <p:sp>
+        <p:nvSpPr>
+          <p:cNvPr id="3" name="Vertical Text Placeholder 2"/>
           <p:cNvSpPr>
             <a:spLocks noGrp="1"/>
           </p:cNvSpPr>
@@ -600,12 +2722,12 @@
         </p:nvSpPr>
         <p:spPr>
           <a:xfrm>
-            <a:off x="838200" y="365125"/>
-            <a:ext cx="7734300" cy="5811838"/>
+            <a:off x="1141412" y="609600"/>
+            <a:ext cx="7543800" cy="5181600"/>
           </a:xfrm>
         </p:spPr>
         <p:txBody>
-          <a:bodyPr vert="eaVert"/>
+          <a:bodyPr vert="eaVert" anchor="t"/>
           <a:lstStyle/>
           <a:p>
             <a:pPr lvl="0"/>
@@ -641,19 +2763,13 @@
               <a:rPr lang="en-US"/>
               <a:t>Fifth level</a:t>
             </a:r>
-            <a:endParaRPr lang="en-GB"/>
-          </a:p>
-        </p:txBody>
-      </p:sp>
-      <p:sp>
-        <p:nvSpPr>
-          <p:cNvPr id="4" name="Date Placeholder 3">
-            <a:extLst>
-              <a:ext uri="{FF2B5EF4-FFF2-40B4-BE49-F238E27FC236}">
-                <a16:creationId xmlns:a16="http://schemas.microsoft.com/office/drawing/2014/main" id="{6AE4509E-7DC2-A66D-9958-781EA5062912}"/>
-              </a:ext>
-            </a:extLst>
-          </p:cNvPr>
+            <a:endParaRPr lang="en-US" dirty="0"/>
+          </a:p>
+        </p:txBody>
+      </p:sp>
+      <p:sp>
+        <p:nvSpPr>
+          <p:cNvPr id="4" name="Date Placeholder 3"/>
           <p:cNvSpPr>
             <a:spLocks noGrp="1"/>
           </p:cNvSpPr>
@@ -676,13 +2792,7 @@
       </p:sp>
       <p:sp>
         <p:nvSpPr>
-          <p:cNvPr id="5" name="Footer Placeholder 4">
-            <a:extLst>
-              <a:ext uri="{FF2B5EF4-FFF2-40B4-BE49-F238E27FC236}">
-                <a16:creationId xmlns:a16="http://schemas.microsoft.com/office/drawing/2014/main" id="{84BCF188-5D36-F2D1-9BC8-C0F496CA7ED0}"/>
-              </a:ext>
-            </a:extLst>
-          </p:cNvPr>
+          <p:cNvPr id="5" name="Footer Placeholder 4"/>
           <p:cNvSpPr>
             <a:spLocks noGrp="1"/>
           </p:cNvSpPr>
@@ -701,13 +2811,7 @@
       </p:sp>
       <p:sp>
         <p:nvSpPr>
-          <p:cNvPr id="6" name="Slide Number Placeholder 5">
-            <a:extLst>
-              <a:ext uri="{FF2B5EF4-FFF2-40B4-BE49-F238E27FC236}">
-                <a16:creationId xmlns:a16="http://schemas.microsoft.com/office/drawing/2014/main" id="{4D4B10AD-F426-7917-165A-390794465D6D}"/>
-              </a:ext>
-            </a:extLst>
-          </p:cNvPr>
+          <p:cNvPr id="6" name="Slide Number Placeholder 5"/>
           <p:cNvSpPr>
             <a:spLocks noGrp="1"/>
           </p:cNvSpPr>
@@ -731,7 +2835,7 @@
     </p:spTree>
     <p:extLst>
       <p:ext uri="{BB962C8B-B14F-4D97-AF65-F5344CB8AC3E}">
-        <p14:creationId xmlns:p14="http://schemas.microsoft.com/office/powerpoint/2010/main" val="3170981863"/>
+        <p14:creationId xmlns:p14="http://schemas.microsoft.com/office/powerpoint/2010/main" val="1985422165"/>
       </p:ext>
     </p:extLst>
   </p:cSld>
@@ -760,13 +2864,7 @@
       </p:grpSpPr>
       <p:sp>
         <p:nvSpPr>
-          <p:cNvPr id="2" name="Title 1">
-            <a:extLst>
-              <a:ext uri="{FF2B5EF4-FFF2-40B4-BE49-F238E27FC236}">
-                <a16:creationId xmlns:a16="http://schemas.microsoft.com/office/drawing/2014/main" id="{13878191-7B74-2E7A-85AD-F0B9B1090DD0}"/>
-              </a:ext>
-            </a:extLst>
-          </p:cNvPr>
+          <p:cNvPr id="2" name="Title 1"/>
           <p:cNvSpPr>
             <a:spLocks noGrp="1"/>
           </p:cNvSpPr>
@@ -783,19 +2881,13 @@
               <a:rPr lang="en-US"/>
               <a:t>Click to edit Master title style</a:t>
             </a:r>
-            <a:endParaRPr lang="en-GB"/>
-          </a:p>
-        </p:txBody>
-      </p:sp>
-      <p:sp>
-        <p:nvSpPr>
-          <p:cNvPr id="3" name="Content Placeholder 2">
-            <a:extLst>
-              <a:ext uri="{FF2B5EF4-FFF2-40B4-BE49-F238E27FC236}">
-                <a16:creationId xmlns:a16="http://schemas.microsoft.com/office/drawing/2014/main" id="{3CE6C574-7C28-C81A-BE07-BA1617DD9AD4}"/>
-              </a:ext>
-            </a:extLst>
-          </p:cNvPr>
+            <a:endParaRPr lang="en-US" dirty="0"/>
+          </a:p>
+        </p:txBody>
+      </p:sp>
+      <p:sp>
+        <p:nvSpPr>
+          <p:cNvPr id="3" name="Content Placeholder 2"/>
           <p:cNvSpPr>
             <a:spLocks noGrp="1"/>
           </p:cNvSpPr>
@@ -805,7 +2897,7 @@
         </p:nvSpPr>
         <p:spPr/>
         <p:txBody>
-          <a:bodyPr/>
+          <a:bodyPr anchor="ctr"/>
           <a:lstStyle/>
           <a:p>
             <a:pPr lvl="0"/>
@@ -841,19 +2933,13 @@
               <a:rPr lang="en-US"/>
               <a:t>Fifth level</a:t>
             </a:r>
-            <a:endParaRPr lang="en-GB"/>
-          </a:p>
-        </p:txBody>
-      </p:sp>
-      <p:sp>
-        <p:nvSpPr>
-          <p:cNvPr id="4" name="Date Placeholder 3">
-            <a:extLst>
-              <a:ext uri="{FF2B5EF4-FFF2-40B4-BE49-F238E27FC236}">
-                <a16:creationId xmlns:a16="http://schemas.microsoft.com/office/drawing/2014/main" id="{CAF7C30D-C6DB-46F8-182C-394956A7DFDD}"/>
-              </a:ext>
-            </a:extLst>
-          </p:cNvPr>
+            <a:endParaRPr lang="en-US" dirty="0"/>
+          </a:p>
+        </p:txBody>
+      </p:sp>
+      <p:sp>
+        <p:nvSpPr>
+          <p:cNvPr id="4" name="Date Placeholder 3"/>
           <p:cNvSpPr>
             <a:spLocks noGrp="1"/>
           </p:cNvSpPr>
@@ -876,13 +2962,7 @@
       </p:sp>
       <p:sp>
         <p:nvSpPr>
-          <p:cNvPr id="5" name="Footer Placeholder 4">
-            <a:extLst>
-              <a:ext uri="{FF2B5EF4-FFF2-40B4-BE49-F238E27FC236}">
-                <a16:creationId xmlns:a16="http://schemas.microsoft.com/office/drawing/2014/main" id="{063B745A-304F-3AB8-3B6A-920C133B2C82}"/>
-              </a:ext>
-            </a:extLst>
-          </p:cNvPr>
+          <p:cNvPr id="5" name="Footer Placeholder 4"/>
           <p:cNvSpPr>
             <a:spLocks noGrp="1"/>
           </p:cNvSpPr>
@@ -901,13 +2981,7 @@
       </p:sp>
       <p:sp>
         <p:nvSpPr>
-          <p:cNvPr id="6" name="Slide Number Placeholder 5">
-            <a:extLst>
-              <a:ext uri="{FF2B5EF4-FFF2-40B4-BE49-F238E27FC236}">
-                <a16:creationId xmlns:a16="http://schemas.microsoft.com/office/drawing/2014/main" id="{5D104619-E117-51FB-8F91-CAB270586653}"/>
-              </a:ext>
-            </a:extLst>
-          </p:cNvPr>
+          <p:cNvPr id="6" name="Slide Number Placeholder 5"/>
           <p:cNvSpPr>
             <a:spLocks noGrp="1"/>
           </p:cNvSpPr>
@@ -931,7 +3005,7 @@
     </p:spTree>
     <p:extLst>
       <p:ext uri="{BB962C8B-B14F-4D97-AF65-F5344CB8AC3E}">
-        <p14:creationId xmlns:p14="http://schemas.microsoft.com/office/powerpoint/2010/main" val="1644223777"/>
+        <p14:creationId xmlns:p14="http://schemas.microsoft.com/office/powerpoint/2010/main" val="2549651812"/>
       </p:ext>
     </p:extLst>
   </p:cSld>
@@ -960,13 +3034,7 @@
       </p:grpSpPr>
       <p:sp>
         <p:nvSpPr>
-          <p:cNvPr id="2" name="Title 1">
-            <a:extLst>
-              <a:ext uri="{FF2B5EF4-FFF2-40B4-BE49-F238E27FC236}">
-                <a16:creationId xmlns:a16="http://schemas.microsoft.com/office/drawing/2014/main" id="{3C638520-2837-A932-338D-1F3088225F99}"/>
-              </a:ext>
-            </a:extLst>
-          </p:cNvPr>
+          <p:cNvPr id="2" name="Title 1"/>
           <p:cNvSpPr>
             <a:spLocks noGrp="1"/>
           </p:cNvSpPr>
@@ -976,15 +3044,15 @@
         </p:nvSpPr>
         <p:spPr>
           <a:xfrm>
-            <a:off x="831850" y="1709738"/>
-            <a:ext cx="10515600" cy="2852737"/>
+            <a:off x="1751013" y="3308581"/>
+            <a:ext cx="8686800" cy="1468800"/>
           </a:xfrm>
         </p:spPr>
         <p:txBody>
           <a:bodyPr anchor="b"/>
           <a:lstStyle>
-            <a:lvl1pPr>
-              <a:defRPr sz="6000"/>
+            <a:lvl1pPr algn="r">
+              <a:defRPr sz="4000" b="0" cap="all"/>
             </a:lvl1pPr>
           </a:lstStyle>
           <a:p>
@@ -992,19 +3060,13 @@
               <a:rPr lang="en-US"/>
               <a:t>Click to edit Master title style</a:t>
             </a:r>
-            <a:endParaRPr lang="en-GB"/>
-          </a:p>
-        </p:txBody>
-      </p:sp>
-      <p:sp>
-        <p:nvSpPr>
-          <p:cNvPr id="3" name="Text Placeholder 2">
-            <a:extLst>
-              <a:ext uri="{FF2B5EF4-FFF2-40B4-BE49-F238E27FC236}">
-                <a16:creationId xmlns:a16="http://schemas.microsoft.com/office/drawing/2014/main" id="{D3B5705A-3145-35F7-A396-E612E4479149}"/>
-              </a:ext>
-            </a:extLst>
-          </p:cNvPr>
+            <a:endParaRPr lang="en-US" dirty="0"/>
+          </a:p>
+        </p:txBody>
+      </p:sp>
+      <p:sp>
+        <p:nvSpPr>
+          <p:cNvPr id="3" name="Text Placeholder 2"/>
           <p:cNvSpPr>
             <a:spLocks noGrp="1"/>
           </p:cNvSpPr>
@@ -1014,99 +3076,110 @@
         </p:nvSpPr>
         <p:spPr>
           <a:xfrm>
-            <a:off x="831850" y="4589463"/>
-            <a:ext cx="10515600" cy="1500187"/>
+            <a:off x="1751011" y="4777381"/>
+            <a:ext cx="8686801" cy="860400"/>
           </a:xfrm>
         </p:spPr>
         <p:txBody>
-          <a:bodyPr/>
+          <a:bodyPr anchor="t">
+            <a:normAutofit/>
+          </a:bodyPr>
           <a:lstStyle>
-            <a:lvl1pPr marL="0" indent="0">
-              <a:buNone/>
-              <a:defRPr sz="2400">
-                <a:solidFill>
-                  <a:schemeClr val="tx1">
-                    <a:tint val="82000"/>
-                  </a:schemeClr>
-                </a:solidFill>
+            <a:lvl1pPr marL="0" indent="0" algn="r">
+              <a:buNone/>
+              <a:defRPr sz="2000">
+                <a:gradFill flip="none" rotWithShape="1">
+                  <a:gsLst>
+                    <a:gs pos="0">
+                      <a:schemeClr val="tx1"/>
+                    </a:gs>
+                    <a:gs pos="100000">
+                      <a:schemeClr val="tx1">
+                        <a:lumMod val="75000"/>
+                      </a:schemeClr>
+                    </a:gs>
+                  </a:gsLst>
+                  <a:lin ang="5400000" scaled="0"/>
+                  <a:tileRect/>
+                </a:gradFill>
               </a:defRPr>
             </a:lvl1pPr>
             <a:lvl2pPr marL="457200" indent="0">
               <a:buNone/>
-              <a:defRPr sz="2000">
+              <a:defRPr sz="1800">
                 <a:solidFill>
                   <a:schemeClr val="tx1">
-                    <a:tint val="82000"/>
+                    <a:tint val="75000"/>
                   </a:schemeClr>
                 </a:solidFill>
               </a:defRPr>
             </a:lvl2pPr>
             <a:lvl3pPr marL="914400" indent="0">
               <a:buNone/>
-              <a:defRPr sz="1800">
+              <a:defRPr sz="1600">
                 <a:solidFill>
                   <a:schemeClr val="tx1">
-                    <a:tint val="82000"/>
+                    <a:tint val="75000"/>
                   </a:schemeClr>
                 </a:solidFill>
               </a:defRPr>
             </a:lvl3pPr>
             <a:lvl4pPr marL="1371600" indent="0">
               <a:buNone/>
-              <a:defRPr sz="1600">
+              <a:defRPr sz="1400">
                 <a:solidFill>
                   <a:schemeClr val="tx1">
-                    <a:tint val="82000"/>
+                    <a:tint val="75000"/>
                   </a:schemeClr>
                 </a:solidFill>
               </a:defRPr>
             </a:lvl4pPr>
             <a:lvl5pPr marL="1828800" indent="0">
               <a:buNone/>
-              <a:defRPr sz="1600">
+              <a:defRPr sz="1400">
                 <a:solidFill>
                   <a:schemeClr val="tx1">
-                    <a:tint val="82000"/>
+                    <a:tint val="75000"/>
                   </a:schemeClr>
                 </a:solidFill>
               </a:defRPr>
             </a:lvl5pPr>
             <a:lvl6pPr marL="2286000" indent="0">
               <a:buNone/>
-              <a:defRPr sz="1600">
+              <a:defRPr sz="1400">
                 <a:solidFill>
                   <a:schemeClr val="tx1">
-                    <a:tint val="82000"/>
+                    <a:tint val="75000"/>
                   </a:schemeClr>
                 </a:solidFill>
               </a:defRPr>
             </a:lvl6pPr>
             <a:lvl7pPr marL="2743200" indent="0">
               <a:buNone/>
-              <a:defRPr sz="1600">
+              <a:defRPr sz="1400">
                 <a:solidFill>
                   <a:schemeClr val="tx1">
-                    <a:tint val="82000"/>
+                    <a:tint val="75000"/>
                   </a:schemeClr>
                 </a:solidFill>
               </a:defRPr>
             </a:lvl7pPr>
             <a:lvl8pPr marL="3200400" indent="0">
               <a:buNone/>
-              <a:defRPr sz="1600">
+              <a:defRPr sz="1400">
                 <a:solidFill>
                   <a:schemeClr val="tx1">
-                    <a:tint val="82000"/>
+                    <a:tint val="75000"/>
                   </a:schemeClr>
                 </a:solidFill>
               </a:defRPr>
             </a:lvl8pPr>
             <a:lvl9pPr marL="3657600" indent="0">
               <a:buNone/>
-              <a:defRPr sz="1600">
+              <a:defRPr sz="1400">
                 <a:solidFill>
                   <a:schemeClr val="tx1">
-                    <a:tint val="82000"/>
+                    <a:tint val="75000"/>
                   </a:schemeClr>
                 </a:solidFill>
               </a:defRPr>
@@ -1123,13 +3196,7 @@
       </p:sp>
       <p:sp>
         <p:nvSpPr>
-          <p:cNvPr id="4" name="Date Placeholder 3">
-            <a:extLst>
-              <a:ext uri="{FF2B5EF4-FFF2-40B4-BE49-F238E27FC236}">
-                <a16:creationId xmlns:a16="http://schemas.microsoft.com/office/drawing/2014/main" id="{C57EFCF8-C671-B07A-70CF-A716E0A5B7AC}"/>
-              </a:ext>
-            </a:extLst>
-          </p:cNvPr>
+          <p:cNvPr id="4" name="Date Placeholder 3"/>
           <p:cNvSpPr>
             <a:spLocks noGrp="1"/>
           </p:cNvSpPr>
@@ -1152,13 +3219,7 @@
       </p:sp>
       <p:sp>
         <p:nvSpPr>
-          <p:cNvPr id="5" name="Footer Placeholder 4">
-            <a:extLst>
-              <a:ext uri="{FF2B5EF4-FFF2-40B4-BE49-F238E27FC236}">
-                <a16:creationId xmlns:a16="http://schemas.microsoft.com/office/drawing/2014/main" id="{D465C493-1CCB-9FCF-BBA2-15B4A61B619B}"/>
-              </a:ext>
-            </a:extLst>
-          </p:cNvPr>
+          <p:cNvPr id="5" name="Footer Placeholder 4"/>
           <p:cNvSpPr>
             <a:spLocks noGrp="1"/>
           </p:cNvSpPr>
@@ -1177,13 +3238,7 @@
       </p:sp>
       <p:sp>
         <p:nvSpPr>
-          <p:cNvPr id="6" name="Slide Number Placeholder 5">
-            <a:extLst>
-              <a:ext uri="{FF2B5EF4-FFF2-40B4-BE49-F238E27FC236}">
-                <a16:creationId xmlns:a16="http://schemas.microsoft.com/office/drawing/2014/main" id="{6EEF6E4D-8367-E091-FD71-52FDEAC35710}"/>
-              </a:ext>
-            </a:extLst>
-          </p:cNvPr>
+          <p:cNvPr id="6" name="Slide Number Placeholder 5"/>
           <p:cNvSpPr>
             <a:spLocks noGrp="1"/>
           </p:cNvSpPr>
@@ -1207,7 +3262,7 @@
     </p:spTree>
     <p:extLst>
       <p:ext uri="{BB962C8B-B14F-4D97-AF65-F5344CB8AC3E}">
-        <p14:creationId xmlns:p14="http://schemas.microsoft.com/office/powerpoint/2010/main" val="489602205"/>
+        <p14:creationId xmlns:p14="http://schemas.microsoft.com/office/powerpoint/2010/main" val="517306328"/>
       </p:ext>
     </p:extLst>
   </p:cSld>
@@ -1236,13 +3291,7 @@
       </p:grpSpPr>
       <p:sp>
         <p:nvSpPr>
-          <p:cNvPr id="2" name="Title 1">
-            <a:extLst>
-              <a:ext uri="{FF2B5EF4-FFF2-40B4-BE49-F238E27FC236}">
-                <a16:creationId xmlns:a16="http://schemas.microsoft.com/office/drawing/2014/main" id="{8FCDDA10-5819-99C7-40FA-24125DFF2E49}"/>
-              </a:ext>
-            </a:extLst>
-          </p:cNvPr>
+          <p:cNvPr id="2" name="Title 1"/>
           <p:cNvSpPr>
             <a:spLocks noGrp="1"/>
           </p:cNvSpPr>
@@ -1259,19 +3308,13 @@
               <a:rPr lang="en-US"/>
               <a:t>Click to edit Master title style</a:t>
             </a:r>
-            <a:endParaRPr lang="en-GB"/>
-          </a:p>
-        </p:txBody>
-      </p:sp>
-      <p:sp>
-        <p:nvSpPr>
-          <p:cNvPr id="3" name="Content Placeholder 2">
-            <a:extLst>
-              <a:ext uri="{FF2B5EF4-FFF2-40B4-BE49-F238E27FC236}">
-                <a16:creationId xmlns:a16="http://schemas.microsoft.com/office/drawing/2014/main" id="{0BC4999A-26FE-AE8E-BBF4-9F4ED9EA29AA}"/>
-              </a:ext>
-            </a:extLst>
-          </p:cNvPr>
+            <a:endParaRPr lang="en-US" dirty="0"/>
+          </a:p>
+        </p:txBody>
+      </p:sp>
+      <p:sp>
+        <p:nvSpPr>
+          <p:cNvPr id="3" name="Content Placeholder 2"/>
           <p:cNvSpPr>
             <a:spLocks noGrp="1"/>
           </p:cNvSpPr>
@@ -1281,13 +3324,43 @@
         </p:nvSpPr>
         <p:spPr>
           <a:xfrm>
-            <a:off x="838200" y="1825625"/>
-            <a:ext cx="5181600" cy="4351338"/>
+            <a:off x="1141412" y="2666999"/>
+            <a:ext cx="4876800" cy="3124201"/>
           </a:xfrm>
         </p:spPr>
         <p:txBody>
-          <a:bodyPr/>
-          <a:lstStyle/>
+          <a:bodyPr>
+            <a:normAutofit/>
+          </a:bodyPr>
+          <a:lstStyle>
+            <a:lvl1pPr>
+              <a:defRPr sz="1800"/>
+            </a:lvl1pPr>
+            <a:lvl2pPr>
+              <a:defRPr sz="1600"/>
+            </a:lvl2pPr>
+            <a:lvl3pPr>
+              <a:defRPr sz="1400"/>
+            </a:lvl3pPr>
+            <a:lvl4pPr>
+              <a:defRPr sz="1200"/>
+            </a:lvl4pPr>
+            <a:lvl5pPr>
+              <a:defRPr sz="1200"/>
+            </a:lvl5pPr>
+            <a:lvl6pPr>
+              <a:defRPr sz="1200"/>
+            </a:lvl6pPr>
+            <a:lvl7pPr>
+              <a:defRPr sz="1200"/>
+            </a:lvl7pPr>
+            <a:lvl8pPr>
+              <a:defRPr sz="1200"/>
+            </a:lvl8pPr>
+            <a:lvl9pPr>
+              <a:defRPr sz="1200"/>
+            </a:lvl9pPr>
+          </a:lstStyle>
           <a:p>
             <a:pPr lvl="0"/>
             <a:r>
@@ -1322,19 +3395,13 @@
               <a:rPr lang="en-US"/>
               <a:t>Fifth level</a:t>
             </a:r>
-            <a:endParaRPr lang="en-GB"/>
-          </a:p>
-        </p:txBody>
-      </p:sp>
-      <p:sp>
-        <p:nvSpPr>
-          <p:cNvPr id="4" name="Content Placeholder 3">
-            <a:extLst>
-              <a:ext uri="{FF2B5EF4-FFF2-40B4-BE49-F238E27FC236}">
-                <a16:creationId xmlns:a16="http://schemas.microsoft.com/office/drawing/2014/main" id="{D52857A3-FD00-55EC-EAA7-FF7D73D065C4}"/>
-              </a:ext>
-            </a:extLst>
-          </p:cNvPr>
+            <a:endParaRPr lang="en-US" dirty="0"/>
+          </a:p>
+        </p:txBody>
+      </p:sp>
+      <p:sp>
+        <p:nvSpPr>
+          <p:cNvPr id="4" name="Content Placeholder 3"/>
           <p:cNvSpPr>
             <a:spLocks noGrp="1"/>
           </p:cNvSpPr>
@@ -1344,13 +3411,43 @@
         </p:nvSpPr>
         <p:spPr>
           <a:xfrm>
-            <a:off x="6172200" y="1825625"/>
-            <a:ext cx="5181600" cy="4351338"/>
+            <a:off x="6170612" y="2667000"/>
+            <a:ext cx="4876800" cy="3124200"/>
           </a:xfrm>
         </p:spPr>
         <p:txBody>
-          <a:bodyPr/>
-          <a:lstStyle/>
+          <a:bodyPr>
+            <a:normAutofit/>
+          </a:bodyPr>
+          <a:lstStyle>
+            <a:lvl1pPr>
+              <a:defRPr sz="1800"/>
+            </a:lvl1pPr>
+            <a:lvl2pPr>
+              <a:defRPr sz="1600"/>
+            </a:lvl2pPr>
+            <a:lvl3pPr>
+              <a:defRPr sz="1400"/>
+            </a:lvl3pPr>
+            <a:lvl4pPr>
+              <a:defRPr sz="1200"/>
+            </a:lvl4pPr>
+            <a:lvl5pPr>
+              <a:defRPr sz="1200"/>
+            </a:lvl5pPr>
+            <a:lvl6pPr>
+              <a:defRPr sz="1200"/>
+            </a:lvl6pPr>
+            <a:lvl7pPr>
+              <a:defRPr sz="1200"/>
+            </a:lvl7pPr>
+            <a:lvl8pPr>
+              <a:defRPr sz="1200"/>
+            </a:lvl8pPr>
+            <a:lvl9pPr>
+              <a:defRPr sz="1200"/>
+            </a:lvl9pPr>
+          </a:lstStyle>
           <a:p>
             <a:pPr lvl="0"/>
             <a:r>
@@ -1385,19 +3482,13 @@
               <a:rPr lang="en-US"/>
               <a:t>Fifth level</a:t>
             </a:r>
-            <a:endParaRPr lang="en-GB"/>
-          </a:p>
-        </p:txBody>
-      </p:sp>
-      <p:sp>
-        <p:nvSpPr>
-          <p:cNvPr id="5" name="Date Placeholder 4">
-            <a:extLst>
-              <a:ext uri="{FF2B5EF4-FFF2-40B4-BE49-F238E27FC236}">
-                <a16:creationId xmlns:a16="http://schemas.microsoft.com/office/drawing/2014/main" id="{0F8E33BC-C1A3-BF71-BEC1-8410294BD745}"/>
-              </a:ext>
-            </a:extLst>
-          </p:cNvPr>
+            <a:endParaRPr lang="en-US" dirty="0"/>
+          </a:p>
+        </p:txBody>
+      </p:sp>
+      <p:sp>
+        <p:nvSpPr>
+          <p:cNvPr id="5" name="Date Placeholder 4"/>
           <p:cNvSpPr>
             <a:spLocks noGrp="1"/>
           </p:cNvSpPr>
@@ -1420,13 +3511,7 @@
       </p:sp>
       <p:sp>
         <p:nvSpPr>
-          <p:cNvPr id="6" name="Footer Placeholder 5">
-            <a:extLst>
-              <a:ext uri="{FF2B5EF4-FFF2-40B4-BE49-F238E27FC236}">
-                <a16:creationId xmlns:a16="http://schemas.microsoft.com/office/drawing/2014/main" id="{0A4EBCE0-61F4-25D4-9C32-1EEA8EF85EBB}"/>
-              </a:ext>
-            </a:extLst>
-          </p:cNvPr>
+          <p:cNvPr id="6" name="Footer Placeholder 5"/>
           <p:cNvSpPr>
             <a:spLocks noGrp="1"/>
           </p:cNvSpPr>
@@ -1445,13 +3530,7 @@
       </p:sp>
       <p:sp>
         <p:nvSpPr>
-          <p:cNvPr id="7" name="Slide Number Placeholder 6">
-            <a:extLst>
-              <a:ext uri="{FF2B5EF4-FFF2-40B4-BE49-F238E27FC236}">
-                <a16:creationId xmlns:a16="http://schemas.microsoft.com/office/drawing/2014/main" id="{6FEB836A-4375-DF68-5E18-0973B9CB2016}"/>
-              </a:ext>
-            </a:extLst>
-          </p:cNvPr>
+          <p:cNvPr id="7" name="Slide Number Placeholder 6"/>
           <p:cNvSpPr>
             <a:spLocks noGrp="1"/>
           </p:cNvSpPr>
@@ -1475,7 +3554,7 @@
     </p:spTree>
     <p:extLst>
       <p:ext uri="{BB962C8B-B14F-4D97-AF65-F5344CB8AC3E}">
-        <p14:creationId xmlns:p14="http://schemas.microsoft.com/office/powerpoint/2010/main" val="2079498331"/>
+        <p14:creationId xmlns:p14="http://schemas.microsoft.com/office/powerpoint/2010/main" val="283957744"/>
       </p:ext>
     </p:extLst>
   </p:cSld>
@@ -1504,66 +3583,55 @@
       </p:grpSpPr>
       <p:sp>
         <p:nvSpPr>
-          <p:cNvPr id="2" name="Title 1">
-            <a:extLst>
-              <a:ext uri="{FF2B5EF4-FFF2-40B4-BE49-F238E27FC236}">
-                <a16:creationId xmlns:a16="http://schemas.microsoft.com/office/drawing/2014/main" id="{71F085D8-27FC-B3FD-3069-E80DB2458F44}"/>
-              </a:ext>
-            </a:extLst>
-          </p:cNvPr>
+          <p:cNvPr id="2" name="Title 1"/>
           <p:cNvSpPr>
             <a:spLocks noGrp="1"/>
           </p:cNvSpPr>
           <p:nvPr>
             <p:ph type="title"/>
+          </p:nvPr>
+        </p:nvSpPr>
+        <p:spPr/>
+        <p:txBody>
+          <a:bodyPr/>
+          <a:lstStyle>
+            <a:lvl1pPr>
+              <a:defRPr/>
+            </a:lvl1pPr>
+          </a:lstStyle>
+          <a:p>
+            <a:r>
+              <a:rPr lang="en-US"/>
+              <a:t>Click to edit Master title style</a:t>
+            </a:r>
+            <a:endParaRPr lang="en-US" dirty="0"/>
+          </a:p>
+        </p:txBody>
+      </p:sp>
+      <p:sp>
+        <p:nvSpPr>
+          <p:cNvPr id="3" name="Text Placeholder 2"/>
+          <p:cNvSpPr>
+            <a:spLocks noGrp="1"/>
+          </p:cNvSpPr>
+          <p:nvPr>
+            <p:ph type="body" idx="1"/>
           </p:nvPr>
         </p:nvSpPr>
         <p:spPr>
           <a:xfrm>
-            <a:off x="839788" y="365125"/>
-            <a:ext cx="10515600" cy="1325563"/>
+            <a:off x="1429280" y="2658533"/>
+            <a:ext cx="4588931" cy="576262"/>
           </a:xfrm>
         </p:spPr>
         <p:txBody>
-          <a:bodyPr/>
-          <a:lstStyle/>
-          <a:p>
-            <a:r>
-              <a:rPr lang="en-US"/>
-              <a:t>Click to edit Master title style</a:t>
-            </a:r>
-            <a:endParaRPr lang="en-GB"/>
-          </a:p>
-        </p:txBody>
-      </p:sp>
-      <p:sp>
-        <p:nvSpPr>
-          <p:cNvPr id="3" name="Text Placeholder 2">
-            <a:extLst>
-              <a:ext uri="{FF2B5EF4-FFF2-40B4-BE49-F238E27FC236}">
-                <a16:creationId xmlns:a16="http://schemas.microsoft.com/office/drawing/2014/main" id="{2764FD8B-81B8-A3B1-1BCA-2B297A4EDB16}"/>
-              </a:ext>
-            </a:extLst>
-          </p:cNvPr>
-          <p:cNvSpPr>
-            <a:spLocks noGrp="1"/>
-          </p:cNvSpPr>
-          <p:nvPr>
-            <p:ph type="body" idx="1"/>
-          </p:nvPr>
-        </p:nvSpPr>
-        <p:spPr>
-          <a:xfrm>
-            <a:off x="839788" y="1681163"/>
-            <a:ext cx="5157787" cy="823912"/>
-          </a:xfrm>
-        </p:spPr>
-        <p:txBody>
-          <a:bodyPr anchor="b"/>
+          <a:bodyPr anchor="b">
+            <a:noAutofit/>
+          </a:bodyPr>
           <a:lstStyle>
             <a:lvl1pPr marL="0" indent="0">
               <a:buNone/>
-              <a:defRPr sz="2400" b="1"/>
+              <a:defRPr sz="2800" b="0"/>
             </a:lvl1pPr>
             <a:lvl2pPr marL="457200" indent="0">
               <a:buNone/>
@@ -1609,13 +3677,7 @@
       </p:sp>
       <p:sp>
         <p:nvSpPr>
-          <p:cNvPr id="4" name="Content Placeholder 3">
-            <a:extLst>
-              <a:ext uri="{FF2B5EF4-FFF2-40B4-BE49-F238E27FC236}">
-                <a16:creationId xmlns:a16="http://schemas.microsoft.com/office/drawing/2014/main" id="{8DA4725D-2B05-34EE-3C69-65AB5FCBD304}"/>
-              </a:ext>
-            </a:extLst>
-          </p:cNvPr>
+          <p:cNvPr id="4" name="Content Placeholder 3"/>
           <p:cNvSpPr>
             <a:spLocks noGrp="1"/>
           </p:cNvSpPr>
@@ -1625,13 +3687,43 @@
         </p:nvSpPr>
         <p:spPr>
           <a:xfrm>
-            <a:off x="839788" y="2505075"/>
-            <a:ext cx="5157787" cy="3684588"/>
+            <a:off x="1141412" y="3243262"/>
+            <a:ext cx="4876800" cy="2547937"/>
           </a:xfrm>
         </p:spPr>
         <p:txBody>
-          <a:bodyPr/>
-          <a:lstStyle/>
+          <a:bodyPr anchor="t">
+            <a:normAutofit/>
+          </a:bodyPr>
+          <a:lstStyle>
+            <a:lvl1pPr>
+              <a:defRPr sz="1800"/>
+            </a:lvl1pPr>
+            <a:lvl2pPr>
+              <a:defRPr sz="1600"/>
+            </a:lvl2pPr>
+            <a:lvl3pPr>
+              <a:defRPr sz="1400"/>
+            </a:lvl3pPr>
+            <a:lvl4pPr>
+              <a:defRPr sz="1200"/>
+            </a:lvl4pPr>
+            <a:lvl5pPr>
+              <a:defRPr sz="1200"/>
+            </a:lvl5pPr>
+            <a:lvl6pPr>
+              <a:defRPr sz="1200"/>
+            </a:lvl6pPr>
+            <a:lvl7pPr>
+              <a:defRPr sz="1200"/>
+            </a:lvl7pPr>
+            <a:lvl8pPr>
+              <a:defRPr sz="1200"/>
+            </a:lvl8pPr>
+            <a:lvl9pPr>
+              <a:defRPr sz="1200"/>
+            </a:lvl9pPr>
+          </a:lstStyle>
           <a:p>
             <a:pPr lvl="0"/>
             <a:r>
@@ -1666,19 +3758,13 @@
               <a:rPr lang="en-US"/>
               <a:t>Fifth level</a:t>
             </a:r>
-            <a:endParaRPr lang="en-GB"/>
-          </a:p>
-        </p:txBody>
-      </p:sp>
-      <p:sp>
-        <p:nvSpPr>
-          <p:cNvPr id="5" name="Text Placeholder 4">
-            <a:extLst>
-              <a:ext uri="{FF2B5EF4-FFF2-40B4-BE49-F238E27FC236}">
-                <a16:creationId xmlns:a16="http://schemas.microsoft.com/office/drawing/2014/main" id="{52CD19F1-550E-96F6-2539-A46E98D30E99}"/>
-              </a:ext>
-            </a:extLst>
-          </p:cNvPr>
+            <a:endParaRPr lang="en-US" dirty="0"/>
+          </a:p>
+        </p:txBody>
+      </p:sp>
+      <p:sp>
+        <p:nvSpPr>
+          <p:cNvPr id="5" name="Text Placeholder 4"/>
           <p:cNvSpPr>
             <a:spLocks noGrp="1"/>
           </p:cNvSpPr>
@@ -1688,16 +3774,18 @@
         </p:nvSpPr>
         <p:spPr>
           <a:xfrm>
-            <a:off x="6172200" y="1681163"/>
-            <a:ext cx="5183188" cy="823912"/>
+            <a:off x="6443133" y="2667000"/>
+            <a:ext cx="4604280" cy="576262"/>
           </a:xfrm>
         </p:spPr>
         <p:txBody>
-          <a:bodyPr anchor="b"/>
+          <a:bodyPr anchor="b">
+            <a:noAutofit/>
+          </a:bodyPr>
           <a:lstStyle>
             <a:lvl1pPr marL="0" indent="0">
               <a:buNone/>
-              <a:defRPr sz="2400" b="1"/>
+              <a:defRPr sz="2800" b="0"/>
             </a:lvl1pPr>
             <a:lvl2pPr marL="457200" indent="0">
               <a:buNone/>
@@ -1743,13 +3831,7 @@
       </p:sp>
       <p:sp>
         <p:nvSpPr>
-          <p:cNvPr id="6" name="Content Placeholder 5">
-            <a:extLst>
-              <a:ext uri="{FF2B5EF4-FFF2-40B4-BE49-F238E27FC236}">
-                <a16:creationId xmlns:a16="http://schemas.microsoft.com/office/drawing/2014/main" id="{B3A5F182-944E-6985-9341-5A80F1EF4850}"/>
-              </a:ext>
-            </a:extLst>
-          </p:cNvPr>
+          <p:cNvPr id="6" name="Content Placeholder 5"/>
           <p:cNvSpPr>
             <a:spLocks noGrp="1"/>
           </p:cNvSpPr>
@@ -1759,13 +3841,43 @@
         </p:nvSpPr>
         <p:spPr>
           <a:xfrm>
-            <a:off x="6172200" y="2505075"/>
-            <a:ext cx="5183188" cy="3684588"/>
+            <a:off x="6170612" y="3243262"/>
+            <a:ext cx="4876801" cy="2547937"/>
           </a:xfrm>
         </p:spPr>
         <p:txBody>
-          <a:bodyPr/>
-          <a:lstStyle/>
+          <a:bodyPr anchor="t">
+            <a:normAutofit/>
+          </a:bodyPr>
+          <a:lstStyle>
+            <a:lvl1pPr>
+              <a:defRPr sz="1800"/>
+            </a:lvl1pPr>
+            <a:lvl2pPr>
+              <a:defRPr sz="1600"/>
+            </a:lvl2pPr>
+            <a:lvl3pPr>
+              <a:defRPr sz="1400"/>
+            </a:lvl3pPr>
+            <a:lvl4pPr>
+              <a:defRPr sz="1200"/>
+            </a:lvl4pPr>
+            <a:lvl5pPr>
+              <a:defRPr sz="1200"/>
+            </a:lvl5pPr>
+            <a:lvl6pPr>
+              <a:defRPr sz="1200"/>
+            </a:lvl6pPr>
+            <a:lvl7pPr>
+              <a:defRPr sz="1200"/>
+            </a:lvl7pPr>
+            <a:lvl8pPr>
+              <a:defRPr sz="1200"/>
+            </a:lvl8pPr>
+            <a:lvl9pPr>
+              <a:defRPr sz="1200"/>
+            </a:lvl9pPr>
+          </a:lstStyle>
           <a:p>
             <a:pPr lvl="0"/>
             <a:r>
@@ -1800,19 +3912,13 @@
               <a:rPr lang="en-US"/>
               <a:t>Fifth level</a:t>
             </a:r>
-            <a:endParaRPr lang="en-GB"/>
-          </a:p>
-        </p:txBody>
-      </p:sp>
-      <p:sp>
-        <p:nvSpPr>
-          <p:cNvPr id="7" name="Date Placeholder 6">
-            <a:extLst>
-              <a:ext uri="{FF2B5EF4-FFF2-40B4-BE49-F238E27FC236}">
-                <a16:creationId xmlns:a16="http://schemas.microsoft.com/office/drawing/2014/main" id="{58B48AE1-9BB8-BEE8-0B81-2E7327F18D2C}"/>
-              </a:ext>
-            </a:extLst>
-          </p:cNvPr>
+            <a:endParaRPr lang="en-US" dirty="0"/>
+          </a:p>
+        </p:txBody>
+      </p:sp>
+      <p:sp>
+        <p:nvSpPr>
+          <p:cNvPr id="7" name="Date Placeholder 6"/>
           <p:cNvSpPr>
             <a:spLocks noGrp="1"/>
           </p:cNvSpPr>
@@ -1835,13 +3941,7 @@
       </p:sp>
       <p:sp>
         <p:nvSpPr>
-          <p:cNvPr id="8" name="Footer Placeholder 7">
-            <a:extLst>
-              <a:ext uri="{FF2B5EF4-FFF2-40B4-BE49-F238E27FC236}">
-                <a16:creationId xmlns:a16="http://schemas.microsoft.com/office/drawing/2014/main" id="{2F8CDA05-1CB9-E7D8-1B34-10F2A4DF6004}"/>
-              </a:ext>
-            </a:extLst>
-          </p:cNvPr>
+          <p:cNvPr id="8" name="Footer Placeholder 7"/>
           <p:cNvSpPr>
             <a:spLocks noGrp="1"/>
           </p:cNvSpPr>
@@ -1860,13 +3960,7 @@
       </p:sp>
       <p:sp>
         <p:nvSpPr>
-          <p:cNvPr id="9" name="Slide Number Placeholder 8">
-            <a:extLst>
-              <a:ext uri="{FF2B5EF4-FFF2-40B4-BE49-F238E27FC236}">
-                <a16:creationId xmlns:a16="http://schemas.microsoft.com/office/drawing/2014/main" id="{8236268F-44FE-6B9F-507F-5773AB0C2F31}"/>
-              </a:ext>
-            </a:extLst>
-          </p:cNvPr>
+          <p:cNvPr id="9" name="Slide Number Placeholder 8"/>
           <p:cNvSpPr>
             <a:spLocks noGrp="1"/>
           </p:cNvSpPr>
@@ -1890,7 +3984,7 @@
     </p:spTree>
     <p:extLst>
       <p:ext uri="{BB962C8B-B14F-4D97-AF65-F5344CB8AC3E}">
-        <p14:creationId xmlns:p14="http://schemas.microsoft.com/office/powerpoint/2010/main" val="1578280443"/>
+        <p14:creationId xmlns:p14="http://schemas.microsoft.com/office/powerpoint/2010/main" val="2649560575"/>
       </p:ext>
     </p:extLst>
   </p:cSld>
@@ -1919,13 +4013,7 @@
       </p:grpSpPr>
       <p:sp>
         <p:nvSpPr>
-          <p:cNvPr id="2" name="Title 1">
-            <a:extLst>
-              <a:ext uri="{FF2B5EF4-FFF2-40B4-BE49-F238E27FC236}">
-                <a16:creationId xmlns:a16="http://schemas.microsoft.com/office/drawing/2014/main" id="{FEEC8D25-E552-A7DC-6BD7-1467046957A8}"/>
-              </a:ext>
-            </a:extLst>
-          </p:cNvPr>
+          <p:cNvPr id="2" name="Title 1"/>
           <p:cNvSpPr>
             <a:spLocks noGrp="1"/>
           </p:cNvSpPr>
@@ -1942,19 +4030,13 @@
               <a:rPr lang="en-US"/>
               <a:t>Click to edit Master title style</a:t>
             </a:r>
-            <a:endParaRPr lang="en-GB"/>
-          </a:p>
-        </p:txBody>
-      </p:sp>
-      <p:sp>
-        <p:nvSpPr>
-          <p:cNvPr id="3" name="Date Placeholder 2">
-            <a:extLst>
-              <a:ext uri="{FF2B5EF4-FFF2-40B4-BE49-F238E27FC236}">
-                <a16:creationId xmlns:a16="http://schemas.microsoft.com/office/drawing/2014/main" id="{08C317AE-FC3E-9627-7B8E-E541911B81DF}"/>
-              </a:ext>
-            </a:extLst>
-          </p:cNvPr>
+            <a:endParaRPr lang="en-US" dirty="0"/>
+          </a:p>
+        </p:txBody>
+      </p:sp>
+      <p:sp>
+        <p:nvSpPr>
+          <p:cNvPr id="3" name="Date Placeholder 2"/>
           <p:cNvSpPr>
             <a:spLocks noGrp="1"/>
           </p:cNvSpPr>
@@ -1977,13 +4059,7 @@
       </p:sp>
       <p:sp>
         <p:nvSpPr>
-          <p:cNvPr id="4" name="Footer Placeholder 3">
-            <a:extLst>
-              <a:ext uri="{FF2B5EF4-FFF2-40B4-BE49-F238E27FC236}">
-                <a16:creationId xmlns:a16="http://schemas.microsoft.com/office/drawing/2014/main" id="{FC999BE5-9A6D-D15E-F017-1071910FC458}"/>
-              </a:ext>
-            </a:extLst>
-          </p:cNvPr>
+          <p:cNvPr id="4" name="Footer Placeholder 3"/>
           <p:cNvSpPr>
             <a:spLocks noGrp="1"/>
           </p:cNvSpPr>
@@ -2002,13 +4078,7 @@
       </p:sp>
       <p:sp>
         <p:nvSpPr>
-          <p:cNvPr id="5" name="Slide Number Placeholder 4">
-            <a:extLst>
-              <a:ext uri="{FF2B5EF4-FFF2-40B4-BE49-F238E27FC236}">
-                <a16:creationId xmlns:a16="http://schemas.microsoft.com/office/drawing/2014/main" id="{580203CE-B1D1-70A9-C517-D7D844652795}"/>
-              </a:ext>
-            </a:extLst>
-          </p:cNvPr>
+          <p:cNvPr id="5" name="Slide Number Placeholder 4"/>
           <p:cNvSpPr>
             <a:spLocks noGrp="1"/>
           </p:cNvSpPr>
@@ -2032,7 +4102,7 @@
     </p:spTree>
     <p:extLst>
       <p:ext uri="{BB962C8B-B14F-4D97-AF65-F5344CB8AC3E}">
-        <p14:creationId xmlns:p14="http://schemas.microsoft.com/office/powerpoint/2010/main" val="2199531222"/>
+        <p14:creationId xmlns:p14="http://schemas.microsoft.com/office/powerpoint/2010/main" val="2853055169"/>
       </p:ext>
     </p:extLst>
   </p:cSld>
@@ -2061,13 +4131,7 @@
       </p:grpSpPr>
       <p:sp>
         <p:nvSpPr>
-          <p:cNvPr id="2" name="Date Placeholder 1">
-            <a:extLst>
-              <a:ext uri="{FF2B5EF4-FFF2-40B4-BE49-F238E27FC236}">
-                <a16:creationId xmlns:a16="http://schemas.microsoft.com/office/drawing/2014/main" id="{08C3ACF4-F142-C341-0D7E-DC9AB9783CB8}"/>
-              </a:ext>
-            </a:extLst>
-          </p:cNvPr>
+          <p:cNvPr id="2" name="Date Placeholder 1"/>
           <p:cNvSpPr>
             <a:spLocks noGrp="1"/>
           </p:cNvSpPr>
@@ -2090,13 +4154,7 @@
       </p:sp>
       <p:sp>
         <p:nvSpPr>
-          <p:cNvPr id="3" name="Footer Placeholder 2">
-            <a:extLst>
-              <a:ext uri="{FF2B5EF4-FFF2-40B4-BE49-F238E27FC236}">
-                <a16:creationId xmlns:a16="http://schemas.microsoft.com/office/drawing/2014/main" id="{0E239263-B535-108E-C1B7-0C23432B1F13}"/>
-              </a:ext>
-            </a:extLst>
-          </p:cNvPr>
+          <p:cNvPr id="3" name="Footer Placeholder 2"/>
           <p:cNvSpPr>
             <a:spLocks noGrp="1"/>
           </p:cNvSpPr>
@@ -2115,13 +4173,7 @@
       </p:sp>
       <p:sp>
         <p:nvSpPr>
-          <p:cNvPr id="4" name="Slide Number Placeholder 3">
-            <a:extLst>
-              <a:ext uri="{FF2B5EF4-FFF2-40B4-BE49-F238E27FC236}">
-                <a16:creationId xmlns:a16="http://schemas.microsoft.com/office/drawing/2014/main" id="{AC754C5B-F849-95B4-3806-1EE6CD6752E5}"/>
-              </a:ext>
-            </a:extLst>
-          </p:cNvPr>
+          <p:cNvPr id="4" name="Slide Number Placeholder 3"/>
           <p:cNvSpPr>
             <a:spLocks noGrp="1"/>
           </p:cNvSpPr>
@@ -2145,7 +4197,7 @@
     </p:spTree>
     <p:extLst>
       <p:ext uri="{BB962C8B-B14F-4D97-AF65-F5344CB8AC3E}">
-        <p14:creationId xmlns:p14="http://schemas.microsoft.com/office/powerpoint/2010/main" val="599627889"/>
+        <p14:creationId xmlns:p14="http://schemas.microsoft.com/office/powerpoint/2010/main" val="2159831534"/>
       </p:ext>
     </p:extLst>
   </p:cSld>
@@ -2174,13 +4226,7 @@
       </p:grpSpPr>
       <p:sp>
         <p:nvSpPr>
-          <p:cNvPr id="2" name="Title 1">
-            <a:extLst>
-              <a:ext uri="{FF2B5EF4-FFF2-40B4-BE49-F238E27FC236}">
-                <a16:creationId xmlns:a16="http://schemas.microsoft.com/office/drawing/2014/main" id="{4E416040-D801-313A-CCCB-28CC4AB494DC}"/>
-              </a:ext>
-            </a:extLst>
-          </p:cNvPr>
+          <p:cNvPr id="2" name="Title 1"/>
           <p:cNvSpPr>
             <a:spLocks noGrp="1"/>
           </p:cNvSpPr>
@@ -2190,141 +4236,135 @@
         </p:nvSpPr>
         <p:spPr>
           <a:xfrm>
-            <a:off x="839788" y="457200"/>
-            <a:ext cx="3932237" cy="1600200"/>
+            <a:off x="1141411" y="1600200"/>
+            <a:ext cx="3549121" cy="1371600"/>
           </a:xfrm>
         </p:spPr>
         <p:txBody>
-          <a:bodyPr anchor="b"/>
+          <a:bodyPr anchor="b">
+            <a:normAutofit/>
+          </a:bodyPr>
+          <a:lstStyle>
+            <a:lvl1pPr algn="l">
+              <a:defRPr sz="2400" b="0"/>
+            </a:lvl1pPr>
+          </a:lstStyle>
+          <a:p>
+            <a:r>
+              <a:rPr lang="en-US"/>
+              <a:t>Click to edit Master title style</a:t>
+            </a:r>
+            <a:endParaRPr lang="en-US" dirty="0"/>
+          </a:p>
+        </p:txBody>
+      </p:sp>
+      <p:sp>
+        <p:nvSpPr>
+          <p:cNvPr id="3" name="Content Placeholder 2"/>
+          <p:cNvSpPr>
+            <a:spLocks noGrp="1"/>
+          </p:cNvSpPr>
+          <p:nvPr>
+            <p:ph idx="1"/>
+          </p:nvPr>
+        </p:nvSpPr>
+        <p:spPr>
+          <a:xfrm>
+            <a:off x="5103812" y="609601"/>
+            <a:ext cx="5943601" cy="5181600"/>
+          </a:xfrm>
+        </p:spPr>
+        <p:txBody>
+          <a:bodyPr anchor="ctr">
+            <a:normAutofit/>
+          </a:bodyPr>
           <a:lstStyle>
             <a:lvl1pPr>
-              <a:defRPr sz="3200"/>
+              <a:defRPr sz="2000"/>
             </a:lvl1pPr>
+            <a:lvl2pPr>
+              <a:defRPr sz="1800"/>
+            </a:lvl2pPr>
+            <a:lvl3pPr>
+              <a:defRPr sz="1600"/>
+            </a:lvl3pPr>
+            <a:lvl4pPr>
+              <a:defRPr sz="1400"/>
+            </a:lvl4pPr>
+            <a:lvl5pPr>
+              <a:defRPr sz="1400"/>
+            </a:lvl5pPr>
+            <a:lvl6pPr>
+              <a:defRPr sz="1400"/>
+            </a:lvl6pPr>
+            <a:lvl7pPr>
+              <a:defRPr sz="1400"/>
+            </a:lvl7pPr>
+            <a:lvl8pPr>
+              <a:defRPr sz="1400"/>
+            </a:lvl8pPr>
+            <a:lvl9pPr>
+              <a:defRPr sz="1400"/>
+            </a:lvl9pPr>
           </a:lstStyle>
           <a:p>
-            <a:r>
-              <a:rPr lang="en-US"/>
-              <a:t>Click to edit Master title style</a:t>
-            </a:r>
-            <a:endParaRPr lang="en-GB"/>
-          </a:p>
-        </p:txBody>
-      </p:sp>
-      <p:sp>
-        <p:nvSpPr>
-          <p:cNvPr id="3" name="Content Placeholder 2">
-            <a:extLst>
-              <a:ext uri="{FF2B5EF4-FFF2-40B4-BE49-F238E27FC236}">
-                <a16:creationId xmlns:a16="http://schemas.microsoft.com/office/drawing/2014/main" id="{227B91B7-54CE-36DA-4C69-9849475AE189}"/>
-              </a:ext>
-            </a:extLst>
-          </p:cNvPr>
-          <p:cNvSpPr>
-            <a:spLocks noGrp="1"/>
-          </p:cNvSpPr>
-          <p:nvPr>
-            <p:ph idx="1"/>
+            <a:pPr lvl="0"/>
+            <a:r>
+              <a:rPr lang="en-US"/>
+              <a:t>Click to edit Master text styles</a:t>
+            </a:r>
+          </a:p>
+          <a:p>
+            <a:pPr lvl="1"/>
+            <a:r>
+              <a:rPr lang="en-US"/>
+              <a:t>Second level</a:t>
+            </a:r>
+          </a:p>
+          <a:p>
+            <a:pPr lvl="2"/>
+            <a:r>
+              <a:rPr lang="en-US"/>
+              <a:t>Third level</a:t>
+            </a:r>
+          </a:p>
+          <a:p>
+            <a:pPr lvl="3"/>
+            <a:r>
+              <a:rPr lang="en-US"/>
+              <a:t>Fourth level</a:t>
+            </a:r>
+          </a:p>
+          <a:p>
+            <a:pPr lvl="4"/>
+            <a:r>
+              <a:rPr lang="en-US"/>
+              <a:t>Fifth level</a:t>
+            </a:r>
+            <a:endParaRPr lang="en-US" dirty="0"/>
+          </a:p>
+        </p:txBody>
+      </p:sp>
+      <p:sp>
+        <p:nvSpPr>
+          <p:cNvPr id="4" name="Text Placeholder 3"/>
+          <p:cNvSpPr>
+            <a:spLocks noGrp="1"/>
+          </p:cNvSpPr>
+          <p:nvPr>
+            <p:ph type="body" sz="half" idx="2"/>
           </p:nvPr>
         </p:nvSpPr>
         <p:spPr>
           <a:xfrm>
-            <a:off x="5183188" y="987425"/>
-            <a:ext cx="6172200" cy="4873625"/>
+            <a:off x="1141411" y="2971800"/>
+            <a:ext cx="3549121" cy="1828800"/>
           </a:xfrm>
         </p:spPr>
         <p:txBody>
-          <a:bodyPr/>
-          <a:lstStyle>
-            <a:lvl1pPr>
-              <a:defRPr sz="3200"/>
-            </a:lvl1pPr>
-            <a:lvl2pPr>
-              <a:defRPr sz="2800"/>
-            </a:lvl2pPr>
-            <a:lvl3pPr>
-              <a:defRPr sz="2400"/>
-            </a:lvl3pPr>
-            <a:lvl4pPr>
-              <a:defRPr sz="2000"/>
-            </a:lvl4pPr>
-            <a:lvl5pPr>
-              <a:defRPr sz="2000"/>
-            </a:lvl5pPr>
-            <a:lvl6pPr>
-              <a:defRPr sz="2000"/>
-            </a:lvl6pPr>
-            <a:lvl7pPr>
-              <a:defRPr sz="2000"/>
-            </a:lvl7pPr>
-            <a:lvl8pPr>
-              <a:defRPr sz="2000"/>
-            </a:lvl8pPr>
-            <a:lvl9pPr>
-              <a:defRPr sz="2000"/>
-            </a:lvl9pPr>
-          </a:lstStyle>
-          <a:p>
-            <a:pPr lvl="0"/>
-            <a:r>
-              <a:rPr lang="en-US"/>
-              <a:t>Click to edit Master text styles</a:t>
-            </a:r>
-          </a:p>
-          <a:p>
-            <a:pPr lvl="1"/>
-            <a:r>
-              <a:rPr lang="en-US"/>
-              <a:t>Second level</a:t>
-            </a:r>
-          </a:p>
-          <a:p>
-            <a:pPr lvl="2"/>
-            <a:r>
-              <a:rPr lang="en-US"/>
-              <a:t>Third level</a:t>
-            </a:r>
-          </a:p>
-          <a:p>
-            <a:pPr lvl="3"/>
-            <a:r>
-              <a:rPr lang="en-US"/>
-              <a:t>Fourth level</a:t>
-            </a:r>
-          </a:p>
-          <a:p>
-            <a:pPr lvl="4"/>
-            <a:r>
-              <a:rPr lang="en-US"/>
-              <a:t>Fifth level</a:t>
-            </a:r>
-            <a:endParaRPr lang="en-GB"/>
-          </a:p>
-        </p:txBody>
-      </p:sp>
-      <p:sp>
-        <p:nvSpPr>
-          <p:cNvPr id="4" name="Text Placeholder 3">
-            <a:extLst>
-              <a:ext uri="{FF2B5EF4-FFF2-40B4-BE49-F238E27FC236}">
-                <a16:creationId xmlns:a16="http://schemas.microsoft.com/office/drawing/2014/main" id="{92737BE8-B6F3-BFE2-CA38-0DF8116AC0D2}"/>
-              </a:ext>
-            </a:extLst>
-          </p:cNvPr>
-          <p:cNvSpPr>
-            <a:spLocks noGrp="1"/>
-          </p:cNvSpPr>
-          <p:nvPr>
-            <p:ph type="body" sz="half" idx="2"/>
-          </p:nvPr>
-        </p:nvSpPr>
-        <p:spPr>
-          <a:xfrm>
-            <a:off x="839788" y="2057400"/>
-            <a:ext cx="3932237" cy="3811588"/>
-          </a:xfrm>
-        </p:spPr>
-        <p:txBody>
-          <a:bodyPr/>
+          <a:bodyPr>
+            <a:normAutofit/>
+          </a:bodyPr>
           <a:lstStyle>
             <a:lvl1pPr marL="0" indent="0">
               <a:buNone/>
@@ -2332,35 +4372,35 @@
             </a:lvl1pPr>
             <a:lvl2pPr marL="457200" indent="0">
               <a:buNone/>
-              <a:defRPr sz="1400"/>
+              <a:defRPr sz="1200"/>
             </a:lvl2pPr>
             <a:lvl3pPr marL="914400" indent="0">
               <a:buNone/>
-              <a:defRPr sz="1200"/>
+              <a:defRPr sz="1000"/>
             </a:lvl3pPr>
             <a:lvl4pPr marL="1371600" indent="0">
               <a:buNone/>
-              <a:defRPr sz="1000"/>
+              <a:defRPr sz="900"/>
             </a:lvl4pPr>
             <a:lvl5pPr marL="1828800" indent="0">
               <a:buNone/>
-              <a:defRPr sz="1000"/>
+              <a:defRPr sz="900"/>
             </a:lvl5pPr>
             <a:lvl6pPr marL="2286000" indent="0">
               <a:buNone/>
-              <a:defRPr sz="1000"/>
+              <a:defRPr sz="900"/>
             </a:lvl6pPr>
             <a:lvl7pPr marL="2743200" indent="0">
               <a:buNone/>
-              <a:defRPr sz="1000"/>
+              <a:defRPr sz="900"/>
             </a:lvl7pPr>
             <a:lvl8pPr marL="3200400" indent="0">
               <a:buNone/>
-              <a:defRPr sz="1000"/>
+              <a:defRPr sz="900"/>
             </a:lvl8pPr>
             <a:lvl9pPr marL="3657600" indent="0">
               <a:buNone/>
-              <a:defRPr sz="1000"/>
+              <a:defRPr sz="900"/>
             </a:lvl9pPr>
           </a:lstStyle>
           <a:p>
@@ -2374,13 +4414,7 @@
       </p:sp>
       <p:sp>
         <p:nvSpPr>
-          <p:cNvPr id="5" name="Date Placeholder 4">
-            <a:extLst>
-              <a:ext uri="{FF2B5EF4-FFF2-40B4-BE49-F238E27FC236}">
-                <a16:creationId xmlns:a16="http://schemas.microsoft.com/office/drawing/2014/main" id="{D937624F-306F-765B-B226-4E86E6DBA401}"/>
-              </a:ext>
-            </a:extLst>
-          </p:cNvPr>
+          <p:cNvPr id="5" name="Date Placeholder 4"/>
           <p:cNvSpPr>
             <a:spLocks noGrp="1"/>
           </p:cNvSpPr>
@@ -2403,13 +4437,7 @@
       </p:sp>
       <p:sp>
         <p:nvSpPr>
-          <p:cNvPr id="6" name="Footer Placeholder 5">
-            <a:extLst>
-              <a:ext uri="{FF2B5EF4-FFF2-40B4-BE49-F238E27FC236}">
-                <a16:creationId xmlns:a16="http://schemas.microsoft.com/office/drawing/2014/main" id="{6817EA72-03E8-4BE0-76C1-87DBCE65A7F3}"/>
-              </a:ext>
-            </a:extLst>
-          </p:cNvPr>
+          <p:cNvPr id="6" name="Footer Placeholder 5"/>
           <p:cNvSpPr>
             <a:spLocks noGrp="1"/>
           </p:cNvSpPr>
@@ -2428,13 +4456,7 @@
       </p:sp>
       <p:sp>
         <p:nvSpPr>
-          <p:cNvPr id="7" name="Slide Number Placeholder 6">
-            <a:extLst>
-              <a:ext uri="{FF2B5EF4-FFF2-40B4-BE49-F238E27FC236}">
-                <a16:creationId xmlns:a16="http://schemas.microsoft.com/office/drawing/2014/main" id="{86D76CD5-84F2-AB09-EE9C-432AD5B49E75}"/>
-              </a:ext>
-            </a:extLst>
-          </p:cNvPr>
+          <p:cNvPr id="7" name="Slide Number Placeholder 6"/>
           <p:cNvSpPr>
             <a:spLocks noGrp="1"/>
           </p:cNvSpPr>
@@ -2458,7 +4480,7 @@
     </p:spTree>
     <p:extLst>
       <p:ext uri="{BB962C8B-B14F-4D97-AF65-F5344CB8AC3E}">
-        <p14:creationId xmlns:p14="http://schemas.microsoft.com/office/powerpoint/2010/main" val="607170068"/>
+        <p14:creationId xmlns:p14="http://schemas.microsoft.com/office/powerpoint/2010/main" val="4162299000"/>
       </p:ext>
     </p:extLst>
   </p:cSld>
@@ -2487,13 +4509,7 @@
       </p:grpSpPr>
       <p:sp>
         <p:nvSpPr>
-          <p:cNvPr id="2" name="Title 1">
-            <a:extLst>
-              <a:ext uri="{FF2B5EF4-FFF2-40B4-BE49-F238E27FC236}">
-                <a16:creationId xmlns:a16="http://schemas.microsoft.com/office/drawing/2014/main" id="{2103E80D-D62D-C414-B514-DE9D63513524}"/>
-              </a:ext>
-            </a:extLst>
-          </p:cNvPr>
+          <p:cNvPr id="2" name="Title 1"/>
           <p:cNvSpPr>
             <a:spLocks noGrp="1"/>
           </p:cNvSpPr>
@@ -2503,15 +4519,17 @@
         </p:nvSpPr>
         <p:spPr>
           <a:xfrm>
-            <a:off x="839788" y="457200"/>
-            <a:ext cx="3932237" cy="1600200"/>
+            <a:off x="1141411" y="1600200"/>
+            <a:ext cx="5334001" cy="1371600"/>
           </a:xfrm>
         </p:spPr>
         <p:txBody>
-          <a:bodyPr anchor="b"/>
+          <a:bodyPr anchor="b">
+            <a:normAutofit/>
+          </a:bodyPr>
           <a:lstStyle>
-            <a:lvl1pPr>
-              <a:defRPr sz="3200"/>
+            <a:lvl1pPr algn="l">
+              <a:defRPr sz="2800" b="0"/>
             </a:lvl1pPr>
           </a:lstStyle>
           <a:p>
@@ -2519,21 +4537,15 @@
               <a:rPr lang="en-US"/>
               <a:t>Click to edit Master title style</a:t>
             </a:r>
-            <a:endParaRPr lang="en-GB"/>
-          </a:p>
-        </p:txBody>
-      </p:sp>
-      <p:sp>
-        <p:nvSpPr>
-          <p:cNvPr id="3" name="Picture Placeholder 2">
-            <a:extLst>
-              <a:ext uri="{FF2B5EF4-FFF2-40B4-BE49-F238E27FC236}">
-                <a16:creationId xmlns:a16="http://schemas.microsoft.com/office/drawing/2014/main" id="{9AF57FE2-4DD1-671E-22FE-84D64631BC01}"/>
-              </a:ext>
-            </a:extLst>
-          </p:cNvPr>
-          <p:cNvSpPr>
-            <a:spLocks noGrp="1"/>
+            <a:endParaRPr lang="en-US" dirty="0"/>
+          </a:p>
+        </p:txBody>
+      </p:sp>
+      <p:sp>
+        <p:nvSpPr>
+          <p:cNvPr id="14" name="Picture Placeholder 2"/>
+          <p:cNvSpPr>
+            <a:spLocks noGrp="1" noChangeAspect="1"/>
           </p:cNvSpPr>
           <p:nvPr>
             <p:ph type="pic" idx="1"/>
@@ -2541,118 +4553,143 @@
         </p:nvSpPr>
         <p:spPr>
           <a:xfrm>
-            <a:off x="5183188" y="987425"/>
-            <a:ext cx="6172200" cy="4873625"/>
+            <a:off x="7433733" y="-18288"/>
+            <a:ext cx="3276599" cy="6903720"/>
           </a:xfrm>
+          <a:ln w="38100">
+            <a:gradFill flip="none" rotWithShape="1">
+              <a:gsLst>
+                <a:gs pos="0">
+                  <a:schemeClr val="bg2"/>
+                </a:gs>
+                <a:gs pos="100000">
+                  <a:schemeClr val="bg2">
+                    <a:lumMod val="75000"/>
+                  </a:schemeClr>
+                </a:gs>
+              </a:gsLst>
+              <a:lin ang="5400000" scaled="0"/>
+              <a:tileRect/>
+            </a:gradFill>
+          </a:ln>
+          <a:effectLst>
+            <a:innerShdw blurRad="57150" dist="38100" dir="10800000">
+              <a:srgbClr val="000000">
+                <a:alpha val="70000"/>
+              </a:srgbClr>
+            </a:innerShdw>
+          </a:effectLst>
         </p:spPr>
         <p:txBody>
-          <a:bodyPr/>
+          <a:bodyPr anchor="t">
+            <a:normAutofit/>
+          </a:bodyPr>
           <a:lstStyle>
-            <a:lvl1pPr marL="0" indent="0">
-              <a:buNone/>
-              <a:defRPr sz="3200"/>
-            </a:lvl1pPr>
-            <a:lvl2pPr marL="457200" indent="0">
-              <a:buNone/>
-              <a:defRPr sz="2800"/>
-            </a:lvl2pPr>
-            <a:lvl3pPr marL="914400" indent="0">
-              <a:buNone/>
-              <a:defRPr sz="2400"/>
-            </a:lvl3pPr>
-            <a:lvl4pPr marL="1371600" indent="0">
-              <a:buNone/>
-              <a:defRPr sz="2000"/>
-            </a:lvl4pPr>
-            <a:lvl5pPr marL="1828800" indent="0">
-              <a:buNone/>
-              <a:defRPr sz="2000"/>
-            </a:lvl5pPr>
-            <a:lvl6pPr marL="2286000" indent="0">
-              <a:buNone/>
-              <a:defRPr sz="2000"/>
-            </a:lvl6pPr>
-            <a:lvl7pPr marL="2743200" indent="0">
-              <a:buNone/>
-              <a:defRPr sz="2000"/>
-            </a:lvl7pPr>
-            <a:lvl8pPr marL="3200400" indent="0">
-              <a:buNone/>
-              <a:defRPr sz="2000"/>
-            </a:lvl8pPr>
-            <a:lvl9pPr marL="3657600" indent="0">
-              <a:buNone/>
-              <a:defRPr sz="2000"/>
-            </a:lvl9pPr>
-          </a:lstStyle>
-          <a:p>
-            <a:endParaRPr lang="en-GB"/>
-          </a:p>
-        </p:txBody>
-      </p:sp>
-      <p:sp>
-        <p:nvSpPr>
-          <p:cNvPr id="4" name="Text Placeholder 3">
-            <a:extLst>
-              <a:ext uri="{FF2B5EF4-FFF2-40B4-BE49-F238E27FC236}">
-                <a16:creationId xmlns:a16="http://schemas.microsoft.com/office/drawing/2014/main" id="{65FA39DE-6FAD-C17E-2462-3BF44269499B}"/>
-              </a:ext>
-            </a:extLst>
-          </p:cNvPr>
-          <p:cNvSpPr>
-            <a:spLocks noGrp="1"/>
-          </p:cNvSpPr>
-          <p:nvPr>
-            <p:ph type="body" sz="half" idx="2"/>
-          </p:nvPr>
-        </p:nvSpPr>
-        <p:spPr>
-          <a:xfrm>
-            <a:off x="839788" y="2057400"/>
-            <a:ext cx="3932237" cy="3811588"/>
-          </a:xfrm>
-        </p:spPr>
-        <p:txBody>
-          <a:bodyPr/>
-          <a:lstStyle>
-            <a:lvl1pPr marL="0" indent="0">
+            <a:lvl1pPr marL="0" indent="0" algn="ctr">
               <a:buNone/>
               <a:defRPr sz="1600"/>
             </a:lvl1pPr>
             <a:lvl2pPr marL="457200" indent="0">
               <a:buNone/>
-              <a:defRPr sz="1400"/>
+              <a:defRPr sz="1600"/>
             </a:lvl2pPr>
             <a:lvl3pPr marL="914400" indent="0">
               <a:buNone/>
-              <a:defRPr sz="1200"/>
+              <a:defRPr sz="1600"/>
             </a:lvl3pPr>
             <a:lvl4pPr marL="1371600" indent="0">
               <a:buNone/>
-              <a:defRPr sz="1000"/>
+              <a:defRPr sz="1600"/>
             </a:lvl4pPr>
             <a:lvl5pPr marL="1828800" indent="0">
               <a:buNone/>
-              <a:defRPr sz="1000"/>
+              <a:defRPr sz="1600"/>
             </a:lvl5pPr>
             <a:lvl6pPr marL="2286000" indent="0">
               <a:buNone/>
-              <a:defRPr sz="1000"/>
+              <a:defRPr sz="1600"/>
             </a:lvl6pPr>
             <a:lvl7pPr marL="2743200" indent="0">
               <a:buNone/>
-              <a:defRPr sz="1000"/>
+              <a:defRPr sz="1600"/>
             </a:lvl7pPr>
             <a:lvl8pPr marL="3200400" indent="0">
               <a:buNone/>
-              <a:defRPr sz="1000"/>
+              <a:defRPr sz="1600"/>
             </a:lvl8pPr>
             <a:lvl9pPr marL="3657600" indent="0">
               <a:buNone/>
-              <a:defRPr sz="1000"/>
+              <a:defRPr sz="1600"/>
             </a:lvl9pPr>
           </a:lstStyle>
           <a:p>
+            <a:r>
+              <a:rPr lang="en-US"/>
+              <a:t>Click icon to add picture</a:t>
+            </a:r>
+            <a:endParaRPr lang="en-US" dirty="0"/>
+          </a:p>
+        </p:txBody>
+      </p:sp>
+      <p:sp>
+        <p:nvSpPr>
+          <p:cNvPr id="4" name="Text Placeholder 3"/>
+          <p:cNvSpPr>
+            <a:spLocks noGrp="1"/>
+          </p:cNvSpPr>
+          <p:nvPr>
+            <p:ph type="body" sz="half" idx="2"/>
+          </p:nvPr>
+        </p:nvSpPr>
+        <p:spPr>
+          <a:xfrm>
+            <a:off x="1141411" y="2971800"/>
+            <a:ext cx="5334001" cy="1828800"/>
+          </a:xfrm>
+        </p:spPr>
+        <p:txBody>
+          <a:bodyPr>
+            <a:normAutofit/>
+          </a:bodyPr>
+          <a:lstStyle>
+            <a:lvl1pPr marL="0" indent="0">
+              <a:buNone/>
+              <a:defRPr sz="1800"/>
+            </a:lvl1pPr>
+            <a:lvl2pPr marL="457200" indent="0">
+              <a:buNone/>
+              <a:defRPr sz="1200"/>
+            </a:lvl2pPr>
+            <a:lvl3pPr marL="914400" indent="0">
+              <a:buNone/>
+              <a:defRPr sz="1000"/>
+            </a:lvl3pPr>
+            <a:lvl4pPr marL="1371600" indent="0">
+              <a:buNone/>
+              <a:defRPr sz="900"/>
+            </a:lvl4pPr>
+            <a:lvl5pPr marL="1828800" indent="0">
+              <a:buNone/>
+              <a:defRPr sz="900"/>
+            </a:lvl5pPr>
+            <a:lvl6pPr marL="2286000" indent="0">
+              <a:buNone/>
+              <a:defRPr sz="900"/>
+            </a:lvl6pPr>
+            <a:lvl7pPr marL="2743200" indent="0">
+              <a:buNone/>
+              <a:defRPr sz="900"/>
+            </a:lvl7pPr>
+            <a:lvl8pPr marL="3200400" indent="0">
+              <a:buNone/>
+              <a:defRPr sz="900"/>
+            </a:lvl8pPr>
+            <a:lvl9pPr marL="3657600" indent="0">
+              <a:buNone/>
+              <a:defRPr sz="900"/>
+            </a:lvl9pPr>
+          </a:lstStyle>
+          <a:p>
             <a:pPr lvl="0"/>
             <a:r>
               <a:rPr lang="en-US"/>
@@ -2663,13 +4700,7 @@
       </p:sp>
       <p:sp>
         <p:nvSpPr>
-          <p:cNvPr id="5" name="Date Placeholder 4">
-            <a:extLst>
-              <a:ext uri="{FF2B5EF4-FFF2-40B4-BE49-F238E27FC236}">
-                <a16:creationId xmlns:a16="http://schemas.microsoft.com/office/drawing/2014/main" id="{1D020C67-205F-970B-86E6-7681D822381F}"/>
-              </a:ext>
-            </a:extLst>
-          </p:cNvPr>
+          <p:cNvPr id="5" name="Date Placeholder 4"/>
           <p:cNvSpPr>
             <a:spLocks noGrp="1"/>
           </p:cNvSpPr>
@@ -2677,7 +4708,12 @@
             <p:ph type="dt" sz="half" idx="10"/>
           </p:nvPr>
         </p:nvSpPr>
-        <p:spPr/>
+        <p:spPr>
+          <a:xfrm>
+            <a:off x="6399212" y="5883275"/>
+            <a:ext cx="914400" cy="365125"/>
+          </a:xfrm>
+        </p:spPr>
         <p:txBody>
           <a:bodyPr/>
           <a:lstStyle/>
@@ -2692,13 +4728,7 @@
       </p:sp>
       <p:sp>
         <p:nvSpPr>
-          <p:cNvPr id="6" name="Footer Placeholder 5">
-            <a:extLst>
-              <a:ext uri="{FF2B5EF4-FFF2-40B4-BE49-F238E27FC236}">
-                <a16:creationId xmlns:a16="http://schemas.microsoft.com/office/drawing/2014/main" id="{5BFCC07F-91B2-867D-7084-F68F55CAFB6B}"/>
-              </a:ext>
-            </a:extLst>
-          </p:cNvPr>
+          <p:cNvPr id="6" name="Footer Placeholder 5"/>
           <p:cNvSpPr>
             <a:spLocks noGrp="1"/>
           </p:cNvSpPr>
@@ -2706,7 +4736,12 @@
             <p:ph type="ftr" sz="quarter" idx="11"/>
           </p:nvPr>
         </p:nvSpPr>
-        <p:spPr/>
+        <p:spPr>
+          <a:xfrm>
+            <a:off x="1141412" y="5883275"/>
+            <a:ext cx="5105400" cy="365125"/>
+          </a:xfrm>
+        </p:spPr>
         <p:txBody>
           <a:bodyPr/>
           <a:lstStyle/>
@@ -2717,13 +4752,7 @@
       </p:sp>
       <p:sp>
         <p:nvSpPr>
-          <p:cNvPr id="7" name="Slide Number Placeholder 6">
-            <a:extLst>
-              <a:ext uri="{FF2B5EF4-FFF2-40B4-BE49-F238E27FC236}">
-                <a16:creationId xmlns:a16="http://schemas.microsoft.com/office/drawing/2014/main" id="{F6636DD4-5F65-3CA9-A63B-17B279C86271}"/>
-              </a:ext>
-            </a:extLst>
-          </p:cNvPr>
+          <p:cNvPr id="7" name="Slide Number Placeholder 6"/>
           <p:cNvSpPr>
             <a:spLocks noGrp="1"/>
           </p:cNvSpPr>
@@ -2731,7 +4760,12 @@
             <p:ph type="sldNum" sz="quarter" idx="12"/>
           </p:nvPr>
         </p:nvSpPr>
-        <p:spPr/>
+        <p:spPr>
+          <a:xfrm>
+            <a:off x="10742612" y="5883275"/>
+            <a:ext cx="322567" cy="365125"/>
+          </a:xfrm>
+        </p:spPr>
         <p:txBody>
           <a:bodyPr/>
           <a:lstStyle/>
@@ -2747,7 +4781,7 @@
     </p:spTree>
     <p:extLst>
       <p:ext uri="{BB962C8B-B14F-4D97-AF65-F5344CB8AC3E}">
-        <p14:creationId xmlns:p14="http://schemas.microsoft.com/office/powerpoint/2010/main" val="598580422"/>
+        <p14:creationId xmlns:p14="http://schemas.microsoft.com/office/powerpoint/2010/main" val="4092251303"/>
       </p:ext>
     </p:extLst>
   </p:cSld>
@@ -2761,8 +4795,8 @@
 <p:sldMaster xmlns:a="http://schemas.openxmlformats.org/drawingml/2006/main" xmlns:r="http://schemas.openxmlformats.org/officeDocument/2006/relationships" xmlns:p="http://schemas.openxmlformats.org/presentationml/2006/main">
   <p:cSld>
     <p:bg>
-      <p:bgRef idx="1001">
-        <a:schemeClr val="bg1"/>
+      <p:bgRef idx="1003">
+        <a:schemeClr val="bg2"/>
       </p:bgRef>
     </p:bg>
     <p:spTree>
@@ -2781,13 +4815,7 @@
       </p:grpSpPr>
       <p:sp>
         <p:nvSpPr>
-          <p:cNvPr id="2" name="Title Placeholder 1">
-            <a:extLst>
-              <a:ext uri="{FF2B5EF4-FFF2-40B4-BE49-F238E27FC236}">
-                <a16:creationId xmlns:a16="http://schemas.microsoft.com/office/drawing/2014/main" id="{D3DCAA83-213A-F1BB-7EA3-E3B02A77F874}"/>
-              </a:ext>
-            </a:extLst>
-          </p:cNvPr>
+          <p:cNvPr id="2" name="Title Placeholder 1"/>
           <p:cNvSpPr>
             <a:spLocks noGrp="1"/>
           </p:cNvSpPr>
@@ -2797,8 +4825,8 @@
         </p:nvSpPr>
         <p:spPr>
           <a:xfrm>
-            <a:off x="838200" y="365125"/>
-            <a:ext cx="10515600" cy="1325563"/>
+            <a:off x="1141413" y="609600"/>
+            <a:ext cx="9905998" cy="1905000"/>
           </a:xfrm>
           <a:prstGeom prst="rect">
             <a:avLst/>
@@ -2814,19 +4842,13 @@
               <a:rPr lang="en-US"/>
               <a:t>Click to edit Master title style</a:t>
             </a:r>
-            <a:endParaRPr lang="en-GB"/>
-          </a:p>
-        </p:txBody>
-      </p:sp>
-      <p:sp>
-        <p:nvSpPr>
-          <p:cNvPr id="3" name="Text Placeholder 2">
-            <a:extLst>
-              <a:ext uri="{FF2B5EF4-FFF2-40B4-BE49-F238E27FC236}">
-                <a16:creationId xmlns:a16="http://schemas.microsoft.com/office/drawing/2014/main" id="{3894C0FD-5B13-C68E-7F85-435E574CF835}"/>
-              </a:ext>
-            </a:extLst>
-          </p:cNvPr>
+            <a:endParaRPr lang="en-US" dirty="0"/>
+          </a:p>
+        </p:txBody>
+      </p:sp>
+      <p:sp>
+        <p:nvSpPr>
+          <p:cNvPr id="3" name="Text Placeholder 2"/>
           <p:cNvSpPr>
             <a:spLocks noGrp="1"/>
           </p:cNvSpPr>
@@ -2836,15 +4858,15 @@
         </p:nvSpPr>
         <p:spPr>
           <a:xfrm>
-            <a:off x="838200" y="1825625"/>
-            <a:ext cx="10515600" cy="4351338"/>
+            <a:off x="1141413" y="2666999"/>
+            <a:ext cx="9905998" cy="3124201"/>
           </a:xfrm>
           <a:prstGeom prst="rect">
             <a:avLst/>
           </a:prstGeom>
         </p:spPr>
         <p:txBody>
-          <a:bodyPr vert="horz" lIns="91440" tIns="45720" rIns="91440" bIns="45720" rtlCol="0">
+          <a:bodyPr vert="horz" lIns="91440" tIns="45720" rIns="91440" bIns="45720" rtlCol="0" anchor="ctr">
             <a:normAutofit/>
           </a:bodyPr>
           <a:lstStyle/>
@@ -2882,19 +4904,13 @@
               <a:rPr lang="en-US"/>
               <a:t>Fifth level</a:t>
             </a:r>
-            <a:endParaRPr lang="en-GB"/>
-          </a:p>
-        </p:txBody>
-      </p:sp>
-      <p:sp>
-        <p:nvSpPr>
-          <p:cNvPr id="4" name="Date Placeholder 3">
-            <a:extLst>
-              <a:ext uri="{FF2B5EF4-FFF2-40B4-BE49-F238E27FC236}">
-                <a16:creationId xmlns:a16="http://schemas.microsoft.com/office/drawing/2014/main" id="{B7748D42-60BB-E462-8479-CC3B3D29E36E}"/>
-              </a:ext>
-            </a:extLst>
-          </p:cNvPr>
+            <a:endParaRPr lang="en-US" dirty="0"/>
+          </a:p>
+        </p:txBody>
+      </p:sp>
+      <p:sp>
+        <p:nvSpPr>
+          <p:cNvPr id="4" name="Date Placeholder 3"/>
           <p:cNvSpPr>
             <a:spLocks noGrp="1"/>
           </p:cNvSpPr>
@@ -2904,8 +4920,8 @@
         </p:nvSpPr>
         <p:spPr>
           <a:xfrm>
-            <a:off x="838200" y="6356350"/>
-            <a:ext cx="2743200" cy="365125"/>
+            <a:off x="8837612" y="5883275"/>
+            <a:ext cx="1600200" cy="365125"/>
           </a:xfrm>
           <a:prstGeom prst="rect">
             <a:avLst/>
@@ -2914,13 +4930,21 @@
         <p:txBody>
           <a:bodyPr vert="horz" lIns="91440" tIns="45720" rIns="91440" bIns="45720" rtlCol="0" anchor="ctr"/>
           <a:lstStyle>
-            <a:lvl1pPr algn="l">
-              <a:defRPr sz="1200">
+            <a:lvl1pPr algn="r">
+              <a:defRPr sz="900" b="1" i="0">
                 <a:solidFill>
                   <a:schemeClr val="tx1">
-                    <a:tint val="82000"/>
+                    <a:lumMod val="75000"/>
                   </a:schemeClr>
                 </a:solidFill>
+                <a:effectLst>
+                  <a:outerShdw blurRad="50800" dist="38100" dir="2700000" algn="tl" rotWithShape="0">
+                    <a:srgbClr val="000000">
+                      <a:alpha val="43000"/>
+                    </a:srgbClr>
+                  </a:outerShdw>
+                </a:effectLst>
+                <a:latin typeface="+mn-lt"/>
               </a:defRPr>
             </a:lvl1pPr>
           </a:lstStyle>
@@ -2935,13 +4959,7 @@
       </p:sp>
       <p:sp>
         <p:nvSpPr>
-          <p:cNvPr id="5" name="Footer Placeholder 4">
-            <a:extLst>
-              <a:ext uri="{FF2B5EF4-FFF2-40B4-BE49-F238E27FC236}">
-                <a16:creationId xmlns:a16="http://schemas.microsoft.com/office/drawing/2014/main" id="{63DF507D-833E-78BE-D8A0-404806F328E1}"/>
-              </a:ext>
-            </a:extLst>
-          </p:cNvPr>
+          <p:cNvPr id="5" name="Footer Placeholder 4"/>
           <p:cNvSpPr>
             <a:spLocks noGrp="1"/>
           </p:cNvSpPr>
@@ -2951,8 +4969,8 @@
         </p:nvSpPr>
         <p:spPr>
           <a:xfrm>
-            <a:off x="4038600" y="6356350"/>
-            <a:ext cx="4114800" cy="365125"/>
+            <a:off x="1141412" y="5883275"/>
+            <a:ext cx="7543800" cy="365125"/>
           </a:xfrm>
           <a:prstGeom prst="rect">
             <a:avLst/>
@@ -2961,13 +4979,21 @@
         <p:txBody>
           <a:bodyPr vert="horz" lIns="91440" tIns="45720" rIns="91440" bIns="45720" rtlCol="0" anchor="ctr"/>
           <a:lstStyle>
-            <a:lvl1pPr algn="ctr">
-              <a:defRPr sz="1200">
+            <a:lvl1pPr algn="l">
+              <a:defRPr sz="900" b="1" i="0">
                 <a:solidFill>
                   <a:schemeClr val="tx1">
-                    <a:tint val="82000"/>
+                    <a:lumMod val="75000"/>
                   </a:schemeClr>
                 </a:solidFill>
+                <a:effectLst>
+                  <a:outerShdw blurRad="50800" dist="38100" dir="2700000" algn="tl" rotWithShape="0">
+                    <a:srgbClr val="000000">
+                      <a:alpha val="43000"/>
+                    </a:srgbClr>
+                  </a:outerShdw>
+                </a:effectLst>
+                <a:latin typeface="+mn-lt"/>
               </a:defRPr>
             </a:lvl1pPr>
           </a:lstStyle>
@@ -2978,13 +5004,7 @@
       </p:sp>
       <p:sp>
         <p:nvSpPr>
-          <p:cNvPr id="6" name="Slide Number Placeholder 5">
-            <a:extLst>
-              <a:ext uri="{FF2B5EF4-FFF2-40B4-BE49-F238E27FC236}">
-                <a16:creationId xmlns:a16="http://schemas.microsoft.com/office/drawing/2014/main" id="{930BB98D-AADC-A70A-4B88-C22E01DC9A6A}"/>
-              </a:ext>
-            </a:extLst>
-          </p:cNvPr>
+          <p:cNvPr id="6" name="Slide Number Placeholder 5"/>
           <p:cNvSpPr>
             <a:spLocks noGrp="1"/>
           </p:cNvSpPr>
@@ -2994,8 +5014,8 @@
         </p:nvSpPr>
         <p:spPr>
           <a:xfrm>
-            <a:off x="8610600" y="6356350"/>
-            <a:ext cx="2743200" cy="365125"/>
+            <a:off x="10514012" y="5883275"/>
+            <a:ext cx="551167" cy="365125"/>
           </a:xfrm>
           <a:prstGeom prst="rect">
             <a:avLst/>
@@ -3005,12 +5025,20 @@
           <a:bodyPr vert="horz" lIns="91440" tIns="45720" rIns="91440" bIns="45720" rtlCol="0" anchor="ctr"/>
           <a:lstStyle>
             <a:lvl1pPr algn="r">
-              <a:defRPr sz="1200">
+              <a:defRPr sz="900" b="1" i="0">
                 <a:solidFill>
                   <a:schemeClr val="tx1">
-                    <a:tint val="82000"/>
+                    <a:lumMod val="75000"/>
                   </a:schemeClr>
                 </a:solidFill>
+                <a:effectLst>
+                  <a:outerShdw blurRad="50800" dist="38100" dir="2700000" algn="tl" rotWithShape="0">
+                    <a:srgbClr val="000000">
+                      <a:alpha val="43000"/>
+                    </a:srgbClr>
+                  </a:outerShdw>
+                </a:effectLst>
+                <a:latin typeface="+mn-lt"/>
               </a:defRPr>
             </a:lvl1pPr>
           </a:lstStyle>
@@ -3026,202 +5054,550 @@
     </p:spTree>
     <p:extLst>
       <p:ext uri="{BB962C8B-B14F-4D97-AF65-F5344CB8AC3E}">
-        <p14:creationId xmlns:p14="http://schemas.microsoft.com/office/powerpoint/2010/main" val="829383902"/>
+        <p14:creationId xmlns:p14="http://schemas.microsoft.com/office/powerpoint/2010/main" val="3806514701"/>
       </p:ext>
     </p:extLst>
   </p:cSld>
-  <p:clrMap bg1="lt1" tx1="dk1" bg2="lt2" tx2="dk2" accent1="accent1" accent2="accent2" accent3="accent3" accent4="accent4" accent5="accent5" accent6="accent6" hlink="hlink" folHlink="folHlink"/>
+  <p:clrMap bg1="dk1" tx1="lt1" bg2="dk2" tx2="lt2" accent1="accent1" accent2="accent2" accent3="accent3" accent4="accent4" accent5="accent5" accent6="accent6" hlink="hlink" folHlink="folHlink"/>
   <p:sldLayoutIdLst>
-    <p:sldLayoutId id="2147483649" r:id="rId1"/>
-    <p:sldLayoutId id="2147483650" r:id="rId2"/>
-    <p:sldLayoutId id="2147483651" r:id="rId3"/>
-    <p:sldLayoutId id="2147483652" r:id="rId4"/>
-    <p:sldLayoutId id="2147483653" r:id="rId5"/>
-    <p:sldLayoutId id="2147483654" r:id="rId6"/>
-    <p:sldLayoutId id="2147483655" r:id="rId7"/>
-    <p:sldLayoutId id="2147483656" r:id="rId8"/>
-    <p:sldLayoutId id="2147483657" r:id="rId9"/>
-    <p:sldLayoutId id="2147483658" r:id="rId10"/>
-    <p:sldLayoutId id="2147483659" r:id="rId11"/>
+    <p:sldLayoutId id="2147483830" r:id="rId1"/>
+    <p:sldLayoutId id="2147483831" r:id="rId2"/>
+    <p:sldLayoutId id="2147483832" r:id="rId3"/>
+    <p:sldLayoutId id="2147483833" r:id="rId4"/>
+    <p:sldLayoutId id="2147483834" r:id="rId5"/>
+    <p:sldLayoutId id="2147483835" r:id="rId6"/>
+    <p:sldLayoutId id="2147483836" r:id="rId7"/>
+    <p:sldLayoutId id="2147483837" r:id="rId8"/>
+    <p:sldLayoutId id="2147483838" r:id="rId9"/>
+    <p:sldLayoutId id="2147483839" r:id="rId10"/>
+    <p:sldLayoutId id="2147483840" r:id="rId11"/>
+    <p:sldLayoutId id="2147483841" r:id="rId12"/>
+    <p:sldLayoutId id="2147483842" r:id="rId13"/>
+    <p:sldLayoutId id="2147483843" r:id="rId14"/>
+    <p:sldLayoutId id="2147483844" r:id="rId15"/>
+    <p:sldLayoutId id="2147483845" r:id="rId16"/>
+    <p:sldLayoutId id="2147483846" r:id="rId17"/>
   </p:sldLayoutIdLst>
   <p:txStyles>
     <p:titleStyle>
-      <a:lvl1pPr algn="l" defTabSz="914400" rtl="0" eaLnBrk="1" latinLnBrk="0" hangingPunct="1">
-        <a:lnSpc>
-          <a:spcPct val="90000"/>
-        </a:lnSpc>
+      <a:lvl1pPr algn="l" defTabSz="457200" rtl="0" eaLnBrk="1" latinLnBrk="0" hangingPunct="1">
         <a:spcBef>
           <a:spcPct val="0"/>
         </a:spcBef>
         <a:buNone/>
-        <a:defRPr sz="4400" kern="1200">
-          <a:solidFill>
-            <a:schemeClr val="tx1"/>
-          </a:solidFill>
+        <a:defRPr sz="3200" kern="1200" cap="all">
+          <a:ln w="3175" cmpd="sng">
+            <a:noFill/>
+          </a:ln>
+          <a:gradFill flip="none" rotWithShape="1">
+            <a:gsLst>
+              <a:gs pos="0">
+                <a:schemeClr val="tx1"/>
+              </a:gs>
+              <a:gs pos="100000">
+                <a:schemeClr val="tx1">
+                  <a:lumMod val="65000"/>
+                </a:schemeClr>
+              </a:gs>
+            </a:gsLst>
+            <a:lin ang="5580000" scaled="0"/>
+            <a:tileRect/>
+          </a:gradFill>
+          <a:effectLst>
+            <a:glow rad="38100">
+              <a:schemeClr val="bg1">
+                <a:lumMod val="65000"/>
+                <a:lumOff val="35000"/>
+                <a:alpha val="40000"/>
+              </a:schemeClr>
+            </a:glow>
+            <a:outerShdw blurRad="28575" dist="38100" dir="14040000" algn="tl" rotWithShape="0">
+              <a:srgbClr val="000000">
+                <a:alpha val="25000"/>
+              </a:srgbClr>
+            </a:outerShdw>
+          </a:effectLst>
           <a:latin typeface="+mj-lt"/>
           <a:ea typeface="+mj-ea"/>
           <a:cs typeface="+mj-cs"/>
         </a:defRPr>
       </a:lvl1pPr>
+      <a:lvl2pPr eaLnBrk="1" hangingPunct="1">
+        <a:defRPr>
+          <a:solidFill>
+            <a:schemeClr val="tx2"/>
+          </a:solidFill>
+        </a:defRPr>
+      </a:lvl2pPr>
+      <a:lvl3pPr eaLnBrk="1" hangingPunct="1">
+        <a:defRPr>
+          <a:solidFill>
+            <a:schemeClr val="tx2"/>
+          </a:solidFill>
+        </a:defRPr>
+      </a:lvl3pPr>
+      <a:lvl4pPr eaLnBrk="1" hangingPunct="1">
+        <a:defRPr>
+          <a:solidFill>
+            <a:schemeClr val="tx2"/>
+          </a:solidFill>
+        </a:defRPr>
+      </a:lvl4pPr>
+      <a:lvl5pPr eaLnBrk="1" hangingPunct="1">
+        <a:defRPr>
+          <a:solidFill>
+            <a:schemeClr val="tx2"/>
+          </a:solidFill>
+        </a:defRPr>
+      </a:lvl5pPr>
+      <a:lvl6pPr eaLnBrk="1" hangingPunct="1">
+        <a:defRPr>
+          <a:solidFill>
+            <a:schemeClr val="tx2"/>
+          </a:solidFill>
+        </a:defRPr>
+      </a:lvl6pPr>
+      <a:lvl7pPr eaLnBrk="1" hangingPunct="1">
+        <a:defRPr>
+          <a:solidFill>
+            <a:schemeClr val="tx2"/>
+          </a:solidFill>
+        </a:defRPr>
+      </a:lvl7pPr>
+      <a:lvl8pPr eaLnBrk="1" hangingPunct="1">
+        <a:defRPr>
+          <a:solidFill>
+            <a:schemeClr val="tx2"/>
+          </a:solidFill>
+        </a:defRPr>
+      </a:lvl8pPr>
+      <a:lvl9pPr eaLnBrk="1" hangingPunct="1">
+        <a:defRPr>
+          <a:solidFill>
+            <a:schemeClr val="tx2"/>
+          </a:solidFill>
+        </a:defRPr>
+      </a:lvl9pPr>
     </p:titleStyle>
     <p:bodyStyle>
-      <a:lvl1pPr marL="228600" indent="-228600" algn="l" defTabSz="914400" rtl="0" eaLnBrk="1" latinLnBrk="0" hangingPunct="1">
-        <a:lnSpc>
-          <a:spcPct val="90000"/>
-        </a:lnSpc>
+      <a:lvl1pPr marL="285750" indent="-285750" algn="l" defTabSz="457200" rtl="0" eaLnBrk="1" latinLnBrk="0" hangingPunct="1">
         <a:spcBef>
-          <a:spcPts val="1000"/>
+          <a:spcPct val="20000"/>
         </a:spcBef>
-        <a:buFont typeface="Arial" panose="020B0604020202020204" pitchFamily="34" charset="0"/>
+        <a:spcAft>
+          <a:spcPts val="600"/>
+        </a:spcAft>
+        <a:buClr>
+          <a:schemeClr val="tx1"/>
+        </a:buClr>
+        <a:buSzPct val="100000"/>
+        <a:buFont typeface="Arial"/>
         <a:buChar char="•"/>
-        <a:defRPr sz="2800" kern="1200">
-          <a:solidFill>
-            <a:schemeClr val="tx1"/>
-          </a:solidFill>
+        <a:defRPr sz="2000" kern="1200" cap="small">
+          <a:gradFill flip="none" rotWithShape="1">
+            <a:gsLst>
+              <a:gs pos="0">
+                <a:schemeClr val="tx1"/>
+              </a:gs>
+              <a:gs pos="100000">
+                <a:schemeClr val="tx1">
+                  <a:lumMod val="75000"/>
+                </a:schemeClr>
+              </a:gs>
+            </a:gsLst>
+            <a:lin ang="5580000" scaled="0"/>
+            <a:tileRect/>
+          </a:gradFill>
+          <a:effectLst>
+            <a:glow rad="38100">
+              <a:schemeClr val="bg1">
+                <a:lumMod val="50000"/>
+                <a:lumOff val="50000"/>
+                <a:alpha val="20000"/>
+              </a:schemeClr>
+            </a:glow>
+            <a:outerShdw blurRad="44450" dist="12700" dir="13860000" algn="tl" rotWithShape="0">
+              <a:srgbClr val="000000">
+                <a:alpha val="20000"/>
+              </a:srgbClr>
+            </a:outerShdw>
+          </a:effectLst>
           <a:latin typeface="+mn-lt"/>
           <a:ea typeface="+mn-ea"/>
           <a:cs typeface="+mn-cs"/>
         </a:defRPr>
       </a:lvl1pPr>
-      <a:lvl2pPr marL="685800" indent="-228600" algn="l" defTabSz="914400" rtl="0" eaLnBrk="1" latinLnBrk="0" hangingPunct="1">
-        <a:lnSpc>
-          <a:spcPct val="90000"/>
-        </a:lnSpc>
+      <a:lvl2pPr marL="742950" indent="-285750" algn="l" defTabSz="457200" rtl="0" eaLnBrk="1" latinLnBrk="0" hangingPunct="1">
         <a:spcBef>
-          <a:spcPts val="500"/>
+          <a:spcPct val="20000"/>
         </a:spcBef>
-        <a:buFont typeface="Arial" panose="020B0604020202020204" pitchFamily="34" charset="0"/>
+        <a:spcAft>
+          <a:spcPts val="600"/>
+        </a:spcAft>
+        <a:buClr>
+          <a:schemeClr val="tx1"/>
+        </a:buClr>
+        <a:buSzPct val="100000"/>
+        <a:buFont typeface="Arial"/>
         <a:buChar char="•"/>
-        <a:defRPr sz="2400" kern="1200">
-          <a:solidFill>
-            <a:schemeClr val="tx1"/>
-          </a:solidFill>
+        <a:defRPr sz="1800" kern="1200" cap="small">
+          <a:gradFill flip="none" rotWithShape="1">
+            <a:gsLst>
+              <a:gs pos="0">
+                <a:schemeClr val="tx1"/>
+              </a:gs>
+              <a:gs pos="100000">
+                <a:schemeClr val="tx1">
+                  <a:lumMod val="75000"/>
+                </a:schemeClr>
+              </a:gs>
+            </a:gsLst>
+            <a:lin ang="5580000" scaled="0"/>
+            <a:tileRect/>
+          </a:gradFill>
+          <a:effectLst>
+            <a:glow rad="38100">
+              <a:schemeClr val="bg1">
+                <a:lumMod val="50000"/>
+                <a:lumOff val="50000"/>
+                <a:alpha val="20000"/>
+              </a:schemeClr>
+            </a:glow>
+            <a:outerShdw blurRad="44450" dist="12700" dir="13860000" algn="tl" rotWithShape="0">
+              <a:srgbClr val="000000">
+                <a:alpha val="20000"/>
+              </a:srgbClr>
+            </a:outerShdw>
+          </a:effectLst>
           <a:latin typeface="+mn-lt"/>
           <a:ea typeface="+mn-ea"/>
           <a:cs typeface="+mn-cs"/>
         </a:defRPr>
       </a:lvl2pPr>
-      <a:lvl3pPr marL="1143000" indent="-228600" algn="l" defTabSz="914400" rtl="0" eaLnBrk="1" latinLnBrk="0" hangingPunct="1">
-        <a:lnSpc>
-          <a:spcPct val="90000"/>
-        </a:lnSpc>
+      <a:lvl3pPr marL="1200150" indent="-285750" algn="l" defTabSz="457200" rtl="0" eaLnBrk="1" latinLnBrk="0" hangingPunct="1">
         <a:spcBef>
-          <a:spcPts val="500"/>
+          <a:spcPct val="20000"/>
         </a:spcBef>
-        <a:buFont typeface="Arial" panose="020B0604020202020204" pitchFamily="34" charset="0"/>
+        <a:spcAft>
+          <a:spcPts val="600"/>
+        </a:spcAft>
+        <a:buClr>
+          <a:schemeClr val="tx1"/>
+        </a:buClr>
+        <a:buSzPct val="100000"/>
+        <a:buFont typeface="Arial"/>
         <a:buChar char="•"/>
-        <a:defRPr sz="2000" kern="1200">
-          <a:solidFill>
-            <a:schemeClr val="tx1"/>
-          </a:solidFill>
+        <a:defRPr sz="1600" kern="1200" cap="small">
+          <a:gradFill flip="none" rotWithShape="1">
+            <a:gsLst>
+              <a:gs pos="0">
+                <a:schemeClr val="tx1"/>
+              </a:gs>
+              <a:gs pos="100000">
+                <a:schemeClr val="tx1">
+                  <a:lumMod val="75000"/>
+                </a:schemeClr>
+              </a:gs>
+            </a:gsLst>
+            <a:lin ang="5580000" scaled="0"/>
+            <a:tileRect/>
+          </a:gradFill>
+          <a:effectLst>
+            <a:glow rad="38100">
+              <a:schemeClr val="bg1">
+                <a:lumMod val="50000"/>
+                <a:lumOff val="50000"/>
+                <a:alpha val="20000"/>
+              </a:schemeClr>
+            </a:glow>
+            <a:outerShdw blurRad="44450" dist="12700" dir="13860000" algn="tl" rotWithShape="0">
+              <a:srgbClr val="000000">
+                <a:alpha val="20000"/>
+              </a:srgbClr>
+            </a:outerShdw>
+          </a:effectLst>
           <a:latin typeface="+mn-lt"/>
           <a:ea typeface="+mn-ea"/>
           <a:cs typeface="+mn-cs"/>
         </a:defRPr>
       </a:lvl3pPr>
-      <a:lvl4pPr marL="1600200" indent="-228600" algn="l" defTabSz="914400" rtl="0" eaLnBrk="1" latinLnBrk="0" hangingPunct="1">
-        <a:lnSpc>
-          <a:spcPct val="90000"/>
-        </a:lnSpc>
+      <a:lvl4pPr marL="1543050" indent="-171450" algn="l" defTabSz="457200" rtl="0" eaLnBrk="1" latinLnBrk="0" hangingPunct="1">
         <a:spcBef>
-          <a:spcPts val="500"/>
+          <a:spcPct val="20000"/>
         </a:spcBef>
-        <a:buFont typeface="Arial" panose="020B0604020202020204" pitchFamily="34" charset="0"/>
+        <a:spcAft>
+          <a:spcPts val="600"/>
+        </a:spcAft>
+        <a:buClr>
+          <a:schemeClr val="tx1"/>
+        </a:buClr>
+        <a:buSzPct val="100000"/>
+        <a:buFont typeface="Arial"/>
         <a:buChar char="•"/>
-        <a:defRPr sz="1800" kern="1200">
-          <a:solidFill>
-            <a:schemeClr val="tx1"/>
-          </a:solidFill>
+        <a:defRPr sz="1400" kern="1200" cap="small">
+          <a:gradFill flip="none" rotWithShape="1">
+            <a:gsLst>
+              <a:gs pos="0">
+                <a:schemeClr val="tx1"/>
+              </a:gs>
+              <a:gs pos="100000">
+                <a:schemeClr val="tx1">
+                  <a:lumMod val="75000"/>
+                </a:schemeClr>
+              </a:gs>
+            </a:gsLst>
+            <a:lin ang="5580000" scaled="0"/>
+            <a:tileRect/>
+          </a:gradFill>
+          <a:effectLst>
+            <a:glow rad="38100">
+              <a:schemeClr val="bg1">
+                <a:lumMod val="50000"/>
+                <a:lumOff val="50000"/>
+                <a:alpha val="20000"/>
+              </a:schemeClr>
+            </a:glow>
+            <a:outerShdw blurRad="44450" dist="12700" dir="13860000" algn="tl" rotWithShape="0">
+              <a:srgbClr val="000000">
+                <a:alpha val="20000"/>
+              </a:srgbClr>
+            </a:outerShdw>
+          </a:effectLst>
           <a:latin typeface="+mn-lt"/>
           <a:ea typeface="+mn-ea"/>
           <a:cs typeface="+mn-cs"/>
         </a:defRPr>
       </a:lvl4pPr>
-      <a:lvl5pPr marL="2057400" indent="-228600" algn="l" defTabSz="914400" rtl="0" eaLnBrk="1" latinLnBrk="0" hangingPunct="1">
-        <a:lnSpc>
-          <a:spcPct val="90000"/>
-        </a:lnSpc>
+      <a:lvl5pPr marL="2000250" indent="-171450" algn="l" defTabSz="457200" rtl="0" eaLnBrk="1" latinLnBrk="0" hangingPunct="1">
         <a:spcBef>
-          <a:spcPts val="500"/>
+          <a:spcPct val="20000"/>
         </a:spcBef>
-        <a:buFont typeface="Arial" panose="020B0604020202020204" pitchFamily="34" charset="0"/>
+        <a:spcAft>
+          <a:spcPts val="600"/>
+        </a:spcAft>
+        <a:buClr>
+          <a:schemeClr val="tx1"/>
+        </a:buClr>
+        <a:buSzPct val="100000"/>
+        <a:buFont typeface="Arial"/>
         <a:buChar char="•"/>
-        <a:defRPr sz="1800" kern="1200">
-          <a:solidFill>
-            <a:schemeClr val="tx1"/>
-          </a:solidFill>
+        <a:defRPr sz="1400" kern="1200" cap="small">
+          <a:gradFill flip="none" rotWithShape="1">
+            <a:gsLst>
+              <a:gs pos="0">
+                <a:schemeClr val="tx1"/>
+              </a:gs>
+              <a:gs pos="100000">
+                <a:schemeClr val="tx1">
+                  <a:lumMod val="75000"/>
+                </a:schemeClr>
+              </a:gs>
+            </a:gsLst>
+            <a:lin ang="5580000" scaled="0"/>
+            <a:tileRect/>
+          </a:gradFill>
+          <a:effectLst>
+            <a:glow rad="38100">
+              <a:schemeClr val="bg1">
+                <a:lumMod val="50000"/>
+                <a:lumOff val="50000"/>
+                <a:alpha val="20000"/>
+              </a:schemeClr>
+            </a:glow>
+            <a:outerShdw blurRad="44450" dist="12700" dir="13860000" algn="tl" rotWithShape="0">
+              <a:srgbClr val="000000">
+                <a:alpha val="20000"/>
+              </a:srgbClr>
+            </a:outerShdw>
+          </a:effectLst>
           <a:latin typeface="+mn-lt"/>
           <a:ea typeface="+mn-ea"/>
           <a:cs typeface="+mn-cs"/>
         </a:defRPr>
       </a:lvl5pPr>
-      <a:lvl6pPr marL="2514600" indent="-228600" algn="l" defTabSz="914400" rtl="0" eaLnBrk="1" latinLnBrk="0" hangingPunct="1">
-        <a:lnSpc>
-          <a:spcPct val="90000"/>
-        </a:lnSpc>
+      <a:lvl6pPr marL="2514600" indent="-228600" algn="l" defTabSz="457200" rtl="0" eaLnBrk="1" latinLnBrk="0" hangingPunct="1">
         <a:spcBef>
-          <a:spcPts val="500"/>
+          <a:spcPct val="20000"/>
         </a:spcBef>
-        <a:buFont typeface="Arial" panose="020B0604020202020204" pitchFamily="34" charset="0"/>
+        <a:spcAft>
+          <a:spcPts val="600"/>
+        </a:spcAft>
+        <a:buClr>
+          <a:schemeClr val="tx1"/>
+        </a:buClr>
+        <a:buSzPct val="100000"/>
+        <a:buFont typeface="Arial"/>
         <a:buChar char="•"/>
-        <a:defRPr sz="1800" kern="1200">
-          <a:solidFill>
-            <a:schemeClr val="tx1"/>
-          </a:solidFill>
+        <a:defRPr sz="1200" kern="1200" cap="small">
+          <a:gradFill flip="none" rotWithShape="1">
+            <a:gsLst>
+              <a:gs pos="0">
+                <a:schemeClr val="tx1"/>
+              </a:gs>
+              <a:gs pos="100000">
+                <a:schemeClr val="tx1">
+                  <a:lumMod val="75000"/>
+                </a:schemeClr>
+              </a:gs>
+            </a:gsLst>
+            <a:lin ang="5580000" scaled="0"/>
+            <a:tileRect/>
+          </a:gradFill>
+          <a:effectLst>
+            <a:glow rad="38100">
+              <a:schemeClr val="bg1">
+                <a:lumMod val="50000"/>
+                <a:lumOff val="50000"/>
+                <a:alpha val="20000"/>
+              </a:schemeClr>
+            </a:glow>
+            <a:outerShdw blurRad="44450" dist="12700" dir="13860000" algn="tl" rotWithShape="0">
+              <a:srgbClr val="000000">
+                <a:alpha val="20000"/>
+              </a:srgbClr>
+            </a:outerShdw>
+          </a:effectLst>
           <a:latin typeface="+mn-lt"/>
           <a:ea typeface="+mn-ea"/>
           <a:cs typeface="+mn-cs"/>
         </a:defRPr>
       </a:lvl6pPr>
-      <a:lvl7pPr marL="2971800" indent="-228600" algn="l" defTabSz="914400" rtl="0" eaLnBrk="1" latinLnBrk="0" hangingPunct="1">
-        <a:lnSpc>
-          <a:spcPct val="90000"/>
-        </a:lnSpc>
+      <a:lvl7pPr marL="2971800" indent="-228600" algn="l" defTabSz="457200" rtl="0" eaLnBrk="1" latinLnBrk="0" hangingPunct="1">
         <a:spcBef>
-          <a:spcPts val="500"/>
+          <a:spcPct val="20000"/>
         </a:spcBef>
-        <a:buFont typeface="Arial" panose="020B0604020202020204" pitchFamily="34" charset="0"/>
+        <a:spcAft>
+          <a:spcPts val="600"/>
+        </a:spcAft>
+        <a:buClr>
+          <a:schemeClr val="tx1"/>
+        </a:buClr>
+        <a:buSzPct val="100000"/>
+        <a:buFont typeface="Arial"/>
         <a:buChar char="•"/>
-        <a:defRPr sz="1800" kern="1200">
-          <a:solidFill>
-            <a:schemeClr val="tx1"/>
-          </a:solidFill>
+        <a:defRPr sz="1200" kern="1200" cap="small">
+          <a:gradFill flip="none" rotWithShape="1">
+            <a:gsLst>
+              <a:gs pos="0">
+                <a:schemeClr val="tx1"/>
+              </a:gs>
+              <a:gs pos="100000">
+                <a:schemeClr val="tx1">
+                  <a:lumMod val="75000"/>
+                </a:schemeClr>
+              </a:gs>
+            </a:gsLst>
+            <a:lin ang="5580000" scaled="0"/>
+            <a:tileRect/>
+          </a:gradFill>
+          <a:effectLst>
+            <a:glow rad="38100">
+              <a:schemeClr val="bg1">
+                <a:lumMod val="50000"/>
+                <a:lumOff val="50000"/>
+                <a:alpha val="20000"/>
+              </a:schemeClr>
+            </a:glow>
+            <a:outerShdw blurRad="44450" dist="12700" dir="13860000" algn="tl" rotWithShape="0">
+              <a:srgbClr val="000000">
+                <a:alpha val="20000"/>
+              </a:srgbClr>
+            </a:outerShdw>
+          </a:effectLst>
           <a:latin typeface="+mn-lt"/>
           <a:ea typeface="+mn-ea"/>
           <a:cs typeface="+mn-cs"/>
         </a:defRPr>
       </a:lvl7pPr>
-      <a:lvl8pPr marL="3429000" indent="-228600" algn="l" defTabSz="914400" rtl="0" eaLnBrk="1" latinLnBrk="0" hangingPunct="1">
-        <a:lnSpc>
-          <a:spcPct val="90000"/>
-        </a:lnSpc>
+      <a:lvl8pPr marL="3429000" indent="-228600" algn="l" defTabSz="457200" rtl="0" eaLnBrk="1" latinLnBrk="0" hangingPunct="1">
         <a:spcBef>
-          <a:spcPts val="500"/>
+          <a:spcPct val="20000"/>
         </a:spcBef>
-        <a:buFont typeface="Arial" panose="020B0604020202020204" pitchFamily="34" charset="0"/>
+        <a:spcAft>
+          <a:spcPts val="600"/>
+        </a:spcAft>
+        <a:buClr>
+          <a:schemeClr val="tx1"/>
+        </a:buClr>
+        <a:buSzPct val="100000"/>
+        <a:buFont typeface="Arial"/>
         <a:buChar char="•"/>
-        <a:defRPr sz="1800" kern="1200">
-          <a:solidFill>
-            <a:schemeClr val="tx1"/>
-          </a:solidFill>
+        <a:defRPr sz="1200" kern="1200" cap="small">
+          <a:gradFill flip="none" rotWithShape="1">
+            <a:gsLst>
+              <a:gs pos="0">
+                <a:schemeClr val="tx1"/>
+              </a:gs>
+              <a:gs pos="100000">
+                <a:schemeClr val="tx1">
+                  <a:lumMod val="75000"/>
+                </a:schemeClr>
+              </a:gs>
+            </a:gsLst>
+            <a:lin ang="5580000" scaled="0"/>
+            <a:tileRect/>
+          </a:gradFill>
+          <a:effectLst>
+            <a:glow rad="38100">
+              <a:schemeClr val="bg1">
+                <a:lumMod val="50000"/>
+                <a:lumOff val="50000"/>
+                <a:alpha val="20000"/>
+              </a:schemeClr>
+            </a:glow>
+            <a:outerShdw blurRad="44450" dist="12700" dir="13860000" algn="tl" rotWithShape="0">
+              <a:srgbClr val="000000">
+                <a:alpha val="20000"/>
+              </a:srgbClr>
+            </a:outerShdw>
+          </a:effectLst>
           <a:latin typeface="+mn-lt"/>
           <a:ea typeface="+mn-ea"/>
           <a:cs typeface="+mn-cs"/>
         </a:defRPr>
       </a:lvl8pPr>
-      <a:lvl9pPr marL="3886200" indent="-228600" algn="l" defTabSz="914400" rtl="0" eaLnBrk="1" latinLnBrk="0" hangingPunct="1">
-        <a:lnSpc>
-          <a:spcPct val="90000"/>
-        </a:lnSpc>
+      <a:lvl9pPr marL="3886200" indent="-228600" algn="l" defTabSz="457200" rtl="0" eaLnBrk="1" latinLnBrk="0" hangingPunct="1">
         <a:spcBef>
-          <a:spcPts val="500"/>
+          <a:spcPct val="20000"/>
         </a:spcBef>
-        <a:buFont typeface="Arial" panose="020B0604020202020204" pitchFamily="34" charset="0"/>
+        <a:spcAft>
+          <a:spcPts val="600"/>
+        </a:spcAft>
+        <a:buClr>
+          <a:schemeClr val="tx1"/>
+        </a:buClr>
+        <a:buSzPct val="100000"/>
+        <a:buFont typeface="Arial"/>
         <a:buChar char="•"/>
-        <a:defRPr sz="1800" kern="1200">
-          <a:solidFill>
-            <a:schemeClr val="tx1"/>
-          </a:solidFill>
+        <a:defRPr sz="1200" kern="1200" cap="small">
+          <a:gradFill flip="none" rotWithShape="1">
+            <a:gsLst>
+              <a:gs pos="0">
+                <a:schemeClr val="tx1"/>
+              </a:gs>
+              <a:gs pos="100000">
+                <a:schemeClr val="tx1">
+                  <a:lumMod val="75000"/>
+                </a:schemeClr>
+              </a:gs>
+            </a:gsLst>
+            <a:lin ang="5580000" scaled="0"/>
+            <a:tileRect/>
+          </a:gradFill>
+          <a:effectLst>
+            <a:glow rad="38100">
+              <a:schemeClr val="bg1">
+                <a:lumMod val="50000"/>
+                <a:lumOff val="50000"/>
+                <a:alpha val="20000"/>
+              </a:schemeClr>
+            </a:glow>
+            <a:outerShdw blurRad="44450" dist="12700" dir="13860000" algn="tl" rotWithShape="0">
+              <a:srgbClr val="000000">
+                <a:alpha val="20000"/>
+              </a:srgbClr>
+            </a:outerShdw>
+          </a:effectLst>
           <a:latin typeface="+mn-lt"/>
           <a:ea typeface="+mn-ea"/>
           <a:cs typeface="+mn-cs"/>
@@ -3232,7 +5608,7 @@
       <a:defPPr>
         <a:defRPr lang="en-US"/>
       </a:defPPr>
-      <a:lvl1pPr marL="0" algn="l" defTabSz="914400" rtl="0" eaLnBrk="1" latinLnBrk="0" hangingPunct="1">
+      <a:lvl1pPr marL="0" algn="l" defTabSz="457200" rtl="0" eaLnBrk="1" latinLnBrk="0" hangingPunct="1">
         <a:defRPr sz="1800" kern="1200">
           <a:solidFill>
             <a:schemeClr val="tx1"/>
@@ -3242,7 +5618,7 @@
           <a:cs typeface="+mn-cs"/>
         </a:defRPr>
       </a:lvl1pPr>
-      <a:lvl2pPr marL="457200" algn="l" defTabSz="914400" rtl="0" eaLnBrk="1" latinLnBrk="0" hangingPunct="1">
+      <a:lvl2pPr marL="457200" algn="l" defTabSz="457200" rtl="0" eaLnBrk="1" latinLnBrk="0" hangingPunct="1">
         <a:defRPr sz="1800" kern="1200">
           <a:solidFill>
             <a:schemeClr val="tx1"/>
@@ -3252,7 +5628,7 @@
           <a:cs typeface="+mn-cs"/>
         </a:defRPr>
       </a:lvl2pPr>
-      <a:lvl3pPr marL="914400" algn="l" defTabSz="914400" rtl="0" eaLnBrk="1" latinLnBrk="0" hangingPunct="1">
+      <a:lvl3pPr marL="914400" algn="l" defTabSz="457200" rtl="0" eaLnBrk="1" latinLnBrk="0" hangingPunct="1">
         <a:defRPr sz="1800" kern="1200">
           <a:solidFill>
             <a:schemeClr val="tx1"/>
@@ -3262,7 +5638,7 @@
           <a:cs typeface="+mn-cs"/>
         </a:defRPr>
       </a:lvl3pPr>
-      <a:lvl4pPr marL="1371600" algn="l" defTabSz="914400" rtl="0" eaLnBrk="1" latinLnBrk="0" hangingPunct="1">
+      <a:lvl4pPr marL="1371600" algn="l" defTabSz="457200" rtl="0" eaLnBrk="1" latinLnBrk="0" hangingPunct="1">
         <a:defRPr sz="1800" kern="1200">
           <a:solidFill>
             <a:schemeClr val="tx1"/>
@@ -3272,7 +5648,7 @@
           <a:cs typeface="+mn-cs"/>
         </a:defRPr>
       </a:lvl4pPr>
-      <a:lvl5pPr marL="1828800" algn="l" defTabSz="914400" rtl="0" eaLnBrk="1" latinLnBrk="0" hangingPunct="1">
+      <a:lvl5pPr marL="1828800" algn="l" defTabSz="457200" rtl="0" eaLnBrk="1" latinLnBrk="0" hangingPunct="1">
         <a:defRPr sz="1800" kern="1200">
           <a:solidFill>
             <a:schemeClr val="tx1"/>
@@ -3282,7 +5658,7 @@
           <a:cs typeface="+mn-cs"/>
         </a:defRPr>
       </a:lvl5pPr>
-      <a:lvl6pPr marL="2286000" algn="l" defTabSz="914400" rtl="0" eaLnBrk="1" latinLnBrk="0" hangingPunct="1">
+      <a:lvl6pPr marL="2286000" algn="l" defTabSz="457200" rtl="0" eaLnBrk="1" latinLnBrk="0" hangingPunct="1">
         <a:defRPr sz="1800" kern="1200">
           <a:solidFill>
             <a:schemeClr val="tx1"/>
@@ -3292,7 +5668,7 @@
           <a:cs typeface="+mn-cs"/>
         </a:defRPr>
       </a:lvl6pPr>
-      <a:lvl7pPr marL="2743200" algn="l" defTabSz="914400" rtl="0" eaLnBrk="1" latinLnBrk="0" hangingPunct="1">
+      <a:lvl7pPr marL="2743200" algn="l" defTabSz="457200" rtl="0" eaLnBrk="1" latinLnBrk="0" hangingPunct="1">
         <a:defRPr sz="1800" kern="1200">
           <a:solidFill>
             <a:schemeClr val="tx1"/>
@@ -3302,7 +5678,7 @@
           <a:cs typeface="+mn-cs"/>
         </a:defRPr>
       </a:lvl7pPr>
-      <a:lvl8pPr marL="3200400" algn="l" defTabSz="914400" rtl="0" eaLnBrk="1" latinLnBrk="0" hangingPunct="1">
+      <a:lvl8pPr marL="3200400" algn="l" defTabSz="457200" rtl="0" eaLnBrk="1" latinLnBrk="0" hangingPunct="1">
         <a:defRPr sz="1800" kern="1200">
           <a:solidFill>
             <a:schemeClr val="tx1"/>
@@ -3312,7 +5688,7 @@
           <a:cs typeface="+mn-cs"/>
         </a:defRPr>
       </a:lvl8pPr>
-      <a:lvl9pPr marL="3657600" algn="l" defTabSz="914400" rtl="0" eaLnBrk="1" latinLnBrk="0" hangingPunct="1">
+      <a:lvl9pPr marL="3657600" algn="l" defTabSz="457200" rtl="0" eaLnBrk="1" latinLnBrk="0" hangingPunct="1">
         <a:defRPr sz="1800" kern="1200">
           <a:solidFill>
             <a:schemeClr val="tx1"/>
@@ -3740,10 +6116,10 @@
       </p:sp>
       <p:sp>
         <p:nvSpPr>
-          <p:cNvPr id="5" name="Content Placeholder 2">
+          <p:cNvPr id="6" name="Content Placeholder 2">
             <a:extLst>
               <a:ext uri="{FF2B5EF4-FFF2-40B4-BE49-F238E27FC236}">
-                <a16:creationId xmlns:a16="http://schemas.microsoft.com/office/drawing/2014/main" id="{153DE474-E8C2-A93F-286D-FED40C09D3E7}"/>
+                <a16:creationId xmlns:a16="http://schemas.microsoft.com/office/drawing/2014/main" id="{CC5D4FF4-A618-5E10-80E1-E6C66AE9138F}"/>
               </a:ext>
             </a:extLst>
           </p:cNvPr>
@@ -3754,7 +6130,7 @@
         </p:nvSpPr>
         <p:spPr>
           <a:xfrm>
-            <a:off x="6164345" y="1825625"/>
+            <a:off x="5862687" y="1648790"/>
             <a:ext cx="4421957" cy="4351338"/>
           </a:xfrm>
           <a:prstGeom prst="rect">
@@ -3762,167 +6138,428 @@
           </a:prstGeom>
         </p:spPr>
         <p:txBody>
-          <a:bodyPr vert="horz" lIns="91440" tIns="45720" rIns="91440" bIns="45720" rtlCol="0">
+          <a:bodyPr vert="horz" lIns="91440" tIns="45720" rIns="91440" bIns="45720" rtlCol="0" anchor="ctr">
             <a:normAutofit/>
           </a:bodyPr>
           <a:lstStyle>
-            <a:lvl1pPr marL="228600" indent="-228600" algn="l" defTabSz="914400" rtl="0" eaLnBrk="1" latinLnBrk="0" hangingPunct="1">
-              <a:lnSpc>
-                <a:spcPct val="90000"/>
-              </a:lnSpc>
+            <a:lvl1pPr marL="285750" indent="-285750" algn="l" defTabSz="457200" rtl="0" eaLnBrk="1" latinLnBrk="0" hangingPunct="1">
               <a:spcBef>
-                <a:spcPts val="1000"/>
+                <a:spcPct val="20000"/>
               </a:spcBef>
-              <a:buFont typeface="Arial" panose="020B0604020202020204" pitchFamily="34" charset="0"/>
+              <a:spcAft>
+                <a:spcPts val="600"/>
+              </a:spcAft>
+              <a:buClr>
+                <a:schemeClr val="tx1"/>
+              </a:buClr>
+              <a:buSzPct val="100000"/>
+              <a:buFont typeface="Arial"/>
               <a:buChar char="•"/>
-              <a:defRPr sz="2800" kern="1200">
-                <a:solidFill>
-                  <a:schemeClr val="tx1"/>
-                </a:solidFill>
+              <a:defRPr sz="2000" kern="1200" cap="small">
+                <a:gradFill flip="none" rotWithShape="1">
+                  <a:gsLst>
+                    <a:gs pos="0">
+                      <a:schemeClr val="tx1"/>
+                    </a:gs>
+                    <a:gs pos="100000">
+                      <a:schemeClr val="tx1">
+                        <a:lumMod val="75000"/>
+                      </a:schemeClr>
+                    </a:gs>
+                  </a:gsLst>
+                  <a:lin ang="5580000" scaled="0"/>
+                  <a:tileRect/>
+                </a:gradFill>
+                <a:effectLst>
+                  <a:glow rad="38100">
+                    <a:schemeClr val="bg1">
+                      <a:lumMod val="50000"/>
+                      <a:lumOff val="50000"/>
+                      <a:alpha val="20000"/>
+                    </a:schemeClr>
+                  </a:glow>
+                  <a:outerShdw blurRad="44450" dist="12700" dir="13860000" algn="tl" rotWithShape="0">
+                    <a:srgbClr val="000000">
+                      <a:alpha val="20000"/>
+                    </a:srgbClr>
+                  </a:outerShdw>
+                </a:effectLst>
                 <a:latin typeface="+mn-lt"/>
                 <a:ea typeface="+mn-ea"/>
                 <a:cs typeface="+mn-cs"/>
               </a:defRPr>
             </a:lvl1pPr>
-            <a:lvl2pPr marL="685800" indent="-228600" algn="l" defTabSz="914400" rtl="0" eaLnBrk="1" latinLnBrk="0" hangingPunct="1">
-              <a:lnSpc>
-                <a:spcPct val="90000"/>
-              </a:lnSpc>
+            <a:lvl2pPr marL="742950" indent="-285750" algn="l" defTabSz="457200" rtl="0" eaLnBrk="1" latinLnBrk="0" hangingPunct="1">
               <a:spcBef>
-                <a:spcPts val="500"/>
+                <a:spcPct val="20000"/>
               </a:spcBef>
-              <a:buFont typeface="Arial" panose="020B0604020202020204" pitchFamily="34" charset="0"/>
+              <a:spcAft>
+                <a:spcPts val="600"/>
+              </a:spcAft>
+              <a:buClr>
+                <a:schemeClr val="tx1"/>
+              </a:buClr>
+              <a:buSzPct val="100000"/>
+              <a:buFont typeface="Arial"/>
               <a:buChar char="•"/>
-              <a:defRPr sz="2400" kern="1200">
-                <a:solidFill>
-                  <a:schemeClr val="tx1"/>
-                </a:solidFill>
+              <a:defRPr sz="1800" kern="1200" cap="small">
+                <a:gradFill flip="none" rotWithShape="1">
+                  <a:gsLst>
+                    <a:gs pos="0">
+                      <a:schemeClr val="tx1"/>
+                    </a:gs>
+                    <a:gs pos="100000">
+                      <a:schemeClr val="tx1">
+                        <a:lumMod val="75000"/>
+                      </a:schemeClr>
+                    </a:gs>
+                  </a:gsLst>
+                  <a:lin ang="5580000" scaled="0"/>
+                  <a:tileRect/>
+                </a:gradFill>
+                <a:effectLst>
+                  <a:glow rad="38100">
+                    <a:schemeClr val="bg1">
+                      <a:lumMod val="50000"/>
+                      <a:lumOff val="50000"/>
+                      <a:alpha val="20000"/>
+                    </a:schemeClr>
+                  </a:glow>
+                  <a:outerShdw blurRad="44450" dist="12700" dir="13860000" algn="tl" rotWithShape="0">
+                    <a:srgbClr val="000000">
+                      <a:alpha val="20000"/>
+                    </a:srgbClr>
+                  </a:outerShdw>
+                </a:effectLst>
                 <a:latin typeface="+mn-lt"/>
                 <a:ea typeface="+mn-ea"/>
                 <a:cs typeface="+mn-cs"/>
               </a:defRPr>
             </a:lvl2pPr>
-            <a:lvl3pPr marL="1143000" indent="-228600" algn="l" defTabSz="914400" rtl="0" eaLnBrk="1" latinLnBrk="0" hangingPunct="1">
-              <a:lnSpc>
-                <a:spcPct val="90000"/>
-              </a:lnSpc>
+            <a:lvl3pPr marL="1200150" indent="-285750" algn="l" defTabSz="457200" rtl="0" eaLnBrk="1" latinLnBrk="0" hangingPunct="1">
               <a:spcBef>
-                <a:spcPts val="500"/>
+                <a:spcPct val="20000"/>
               </a:spcBef>
-              <a:buFont typeface="Arial" panose="020B0604020202020204" pitchFamily="34" charset="0"/>
+              <a:spcAft>
+                <a:spcPts val="600"/>
+              </a:spcAft>
+              <a:buClr>
+                <a:schemeClr val="tx1"/>
+              </a:buClr>
+              <a:buSzPct val="100000"/>
+              <a:buFont typeface="Arial"/>
               <a:buChar char="•"/>
-              <a:defRPr sz="2000" kern="1200">
-                <a:solidFill>
-                  <a:schemeClr val="tx1"/>
-                </a:solidFill>
+              <a:defRPr sz="1600" kern="1200" cap="small">
+                <a:gradFill flip="none" rotWithShape="1">
+                  <a:gsLst>
+                    <a:gs pos="0">
+                      <a:schemeClr val="tx1"/>
+                    </a:gs>
+                    <a:gs pos="100000">
+                      <a:schemeClr val="tx1">
+                        <a:lumMod val="75000"/>
+                      </a:schemeClr>
+                    </a:gs>
+                  </a:gsLst>
+                  <a:lin ang="5580000" scaled="0"/>
+                  <a:tileRect/>
+                </a:gradFill>
+                <a:effectLst>
+                  <a:glow rad="38100">
+                    <a:schemeClr val="bg1">
+                      <a:lumMod val="50000"/>
+                      <a:lumOff val="50000"/>
+                      <a:alpha val="20000"/>
+                    </a:schemeClr>
+                  </a:glow>
+                  <a:outerShdw blurRad="44450" dist="12700" dir="13860000" algn="tl" rotWithShape="0">
+                    <a:srgbClr val="000000">
+                      <a:alpha val="20000"/>
+                    </a:srgbClr>
+                  </a:outerShdw>
+                </a:effectLst>
                 <a:latin typeface="+mn-lt"/>
                 <a:ea typeface="+mn-ea"/>
                 <a:cs typeface="+mn-cs"/>
               </a:defRPr>
             </a:lvl3pPr>
-            <a:lvl4pPr marL="1600200" indent="-228600" algn="l" defTabSz="914400" rtl="0" eaLnBrk="1" latinLnBrk="0" hangingPunct="1">
-              <a:lnSpc>
-                <a:spcPct val="90000"/>
-              </a:lnSpc>
+            <a:lvl4pPr marL="1543050" indent="-171450" algn="l" defTabSz="457200" rtl="0" eaLnBrk="1" latinLnBrk="0" hangingPunct="1">
               <a:spcBef>
-                <a:spcPts val="500"/>
+                <a:spcPct val="20000"/>
               </a:spcBef>
-              <a:buFont typeface="Arial" panose="020B0604020202020204" pitchFamily="34" charset="0"/>
+              <a:spcAft>
+                <a:spcPts val="600"/>
+              </a:spcAft>
+              <a:buClr>
+                <a:schemeClr val="tx1"/>
+              </a:buClr>
+              <a:buSzPct val="100000"/>
+              <a:buFont typeface="Arial"/>
               <a:buChar char="•"/>
-              <a:defRPr sz="1800" kern="1200">
-                <a:solidFill>
-                  <a:schemeClr val="tx1"/>
-                </a:solidFill>
+              <a:defRPr sz="1400" kern="1200" cap="small">
+                <a:gradFill flip="none" rotWithShape="1">
+                  <a:gsLst>
+                    <a:gs pos="0">
+                      <a:schemeClr val="tx1"/>
+                    </a:gs>
+                    <a:gs pos="100000">
+                      <a:schemeClr val="tx1">
+                        <a:lumMod val="75000"/>
+                      </a:schemeClr>
+                    </a:gs>
+                  </a:gsLst>
+                  <a:lin ang="5580000" scaled="0"/>
+                  <a:tileRect/>
+                </a:gradFill>
+                <a:effectLst>
+                  <a:glow rad="38100">
+                    <a:schemeClr val="bg1">
+                      <a:lumMod val="50000"/>
+                      <a:lumOff val="50000"/>
+                      <a:alpha val="20000"/>
+                    </a:schemeClr>
+                  </a:glow>
+                  <a:outerShdw blurRad="44450" dist="12700" dir="13860000" algn="tl" rotWithShape="0">
+                    <a:srgbClr val="000000">
+                      <a:alpha val="20000"/>
+                    </a:srgbClr>
+                  </a:outerShdw>
+                </a:effectLst>
                 <a:latin typeface="+mn-lt"/>
                 <a:ea typeface="+mn-ea"/>
                 <a:cs typeface="+mn-cs"/>
               </a:defRPr>
             </a:lvl4pPr>
-            <a:lvl5pPr marL="2057400" indent="-228600" algn="l" defTabSz="914400" rtl="0" eaLnBrk="1" latinLnBrk="0" hangingPunct="1">
-              <a:lnSpc>
-                <a:spcPct val="90000"/>
-              </a:lnSpc>
+            <a:lvl5pPr marL="2000250" indent="-171450" algn="l" defTabSz="457200" rtl="0" eaLnBrk="1" latinLnBrk="0" hangingPunct="1">
               <a:spcBef>
-                <a:spcPts val="500"/>
+                <a:spcPct val="20000"/>
               </a:spcBef>
-              <a:buFont typeface="Arial" panose="020B0604020202020204" pitchFamily="34" charset="0"/>
+              <a:spcAft>
+                <a:spcPts val="600"/>
+              </a:spcAft>
+              <a:buClr>
+                <a:schemeClr val="tx1"/>
+              </a:buClr>
+              <a:buSzPct val="100000"/>
+              <a:buFont typeface="Arial"/>
               <a:buChar char="•"/>
-              <a:defRPr sz="1800" kern="1200">
-                <a:solidFill>
-                  <a:schemeClr val="tx1"/>
-                </a:solidFill>
+              <a:defRPr sz="1400" kern="1200" cap="small">
+                <a:gradFill flip="none" rotWithShape="1">
+                  <a:gsLst>
+                    <a:gs pos="0">
+                      <a:schemeClr val="tx1"/>
+                    </a:gs>
+                    <a:gs pos="100000">
+                      <a:schemeClr val="tx1">
+                        <a:lumMod val="75000"/>
+                      </a:schemeClr>
+                    </a:gs>
+                  </a:gsLst>
+                  <a:lin ang="5580000" scaled="0"/>
+                  <a:tileRect/>
+                </a:gradFill>
+                <a:effectLst>
+                  <a:glow rad="38100">
+                    <a:schemeClr val="bg1">
+                      <a:lumMod val="50000"/>
+                      <a:lumOff val="50000"/>
+                      <a:alpha val="20000"/>
+                    </a:schemeClr>
+                  </a:glow>
+                  <a:outerShdw blurRad="44450" dist="12700" dir="13860000" algn="tl" rotWithShape="0">
+                    <a:srgbClr val="000000">
+                      <a:alpha val="20000"/>
+                    </a:srgbClr>
+                  </a:outerShdw>
+                </a:effectLst>
                 <a:latin typeface="+mn-lt"/>
                 <a:ea typeface="+mn-ea"/>
                 <a:cs typeface="+mn-cs"/>
               </a:defRPr>
             </a:lvl5pPr>
-            <a:lvl6pPr marL="2514600" indent="-228600" algn="l" defTabSz="914400" rtl="0" eaLnBrk="1" latinLnBrk="0" hangingPunct="1">
-              <a:lnSpc>
-                <a:spcPct val="90000"/>
-              </a:lnSpc>
+            <a:lvl6pPr marL="2514600" indent="-228600" algn="l" defTabSz="457200" rtl="0" eaLnBrk="1" latinLnBrk="0" hangingPunct="1">
               <a:spcBef>
-                <a:spcPts val="500"/>
+                <a:spcPct val="20000"/>
               </a:spcBef>
-              <a:buFont typeface="Arial" panose="020B0604020202020204" pitchFamily="34" charset="0"/>
+              <a:spcAft>
+                <a:spcPts val="600"/>
+              </a:spcAft>
+              <a:buClr>
+                <a:schemeClr val="tx1"/>
+              </a:buClr>
+              <a:buSzPct val="100000"/>
+              <a:buFont typeface="Arial"/>
               <a:buChar char="•"/>
-              <a:defRPr sz="1800" kern="1200">
-                <a:solidFill>
-                  <a:schemeClr val="tx1"/>
-                </a:solidFill>
+              <a:defRPr sz="1200" kern="1200" cap="small">
+                <a:gradFill flip="none" rotWithShape="1">
+                  <a:gsLst>
+                    <a:gs pos="0">
+                      <a:schemeClr val="tx1"/>
+                    </a:gs>
+                    <a:gs pos="100000">
+                      <a:schemeClr val="tx1">
+                        <a:lumMod val="75000"/>
+                      </a:schemeClr>
+                    </a:gs>
+                  </a:gsLst>
+                  <a:lin ang="5580000" scaled="0"/>
+                  <a:tileRect/>
+                </a:gradFill>
+                <a:effectLst>
+                  <a:glow rad="38100">
+                    <a:schemeClr val="bg1">
+                      <a:lumMod val="50000"/>
+                      <a:lumOff val="50000"/>
+                      <a:alpha val="20000"/>
+                    </a:schemeClr>
+                  </a:glow>
+                  <a:outerShdw blurRad="44450" dist="12700" dir="13860000" algn="tl" rotWithShape="0">
+                    <a:srgbClr val="000000">
+                      <a:alpha val="20000"/>
+                    </a:srgbClr>
+                  </a:outerShdw>
+                </a:effectLst>
                 <a:latin typeface="+mn-lt"/>
                 <a:ea typeface="+mn-ea"/>
                 <a:cs typeface="+mn-cs"/>
               </a:defRPr>
             </a:lvl6pPr>
-            <a:lvl7pPr marL="2971800" indent="-228600" algn="l" defTabSz="914400" rtl="0" eaLnBrk="1" latinLnBrk="0" hangingPunct="1">
-              <a:lnSpc>
-                <a:spcPct val="90000"/>
-              </a:lnSpc>
+            <a:lvl7pPr marL="2971800" indent="-228600" algn="l" defTabSz="457200" rtl="0" eaLnBrk="1" latinLnBrk="0" hangingPunct="1">
               <a:spcBef>
-                <a:spcPts val="500"/>
+                <a:spcPct val="20000"/>
               </a:spcBef>
-              <a:buFont typeface="Arial" panose="020B0604020202020204" pitchFamily="34" charset="0"/>
+              <a:spcAft>
+                <a:spcPts val="600"/>
+              </a:spcAft>
+              <a:buClr>
+                <a:schemeClr val="tx1"/>
+              </a:buClr>
+              <a:buSzPct val="100000"/>
+              <a:buFont typeface="Arial"/>
               <a:buChar char="•"/>
-              <a:defRPr sz="1800" kern="1200">
-                <a:solidFill>
-                  <a:schemeClr val="tx1"/>
-                </a:solidFill>
+              <a:defRPr sz="1200" kern="1200" cap="small">
+                <a:gradFill flip="none" rotWithShape="1">
+                  <a:gsLst>
+                    <a:gs pos="0">
+                      <a:schemeClr val="tx1"/>
+                    </a:gs>
+                    <a:gs pos="100000">
+                      <a:schemeClr val="tx1">
+                        <a:lumMod val="75000"/>
+                      </a:schemeClr>
+                    </a:gs>
+                  </a:gsLst>
+                  <a:lin ang="5580000" scaled="0"/>
+                  <a:tileRect/>
+                </a:gradFill>
+                <a:effectLst>
+                  <a:glow rad="38100">
+                    <a:schemeClr val="bg1">
+                      <a:lumMod val="50000"/>
+                      <a:lumOff val="50000"/>
+                      <a:alpha val="20000"/>
+                    </a:schemeClr>
+                  </a:glow>
+                  <a:outerShdw blurRad="44450" dist="12700" dir="13860000" algn="tl" rotWithShape="0">
+                    <a:srgbClr val="000000">
+                      <a:alpha val="20000"/>
+                    </a:srgbClr>
+                  </a:outerShdw>
+                </a:effectLst>
                 <a:latin typeface="+mn-lt"/>
                 <a:ea typeface="+mn-ea"/>
                 <a:cs typeface="+mn-cs"/>
               </a:defRPr>
             </a:lvl7pPr>
-            <a:lvl8pPr marL="3429000" indent="-228600" algn="l" defTabSz="914400" rtl="0" eaLnBrk="1" latinLnBrk="0" hangingPunct="1">
-              <a:lnSpc>
-                <a:spcPct val="90000"/>
-              </a:lnSpc>
+            <a:lvl8pPr marL="3429000" indent="-228600" algn="l" defTabSz="457200" rtl="0" eaLnBrk="1" latinLnBrk="0" hangingPunct="1">
               <a:spcBef>
-                <a:spcPts val="500"/>
+                <a:spcPct val="20000"/>
               </a:spcBef>
-              <a:buFont typeface="Arial" panose="020B0604020202020204" pitchFamily="34" charset="0"/>
+              <a:spcAft>
+                <a:spcPts val="600"/>
+              </a:spcAft>
+              <a:buClr>
+                <a:schemeClr val="tx1"/>
+              </a:buClr>
+              <a:buSzPct val="100000"/>
+              <a:buFont typeface="Arial"/>
               <a:buChar char="•"/>
-              <a:defRPr sz="1800" kern="1200">
-                <a:solidFill>
-                  <a:schemeClr val="tx1"/>
-                </a:solidFill>
+              <a:defRPr sz="1200" kern="1200" cap="small">
+                <a:gradFill flip="none" rotWithShape="1">
+                  <a:gsLst>
+                    <a:gs pos="0">
+                      <a:schemeClr val="tx1"/>
+                    </a:gs>
+                    <a:gs pos="100000">
+                      <a:schemeClr val="tx1">
+                        <a:lumMod val="75000"/>
+                      </a:schemeClr>
+                    </a:gs>
+                  </a:gsLst>
+                  <a:lin ang="5580000" scaled="0"/>
+                  <a:tileRect/>
+                </a:gradFill>
+                <a:effectLst>
+                  <a:glow rad="38100">
+                    <a:schemeClr val="bg1">
+                      <a:lumMod val="50000"/>
+                      <a:lumOff val="50000"/>
+                      <a:alpha val="20000"/>
+                    </a:schemeClr>
+                  </a:glow>
+                  <a:outerShdw blurRad="44450" dist="12700" dir="13860000" algn="tl" rotWithShape="0">
+                    <a:srgbClr val="000000">
+                      <a:alpha val="20000"/>
+                    </a:srgbClr>
+                  </a:outerShdw>
+                </a:effectLst>
                 <a:latin typeface="+mn-lt"/>
                 <a:ea typeface="+mn-ea"/>
                 <a:cs typeface="+mn-cs"/>
               </a:defRPr>
             </a:lvl8pPr>
-            <a:lvl9pPr marL="3886200" indent="-228600" algn="l" defTabSz="914400" rtl="0" eaLnBrk="1" latinLnBrk="0" hangingPunct="1">
-              <a:lnSpc>
-                <a:spcPct val="90000"/>
-              </a:lnSpc>
+            <a:lvl9pPr marL="3886200" indent="-228600" algn="l" defTabSz="457200" rtl="0" eaLnBrk="1" latinLnBrk="0" hangingPunct="1">
               <a:spcBef>
-                <a:spcPts val="500"/>
+                <a:spcPct val="20000"/>
               </a:spcBef>
-              <a:buFont typeface="Arial" panose="020B0604020202020204" pitchFamily="34" charset="0"/>
+              <a:spcAft>
+                <a:spcPts val="600"/>
+              </a:spcAft>
+              <a:buClr>
+                <a:schemeClr val="tx1"/>
+              </a:buClr>
+              <a:buSzPct val="100000"/>
+              <a:buFont typeface="Arial"/>
               <a:buChar char="•"/>
-              <a:defRPr sz="1800" kern="1200">
-                <a:solidFill>
-                  <a:schemeClr val="tx1"/>
-                </a:solidFill>
+              <a:defRPr sz="1200" kern="1200" cap="small">
+                <a:gradFill flip="none" rotWithShape="1">
+                  <a:gsLst>
+                    <a:gs pos="0">
+                      <a:schemeClr val="tx1"/>
+                    </a:gs>
+                    <a:gs pos="100000">
+                      <a:schemeClr val="tx1">
+                        <a:lumMod val="75000"/>
+                      </a:schemeClr>
+                    </a:gs>
+                  </a:gsLst>
+                  <a:lin ang="5580000" scaled="0"/>
+                  <a:tileRect/>
+                </a:gradFill>
+                <a:effectLst>
+                  <a:glow rad="38100">
+                    <a:schemeClr val="bg1">
+                      <a:lumMod val="50000"/>
+                      <a:lumOff val="50000"/>
+                      <a:alpha val="20000"/>
+                    </a:schemeClr>
+                  </a:glow>
+                  <a:outerShdw blurRad="44450" dist="12700" dir="13860000" algn="tl" rotWithShape="0">
+                    <a:srgbClr val="000000">
+                      <a:alpha val="20000"/>
+                    </a:srgbClr>
+                  </a:outerShdw>
+                </a:effectLst>
                 <a:latin typeface="+mn-lt"/>
                 <a:ea typeface="+mn-ea"/>
                 <a:cs typeface="+mn-cs"/>
@@ -3945,30 +6582,30 @@
               <a:buNone/>
             </a:pPr>
             <a:r>
-              <a:rPr lang="en-US" sz="1600" dirty="0"/>
+              <a:rPr lang="en-US" dirty="0"/>
               <a:t>A collection of over 3.4k task records measuring how compatible a prompt is to the domains of the AI</a:t>
             </a:r>
           </a:p>
           <a:p>
             <a:r>
-              <a:rPr lang="en-US" sz="1600" dirty="0"/>
+              <a:rPr lang="en-US" dirty="0"/>
               <a:t>Binary </a:t>
             </a:r>
             <a:r>
-              <a:rPr lang="en-US" sz="1600" dirty="0" err="1"/>
+              <a:rPr lang="en-US" dirty="0" err="1"/>
               <a:t>resilts</a:t>
             </a:r>
-            <a:endParaRPr lang="en-US" sz="1600" dirty="0"/>
-          </a:p>
-          <a:p>
-            <a:r>
-              <a:rPr lang="en-US" sz="1600" dirty="0"/>
+            <a:endParaRPr lang="en-US" dirty="0"/>
+          </a:p>
+          <a:p>
+            <a:r>
+              <a:rPr lang="en-US" dirty="0"/>
               <a:t>Benchmark being 64% live  tasks</a:t>
             </a:r>
           </a:p>
           <a:p>
             <a:r>
-              <a:rPr lang="en-US" sz="1600" dirty="0"/>
+              <a:rPr lang="en-US" dirty="0"/>
               <a:t>Dominant domain: gender\other</a:t>
             </a:r>
             <a:endParaRPr lang="en-GB" dirty="0"/>
@@ -3991,6 +6628,29 @@
 <file path=ppt/slides/slide3.xml><?xml version="1.0" encoding="utf-8"?>
 <p:sld xmlns:a="http://schemas.openxmlformats.org/drawingml/2006/main" xmlns:r="http://schemas.openxmlformats.org/officeDocument/2006/relationships" xmlns:p="http://schemas.openxmlformats.org/presentationml/2006/main">
   <p:cSld>
+    <p:bg>
+      <p:bgPr>
+        <a:blipFill rotWithShape="1">
+          <a:blip r:embed="rId2">
+            <a:duotone>
+              <a:schemeClr val="bg2">
+                <a:shade val="28000"/>
+                <a:satMod val="94000"/>
+                <a:lumMod val="20000"/>
+              </a:schemeClr>
+              <a:schemeClr val="bg2">
+                <a:tint val="94000"/>
+                <a:shade val="84000"/>
+                <a:satMod val="148000"/>
+                <a:lumMod val="114000"/>
+              </a:schemeClr>
+            </a:duotone>
+          </a:blip>
+          <a:stretch/>
+        </a:blipFill>
+        <a:effectLst/>
+      </p:bgPr>
+    </p:bg>
     <p:spTree>
       <p:nvGrpSpPr>
         <p:cNvPr id="1" name=""/>
@@ -4021,19 +6681,253 @@
             <p:ph type="title"/>
           </p:nvPr>
         </p:nvSpPr>
-        <p:spPr/>
-        <p:txBody>
-          <a:bodyPr/>
+        <p:spPr>
+          <a:xfrm>
+            <a:off x="974179" y="714375"/>
+            <a:ext cx="3332955" cy="5076826"/>
+          </a:xfrm>
+        </p:spPr>
+        <p:txBody>
+          <a:bodyPr anchor="ctr">
+            <a:normAutofit/>
+          </a:bodyPr>
           <a:lstStyle/>
           <a:p>
             <a:r>
-              <a:rPr lang="en-US" dirty="0"/>
+              <a:rPr lang="en-US" sz="4000"/>
               <a:t>Refusal insights</a:t>
             </a:r>
-            <a:endParaRPr lang="en-GB" dirty="0"/>
-          </a:p>
-        </p:txBody>
-      </p:sp>
+            <a:endParaRPr lang="en-GB" sz="4000"/>
+          </a:p>
+        </p:txBody>
+      </p:sp>
+      <p:sp>
+        <p:nvSpPr>
+          <p:cNvPr id="8" name="Rectangle 7">
+            <a:extLst>
+              <a:ext uri="{FF2B5EF4-FFF2-40B4-BE49-F238E27FC236}">
+                <a16:creationId xmlns:a16="http://schemas.microsoft.com/office/drawing/2014/main" id="{375136A9-49F9-4DA0-A741-F065B0FA091D}"/>
+              </a:ext>
+              <a:ext uri="{C183D7F6-B498-43B3-948B-1728B52AA6E4}">
+                <adec:decorative xmlns:adec="http://schemas.microsoft.com/office/drawing/2017/decorative" val="1"/>
+              </a:ext>
+            </a:extLst>
+          </p:cNvPr>
+          <p:cNvSpPr>
+            <a:spLocks noGrp="1" noRot="1" noChangeAspect="1" noMove="1" noResize="1" noEditPoints="1" noAdjustHandles="1" noChangeArrowheads="1" noChangeShapeType="1" noTextEdit="1"/>
+          </p:cNvSpPr>
+          <p:nvPr>
+            <p:extLst>
+              <p:ext uri="{386F3935-93C4-4BCD-93E2-E3B085C9AB24}">
+                <p16:designElem xmlns:p16="http://schemas.microsoft.com/office/powerpoint/2015/main" val="1"/>
+              </p:ext>
+            </p:extLst>
+          </p:nvPr>
+        </p:nvSpPr>
+        <p:spPr>
+          <a:xfrm>
+            <a:off x="4633356" y="0"/>
+            <a:ext cx="7558643" cy="6858000"/>
+          </a:xfrm>
+          <a:prstGeom prst="rect">
+            <a:avLst/>
+          </a:prstGeom>
+          <a:solidFill>
+            <a:schemeClr val="bg2"/>
+          </a:solidFill>
+          <a:ln>
+            <a:noFill/>
+          </a:ln>
+          <a:effectLst>
+            <a:innerShdw blurRad="63500" dist="50800" dir="10800000">
+              <a:prstClr val="black">
+                <a:alpha val="50000"/>
+              </a:prstClr>
+            </a:innerShdw>
+          </a:effectLst>
+        </p:spPr>
+        <p:style>
+          <a:lnRef idx="2">
+            <a:schemeClr val="accent1">
+              <a:shade val="50000"/>
+            </a:schemeClr>
+          </a:lnRef>
+          <a:fillRef idx="1">
+            <a:schemeClr val="accent1"/>
+          </a:fillRef>
+          <a:effectRef idx="0">
+            <a:schemeClr val="accent1"/>
+          </a:effectRef>
+          <a:fontRef idx="minor">
+            <a:schemeClr val="lt1"/>
+          </a:fontRef>
+        </p:style>
+        <p:txBody>
+          <a:bodyPr rtlCol="0" anchor="ctr"/>
+          <a:lstStyle/>
+          <a:p>
+            <a:pPr algn="ctr"/>
+            <a:endParaRPr lang="en-US" dirty="0"/>
+          </a:p>
+        </p:txBody>
+      </p:sp>
+      <p:sp>
+        <p:nvSpPr>
+          <p:cNvPr id="10" name="Rectangle 9">
+            <a:extLst>
+              <a:ext uri="{FF2B5EF4-FFF2-40B4-BE49-F238E27FC236}">
+                <a16:creationId xmlns:a16="http://schemas.microsoft.com/office/drawing/2014/main" id="{B912F6C7-0423-4B6F-AECE-710C848918FD}"/>
+              </a:ext>
+              <a:ext uri="{C183D7F6-B498-43B3-948B-1728B52AA6E4}">
+                <adec:decorative xmlns:adec="http://schemas.microsoft.com/office/drawing/2017/decorative" val="1"/>
+              </a:ext>
+            </a:extLst>
+          </p:cNvPr>
+          <p:cNvSpPr>
+            <a:spLocks noGrp="1" noRot="1" noChangeAspect="1" noMove="1" noResize="1" noEditPoints="1" noAdjustHandles="1" noChangeArrowheads="1" noChangeShapeType="1" noTextEdit="1"/>
+          </p:cNvSpPr>
+          <p:nvPr>
+            <p:extLst>
+              <p:ext uri="{386F3935-93C4-4BCD-93E2-E3B085C9AB24}">
+                <p16:designElem xmlns:p16="http://schemas.microsoft.com/office/powerpoint/2015/main" val="1"/>
+              </p:ext>
+            </p:extLst>
+          </p:nvPr>
+        </p:nvSpPr>
+        <p:spPr>
+          <a:xfrm rot="5400000" flipH="1">
+            <a:off x="1446539" y="3195797"/>
+            <a:ext cx="6858000" cy="466406"/>
+          </a:xfrm>
+          <a:prstGeom prst="rect">
+            <a:avLst/>
+          </a:prstGeom>
+          <a:gradFill>
+            <a:gsLst>
+              <a:gs pos="0">
+                <a:srgbClr val="363D46">
+                  <a:alpha val="0"/>
+                </a:srgbClr>
+              </a:gs>
+              <a:gs pos="100000">
+                <a:srgbClr val="363D46">
+                  <a:lumMod val="75000"/>
+                </a:srgbClr>
+              </a:gs>
+            </a:gsLst>
+            <a:lin ang="5400000" scaled="0"/>
+          </a:gradFill>
+          <a:ln>
+            <a:noFill/>
+          </a:ln>
+          <a:effectLst/>
+        </p:spPr>
+        <p:style>
+          <a:lnRef idx="2">
+            <a:schemeClr val="accent1">
+              <a:shade val="50000"/>
+            </a:schemeClr>
+          </a:lnRef>
+          <a:fillRef idx="1">
+            <a:schemeClr val="accent1"/>
+          </a:fillRef>
+          <a:effectRef idx="0">
+            <a:schemeClr val="accent1"/>
+          </a:effectRef>
+          <a:fontRef idx="minor">
+            <a:schemeClr val="lt1"/>
+          </a:fontRef>
+        </p:style>
+        <p:txBody>
+          <a:bodyPr rot="0" spcFirstLastPara="0" vertOverflow="overflow" horzOverflow="overflow" vert="horz" wrap="square" lIns="91440" tIns="45720" rIns="91440" bIns="45720" numCol="1" spcCol="0" rtlCol="0" fromWordArt="0" anchor="ctr" anchorCtr="0" forceAA="0" compatLnSpc="1">
+            <a:prstTxWarp prst="textNoShape">
+              <a:avLst/>
+            </a:prstTxWarp>
+            <a:noAutofit/>
+          </a:bodyPr>
+          <a:lstStyle/>
+          <a:p>
+            <a:pPr algn="ctr"/>
+            <a:endParaRPr lang="en-US"/>
+          </a:p>
+        </p:txBody>
+      </p:sp>
+      <p:cxnSp>
+        <p:nvCxnSpPr>
+          <p:cNvPr id="12" name="Straight Connector 11">
+            <a:extLst>
+              <a:ext uri="{FF2B5EF4-FFF2-40B4-BE49-F238E27FC236}">
+                <a16:creationId xmlns:a16="http://schemas.microsoft.com/office/drawing/2014/main" id="{A7208205-03EE-4EC8-9C34-59270C1880D8}"/>
+              </a:ext>
+              <a:ext uri="{C183D7F6-B498-43B3-948B-1728B52AA6E4}">
+                <adec:decorative xmlns:adec="http://schemas.microsoft.com/office/drawing/2017/decorative" val="1"/>
+              </a:ext>
+            </a:extLst>
+          </p:cNvPr>
+          <p:cNvCxnSpPr>
+            <a:cxnSpLocks noGrp="1" noRot="1" noChangeAspect="1" noMove="1" noResize="1" noEditPoints="1" noAdjustHandles="1" noChangeArrowheads="1" noChangeShapeType="1"/>
+          </p:cNvCxnSpPr>
+          <p:nvPr>
+            <p:extLst>
+              <p:ext uri="{386F3935-93C4-4BCD-93E2-E3B085C9AB24}">
+                <p16:designElem xmlns:p16="http://schemas.microsoft.com/office/powerpoint/2015/main" val="1"/>
+              </p:ext>
+            </p:extLst>
+          </p:nvPr>
+        </p:nvCxnSpPr>
+        <p:spPr>
+          <a:xfrm>
+            <a:off x="4642336" y="0"/>
+            <a:ext cx="0" cy="6858000"/>
+          </a:xfrm>
+          <a:prstGeom prst="line">
+            <a:avLst/>
+          </a:prstGeom>
+          <a:solidFill>
+            <a:srgbClr val="FFFFFF"/>
+          </a:solidFill>
+          <a:ln w="38100" cap="flat">
+            <a:gradFill flip="none" rotWithShape="1">
+              <a:gsLst>
+                <a:gs pos="0">
+                  <a:srgbClr val="363D46"/>
+                </a:gs>
+                <a:gs pos="100000">
+                  <a:srgbClr val="363D46">
+                    <a:lumMod val="75000"/>
+                  </a:srgbClr>
+                </a:gs>
+              </a:gsLst>
+              <a:lin ang="5400000" scaled="0"/>
+              <a:tileRect/>
+            </a:gradFill>
+            <a:miter lim="800000"/>
+          </a:ln>
+          <a:effectLst>
+            <a:innerShdw blurRad="57150" dist="38100" dir="14460000">
+              <a:srgbClr val="000000">
+                <a:alpha val="70000"/>
+              </a:srgbClr>
+            </a:innerShdw>
+          </a:effectLst>
+        </p:spPr>
+        <p:style>
+          <a:lnRef idx="2">
+            <a:schemeClr val="accent1">
+              <a:shade val="50000"/>
+            </a:schemeClr>
+          </a:lnRef>
+          <a:fillRef idx="1">
+            <a:schemeClr val="accent1"/>
+          </a:fillRef>
+          <a:effectRef idx="0">
+            <a:schemeClr val="accent1"/>
+          </a:effectRef>
+          <a:fontRef idx="minor">
+            <a:schemeClr val="lt1"/>
+          </a:fontRef>
+        </p:style>
+      </p:cxnSp>
       <p:sp>
         <p:nvSpPr>
           <p:cNvPr id="3" name="Content Placeholder 2">
@@ -4050,12 +6944,520 @@
             <p:ph idx="1"/>
           </p:nvPr>
         </p:nvSpPr>
-        <p:spPr/>
-        <p:txBody>
-          <a:bodyPr/>
+        <p:spPr>
+          <a:xfrm>
+            <a:off x="4973046" y="714375"/>
+            <a:ext cx="6253751" cy="5076825"/>
+          </a:xfrm>
+        </p:spPr>
+        <p:txBody>
+          <a:bodyPr>
+            <a:normAutofit/>
+          </a:bodyPr>
           <a:lstStyle/>
           <a:p>
-            <a:endParaRPr lang="en-GB"/>
+            <a:endParaRPr lang="en-US">
+              <a:solidFill>
+                <a:schemeClr val="tx1"/>
+              </a:solidFill>
+            </a:endParaRPr>
+          </a:p>
+          <a:p>
+            <a:endParaRPr lang="en-GB">
+              <a:solidFill>
+                <a:schemeClr val="tx1"/>
+              </a:solidFill>
+            </a:endParaRPr>
+          </a:p>
+        </p:txBody>
+      </p:sp>
+      <p:sp>
+        <p:nvSpPr>
+          <p:cNvPr id="4" name="Content Placeholder 2">
+            <a:extLst>
+              <a:ext uri="{FF2B5EF4-FFF2-40B4-BE49-F238E27FC236}">
+                <a16:creationId xmlns:a16="http://schemas.microsoft.com/office/drawing/2014/main" id="{8D93EF01-910E-58C5-274C-7297FE4FA447}"/>
+              </a:ext>
+            </a:extLst>
+          </p:cNvPr>
+          <p:cNvSpPr txBox="1">
+            <a:spLocks/>
+          </p:cNvSpPr>
+          <p:nvPr/>
+        </p:nvSpPr>
+        <p:spPr>
+          <a:xfrm>
+            <a:off x="5792266" y="1439862"/>
+            <a:ext cx="4421957" cy="4351338"/>
+          </a:xfrm>
+          <a:prstGeom prst="rect">
+            <a:avLst/>
+          </a:prstGeom>
+        </p:spPr>
+        <p:txBody>
+          <a:bodyPr vert="horz" lIns="91440" tIns="45720" rIns="91440" bIns="45720" rtlCol="0" anchor="ctr">
+            <a:normAutofit/>
+          </a:bodyPr>
+          <a:lstStyle>
+            <a:lvl1pPr marL="285750" indent="-285750" algn="l" defTabSz="457200" rtl="0" eaLnBrk="1" latinLnBrk="0" hangingPunct="1">
+              <a:spcBef>
+                <a:spcPct val="20000"/>
+              </a:spcBef>
+              <a:spcAft>
+                <a:spcPts val="600"/>
+              </a:spcAft>
+              <a:buClr>
+                <a:schemeClr val="tx1"/>
+              </a:buClr>
+              <a:buSzPct val="100000"/>
+              <a:buFont typeface="Arial"/>
+              <a:buChar char="•"/>
+              <a:defRPr sz="2000" kern="1200" cap="small">
+                <a:gradFill flip="none" rotWithShape="1">
+                  <a:gsLst>
+                    <a:gs pos="0">
+                      <a:schemeClr val="tx1"/>
+                    </a:gs>
+                    <a:gs pos="100000">
+                      <a:schemeClr val="tx1">
+                        <a:lumMod val="75000"/>
+                      </a:schemeClr>
+                    </a:gs>
+                  </a:gsLst>
+                  <a:lin ang="5580000" scaled="0"/>
+                  <a:tileRect/>
+                </a:gradFill>
+                <a:effectLst>
+                  <a:glow rad="38100">
+                    <a:schemeClr val="bg1">
+                      <a:lumMod val="50000"/>
+                      <a:lumOff val="50000"/>
+                      <a:alpha val="20000"/>
+                    </a:schemeClr>
+                  </a:glow>
+                  <a:outerShdw blurRad="44450" dist="12700" dir="13860000" algn="tl" rotWithShape="0">
+                    <a:srgbClr val="000000">
+                      <a:alpha val="20000"/>
+                    </a:srgbClr>
+                  </a:outerShdw>
+                </a:effectLst>
+                <a:latin typeface="+mn-lt"/>
+                <a:ea typeface="+mn-ea"/>
+                <a:cs typeface="+mn-cs"/>
+              </a:defRPr>
+            </a:lvl1pPr>
+            <a:lvl2pPr marL="742950" indent="-285750" algn="l" defTabSz="457200" rtl="0" eaLnBrk="1" latinLnBrk="0" hangingPunct="1">
+              <a:spcBef>
+                <a:spcPct val="20000"/>
+              </a:spcBef>
+              <a:spcAft>
+                <a:spcPts val="600"/>
+              </a:spcAft>
+              <a:buClr>
+                <a:schemeClr val="tx1"/>
+              </a:buClr>
+              <a:buSzPct val="100000"/>
+              <a:buFont typeface="Arial"/>
+              <a:buChar char="•"/>
+              <a:defRPr sz="1800" kern="1200" cap="small">
+                <a:gradFill flip="none" rotWithShape="1">
+                  <a:gsLst>
+                    <a:gs pos="0">
+                      <a:schemeClr val="tx1"/>
+                    </a:gs>
+                    <a:gs pos="100000">
+                      <a:schemeClr val="tx1">
+                        <a:lumMod val="75000"/>
+                      </a:schemeClr>
+                    </a:gs>
+                  </a:gsLst>
+                  <a:lin ang="5580000" scaled="0"/>
+                  <a:tileRect/>
+                </a:gradFill>
+                <a:effectLst>
+                  <a:glow rad="38100">
+                    <a:schemeClr val="bg1">
+                      <a:lumMod val="50000"/>
+                      <a:lumOff val="50000"/>
+                      <a:alpha val="20000"/>
+                    </a:schemeClr>
+                  </a:glow>
+                  <a:outerShdw blurRad="44450" dist="12700" dir="13860000" algn="tl" rotWithShape="0">
+                    <a:srgbClr val="000000">
+                      <a:alpha val="20000"/>
+                    </a:srgbClr>
+                  </a:outerShdw>
+                </a:effectLst>
+                <a:latin typeface="+mn-lt"/>
+                <a:ea typeface="+mn-ea"/>
+                <a:cs typeface="+mn-cs"/>
+              </a:defRPr>
+            </a:lvl2pPr>
+            <a:lvl3pPr marL="1200150" indent="-285750" algn="l" defTabSz="457200" rtl="0" eaLnBrk="1" latinLnBrk="0" hangingPunct="1">
+              <a:spcBef>
+                <a:spcPct val="20000"/>
+              </a:spcBef>
+              <a:spcAft>
+                <a:spcPts val="600"/>
+              </a:spcAft>
+              <a:buClr>
+                <a:schemeClr val="tx1"/>
+              </a:buClr>
+              <a:buSzPct val="100000"/>
+              <a:buFont typeface="Arial"/>
+              <a:buChar char="•"/>
+              <a:defRPr sz="1600" kern="1200" cap="small">
+                <a:gradFill flip="none" rotWithShape="1">
+                  <a:gsLst>
+                    <a:gs pos="0">
+                      <a:schemeClr val="tx1"/>
+                    </a:gs>
+                    <a:gs pos="100000">
+                      <a:schemeClr val="tx1">
+                        <a:lumMod val="75000"/>
+                      </a:schemeClr>
+                    </a:gs>
+                  </a:gsLst>
+                  <a:lin ang="5580000" scaled="0"/>
+                  <a:tileRect/>
+                </a:gradFill>
+                <a:effectLst>
+                  <a:glow rad="38100">
+                    <a:schemeClr val="bg1">
+                      <a:lumMod val="50000"/>
+                      <a:lumOff val="50000"/>
+                      <a:alpha val="20000"/>
+                    </a:schemeClr>
+                  </a:glow>
+                  <a:outerShdw blurRad="44450" dist="12700" dir="13860000" algn="tl" rotWithShape="0">
+                    <a:srgbClr val="000000">
+                      <a:alpha val="20000"/>
+                    </a:srgbClr>
+                  </a:outerShdw>
+                </a:effectLst>
+                <a:latin typeface="+mn-lt"/>
+                <a:ea typeface="+mn-ea"/>
+                <a:cs typeface="+mn-cs"/>
+              </a:defRPr>
+            </a:lvl3pPr>
+            <a:lvl4pPr marL="1543050" indent="-171450" algn="l" defTabSz="457200" rtl="0" eaLnBrk="1" latinLnBrk="0" hangingPunct="1">
+              <a:spcBef>
+                <a:spcPct val="20000"/>
+              </a:spcBef>
+              <a:spcAft>
+                <a:spcPts val="600"/>
+              </a:spcAft>
+              <a:buClr>
+                <a:schemeClr val="tx1"/>
+              </a:buClr>
+              <a:buSzPct val="100000"/>
+              <a:buFont typeface="Arial"/>
+              <a:buChar char="•"/>
+              <a:defRPr sz="1400" kern="1200" cap="small">
+                <a:gradFill flip="none" rotWithShape="1">
+                  <a:gsLst>
+                    <a:gs pos="0">
+                      <a:schemeClr val="tx1"/>
+                    </a:gs>
+                    <a:gs pos="100000">
+                      <a:schemeClr val="tx1">
+                        <a:lumMod val="75000"/>
+                      </a:schemeClr>
+                    </a:gs>
+                  </a:gsLst>
+                  <a:lin ang="5580000" scaled="0"/>
+                  <a:tileRect/>
+                </a:gradFill>
+                <a:effectLst>
+                  <a:glow rad="38100">
+                    <a:schemeClr val="bg1">
+                      <a:lumMod val="50000"/>
+                      <a:lumOff val="50000"/>
+                      <a:alpha val="20000"/>
+                    </a:schemeClr>
+                  </a:glow>
+                  <a:outerShdw blurRad="44450" dist="12700" dir="13860000" algn="tl" rotWithShape="0">
+                    <a:srgbClr val="000000">
+                      <a:alpha val="20000"/>
+                    </a:srgbClr>
+                  </a:outerShdw>
+                </a:effectLst>
+                <a:latin typeface="+mn-lt"/>
+                <a:ea typeface="+mn-ea"/>
+                <a:cs typeface="+mn-cs"/>
+              </a:defRPr>
+            </a:lvl4pPr>
+            <a:lvl5pPr marL="2000250" indent="-171450" algn="l" defTabSz="457200" rtl="0" eaLnBrk="1" latinLnBrk="0" hangingPunct="1">
+              <a:spcBef>
+                <a:spcPct val="20000"/>
+              </a:spcBef>
+              <a:spcAft>
+                <a:spcPts val="600"/>
+              </a:spcAft>
+              <a:buClr>
+                <a:schemeClr val="tx1"/>
+              </a:buClr>
+              <a:buSzPct val="100000"/>
+              <a:buFont typeface="Arial"/>
+              <a:buChar char="•"/>
+              <a:defRPr sz="1400" kern="1200" cap="small">
+                <a:gradFill flip="none" rotWithShape="1">
+                  <a:gsLst>
+                    <a:gs pos="0">
+                      <a:schemeClr val="tx1"/>
+                    </a:gs>
+                    <a:gs pos="100000">
+                      <a:schemeClr val="tx1">
+                        <a:lumMod val="75000"/>
+                      </a:schemeClr>
+                    </a:gs>
+                  </a:gsLst>
+                  <a:lin ang="5580000" scaled="0"/>
+                  <a:tileRect/>
+                </a:gradFill>
+                <a:effectLst>
+                  <a:glow rad="38100">
+                    <a:schemeClr val="bg1">
+                      <a:lumMod val="50000"/>
+                      <a:lumOff val="50000"/>
+                      <a:alpha val="20000"/>
+                    </a:schemeClr>
+                  </a:glow>
+                  <a:outerShdw blurRad="44450" dist="12700" dir="13860000" algn="tl" rotWithShape="0">
+                    <a:srgbClr val="000000">
+                      <a:alpha val="20000"/>
+                    </a:srgbClr>
+                  </a:outerShdw>
+                </a:effectLst>
+                <a:latin typeface="+mn-lt"/>
+                <a:ea typeface="+mn-ea"/>
+                <a:cs typeface="+mn-cs"/>
+              </a:defRPr>
+            </a:lvl5pPr>
+            <a:lvl6pPr marL="2514600" indent="-228600" algn="l" defTabSz="457200" rtl="0" eaLnBrk="1" latinLnBrk="0" hangingPunct="1">
+              <a:spcBef>
+                <a:spcPct val="20000"/>
+              </a:spcBef>
+              <a:spcAft>
+                <a:spcPts val="600"/>
+              </a:spcAft>
+              <a:buClr>
+                <a:schemeClr val="tx1"/>
+              </a:buClr>
+              <a:buSzPct val="100000"/>
+              <a:buFont typeface="Arial"/>
+              <a:buChar char="•"/>
+              <a:defRPr sz="1200" kern="1200" cap="small">
+                <a:gradFill flip="none" rotWithShape="1">
+                  <a:gsLst>
+                    <a:gs pos="0">
+                      <a:schemeClr val="tx1"/>
+                    </a:gs>
+                    <a:gs pos="100000">
+                      <a:schemeClr val="tx1">
+                        <a:lumMod val="75000"/>
+                      </a:schemeClr>
+                    </a:gs>
+                  </a:gsLst>
+                  <a:lin ang="5580000" scaled="0"/>
+                  <a:tileRect/>
+                </a:gradFill>
+                <a:effectLst>
+                  <a:glow rad="38100">
+                    <a:schemeClr val="bg1">
+                      <a:lumMod val="50000"/>
+                      <a:lumOff val="50000"/>
+                      <a:alpha val="20000"/>
+                    </a:schemeClr>
+                  </a:glow>
+                  <a:outerShdw blurRad="44450" dist="12700" dir="13860000" algn="tl" rotWithShape="0">
+                    <a:srgbClr val="000000">
+                      <a:alpha val="20000"/>
+                    </a:srgbClr>
+                  </a:outerShdw>
+                </a:effectLst>
+                <a:latin typeface="+mn-lt"/>
+                <a:ea typeface="+mn-ea"/>
+                <a:cs typeface="+mn-cs"/>
+              </a:defRPr>
+            </a:lvl6pPr>
+            <a:lvl7pPr marL="2971800" indent="-228600" algn="l" defTabSz="457200" rtl="0" eaLnBrk="1" latinLnBrk="0" hangingPunct="1">
+              <a:spcBef>
+                <a:spcPct val="20000"/>
+              </a:spcBef>
+              <a:spcAft>
+                <a:spcPts val="600"/>
+              </a:spcAft>
+              <a:buClr>
+                <a:schemeClr val="tx1"/>
+              </a:buClr>
+              <a:buSzPct val="100000"/>
+              <a:buFont typeface="Arial"/>
+              <a:buChar char="•"/>
+              <a:defRPr sz="1200" kern="1200" cap="small">
+                <a:gradFill flip="none" rotWithShape="1">
+                  <a:gsLst>
+                    <a:gs pos="0">
+                      <a:schemeClr val="tx1"/>
+                    </a:gs>
+                    <a:gs pos="100000">
+                      <a:schemeClr val="tx1">
+                        <a:lumMod val="75000"/>
+                      </a:schemeClr>
+                    </a:gs>
+                  </a:gsLst>
+                  <a:lin ang="5580000" scaled="0"/>
+                  <a:tileRect/>
+                </a:gradFill>
+                <a:effectLst>
+                  <a:glow rad="38100">
+                    <a:schemeClr val="bg1">
+                      <a:lumMod val="50000"/>
+                      <a:lumOff val="50000"/>
+                      <a:alpha val="20000"/>
+                    </a:schemeClr>
+                  </a:glow>
+                  <a:outerShdw blurRad="44450" dist="12700" dir="13860000" algn="tl" rotWithShape="0">
+                    <a:srgbClr val="000000">
+                      <a:alpha val="20000"/>
+                    </a:srgbClr>
+                  </a:outerShdw>
+                </a:effectLst>
+                <a:latin typeface="+mn-lt"/>
+                <a:ea typeface="+mn-ea"/>
+                <a:cs typeface="+mn-cs"/>
+              </a:defRPr>
+            </a:lvl7pPr>
+            <a:lvl8pPr marL="3429000" indent="-228600" algn="l" defTabSz="457200" rtl="0" eaLnBrk="1" latinLnBrk="0" hangingPunct="1">
+              <a:spcBef>
+                <a:spcPct val="20000"/>
+              </a:spcBef>
+              <a:spcAft>
+                <a:spcPts val="600"/>
+              </a:spcAft>
+              <a:buClr>
+                <a:schemeClr val="tx1"/>
+              </a:buClr>
+              <a:buSzPct val="100000"/>
+              <a:buFont typeface="Arial"/>
+              <a:buChar char="•"/>
+              <a:defRPr sz="1200" kern="1200" cap="small">
+                <a:gradFill flip="none" rotWithShape="1">
+                  <a:gsLst>
+                    <a:gs pos="0">
+                      <a:schemeClr val="tx1"/>
+                    </a:gs>
+                    <a:gs pos="100000">
+                      <a:schemeClr val="tx1">
+                        <a:lumMod val="75000"/>
+                      </a:schemeClr>
+                    </a:gs>
+                  </a:gsLst>
+                  <a:lin ang="5580000" scaled="0"/>
+                  <a:tileRect/>
+                </a:gradFill>
+                <a:effectLst>
+                  <a:glow rad="38100">
+                    <a:schemeClr val="bg1">
+                      <a:lumMod val="50000"/>
+                      <a:lumOff val="50000"/>
+                      <a:alpha val="20000"/>
+                    </a:schemeClr>
+                  </a:glow>
+                  <a:outerShdw blurRad="44450" dist="12700" dir="13860000" algn="tl" rotWithShape="0">
+                    <a:srgbClr val="000000">
+                      <a:alpha val="20000"/>
+                    </a:srgbClr>
+                  </a:outerShdw>
+                </a:effectLst>
+                <a:latin typeface="+mn-lt"/>
+                <a:ea typeface="+mn-ea"/>
+                <a:cs typeface="+mn-cs"/>
+              </a:defRPr>
+            </a:lvl8pPr>
+            <a:lvl9pPr marL="3886200" indent="-228600" algn="l" defTabSz="457200" rtl="0" eaLnBrk="1" latinLnBrk="0" hangingPunct="1">
+              <a:spcBef>
+                <a:spcPct val="20000"/>
+              </a:spcBef>
+              <a:spcAft>
+                <a:spcPts val="600"/>
+              </a:spcAft>
+              <a:buClr>
+                <a:schemeClr val="tx1"/>
+              </a:buClr>
+              <a:buSzPct val="100000"/>
+              <a:buFont typeface="Arial"/>
+              <a:buChar char="•"/>
+              <a:defRPr sz="1200" kern="1200" cap="small">
+                <a:gradFill flip="none" rotWithShape="1">
+                  <a:gsLst>
+                    <a:gs pos="0">
+                      <a:schemeClr val="tx1"/>
+                    </a:gs>
+                    <a:gs pos="100000">
+                      <a:schemeClr val="tx1">
+                        <a:lumMod val="75000"/>
+                      </a:schemeClr>
+                    </a:gs>
+                  </a:gsLst>
+                  <a:lin ang="5580000" scaled="0"/>
+                  <a:tileRect/>
+                </a:gradFill>
+                <a:effectLst>
+                  <a:glow rad="38100">
+                    <a:schemeClr val="bg1">
+                      <a:lumMod val="50000"/>
+                      <a:lumOff val="50000"/>
+                      <a:alpha val="20000"/>
+                    </a:schemeClr>
+                  </a:glow>
+                  <a:outerShdw blurRad="44450" dist="12700" dir="13860000" algn="tl" rotWithShape="0">
+                    <a:srgbClr val="000000">
+                      <a:alpha val="20000"/>
+                    </a:srgbClr>
+                  </a:outerShdw>
+                </a:effectLst>
+                <a:latin typeface="+mn-lt"/>
+                <a:ea typeface="+mn-ea"/>
+                <a:cs typeface="+mn-cs"/>
+              </a:defRPr>
+            </a:lvl9pPr>
+          </a:lstStyle>
+          <a:p>
+            <a:pPr marL="0" indent="0">
+              <a:buFont typeface="Arial"/>
+              <a:buNone/>
+            </a:pPr>
+            <a:r>
+              <a:rPr lang="en-US" dirty="0"/>
+              <a:t>Weve observed that</a:t>
+            </a:r>
+            <a:endParaRPr lang="en-US" sz="1600" dirty="0"/>
+          </a:p>
+          <a:p>
+            <a:r>
+              <a:rPr lang="en-US" sz="1600" dirty="0"/>
+              <a:t>The more complex the prompt the more prone it is to be “can answer”</a:t>
+            </a:r>
+          </a:p>
+          <a:p>
+            <a:r>
+              <a:rPr lang="en-US" sz="1600" dirty="0"/>
+              <a:t>There are more answerable cases</a:t>
+            </a:r>
+          </a:p>
+          <a:p>
+            <a:r>
+              <a:rPr lang="en-US" sz="1600" dirty="0"/>
+              <a:t>Enhance users trust</a:t>
+            </a:r>
+          </a:p>
+          <a:p>
+            <a:pPr marL="0" indent="0">
+              <a:buFont typeface="Arial"/>
+              <a:buNone/>
+            </a:pPr>
+            <a:endParaRPr lang="en-GB" dirty="0"/>
           </a:p>
         </p:txBody>
       </p:sp>
@@ -4073,9 +7475,9 @@
 </file>
 
 <file path=ppt/theme/theme1.xml><?xml version="1.0" encoding="utf-8"?>
-<a:theme xmlns:a="http://schemas.openxmlformats.org/drawingml/2006/main" name="Office Theme">
+<a:theme xmlns:a="http://schemas.openxmlformats.org/drawingml/2006/main" name="Mesh">
   <a:themeElements>
-    <a:clrScheme name="Office">
+    <a:clrScheme name="Green Yellow">
       <a:dk1>
         <a:sysClr val="windowText" lastClr="000000"/>
       </a:dk1>
@@ -4083,100 +7485,48 @@
         <a:sysClr val="window" lastClr="FFFFFF"/>
       </a:lt1>
       <a:dk2>
-        <a:srgbClr val="0E2841"/>
+        <a:srgbClr val="455F51"/>
       </a:dk2>
       <a:lt2>
-        <a:srgbClr val="E8E8E8"/>
+        <a:srgbClr val="E2DFCC"/>
       </a:lt2>
       <a:accent1>
-        <a:srgbClr val="156082"/>
+        <a:srgbClr val="99CB38"/>
       </a:accent1>
       <a:accent2>
-        <a:srgbClr val="E97132"/>
+        <a:srgbClr val="63A537"/>
       </a:accent2>
       <a:accent3>
-        <a:srgbClr val="196B24"/>
+        <a:srgbClr val="37A76F"/>
       </a:accent3>
       <a:accent4>
-        <a:srgbClr val="0F9ED5"/>
+        <a:srgbClr val="44C1A3"/>
       </a:accent4>
       <a:accent5>
-        <a:srgbClr val="A02B93"/>
+        <a:srgbClr val="4EB3CF"/>
       </a:accent5>
       <a:accent6>
-        <a:srgbClr val="4EA72E"/>
+        <a:srgbClr val="51C3F9"/>
       </a:accent6>
       <a:hlink>
-        <a:srgbClr val="467886"/>
+        <a:srgbClr val="EE7B08"/>
       </a:hlink>
       <a:folHlink>
-        <a:srgbClr val="96607D"/>
+        <a:srgbClr val="977B2D"/>
       </a:folHlink>
     </a:clrScheme>
-    <a:fontScheme name="Office">
+    <a:fontScheme name="Mesh">
       <a:majorFont>
-        <a:latin typeface="Aptos Display" panose="02110004020202020204"/>
+        <a:latin typeface="Century Gothic" panose="020B0502020202020204"/>
         <a:ea typeface=""/>
         <a:cs typeface=""/>
-        <a:font script="Jpan" typeface="游ゴシック Light"/>
+        <a:font script="Jpan" typeface="ＭＳ ゴシック"/>
         <a:font script="Hang" typeface="맑은 고딕"/>
-        <a:font script="Hans" typeface="等线 Light"/>
+        <a:font script="Hans" typeface="宋体"/>
         <a:font script="Hant" typeface="新細明體"/>
-        <a:font script="Arab" typeface="Times New Roman"/>
-        <a:font script="Hebr" typeface="Times New Roman"/>
-        <a:font script="Thai" typeface="Angsana New"/>
-        <a:font script="Ethi" typeface="Nyala"/>
-        <a:font script="Beng" typeface="Vrinda"/>
-        <a:font script="Gujr" typeface="Shruti"/>
-        <a:font script="Khmr" typeface="MoolBoran"/>
-        <a:font script="Knda" typeface="Tunga"/>
-        <a:font script="Guru" typeface="Raavi"/>
-        <a:font script="Cans" typeface="Euphemia"/>
-        <a:font script="Cher" typeface="Plantagenet Cherokee"/>
-        <a:font script="Yiii" typeface="Microsoft Yi Baiti"/>
-        <a:font script="Tibt" typeface="Microsoft Himalaya"/>
-        <a:font script="Thaa" typeface="MV Boli"/>
-        <a:font script="Deva" typeface="Mangal"/>
-        <a:font script="Telu" typeface="Gautami"/>
-        <a:font script="Taml" typeface="Latha"/>
-        <a:font script="Syrc" typeface="Estrangelo Edessa"/>
-        <a:font script="Orya" typeface="Kalinga"/>
-        <a:font script="Mlym" typeface="Kartika"/>
-        <a:font script="Laoo" typeface="DokChampa"/>
-        <a:font script="Sinh" typeface="Iskoola Pota"/>
-        <a:font script="Mong" typeface="Mongolian Baiti"/>
-        <a:font script="Viet" typeface="Times New Roman"/>
-        <a:font script="Uigh" typeface="Microsoft Uighur"/>
-        <a:font script="Geor" typeface="Sylfaen"/>
-        <a:font script="Armn" typeface="Arial"/>
-        <a:font script="Bugi" typeface="Leelawadee UI"/>
-        <a:font script="Bopo" typeface="Microsoft JhengHei"/>
-        <a:font script="Java" typeface="Javanese Text"/>
-        <a:font script="Lisu" typeface="Segoe UI"/>
-        <a:font script="Mymr" typeface="Myanmar Text"/>
-        <a:font script="Nkoo" typeface="Ebrima"/>
-        <a:font script="Olck" typeface="Nirmala UI"/>
-        <a:font script="Osma" typeface="Ebrima"/>
-        <a:font script="Phag" typeface="Phagspa"/>
-        <a:font script="Syrn" typeface="Estrangelo Edessa"/>
-        <a:font script="Syrj" typeface="Estrangelo Edessa"/>
-        <a:font script="Syre" typeface="Estrangelo Edessa"/>
-        <a:font script="Sora" typeface="Nirmala UI"/>
-        <a:font script="Tale" typeface="Microsoft Tai Le"/>
-        <a:font script="Talu" typeface="Microsoft New Tai Lue"/>
-        <a:font script="Tfng" typeface="Ebrima"/>
-      </a:majorFont>
-      <a:minorFont>
-        <a:latin typeface="Aptos" panose="02110004020202020204"/>
-        <a:ea typeface=""/>
-        <a:cs typeface=""/>
-        <a:font script="Jpan" typeface="游ゴシック"/>
-        <a:font script="Hang" typeface="맑은 고딕"/>
-        <a:font script="Hans" typeface="等线"/>
-        <a:font script="Hant" typeface="新細明體"/>
-        <a:font script="Arab" typeface="Arial"/>
-        <a:font script="Hebr" typeface="Arial"/>
-        <a:font script="Thai" typeface="Cordia New"/>
+        <a:font script="Arab" typeface="Tahoma"/>
+        <a:font script="Hebr" typeface="Gisha"/>
+        <a:font script="Thai" typeface="DilleniaUPC"/>
         <a:font script="Ethi" typeface="Nyala"/>
         <a:font script="Beng" typeface="Vrinda"/>
         <a:font script="Gujr" typeface="Shruti"/>
@@ -4197,29 +7547,47 @@
         <a:font script="Laoo" typeface="DokChampa"/>
         <a:font script="Sinh" typeface="Iskoola Pota"/>
         <a:font script="Mong" typeface="Mongolian Baiti"/>
-        <a:font script="Viet" typeface="Arial"/>
+        <a:font script="Viet" typeface="Tahoma"/>
         <a:font script="Uigh" typeface="Microsoft Uighur"/>
         <a:font script="Geor" typeface="Sylfaen"/>
-        <a:font script="Armn" typeface="Arial"/>
-        <a:font script="Bugi" typeface="Leelawadee UI"/>
-        <a:font script="Bopo" typeface="Microsoft JhengHei"/>
-        <a:font script="Java" typeface="Javanese Text"/>
-        <a:font script="Lisu" typeface="Segoe UI"/>
-        <a:font script="Mymr" typeface="Myanmar Text"/>
-        <a:font script="Nkoo" typeface="Ebrima"/>
-        <a:font script="Olck" typeface="Nirmala UI"/>
-        <a:font script="Osma" typeface="Ebrima"/>
-        <a:font script="Phag" typeface="Phagspa"/>
-        <a:font script="Syrn" typeface="Estrangelo Edessa"/>
-        <a:font script="Syrj" typeface="Estrangelo Edessa"/>
-        <a:font script="Syre" typeface="Estrangelo Edessa"/>
-        <a:font script="Sora" typeface="Nirmala UI"/>
-        <a:font script="Tale" typeface="Microsoft Tai Le"/>
-        <a:font script="Talu" typeface="Microsoft New Tai Lue"/>
-        <a:font script="Tfng" typeface="Ebrima"/>
+      </a:majorFont>
+      <a:minorFont>
+        <a:latin typeface="Century Gothic" panose="020B0502020202020204"/>
+        <a:ea typeface=""/>
+        <a:cs typeface=""/>
+        <a:font script="Jpan" typeface="ＭＳ ゴシック"/>
+        <a:font script="Hang" typeface="맑은 고딕"/>
+        <a:font script="Hans" typeface="宋体"/>
+        <a:font script="Hant" typeface="新細明體"/>
+        <a:font script="Arab" typeface="Tahoma"/>
+        <a:font script="Hebr" typeface="Gisha"/>
+        <a:font script="Thai" typeface="DilleniaUPC"/>
+        <a:font script="Ethi" typeface="Nyala"/>
+        <a:font script="Beng" typeface="Vrinda"/>
+        <a:font script="Gujr" typeface="Shruti"/>
+        <a:font script="Khmr" typeface="DaunPenh"/>
+        <a:font script="Knda" typeface="Tunga"/>
+        <a:font script="Guru" typeface="Raavi"/>
+        <a:font script="Cans" typeface="Euphemia"/>
+        <a:font script="Cher" typeface="Plantagenet Cherokee"/>
+        <a:font script="Yiii" typeface="Microsoft Yi Baiti"/>
+        <a:font script="Tibt" typeface="Microsoft Himalaya"/>
+        <a:font script="Thaa" typeface="MV Boli"/>
+        <a:font script="Deva" typeface="Mangal"/>
+        <a:font script="Telu" typeface="Gautami"/>
+        <a:font script="Taml" typeface="Latha"/>
+        <a:font script="Syrc" typeface="Estrangelo Edessa"/>
+        <a:font script="Orya" typeface="Kalinga"/>
+        <a:font script="Mlym" typeface="Kartika"/>
+        <a:font script="Laoo" typeface="DokChampa"/>
+        <a:font script="Sinh" typeface="Iskoola Pota"/>
+        <a:font script="Mong" typeface="Mongolian Baiti"/>
+        <a:font script="Viet" typeface="Verdana"/>
+        <a:font script="Uigh" typeface="Microsoft Uighur"/>
+        <a:font script="Geor" typeface="Sylfaen"/>
       </a:minorFont>
     </a:fontScheme>
-    <a:fmtScheme name="Office">
+    <a:fmtScheme name="Mesh">
       <a:fillStyleLst>
         <a:solidFill>
           <a:schemeClr val="phClr"/>
@@ -4228,23 +7596,13 @@
           <a:gsLst>
             <a:gs pos="0">
               <a:schemeClr val="phClr">
+                <a:tint val="60000"/>
                 <a:lumMod val="110000"/>
-                <a:satMod val="105000"/>
-                <a:tint val="67000"/>
-              </a:schemeClr>
-            </a:gs>
-            <a:gs pos="50000">
-              <a:schemeClr val="phClr">
-                <a:lumMod val="105000"/>
-                <a:satMod val="103000"/>
-                <a:tint val="73000"/>
               </a:schemeClr>
             </a:gs>
             <a:gs pos="100000">
               <a:schemeClr val="phClr">
-                <a:lumMod val="105000"/>
-                <a:satMod val="109000"/>
-                <a:tint val="81000"/>
+                <a:tint val="82000"/>
               </a:schemeClr>
             </a:gs>
           </a:gsLst>
@@ -4254,23 +7612,14 @@
           <a:gsLst>
             <a:gs pos="0">
               <a:schemeClr val="phClr">
-                <a:satMod val="103000"/>
-                <a:lumMod val="102000"/>
-                <a:tint val="94000"/>
-              </a:schemeClr>
-            </a:gs>
-            <a:gs pos="50000">
-              <a:schemeClr val="phClr">
-                <a:satMod val="110000"/>
-                <a:lumMod val="100000"/>
-                <a:shade val="100000"/>
+                <a:tint val="96000"/>
+                <a:lumMod val="104000"/>
               </a:schemeClr>
             </a:gs>
             <a:gs pos="100000">
               <a:schemeClr val="phClr">
-                <a:lumMod val="99000"/>
-                <a:satMod val="120000"/>
-                <a:shade val="78000"/>
+                <a:shade val="84000"/>
+                <a:lumMod val="84000"/>
               </a:schemeClr>
             </a:gs>
           </a:gsLst>
@@ -4278,26 +7627,23 @@
         </a:gradFill>
       </a:fillStyleLst>
       <a:lnStyleLst>
-        <a:ln w="12700" cap="flat" cmpd="sng" algn="ctr">
+        <a:ln w="9525" cap="rnd" cmpd="sng" algn="ctr">
           <a:solidFill>
             <a:schemeClr val="phClr"/>
           </a:solidFill>
           <a:prstDash val="solid"/>
-          <a:miter lim="800000"/>
         </a:ln>
-        <a:ln w="19050" cap="flat" cmpd="sng" algn="ctr">
+        <a:ln w="19050" cap="rnd" cmpd="sng" algn="ctr">
           <a:solidFill>
             <a:schemeClr val="phClr"/>
           </a:solidFill>
           <a:prstDash val="solid"/>
-          <a:miter lim="800000"/>
         </a:ln>
-        <a:ln w="25400" cap="flat" cmpd="sng" algn="ctr">
+        <a:ln w="25400" cap="rnd" cmpd="sng" algn="ctr">
           <a:solidFill>
             <a:schemeClr val="phClr"/>
           </a:solidFill>
           <a:prstDash val="solid"/>
-          <a:miter lim="800000"/>
         </a:ln>
       </a:lnStyleLst>
       <a:effectStyleLst>
@@ -4305,83 +7651,80 @@
           <a:effectLst/>
         </a:effectStyle>
         <a:effectStyle>
-          <a:effectLst/>
+          <a:effectLst>
+            <a:innerShdw blurRad="50800" dist="25400" dir="13500000">
+              <a:srgbClr val="000000">
+                <a:alpha val="55000"/>
+              </a:srgbClr>
+            </a:innerShdw>
+          </a:effectLst>
         </a:effectStyle>
         <a:effectStyle>
           <a:effectLst>
-            <a:outerShdw blurRad="57150" dist="19050" dir="5400000" algn="ctr" rotWithShape="0">
+            <a:outerShdw blurRad="50800" dist="38100" dir="5400000" rotWithShape="0">
               <a:srgbClr val="000000">
-                <a:alpha val="63000"/>
+                <a:alpha val="60000"/>
               </a:srgbClr>
             </a:outerShdw>
           </a:effectLst>
+          <a:scene3d>
+            <a:camera prst="orthographicFront">
+              <a:rot lat="0" lon="0" rev="0"/>
+            </a:camera>
+            <a:lightRig rig="threePt" dir="tl"/>
+          </a:scene3d>
+          <a:sp3d>
+            <a:bevelT w="25400" h="25400" prst="slope"/>
+          </a:sp3d>
         </a:effectStyle>
       </a:effectStyleLst>
       <a:bgFillStyleLst>
         <a:solidFill>
           <a:schemeClr val="phClr"/>
         </a:solidFill>
-        <a:solidFill>
-          <a:schemeClr val="phClr">
-            <a:tint val="95000"/>
-            <a:satMod val="170000"/>
-          </a:schemeClr>
-        </a:solidFill>
         <a:gradFill rotWithShape="1">
           <a:gsLst>
             <a:gs pos="0">
               <a:schemeClr val="phClr">
-                <a:tint val="93000"/>
-                <a:satMod val="150000"/>
-                <a:shade val="98000"/>
-                <a:lumMod val="102000"/>
-              </a:schemeClr>
-            </a:gs>
-            <a:gs pos="50000">
-              <a:schemeClr val="phClr">
-                <a:tint val="98000"/>
-                <a:satMod val="130000"/>
-                <a:shade val="90000"/>
-                <a:lumMod val="103000"/>
+                <a:tint val="90000"/>
+                <a:lumMod val="110000"/>
               </a:schemeClr>
             </a:gs>
             <a:gs pos="100000">
               <a:schemeClr val="phClr">
-                <a:shade val="63000"/>
-                <a:satMod val="120000"/>
+                <a:shade val="64000"/>
+                <a:lumMod val="98000"/>
               </a:schemeClr>
             </a:gs>
           </a:gsLst>
           <a:lin ang="5400000" scaled="0"/>
         </a:gradFill>
+        <a:blipFill rotWithShape="1">
+          <a:blip xmlns:r="http://schemas.openxmlformats.org/officeDocument/2006/relationships" r:embed="rId1">
+            <a:duotone>
+              <a:schemeClr val="phClr">
+                <a:shade val="28000"/>
+                <a:satMod val="94000"/>
+                <a:lumMod val="20000"/>
+              </a:schemeClr>
+              <a:schemeClr val="phClr">
+                <a:tint val="94000"/>
+                <a:shade val="84000"/>
+                <a:satMod val="148000"/>
+                <a:lumMod val="114000"/>
+              </a:schemeClr>
+            </a:duotone>
+          </a:blip>
+          <a:stretch/>
+        </a:blipFill>
       </a:bgFillStyleLst>
     </a:fmtScheme>
   </a:themeElements>
-  <a:objectDefaults>
-    <a:lnDef>
-      <a:spPr/>
-      <a:bodyPr/>
-      <a:lstStyle/>
-      <a:style>
-        <a:lnRef idx="2">
-          <a:schemeClr val="accent1"/>
-        </a:lnRef>
-        <a:fillRef idx="0">
-          <a:schemeClr val="accent1"/>
-        </a:fillRef>
-        <a:effectRef idx="1">
-          <a:schemeClr val="accent1"/>
-        </a:effectRef>
-        <a:fontRef idx="minor">
-          <a:schemeClr val="tx1"/>
-        </a:fontRef>
-      </a:style>
-    </a:lnDef>
-  </a:objectDefaults>
+  <a:objectDefaults/>
   <a:extraClrSchemeLst/>
   <a:extLst>
     <a:ext uri="{05A4C25C-085E-4340-85A3-A5531E510DB2}">
-      <thm15:themeFamily xmlns:thm15="http://schemas.microsoft.com/office/thememl/2012/main" name="Office Theme" id="{2E142A2C-CD16-42D6-873A-C26D2A0506FA}" vid="{1BDDFF52-6CD6-40A5-AB3C-68EB2F1E4D0A}"/>
+      <thm15:themeFamily xmlns:thm15="http://schemas.microsoft.com/office/thememl/2012/main" name="Mesh" id="{789EC3FE-34FD-429C-9918-760025E6C145}" vid="{B8BE45C0-8141-4D58-8C71-A009BC26FBBB}"/>
     </a:ext>
   </a:extLst>
 </a:theme>

--- a/exe2/presentation.pptx
+++ b/exe2/presentation.pptx
@@ -8,6 +8,9 @@
     <p:sldId id="256" r:id="rId2"/>
     <p:sldId id="257" r:id="rId3"/>
     <p:sldId id="258" r:id="rId4"/>
+    <p:sldId id="259" r:id="rId5"/>
+    <p:sldId id="260" r:id="rId6"/>
+    <p:sldId id="261" r:id="rId7"/>
   </p:sldIdLst>
   <p:sldSz cx="12192000" cy="6858000"/>
   <p:notesSz cx="6858000" cy="9144000"/>
@@ -5826,95 +5829,10 @@
           <a:lstStyle/>
           <a:p>
             <a:r>
-              <a:rPr lang="en-US" dirty="0"/>
-              <a:t>Problem: can </a:t>
+              <a:rPr lang="en-US" b="1" dirty="0"/>
+              <a:t>Problem: can the agent answer?</a:t>
             </a:r>
-            <a:r>
-              <a:rPr lang="en-US" dirty="0" err="1"/>
-              <a:t>theagent</a:t>
-            </a:r>
-            <a:r>
-              <a:rPr lang="en-US" dirty="0"/>
-              <a:t> answer?</a:t>
-            </a:r>
-            <a:endParaRPr lang="en-GB" dirty="0"/>
-          </a:p>
-        </p:txBody>
-      </p:sp>
-      <p:sp>
-        <p:nvSpPr>
-          <p:cNvPr id="3" name="Content Placeholder 2">
-            <a:extLst>
-              <a:ext uri="{FF2B5EF4-FFF2-40B4-BE49-F238E27FC236}">
-                <a16:creationId xmlns:a16="http://schemas.microsoft.com/office/drawing/2014/main" id="{5F359643-5B90-5775-DB15-811F84BF1579}"/>
-              </a:ext>
-            </a:extLst>
-          </p:cNvPr>
-          <p:cNvSpPr>
-            <a:spLocks noGrp="1"/>
-          </p:cNvSpPr>
-          <p:nvPr>
-            <p:ph idx="1"/>
-          </p:nvPr>
-        </p:nvSpPr>
-        <p:spPr>
-          <a:xfrm>
-            <a:off x="838200" y="1825625"/>
-            <a:ext cx="4421957" cy="4351338"/>
-          </a:xfrm>
-        </p:spPr>
-        <p:txBody>
-          <a:bodyPr/>
-          <a:lstStyle/>
-          <a:p>
-            <a:pPr marL="0" indent="0">
-              <a:buNone/>
-            </a:pPr>
-            <a:r>
-              <a:rPr lang="en-US" dirty="0"/>
-              <a:t>Objective</a:t>
-            </a:r>
-          </a:p>
-          <a:p>
-            <a:pPr marL="0" indent="0">
-              <a:buNone/>
-            </a:pPr>
-            <a:r>
-              <a:rPr lang="en-US" sz="1600" dirty="0"/>
-              <a:t>Improve reliability, preventing the agent from being overconfident. Giving it the ability to reject a prompt\ ask based on the users query.</a:t>
-            </a:r>
-          </a:p>
-          <a:p>
-            <a:r>
-              <a:rPr lang="en-US" sz="1600" dirty="0"/>
-              <a:t>Detect not </a:t>
-            </a:r>
-            <a:r>
-              <a:rPr lang="en-US" sz="1600" dirty="0" err="1"/>
-              <a:t>can_answer</a:t>
-            </a:r>
-            <a:r>
-              <a:rPr lang="en-US" sz="1600" dirty="0"/>
-              <a:t> </a:t>
-            </a:r>
-          </a:p>
-          <a:p>
-            <a:r>
-              <a:rPr lang="en-US" sz="1600" dirty="0"/>
-              <a:t>Optimize resource allocation</a:t>
-            </a:r>
-          </a:p>
-          <a:p>
-            <a:r>
-              <a:rPr lang="en-US" sz="1600" dirty="0"/>
-              <a:t>Enhance users trust</a:t>
-            </a:r>
-          </a:p>
-          <a:p>
-            <a:pPr marL="0" indent="0">
-              <a:buNone/>
-            </a:pPr>
-            <a:endParaRPr lang="en-GB" dirty="0"/>
+            <a:endParaRPr lang="en-GB" b="1" dirty="0"/>
           </a:p>
         </p:txBody>
       </p:sp>
@@ -6571,44 +6489,453 @@
               <a:buFont typeface="Arial" panose="020B0604020202020204" pitchFamily="34" charset="0"/>
               <a:buNone/>
             </a:pPr>
+            <a:endParaRPr lang="en-GB" dirty="0"/>
+          </a:p>
+        </p:txBody>
+      </p:sp>
+      <p:sp>
+        <p:nvSpPr>
+          <p:cNvPr id="7" name="Rectangle: Rounded Corners 6">
+            <a:extLst>
+              <a:ext uri="{FF2B5EF4-FFF2-40B4-BE49-F238E27FC236}">
+                <a16:creationId xmlns:a16="http://schemas.microsoft.com/office/drawing/2014/main" id="{2ECE2C88-6E35-6411-2E87-9176C5A66D9E}"/>
+              </a:ext>
+            </a:extLst>
+          </p:cNvPr>
+          <p:cNvSpPr/>
+          <p:nvPr/>
+        </p:nvSpPr>
+        <p:spPr>
+          <a:xfrm>
+            <a:off x="1065195" y="2263365"/>
+            <a:ext cx="4130512" cy="3475858"/>
+          </a:xfrm>
+          <a:prstGeom prst="roundRect">
+            <a:avLst/>
+          </a:prstGeom>
+          <a:solidFill>
+            <a:srgbClr val="000000">
+              <a:alpha val="30196"/>
+            </a:srgbClr>
+          </a:solidFill>
+          <a:ln>
+            <a:noFill/>
+          </a:ln>
+        </p:spPr>
+        <p:style>
+          <a:lnRef idx="2">
+            <a:schemeClr val="accent1">
+              <a:shade val="15000"/>
+            </a:schemeClr>
+          </a:lnRef>
+          <a:fillRef idx="1">
+            <a:schemeClr val="accent1"/>
+          </a:fillRef>
+          <a:effectRef idx="0">
+            <a:schemeClr val="accent1"/>
+          </a:effectRef>
+          <a:fontRef idx="minor">
+            <a:schemeClr val="lt1"/>
+          </a:fontRef>
+        </p:style>
+        <p:txBody>
+          <a:bodyPr rtlCol="0" anchor="ctr"/>
+          <a:lstStyle/>
+          <a:p>
             <a:r>
-              <a:rPr lang="en-US" dirty="0"/>
+              <a:rPr lang="en-US" sz="2000" cap="small" dirty="0">
+                <a:solidFill>
+                  <a:schemeClr val="tx1"/>
+                </a:solidFill>
+                <a:effectLst>
+                  <a:glow rad="38100">
+                    <a:schemeClr val="bg1">
+                      <a:lumMod val="50000"/>
+                      <a:lumOff val="50000"/>
+                      <a:alpha val="20000"/>
+                    </a:schemeClr>
+                  </a:glow>
+                  <a:outerShdw blurRad="44450" dist="12700" dir="13860000" algn="tl" rotWithShape="0">
+                    <a:srgbClr val="000000">
+                      <a:alpha val="20000"/>
+                    </a:srgbClr>
+                  </a:outerShdw>
+                </a:effectLst>
+              </a:rPr>
+              <a:t>Objective</a:t>
+            </a:r>
+            <a:endParaRPr lang="en-US" sz="1600" cap="small" dirty="0">
+              <a:solidFill>
+                <a:schemeClr val="tx1"/>
+              </a:solidFill>
+              <a:effectLst>
+                <a:glow rad="38100">
+                  <a:schemeClr val="bg1">
+                    <a:lumMod val="50000"/>
+                    <a:lumOff val="50000"/>
+                    <a:alpha val="20000"/>
+                  </a:schemeClr>
+                </a:glow>
+                <a:outerShdw blurRad="44450" dist="12700" dir="13860000" algn="tl" rotWithShape="0">
+                  <a:srgbClr val="000000">
+                    <a:alpha val="20000"/>
+                  </a:srgbClr>
+                </a:outerShdw>
+              </a:effectLst>
+            </a:endParaRPr>
+          </a:p>
+          <a:p>
+            <a:r>
+              <a:rPr lang="en-US" sz="1600" cap="small" dirty="0">
+                <a:solidFill>
+                  <a:schemeClr val="tx1"/>
+                </a:solidFill>
+                <a:effectLst>
+                  <a:glow rad="38100">
+                    <a:schemeClr val="bg1">
+                      <a:lumMod val="50000"/>
+                      <a:lumOff val="50000"/>
+                      <a:alpha val="20000"/>
+                    </a:schemeClr>
+                  </a:glow>
+                  <a:outerShdw blurRad="44450" dist="12700" dir="13860000" algn="tl" rotWithShape="0">
+                    <a:srgbClr val="000000">
+                      <a:alpha val="20000"/>
+                    </a:srgbClr>
+                  </a:outerShdw>
+                </a:effectLst>
+              </a:rPr>
+              <a:t>Improve reliability, preventing the agent from being overconfident. Giving it the ability to reject a prompt\ ask based on the users query.</a:t>
+            </a:r>
+          </a:p>
+          <a:p>
+            <a:pPr marL="285750" indent="-285750">
+              <a:buFont typeface="Arial" panose="020B0604020202020204" pitchFamily="34" charset="0"/>
+              <a:buChar char="•"/>
+            </a:pPr>
+            <a:r>
+              <a:rPr lang="en-US" sz="1600" cap="small" dirty="0">
+                <a:solidFill>
+                  <a:schemeClr val="tx1"/>
+                </a:solidFill>
+                <a:effectLst>
+                  <a:glow rad="38100">
+                    <a:schemeClr val="bg1">
+                      <a:lumMod val="50000"/>
+                      <a:lumOff val="50000"/>
+                      <a:alpha val="20000"/>
+                    </a:schemeClr>
+                  </a:glow>
+                  <a:outerShdw blurRad="44450" dist="12700" dir="13860000" algn="tl" rotWithShape="0">
+                    <a:srgbClr val="000000">
+                      <a:alpha val="20000"/>
+                    </a:srgbClr>
+                  </a:outerShdw>
+                </a:effectLst>
+              </a:rPr>
+              <a:t>Detect not </a:t>
+            </a:r>
+            <a:r>
+              <a:rPr lang="en-US" sz="1600" cap="small" dirty="0" err="1">
+                <a:solidFill>
+                  <a:schemeClr val="tx1"/>
+                </a:solidFill>
+                <a:effectLst>
+                  <a:glow rad="38100">
+                    <a:schemeClr val="bg1">
+                      <a:lumMod val="50000"/>
+                      <a:lumOff val="50000"/>
+                      <a:alpha val="20000"/>
+                    </a:schemeClr>
+                  </a:glow>
+                  <a:outerShdw blurRad="44450" dist="12700" dir="13860000" algn="tl" rotWithShape="0">
+                    <a:srgbClr val="000000">
+                      <a:alpha val="20000"/>
+                    </a:srgbClr>
+                  </a:outerShdw>
+                </a:effectLst>
+              </a:rPr>
+              <a:t>can_answer</a:t>
+            </a:r>
+            <a:r>
+              <a:rPr lang="en-US" sz="1600" cap="small" dirty="0">
+                <a:solidFill>
+                  <a:schemeClr val="tx1"/>
+                </a:solidFill>
+                <a:effectLst>
+                  <a:glow rad="38100">
+                    <a:schemeClr val="bg1">
+                      <a:lumMod val="50000"/>
+                      <a:lumOff val="50000"/>
+                      <a:alpha val="20000"/>
+                    </a:schemeClr>
+                  </a:glow>
+                  <a:outerShdw blurRad="44450" dist="12700" dir="13860000" algn="tl" rotWithShape="0">
+                    <a:srgbClr val="000000">
+                      <a:alpha val="20000"/>
+                    </a:srgbClr>
+                  </a:outerShdw>
+                </a:effectLst>
+              </a:rPr>
+              <a:t> </a:t>
+            </a:r>
+          </a:p>
+          <a:p>
+            <a:pPr marL="285750" indent="-285750">
+              <a:buFont typeface="Arial" panose="020B0604020202020204" pitchFamily="34" charset="0"/>
+              <a:buChar char="•"/>
+            </a:pPr>
+            <a:r>
+              <a:rPr lang="en-US" sz="1600" cap="small" dirty="0">
+                <a:solidFill>
+                  <a:schemeClr val="tx1"/>
+                </a:solidFill>
+                <a:effectLst>
+                  <a:glow rad="38100">
+                    <a:schemeClr val="bg1">
+                      <a:lumMod val="50000"/>
+                      <a:lumOff val="50000"/>
+                      <a:alpha val="20000"/>
+                    </a:schemeClr>
+                  </a:glow>
+                  <a:outerShdw blurRad="44450" dist="12700" dir="13860000" algn="tl" rotWithShape="0">
+                    <a:srgbClr val="000000">
+                      <a:alpha val="20000"/>
+                    </a:srgbClr>
+                  </a:outerShdw>
+                </a:effectLst>
+              </a:rPr>
+              <a:t>Optimize resource allocation</a:t>
+            </a:r>
+          </a:p>
+          <a:p>
+            <a:pPr marL="285750" indent="-285750">
+              <a:buFont typeface="Arial" panose="020B0604020202020204" pitchFamily="34" charset="0"/>
+              <a:buChar char="•"/>
+            </a:pPr>
+            <a:r>
+              <a:rPr lang="en-US" sz="1600" cap="small" dirty="0">
+                <a:solidFill>
+                  <a:schemeClr val="tx1"/>
+                </a:solidFill>
+                <a:effectLst>
+                  <a:glow rad="38100">
+                    <a:schemeClr val="bg1">
+                      <a:lumMod val="50000"/>
+                      <a:lumOff val="50000"/>
+                      <a:alpha val="20000"/>
+                    </a:schemeClr>
+                  </a:glow>
+                  <a:outerShdw blurRad="44450" dist="12700" dir="13860000" algn="tl" rotWithShape="0">
+                    <a:srgbClr val="000000">
+                      <a:alpha val="20000"/>
+                    </a:srgbClr>
+                  </a:outerShdw>
+                </a:effectLst>
+              </a:rPr>
+              <a:t>Enhance users trust</a:t>
+            </a:r>
+          </a:p>
+        </p:txBody>
+      </p:sp>
+      <p:sp>
+        <p:nvSpPr>
+          <p:cNvPr id="10" name="Rectangle: Rounded Corners 9">
+            <a:extLst>
+              <a:ext uri="{FF2B5EF4-FFF2-40B4-BE49-F238E27FC236}">
+                <a16:creationId xmlns:a16="http://schemas.microsoft.com/office/drawing/2014/main" id="{62F7CECE-EC22-5C21-CDB1-04D0DB7169CE}"/>
+              </a:ext>
+            </a:extLst>
+          </p:cNvPr>
+          <p:cNvSpPr/>
+          <p:nvPr/>
+        </p:nvSpPr>
+        <p:spPr>
+          <a:xfrm>
+            <a:off x="6230350" y="2263365"/>
+            <a:ext cx="4130512" cy="3475858"/>
+          </a:xfrm>
+          <a:prstGeom prst="roundRect">
+            <a:avLst/>
+          </a:prstGeom>
+          <a:solidFill>
+            <a:srgbClr val="000000">
+              <a:alpha val="30196"/>
+            </a:srgbClr>
+          </a:solidFill>
+          <a:ln>
+            <a:noFill/>
+          </a:ln>
+        </p:spPr>
+        <p:style>
+          <a:lnRef idx="2">
+            <a:schemeClr val="accent1">
+              <a:shade val="15000"/>
+            </a:schemeClr>
+          </a:lnRef>
+          <a:fillRef idx="1">
+            <a:schemeClr val="accent1"/>
+          </a:fillRef>
+          <a:effectRef idx="0">
+            <a:schemeClr val="accent1"/>
+          </a:effectRef>
+          <a:fontRef idx="minor">
+            <a:schemeClr val="lt1"/>
+          </a:fontRef>
+        </p:style>
+        <p:txBody>
+          <a:bodyPr rtlCol="0" anchor="ctr"/>
+          <a:lstStyle/>
+          <a:p>
+            <a:r>
+              <a:rPr lang="en-US" sz="2000" cap="small" dirty="0">
+                <a:solidFill>
+                  <a:schemeClr val="tx1"/>
+                </a:solidFill>
+                <a:effectLst>
+                  <a:glow rad="38100">
+                    <a:schemeClr val="bg1">
+                      <a:lumMod val="50000"/>
+                      <a:lumOff val="50000"/>
+                      <a:alpha val="20000"/>
+                    </a:schemeClr>
+                  </a:glow>
+                  <a:outerShdw blurRad="44450" dist="12700" dir="13860000" algn="tl" rotWithShape="0">
+                    <a:srgbClr val="000000">
+                      <a:alpha val="20000"/>
+                    </a:srgbClr>
+                  </a:outerShdw>
+                </a:effectLst>
+              </a:rPr>
               <a:t>Dataset </a:t>
             </a:r>
           </a:p>
           <a:p>
-            <a:pPr marL="0" indent="0">
+            <a:r>
+              <a:rPr lang="en-US" sz="1600" cap="small" dirty="0">
+                <a:solidFill>
+                  <a:schemeClr val="tx1"/>
+                </a:solidFill>
+                <a:effectLst>
+                  <a:glow rad="38100">
+                    <a:schemeClr val="bg1">
+                      <a:lumMod val="50000"/>
+                      <a:lumOff val="50000"/>
+                      <a:alpha val="20000"/>
+                    </a:schemeClr>
+                  </a:glow>
+                  <a:outerShdw blurRad="44450" dist="12700" dir="13860000" algn="tl" rotWithShape="0">
+                    <a:srgbClr val="000000">
+                      <a:alpha val="20000"/>
+                    </a:srgbClr>
+                  </a:outerShdw>
+                </a:effectLst>
+              </a:rPr>
+              <a:t>A collection of over 3.4k task records measuring how compatible a prompt is to the domains of the AI</a:t>
+            </a:r>
+          </a:p>
+          <a:p>
+            <a:pPr marL="285750" indent="-285750">
               <a:buFont typeface="Arial" panose="020B0604020202020204" pitchFamily="34" charset="0"/>
-              <a:buNone/>
+              <a:buChar char="•"/>
             </a:pPr>
             <a:r>
-              <a:rPr lang="en-US" dirty="0"/>
-              <a:t>A collection of over 3.4k task records measuring how compatible a prompt is to the domains of the AI</a:t>
+              <a:rPr lang="en-US" sz="1600" cap="small" dirty="0">
+                <a:solidFill>
+                  <a:schemeClr val="tx1"/>
+                </a:solidFill>
+                <a:effectLst>
+                  <a:glow rad="38100">
+                    <a:schemeClr val="bg1">
+                      <a:lumMod val="50000"/>
+                      <a:lumOff val="50000"/>
+                      <a:alpha val="20000"/>
+                    </a:schemeClr>
+                  </a:glow>
+                  <a:outerShdw blurRad="44450" dist="12700" dir="13860000" algn="tl" rotWithShape="0">
+                    <a:srgbClr val="000000">
+                      <a:alpha val="20000"/>
+                    </a:srgbClr>
+                  </a:outerShdw>
+                </a:effectLst>
+              </a:rPr>
+              <a:t>Binary results</a:t>
             </a:r>
           </a:p>
           <a:p>
+            <a:pPr marL="285750" indent="-285750">
+              <a:buFont typeface="Arial" panose="020B0604020202020204" pitchFamily="34" charset="0"/>
+              <a:buChar char="•"/>
+            </a:pPr>
             <a:r>
-              <a:rPr lang="en-US" dirty="0"/>
-              <a:t>Binary </a:t>
-            </a:r>
-            <a:r>
-              <a:rPr lang="en-US" dirty="0" err="1"/>
-              <a:t>resilts</a:t>
-            </a:r>
-            <a:endParaRPr lang="en-US" dirty="0"/>
-          </a:p>
-          <a:p>
-            <a:r>
-              <a:rPr lang="en-US" dirty="0"/>
+              <a:rPr lang="en-US" sz="1600" cap="small" dirty="0">
+                <a:solidFill>
+                  <a:schemeClr val="tx1"/>
+                </a:solidFill>
+                <a:effectLst>
+                  <a:glow rad="38100">
+                    <a:schemeClr val="bg1">
+                      <a:lumMod val="50000"/>
+                      <a:lumOff val="50000"/>
+                      <a:alpha val="20000"/>
+                    </a:schemeClr>
+                  </a:glow>
+                  <a:outerShdw blurRad="44450" dist="12700" dir="13860000" algn="tl" rotWithShape="0">
+                    <a:srgbClr val="000000">
+                      <a:alpha val="20000"/>
+                    </a:srgbClr>
+                  </a:outerShdw>
+                </a:effectLst>
+              </a:rPr>
               <a:t>Benchmark being 64% live  tasks</a:t>
             </a:r>
           </a:p>
           <a:p>
+            <a:pPr marL="285750" indent="-285750">
+              <a:buFont typeface="Arial" panose="020B0604020202020204" pitchFamily="34" charset="0"/>
+              <a:buChar char="•"/>
+            </a:pPr>
             <a:r>
-              <a:rPr lang="en-US" dirty="0"/>
+              <a:rPr lang="en-US" sz="1600" cap="small" dirty="0">
+                <a:solidFill>
+                  <a:schemeClr val="tx1"/>
+                </a:solidFill>
+                <a:effectLst>
+                  <a:glow rad="38100">
+                    <a:schemeClr val="bg1">
+                      <a:lumMod val="50000"/>
+                      <a:lumOff val="50000"/>
+                      <a:alpha val="20000"/>
+                    </a:schemeClr>
+                  </a:glow>
+                  <a:outerShdw blurRad="44450" dist="12700" dir="13860000" algn="tl" rotWithShape="0">
+                    <a:srgbClr val="000000">
+                      <a:alpha val="20000"/>
+                    </a:srgbClr>
+                  </a:outerShdw>
+                </a:effectLst>
+              </a:rPr>
               <a:t>Dominant domain: gender\other</a:t>
             </a:r>
-            <a:endParaRPr lang="en-GB" dirty="0"/>
+            <a:endParaRPr lang="en-GB" sz="1600" cap="small" dirty="0">
+              <a:solidFill>
+                <a:schemeClr val="tx1"/>
+              </a:solidFill>
+              <a:effectLst>
+                <a:glow rad="38100">
+                  <a:schemeClr val="bg1">
+                    <a:lumMod val="50000"/>
+                    <a:lumOff val="50000"/>
+                    <a:alpha val="20000"/>
+                  </a:schemeClr>
+                </a:glow>
+                <a:outerShdw blurRad="44450" dist="12700" dir="13860000" algn="tl" rotWithShape="0">
+                  <a:srgbClr val="000000">
+                    <a:alpha val="20000"/>
+                  </a:srgbClr>
+                </a:outerShdw>
+              </a:effectLst>
+            </a:endParaRPr>
           </a:p>
         </p:txBody>
       </p:sp>
@@ -6694,10 +7021,10 @@
           <a:lstStyle/>
           <a:p>
             <a:r>
-              <a:rPr lang="en-US" sz="4000"/>
+              <a:rPr lang="en-US" sz="4000" b="1" dirty="0"/>
               <a:t>Refusal insights</a:t>
             </a:r>
-            <a:endParaRPr lang="en-GB" sz="4000"/>
+            <a:endParaRPr lang="en-GB" sz="4000" b="1" dirty="0"/>
           </a:p>
         </p:txBody>
       </p:sp>
@@ -7437,27 +7764,62 @@
           <a:p>
             <a:r>
               <a:rPr lang="en-US" sz="1600" dirty="0"/>
-              <a:t>The more complex the prompt the more prone it is to be “can answer”</a:t>
+              <a:t>The more </a:t>
             </a:r>
-          </a:p>
-          <a:p>
+            <a:r>
+              <a:rPr lang="en-US" sz="1600" b="1" dirty="0"/>
+              <a:t>complex</a:t>
+            </a:r>
             <a:r>
               <a:rPr lang="en-US" sz="1600" dirty="0"/>
-              <a:t>There are more answerable cases</a:t>
+              <a:t> the prompt the more prone it is to be “can answer”</a:t>
             </a:r>
           </a:p>
           <a:p>
+            <a:r>
+              <a:rPr lang="en-GB" sz="1600" b="1" dirty="0" err="1"/>
+              <a:t>aspect_coverage_ratio</a:t>
+            </a:r>
+            <a:r>
+              <a:rPr lang="en-GB" sz="1600" dirty="0"/>
+              <a:t> is our strongest indicator if a query is answerable . Rejected queries rarely match tool’s aspects</a:t>
+            </a:r>
+            <a:endParaRPr lang="en-US" sz="1600" dirty="0"/>
+          </a:p>
+          <a:p>
+            <a:r>
+              <a:rPr lang="en-GB" sz="1600" b="1" dirty="0"/>
+              <a:t>Data Noise</a:t>
+            </a:r>
+            <a:r>
+              <a:rPr lang="he-IL" sz="1600" b="1" dirty="0"/>
+              <a:t> </a:t>
+            </a:r>
+            <a:r>
+              <a:rPr lang="en-GB" sz="1600" dirty="0"/>
+              <a:t>In the "Other" domain</a:t>
+            </a:r>
+            <a:r>
+              <a:rPr lang="he-IL" sz="1600" dirty="0"/>
+              <a:t>  </a:t>
+            </a:r>
+            <a:r>
+              <a:rPr lang="en-US" sz="1600" dirty="0" err="1"/>
+              <a:t>tehres</a:t>
+            </a:r>
             <a:r>
               <a:rPr lang="en-US" sz="1600" dirty="0"/>
-              <a:t>Enhance users trust</a:t>
+              <a:t> no </a:t>
             </a:r>
-          </a:p>
-          <a:p>
-            <a:pPr marL="0" indent="0">
-              <a:buFont typeface="Arial"/>
-              <a:buNone/>
-            </a:pPr>
-            <a:endParaRPr lang="en-GB" dirty="0"/>
+            <a:r>
+              <a:rPr lang="en-US" sz="1600" dirty="0" err="1"/>
+              <a:t>predicrting</a:t>
+            </a:r>
+            <a:r>
+              <a:rPr lang="en-US" sz="1600" dirty="0"/>
+              <a:t> which aspects will turn us to refusal</a:t>
+            </a:r>
+            <a:endParaRPr lang="en-US" sz="1600" b="1" dirty="0"/>
           </a:p>
         </p:txBody>
       </p:sp>
@@ -7465,6 +7827,4784 @@
     <p:extLst>
       <p:ext uri="{BB962C8B-B14F-4D97-AF65-F5344CB8AC3E}">
         <p14:creationId xmlns:p14="http://schemas.microsoft.com/office/powerpoint/2010/main" val="2667558626"/>
+      </p:ext>
+    </p:extLst>
+  </p:cSld>
+  <p:clrMapOvr>
+    <a:masterClrMapping/>
+  </p:clrMapOvr>
+</p:sld>
+</file>
+
+<file path=ppt/slides/slide4.xml><?xml version="1.0" encoding="utf-8"?>
+<p:sld xmlns:a="http://schemas.openxmlformats.org/drawingml/2006/main" xmlns:r="http://schemas.openxmlformats.org/officeDocument/2006/relationships" xmlns:p="http://schemas.openxmlformats.org/presentationml/2006/main">
+  <p:cSld>
+    <p:bg>
+      <p:bgPr>
+        <a:blipFill rotWithShape="1">
+          <a:blip r:embed="rId2">
+            <a:duotone>
+              <a:schemeClr val="bg2">
+                <a:shade val="28000"/>
+                <a:satMod val="94000"/>
+                <a:lumMod val="20000"/>
+              </a:schemeClr>
+              <a:schemeClr val="bg2">
+                <a:tint val="94000"/>
+                <a:shade val="84000"/>
+                <a:satMod val="148000"/>
+                <a:lumMod val="114000"/>
+              </a:schemeClr>
+            </a:duotone>
+          </a:blip>
+          <a:stretch/>
+        </a:blipFill>
+        <a:effectLst/>
+      </p:bgPr>
+    </p:bg>
+    <p:spTree>
+      <p:nvGrpSpPr>
+        <p:cNvPr id="1" name=""/>
+        <p:cNvGrpSpPr/>
+        <p:nvPr/>
+      </p:nvGrpSpPr>
+      <p:grpSpPr>
+        <a:xfrm>
+          <a:off x="0" y="0"/>
+          <a:ext cx="0" cy="0"/>
+          <a:chOff x="0" y="0"/>
+          <a:chExt cx="0" cy="0"/>
+        </a:xfrm>
+      </p:grpSpPr>
+      <p:sp>
+        <p:nvSpPr>
+          <p:cNvPr id="8" name="Rectangle 7">
+            <a:extLst>
+              <a:ext uri="{FF2B5EF4-FFF2-40B4-BE49-F238E27FC236}">
+                <a16:creationId xmlns:a16="http://schemas.microsoft.com/office/drawing/2014/main" id="{C138CEDA-0C7F-4A0D-9089-CD1E70084AEC}"/>
+              </a:ext>
+              <a:ext uri="{C183D7F6-B498-43B3-948B-1728B52AA6E4}">
+                <adec:decorative xmlns:adec="http://schemas.microsoft.com/office/drawing/2017/decorative" val="1"/>
+              </a:ext>
+            </a:extLst>
+          </p:cNvPr>
+          <p:cNvSpPr>
+            <a:spLocks noGrp="1" noRot="1" noChangeAspect="1" noMove="1" noResize="1" noEditPoints="1" noAdjustHandles="1" noChangeArrowheads="1" noChangeShapeType="1" noTextEdit="1"/>
+          </p:cNvSpPr>
+          <p:nvPr>
+            <p:extLst>
+              <p:ext uri="{386F3935-93C4-4BCD-93E2-E3B085C9AB24}">
+                <p16:designElem xmlns:p16="http://schemas.microsoft.com/office/powerpoint/2015/main" val="1"/>
+              </p:ext>
+            </p:extLst>
+          </p:nvPr>
+        </p:nvSpPr>
+        <p:spPr>
+          <a:xfrm>
+            <a:off x="0" y="-1"/>
+            <a:ext cx="12192000" cy="4515367"/>
+          </a:xfrm>
+          <a:prstGeom prst="rect">
+            <a:avLst/>
+          </a:prstGeom>
+          <a:solidFill>
+            <a:schemeClr val="bg2"/>
+          </a:solidFill>
+          <a:ln>
+            <a:noFill/>
+          </a:ln>
+          <a:effectLst/>
+        </p:spPr>
+        <p:style>
+          <a:lnRef idx="2">
+            <a:schemeClr val="accent1">
+              <a:shade val="50000"/>
+            </a:schemeClr>
+          </a:lnRef>
+          <a:fillRef idx="1">
+            <a:schemeClr val="accent1"/>
+          </a:fillRef>
+          <a:effectRef idx="0">
+            <a:schemeClr val="accent1"/>
+          </a:effectRef>
+          <a:fontRef idx="minor">
+            <a:schemeClr val="lt1"/>
+          </a:fontRef>
+        </p:style>
+        <p:txBody>
+          <a:bodyPr rtlCol="0" anchor="ctr"/>
+          <a:lstStyle/>
+          <a:p>
+            <a:pPr algn="ctr"/>
+            <a:endParaRPr lang="en-US"/>
+          </a:p>
+        </p:txBody>
+      </p:sp>
+      <p:sp>
+        <p:nvSpPr>
+          <p:cNvPr id="10" name="Rectangle 9">
+            <a:extLst>
+              <a:ext uri="{FF2B5EF4-FFF2-40B4-BE49-F238E27FC236}">
+                <a16:creationId xmlns:a16="http://schemas.microsoft.com/office/drawing/2014/main" id="{44B231A0-304E-4E17-94F9-17C05B0E7FB3}"/>
+              </a:ext>
+              <a:ext uri="{C183D7F6-B498-43B3-948B-1728B52AA6E4}">
+                <adec:decorative xmlns:adec="http://schemas.microsoft.com/office/drawing/2017/decorative" val="1"/>
+              </a:ext>
+            </a:extLst>
+          </p:cNvPr>
+          <p:cNvSpPr>
+            <a:spLocks noGrp="1" noRot="1" noChangeAspect="1" noMove="1" noResize="1" noEditPoints="1" noAdjustHandles="1" noChangeArrowheads="1" noChangeShapeType="1" noTextEdit="1"/>
+          </p:cNvSpPr>
+          <p:nvPr>
+            <p:extLst>
+              <p:ext uri="{386F3935-93C4-4BCD-93E2-E3B085C9AB24}">
+                <p16:designElem xmlns:p16="http://schemas.microsoft.com/office/powerpoint/2015/main" val="1"/>
+              </p:ext>
+            </p:extLst>
+          </p:nvPr>
+        </p:nvSpPr>
+        <p:spPr>
+          <a:xfrm rot="10800000">
+            <a:off x="0" y="4048959"/>
+            <a:ext cx="12192000" cy="466406"/>
+          </a:xfrm>
+          <a:prstGeom prst="rect">
+            <a:avLst/>
+          </a:prstGeom>
+          <a:gradFill>
+            <a:gsLst>
+              <a:gs pos="0">
+                <a:schemeClr val="bg1">
+                  <a:alpha val="50000"/>
+                </a:schemeClr>
+              </a:gs>
+              <a:gs pos="100000">
+                <a:srgbClr val="363D46">
+                  <a:lumMod val="75000"/>
+                  <a:alpha val="0"/>
+                </a:srgbClr>
+              </a:gs>
+            </a:gsLst>
+            <a:lin ang="5400000" scaled="0"/>
+          </a:gradFill>
+          <a:ln>
+            <a:noFill/>
+          </a:ln>
+          <a:effectLst/>
+        </p:spPr>
+        <p:style>
+          <a:lnRef idx="2">
+            <a:schemeClr val="accent1">
+              <a:shade val="50000"/>
+            </a:schemeClr>
+          </a:lnRef>
+          <a:fillRef idx="1">
+            <a:schemeClr val="accent1"/>
+          </a:fillRef>
+          <a:effectRef idx="0">
+            <a:schemeClr val="accent1"/>
+          </a:effectRef>
+          <a:fontRef idx="minor">
+            <a:schemeClr val="lt1"/>
+          </a:fontRef>
+        </p:style>
+        <p:txBody>
+          <a:bodyPr rot="0" spcFirstLastPara="0" vertOverflow="overflow" horzOverflow="overflow" vert="horz" wrap="square" lIns="91440" tIns="45720" rIns="91440" bIns="45720" numCol="1" spcCol="0" rtlCol="0" fromWordArt="0" anchor="ctr" anchorCtr="0" forceAA="0" compatLnSpc="1">
+            <a:prstTxWarp prst="textNoShape">
+              <a:avLst/>
+            </a:prstTxWarp>
+            <a:noAutofit/>
+          </a:bodyPr>
+          <a:lstStyle/>
+          <a:p>
+            <a:pPr algn="ctr"/>
+            <a:endParaRPr lang="en-US"/>
+          </a:p>
+        </p:txBody>
+      </p:sp>
+      <p:cxnSp>
+        <p:nvCxnSpPr>
+          <p:cNvPr id="12" name="Straight Connector 11">
+            <a:extLst>
+              <a:ext uri="{FF2B5EF4-FFF2-40B4-BE49-F238E27FC236}">
+                <a16:creationId xmlns:a16="http://schemas.microsoft.com/office/drawing/2014/main" id="{183525D7-E53C-447D-B126-70F2345DB1CE}"/>
+              </a:ext>
+              <a:ext uri="{C183D7F6-B498-43B3-948B-1728B52AA6E4}">
+                <adec:decorative xmlns:adec="http://schemas.microsoft.com/office/drawing/2017/decorative" val="1"/>
+              </a:ext>
+            </a:extLst>
+          </p:cNvPr>
+          <p:cNvCxnSpPr>
+            <a:cxnSpLocks noGrp="1" noRot="1" noChangeAspect="1" noMove="1" noResize="1" noEditPoints="1" noAdjustHandles="1" noChangeArrowheads="1" noChangeShapeType="1"/>
+          </p:cNvCxnSpPr>
+          <p:nvPr>
+            <p:extLst>
+              <p:ext uri="{386F3935-93C4-4BCD-93E2-E3B085C9AB24}">
+                <p16:designElem xmlns:p16="http://schemas.microsoft.com/office/powerpoint/2015/main" val="1"/>
+              </p:ext>
+            </p:extLst>
+          </p:nvPr>
+        </p:nvCxnSpPr>
+        <p:spPr>
+          <a:xfrm>
+            <a:off x="7296" y="4515366"/>
+            <a:ext cx="12192000" cy="0"/>
+          </a:xfrm>
+          <a:prstGeom prst="line">
+            <a:avLst/>
+          </a:prstGeom>
+          <a:solidFill>
+            <a:srgbClr val="FFFFFF"/>
+          </a:solidFill>
+          <a:ln w="38100" cap="flat">
+            <a:gradFill flip="none" rotWithShape="1">
+              <a:gsLst>
+                <a:gs pos="0">
+                  <a:srgbClr val="363D46"/>
+                </a:gs>
+                <a:gs pos="100000">
+                  <a:srgbClr val="363D46">
+                    <a:lumMod val="75000"/>
+                  </a:srgbClr>
+                </a:gs>
+              </a:gsLst>
+              <a:lin ang="5400000" scaled="0"/>
+              <a:tileRect/>
+            </a:gradFill>
+            <a:miter lim="800000"/>
+          </a:ln>
+          <a:effectLst/>
+        </p:spPr>
+        <p:style>
+          <a:lnRef idx="2">
+            <a:schemeClr val="accent1">
+              <a:shade val="50000"/>
+            </a:schemeClr>
+          </a:lnRef>
+          <a:fillRef idx="1">
+            <a:schemeClr val="accent1"/>
+          </a:fillRef>
+          <a:effectRef idx="0">
+            <a:schemeClr val="accent1"/>
+          </a:effectRef>
+          <a:fontRef idx="minor">
+            <a:schemeClr val="lt1"/>
+          </a:fontRef>
+        </p:style>
+      </p:cxnSp>
+      <p:pic>
+        <p:nvPicPr>
+          <p:cNvPr id="11" name="Picture 10">
+            <a:extLst>
+              <a:ext uri="{FF2B5EF4-FFF2-40B4-BE49-F238E27FC236}">
+                <a16:creationId xmlns:a16="http://schemas.microsoft.com/office/drawing/2014/main" id="{C666C0D5-A20D-A808-31C1-49AE10B9E8F7}"/>
+              </a:ext>
+            </a:extLst>
+          </p:cNvPr>
+          <p:cNvPicPr>
+            <a:picLocks noChangeAspect="1"/>
+          </p:cNvPicPr>
+          <p:nvPr/>
+        </p:nvPicPr>
+        <p:blipFill>
+          <a:blip r:embed="rId3"/>
+          <a:stretch>
+            <a:fillRect/>
+          </a:stretch>
+        </p:blipFill>
+        <p:spPr>
+          <a:xfrm>
+            <a:off x="354888" y="88527"/>
+            <a:ext cx="6481073" cy="4193635"/>
+          </a:xfrm>
+          <a:prstGeom prst="rect">
+            <a:avLst/>
+          </a:prstGeom>
+        </p:spPr>
+      </p:pic>
+      <p:graphicFrame>
+        <p:nvGraphicFramePr>
+          <p:cNvPr id="15" name="Table 14">
+            <a:extLst>
+              <a:ext uri="{FF2B5EF4-FFF2-40B4-BE49-F238E27FC236}">
+                <a16:creationId xmlns:a16="http://schemas.microsoft.com/office/drawing/2014/main" id="{578B9D7C-579C-1856-8E39-20DB4A0E8378}"/>
+              </a:ext>
+            </a:extLst>
+          </p:cNvPr>
+          <p:cNvGraphicFramePr>
+            <a:graphicFrameLocks noGrp="1"/>
+          </p:cNvGraphicFramePr>
+          <p:nvPr>
+            <p:extLst>
+              <p:ext uri="{D42A27DB-BD31-4B8C-83A1-F6EECF244321}">
+                <p14:modId xmlns:p14="http://schemas.microsoft.com/office/powerpoint/2010/main" val="2690427375"/>
+              </p:ext>
+            </p:extLst>
+          </p:nvPr>
+        </p:nvGraphicFramePr>
+        <p:xfrm>
+          <a:off x="7190848" y="606543"/>
+          <a:ext cx="4811860" cy="1966973"/>
+        </p:xfrm>
+        <a:graphic>
+          <a:graphicData uri="http://schemas.openxmlformats.org/drawingml/2006/table">
+            <a:tbl>
+              <a:tblPr firstRow="1" bandRow="1">
+                <a:tableStyleId>{0660B408-B3CF-4A94-85FC-2B1E0A45F4A2}</a:tableStyleId>
+              </a:tblPr>
+              <a:tblGrid>
+                <a:gridCol w="369449">
+                  <a:extLst>
+                    <a:ext uri="{9D8B030D-6E8A-4147-A177-3AD203B41FA5}">
+                      <a16:colId xmlns:a16="http://schemas.microsoft.com/office/drawing/2014/main" val="3703669866"/>
+                    </a:ext>
+                  </a:extLst>
+                </a:gridCol>
+                <a:gridCol w="1093509">
+                  <a:extLst>
+                    <a:ext uri="{9D8B030D-6E8A-4147-A177-3AD203B41FA5}">
+                      <a16:colId xmlns:a16="http://schemas.microsoft.com/office/drawing/2014/main" val="704636194"/>
+                    </a:ext>
+                  </a:extLst>
+                </a:gridCol>
+                <a:gridCol w="782425">
+                  <a:extLst>
+                    <a:ext uri="{9D8B030D-6E8A-4147-A177-3AD203B41FA5}">
+                      <a16:colId xmlns:a16="http://schemas.microsoft.com/office/drawing/2014/main" val="2444234231"/>
+                    </a:ext>
+                  </a:extLst>
+                </a:gridCol>
+                <a:gridCol w="823449">
+                  <a:extLst>
+                    <a:ext uri="{9D8B030D-6E8A-4147-A177-3AD203B41FA5}">
+                      <a16:colId xmlns:a16="http://schemas.microsoft.com/office/drawing/2014/main" val="132631571"/>
+                    </a:ext>
+                  </a:extLst>
+                </a:gridCol>
+                <a:gridCol w="871514">
+                  <a:extLst>
+                    <a:ext uri="{9D8B030D-6E8A-4147-A177-3AD203B41FA5}">
+                      <a16:colId xmlns:a16="http://schemas.microsoft.com/office/drawing/2014/main" val="116675373"/>
+                    </a:ext>
+                  </a:extLst>
+                </a:gridCol>
+                <a:gridCol w="871514">
+                  <a:extLst>
+                    <a:ext uri="{9D8B030D-6E8A-4147-A177-3AD203B41FA5}">
+                      <a16:colId xmlns:a16="http://schemas.microsoft.com/office/drawing/2014/main" val="2052860894"/>
+                    </a:ext>
+                  </a:extLst>
+                </a:gridCol>
+              </a:tblGrid>
+              <a:tr h="348517">
+                <a:tc>
+                  <a:txBody>
+                    <a:bodyPr/>
+                    <a:lstStyle/>
+                    <a:p>
+                      <a:pPr algn="r" fontAlgn="ctr">
+                        <a:buNone/>
+                      </a:pPr>
+                      <a:endParaRPr lang="en-GB" sz="1050">
+                        <a:effectLst/>
+                      </a:endParaRPr>
+                    </a:p>
+                  </a:txBody>
+                  <a:tcPr marL="60960" marR="60960" marT="30480" marB="30480" anchor="ctr"/>
+                </a:tc>
+                <a:tc>
+                  <a:txBody>
+                    <a:bodyPr/>
+                    <a:lstStyle/>
+                    <a:p>
+                      <a:pPr algn="r" fontAlgn="ctr">
+                        <a:buNone/>
+                      </a:pPr>
+                      <a:r>
+                        <a:rPr lang="en-GB" sz="1050" dirty="0">
+                          <a:effectLst/>
+                        </a:rPr>
+                        <a:t>Model</a:t>
+                      </a:r>
+                    </a:p>
+                  </a:txBody>
+                  <a:tcPr marL="60960" marR="60960" marT="30480" marB="30480" anchor="ctr"/>
+                </a:tc>
+                <a:tc>
+                  <a:txBody>
+                    <a:bodyPr/>
+                    <a:lstStyle/>
+                    <a:p>
+                      <a:pPr algn="ctr" fontAlgn="ctr">
+                        <a:buNone/>
+                      </a:pPr>
+                      <a:r>
+                        <a:rPr lang="en-GB" sz="1050" dirty="0">
+                          <a:effectLst/>
+                        </a:rPr>
+                        <a:t>Accuracy</a:t>
+                      </a:r>
+                    </a:p>
+                  </a:txBody>
+                  <a:tcPr marL="60960" marR="60960" marT="30480" marB="30480" anchor="ctr"/>
+                </a:tc>
+                <a:tc>
+                  <a:txBody>
+                    <a:bodyPr/>
+                    <a:lstStyle/>
+                    <a:p>
+                      <a:pPr algn="ctr" fontAlgn="ctr">
+                        <a:buNone/>
+                      </a:pPr>
+                      <a:r>
+                        <a:rPr lang="en-GB" sz="1050" dirty="0">
+                          <a:effectLst/>
+                        </a:rPr>
+                        <a:t>Precision</a:t>
+                      </a:r>
+                    </a:p>
+                  </a:txBody>
+                  <a:tcPr marL="60960" marR="60960" marT="30480" marB="30480" anchor="ctr"/>
+                </a:tc>
+                <a:tc>
+                  <a:txBody>
+                    <a:bodyPr/>
+                    <a:lstStyle/>
+                    <a:p>
+                      <a:pPr algn="ctr" fontAlgn="ctr">
+                        <a:buNone/>
+                      </a:pPr>
+                      <a:r>
+                        <a:rPr lang="en-GB" sz="1050" dirty="0">
+                          <a:effectLst/>
+                        </a:rPr>
+                        <a:t>Recall</a:t>
+                      </a:r>
+                    </a:p>
+                  </a:txBody>
+                  <a:tcPr marL="60960" marR="60960" marT="30480" marB="30480" anchor="ctr"/>
+                </a:tc>
+                <a:tc>
+                  <a:txBody>
+                    <a:bodyPr/>
+                    <a:lstStyle/>
+                    <a:p>
+                      <a:pPr algn="ctr" fontAlgn="ctr">
+                        <a:buNone/>
+                      </a:pPr>
+                      <a:r>
+                        <a:rPr lang="en-GB" sz="1050" dirty="0">
+                          <a:effectLst/>
+                        </a:rPr>
+                        <a:t>F1-Score</a:t>
+                      </a:r>
+                    </a:p>
+                  </a:txBody>
+                  <a:tcPr marL="60960" marR="60960" marT="30480" marB="30480" anchor="ctr"/>
+                </a:tc>
+                <a:extLst>
+                  <a:ext uri="{0D108BD9-81ED-4DB2-BD59-A6C34878D82A}">
+                    <a16:rowId xmlns:a16="http://schemas.microsoft.com/office/drawing/2014/main" val="1655261947"/>
+                  </a:ext>
+                </a:extLst>
+              </a:tr>
+              <a:tr h="404614">
+                <a:tc>
+                  <a:txBody>
+                    <a:bodyPr/>
+                    <a:lstStyle/>
+                    <a:p>
+                      <a:pPr algn="ctr" fontAlgn="ctr">
+                        <a:buNone/>
+                      </a:pPr>
+                      <a:r>
+                        <a:rPr lang="en-GB" sz="1050" b="0" dirty="0">
+                          <a:effectLst/>
+                        </a:rPr>
+                        <a:t>0</a:t>
+                      </a:r>
+                    </a:p>
+                  </a:txBody>
+                  <a:tcPr marL="60960" marR="60960" marT="30480" marB="30480" anchor="ctr"/>
+                </a:tc>
+                <a:tc>
+                  <a:txBody>
+                    <a:bodyPr/>
+                    <a:lstStyle/>
+                    <a:p>
+                      <a:pPr>
+                        <a:buNone/>
+                      </a:pPr>
+                      <a:r>
+                        <a:rPr lang="en-GB" sz="1050" dirty="0">
+                          <a:effectLst/>
+                        </a:rPr>
+                        <a:t>Baseline</a:t>
+                      </a:r>
+                    </a:p>
+                  </a:txBody>
+                  <a:tcPr marL="60960" marR="60960" marT="30480" marB="30480" anchor="ctr"/>
+                </a:tc>
+                <a:tc>
+                  <a:txBody>
+                    <a:bodyPr/>
+                    <a:lstStyle/>
+                    <a:p>
+                      <a:pPr algn="ctr">
+                        <a:buNone/>
+                      </a:pPr>
+                      <a:r>
+                        <a:rPr lang="en-GB" sz="1050" b="1" dirty="0">
+                          <a:effectLst/>
+                        </a:rPr>
+                        <a:t>67.7 %</a:t>
+                      </a:r>
+                    </a:p>
+                  </a:txBody>
+                  <a:tcPr marL="60960" marR="60960" marT="30480" marB="30480" anchor="ctr"/>
+                </a:tc>
+                <a:tc>
+                  <a:txBody>
+                    <a:bodyPr/>
+                    <a:lstStyle/>
+                    <a:p>
+                      <a:pPr>
+                        <a:buNone/>
+                      </a:pPr>
+                      <a:r>
+                        <a:rPr lang="en-GB" sz="1050" dirty="0">
+                          <a:effectLst/>
+                        </a:rPr>
+                        <a:t>0.677143</a:t>
+                      </a:r>
+                    </a:p>
+                  </a:txBody>
+                  <a:tcPr marL="60960" marR="60960" marT="30480" marB="30480" anchor="ctr"/>
+                </a:tc>
+                <a:tc>
+                  <a:txBody>
+                    <a:bodyPr/>
+                    <a:lstStyle/>
+                    <a:p>
+                      <a:pPr>
+                        <a:buNone/>
+                      </a:pPr>
+                      <a:r>
+                        <a:rPr lang="en-GB" sz="1050">
+                          <a:effectLst/>
+                        </a:rPr>
+                        <a:t>1.000000</a:t>
+                      </a:r>
+                    </a:p>
+                  </a:txBody>
+                  <a:tcPr marL="60960" marR="60960" marT="30480" marB="30480" anchor="ctr"/>
+                </a:tc>
+                <a:tc>
+                  <a:txBody>
+                    <a:bodyPr/>
+                    <a:lstStyle/>
+                    <a:p>
+                      <a:pPr>
+                        <a:buNone/>
+                      </a:pPr>
+                      <a:r>
+                        <a:rPr lang="en-GB" sz="1050" dirty="0">
+                          <a:effectLst/>
+                        </a:rPr>
+                        <a:t>0.807496</a:t>
+                      </a:r>
+                    </a:p>
+                  </a:txBody>
+                  <a:tcPr marL="60960" marR="60960" marT="30480" marB="30480" anchor="ctr"/>
+                </a:tc>
+                <a:extLst>
+                  <a:ext uri="{0D108BD9-81ED-4DB2-BD59-A6C34878D82A}">
+                    <a16:rowId xmlns:a16="http://schemas.microsoft.com/office/drawing/2014/main" val="1307038135"/>
+                  </a:ext>
+                </a:extLst>
+              </a:tr>
+              <a:tr h="404614">
+                <a:tc>
+                  <a:txBody>
+                    <a:bodyPr/>
+                    <a:lstStyle/>
+                    <a:p>
+                      <a:pPr algn="ctr" fontAlgn="ctr">
+                        <a:buNone/>
+                      </a:pPr>
+                      <a:r>
+                        <a:rPr lang="en-GB" sz="1050" b="0" dirty="0">
+                          <a:effectLst/>
+                        </a:rPr>
+                        <a:t>1</a:t>
+                      </a:r>
+                    </a:p>
+                  </a:txBody>
+                  <a:tcPr marL="60960" marR="60960" marT="30480" marB="30480" anchor="ctr"/>
+                </a:tc>
+                <a:tc>
+                  <a:txBody>
+                    <a:bodyPr/>
+                    <a:lstStyle/>
+                    <a:p>
+                      <a:pPr>
+                        <a:buNone/>
+                      </a:pPr>
+                      <a:r>
+                        <a:rPr lang="en-GB" sz="1050" dirty="0">
+                          <a:effectLst/>
+                        </a:rPr>
+                        <a:t>KNN</a:t>
+                      </a:r>
+                    </a:p>
+                  </a:txBody>
+                  <a:tcPr marL="60960" marR="60960" marT="30480" marB="30480" anchor="ctr"/>
+                </a:tc>
+                <a:tc>
+                  <a:txBody>
+                    <a:bodyPr/>
+                    <a:lstStyle/>
+                    <a:p>
+                      <a:pPr algn="ctr">
+                        <a:buNone/>
+                      </a:pPr>
+                      <a:r>
+                        <a:rPr lang="en-GB" sz="1050" b="1" dirty="0">
+                          <a:effectLst/>
+                        </a:rPr>
+                        <a:t>82.8 %</a:t>
+                      </a:r>
+                    </a:p>
+                  </a:txBody>
+                  <a:tcPr marL="60960" marR="60960" marT="30480" marB="30480" anchor="ctr"/>
+                </a:tc>
+                <a:tc>
+                  <a:txBody>
+                    <a:bodyPr/>
+                    <a:lstStyle/>
+                    <a:p>
+                      <a:pPr>
+                        <a:buNone/>
+                      </a:pPr>
+                      <a:r>
+                        <a:rPr lang="en-GB" sz="1050" dirty="0">
+                          <a:effectLst/>
+                        </a:rPr>
+                        <a:t>0.841699</a:t>
+                      </a:r>
+                    </a:p>
+                  </a:txBody>
+                  <a:tcPr marL="60960" marR="60960" marT="30480" marB="30480" anchor="ctr"/>
+                </a:tc>
+                <a:tc>
+                  <a:txBody>
+                    <a:bodyPr/>
+                    <a:lstStyle/>
+                    <a:p>
+                      <a:pPr>
+                        <a:buNone/>
+                      </a:pPr>
+                      <a:r>
+                        <a:rPr lang="en-GB" sz="1050" dirty="0">
+                          <a:effectLst/>
+                        </a:rPr>
+                        <a:t>0.919831</a:t>
+                      </a:r>
+                    </a:p>
+                  </a:txBody>
+                  <a:tcPr marL="60960" marR="60960" marT="30480" marB="30480" anchor="ctr"/>
+                </a:tc>
+                <a:tc>
+                  <a:txBody>
+                    <a:bodyPr/>
+                    <a:lstStyle/>
+                    <a:p>
+                      <a:pPr>
+                        <a:buNone/>
+                      </a:pPr>
+                      <a:r>
+                        <a:rPr lang="en-GB" sz="1050" dirty="0">
+                          <a:effectLst/>
+                        </a:rPr>
+                        <a:t>0.879032</a:t>
+                      </a:r>
+                    </a:p>
+                  </a:txBody>
+                  <a:tcPr marL="60960" marR="60960" marT="30480" marB="30480" anchor="ctr"/>
+                </a:tc>
+                <a:extLst>
+                  <a:ext uri="{0D108BD9-81ED-4DB2-BD59-A6C34878D82A}">
+                    <a16:rowId xmlns:a16="http://schemas.microsoft.com/office/drawing/2014/main" val="3604233230"/>
+                  </a:ext>
+                </a:extLst>
+              </a:tr>
+              <a:tr h="404614">
+                <a:tc>
+                  <a:txBody>
+                    <a:bodyPr/>
+                    <a:lstStyle/>
+                    <a:p>
+                      <a:pPr algn="ctr" fontAlgn="ctr">
+                        <a:buNone/>
+                      </a:pPr>
+                      <a:r>
+                        <a:rPr lang="en-GB" sz="1050" b="0" dirty="0">
+                          <a:effectLst/>
+                        </a:rPr>
+                        <a:t>2</a:t>
+                      </a:r>
+                    </a:p>
+                  </a:txBody>
+                  <a:tcPr marL="60960" marR="60960" marT="30480" marB="30480" anchor="ctr"/>
+                </a:tc>
+                <a:tc>
+                  <a:txBody>
+                    <a:bodyPr/>
+                    <a:lstStyle/>
+                    <a:p>
+                      <a:pPr>
+                        <a:buNone/>
+                      </a:pPr>
+                      <a:r>
+                        <a:rPr lang="en-GB" sz="1050" dirty="0">
+                          <a:effectLst/>
+                        </a:rPr>
+                        <a:t>AdaBoost</a:t>
+                      </a:r>
+                    </a:p>
+                  </a:txBody>
+                  <a:tcPr marL="60960" marR="60960" marT="30480" marB="30480" anchor="ctr"/>
+                </a:tc>
+                <a:tc>
+                  <a:txBody>
+                    <a:bodyPr/>
+                    <a:lstStyle/>
+                    <a:p>
+                      <a:pPr algn="ctr">
+                        <a:buNone/>
+                      </a:pPr>
+                      <a:r>
+                        <a:rPr lang="en-GB" sz="1050" b="1" dirty="0">
+                          <a:effectLst/>
+                        </a:rPr>
+                        <a:t>87.7 %</a:t>
+                      </a:r>
+                    </a:p>
+                  </a:txBody>
+                  <a:tcPr marL="60960" marR="60960" marT="30480" marB="30480" anchor="ctr"/>
+                </a:tc>
+                <a:tc>
+                  <a:txBody>
+                    <a:bodyPr/>
+                    <a:lstStyle/>
+                    <a:p>
+                      <a:pPr>
+                        <a:buNone/>
+                      </a:pPr>
+                      <a:r>
+                        <a:rPr lang="en-GB" sz="1050">
+                          <a:effectLst/>
+                        </a:rPr>
+                        <a:t>0.867424</a:t>
+                      </a:r>
+                    </a:p>
+                  </a:txBody>
+                  <a:tcPr marL="60960" marR="60960" marT="30480" marB="30480" anchor="ctr"/>
+                </a:tc>
+                <a:tc>
+                  <a:txBody>
+                    <a:bodyPr/>
+                    <a:lstStyle/>
+                    <a:p>
+                      <a:pPr>
+                        <a:buNone/>
+                      </a:pPr>
+                      <a:r>
+                        <a:rPr lang="en-GB" sz="1050" dirty="0">
+                          <a:effectLst/>
+                        </a:rPr>
+                        <a:t>0.966245</a:t>
+                      </a:r>
+                    </a:p>
+                  </a:txBody>
+                  <a:tcPr marL="60960" marR="60960" marT="30480" marB="30480" anchor="ctr"/>
+                </a:tc>
+                <a:tc>
+                  <a:txBody>
+                    <a:bodyPr/>
+                    <a:lstStyle/>
+                    <a:p>
+                      <a:pPr>
+                        <a:buNone/>
+                      </a:pPr>
+                      <a:r>
+                        <a:rPr lang="en-GB" sz="1050" dirty="0">
+                          <a:effectLst/>
+                        </a:rPr>
+                        <a:t>0.914172</a:t>
+                      </a:r>
+                    </a:p>
+                  </a:txBody>
+                  <a:tcPr marL="60960" marR="60960" marT="30480" marB="30480" anchor="ctr"/>
+                </a:tc>
+                <a:extLst>
+                  <a:ext uri="{0D108BD9-81ED-4DB2-BD59-A6C34878D82A}">
+                    <a16:rowId xmlns:a16="http://schemas.microsoft.com/office/drawing/2014/main" val="2970700451"/>
+                  </a:ext>
+                </a:extLst>
+              </a:tr>
+              <a:tr h="404614">
+                <a:tc>
+                  <a:txBody>
+                    <a:bodyPr/>
+                    <a:lstStyle/>
+                    <a:p>
+                      <a:pPr algn="ctr" fontAlgn="ctr">
+                        <a:buNone/>
+                      </a:pPr>
+                      <a:r>
+                        <a:rPr lang="en-GB" sz="1050" b="0" dirty="0">
+                          <a:effectLst/>
+                        </a:rPr>
+                        <a:t>3</a:t>
+                      </a:r>
+                    </a:p>
+                  </a:txBody>
+                  <a:tcPr marL="60960" marR="60960" marT="30480" marB="30480" anchor="ctr"/>
+                </a:tc>
+                <a:tc>
+                  <a:txBody>
+                    <a:bodyPr/>
+                    <a:lstStyle/>
+                    <a:p>
+                      <a:pPr>
+                        <a:buNone/>
+                      </a:pPr>
+                      <a:r>
+                        <a:rPr lang="en-GB" sz="1050" dirty="0">
+                          <a:effectLst/>
+                        </a:rPr>
+                        <a:t>Random Forest</a:t>
+                      </a:r>
+                    </a:p>
+                  </a:txBody>
+                  <a:tcPr marL="60960" marR="60960" marT="30480" marB="30480" anchor="ctr"/>
+                </a:tc>
+                <a:tc>
+                  <a:txBody>
+                    <a:bodyPr/>
+                    <a:lstStyle/>
+                    <a:p>
+                      <a:pPr algn="ctr">
+                        <a:buNone/>
+                      </a:pPr>
+                      <a:r>
+                        <a:rPr lang="en-GB" sz="1050" b="1" dirty="0">
+                          <a:effectLst/>
+                        </a:rPr>
+                        <a:t>90.8 %</a:t>
+                      </a:r>
+                    </a:p>
+                  </a:txBody>
+                  <a:tcPr marL="60960" marR="60960" marT="30480" marB="30480" anchor="ctr"/>
+                </a:tc>
+                <a:tc>
+                  <a:txBody>
+                    <a:bodyPr/>
+                    <a:lstStyle/>
+                    <a:p>
+                      <a:pPr>
+                        <a:buNone/>
+                      </a:pPr>
+                      <a:r>
+                        <a:rPr lang="en-GB" sz="1050">
+                          <a:effectLst/>
+                        </a:rPr>
+                        <a:t>0.908367</a:t>
+                      </a:r>
+                    </a:p>
+                  </a:txBody>
+                  <a:tcPr marL="60960" marR="60960" marT="30480" marB="30480" anchor="ctr"/>
+                </a:tc>
+                <a:tc>
+                  <a:txBody>
+                    <a:bodyPr/>
+                    <a:lstStyle/>
+                    <a:p>
+                      <a:pPr>
+                        <a:buNone/>
+                      </a:pPr>
+                      <a:r>
+                        <a:rPr lang="en-GB" sz="1050">
+                          <a:effectLst/>
+                        </a:rPr>
+                        <a:t>0.962025</a:t>
+                      </a:r>
+                    </a:p>
+                  </a:txBody>
+                  <a:tcPr marL="60960" marR="60960" marT="30480" marB="30480" anchor="ctr"/>
+                </a:tc>
+                <a:tc>
+                  <a:txBody>
+                    <a:bodyPr/>
+                    <a:lstStyle/>
+                    <a:p>
+                      <a:pPr>
+                        <a:buNone/>
+                      </a:pPr>
+                      <a:r>
+                        <a:rPr lang="en-GB" sz="1050" dirty="0">
+                          <a:effectLst/>
+                        </a:rPr>
+                        <a:t>0.934426</a:t>
+                      </a:r>
+                    </a:p>
+                  </a:txBody>
+                  <a:tcPr marL="60960" marR="60960" marT="30480" marB="30480" anchor="ctr"/>
+                </a:tc>
+                <a:extLst>
+                  <a:ext uri="{0D108BD9-81ED-4DB2-BD59-A6C34878D82A}">
+                    <a16:rowId xmlns:a16="http://schemas.microsoft.com/office/drawing/2014/main" val="1804940953"/>
+                  </a:ext>
+                </a:extLst>
+              </a:tr>
+            </a:tbl>
+          </a:graphicData>
+        </a:graphic>
+      </p:graphicFrame>
+      <p:sp>
+        <p:nvSpPr>
+          <p:cNvPr id="16" name="Content Placeholder 2">
+            <a:extLst>
+              <a:ext uri="{FF2B5EF4-FFF2-40B4-BE49-F238E27FC236}">
+                <a16:creationId xmlns:a16="http://schemas.microsoft.com/office/drawing/2014/main" id="{3E043C1C-8E12-ACF5-345B-3DF394C27A98}"/>
+              </a:ext>
+            </a:extLst>
+          </p:cNvPr>
+          <p:cNvSpPr txBox="1">
+            <a:spLocks/>
+          </p:cNvSpPr>
+          <p:nvPr/>
+        </p:nvSpPr>
+        <p:spPr>
+          <a:xfrm>
+            <a:off x="5961947" y="4888705"/>
+            <a:ext cx="5218240" cy="1362745"/>
+          </a:xfrm>
+          <a:prstGeom prst="rect">
+            <a:avLst/>
+          </a:prstGeom>
+        </p:spPr>
+        <p:txBody>
+          <a:bodyPr vert="horz" lIns="91440" tIns="45720" rIns="91440" bIns="45720" rtlCol="0" anchor="ctr">
+            <a:normAutofit/>
+          </a:bodyPr>
+          <a:lstStyle>
+            <a:lvl1pPr marL="285750" indent="-285750" algn="l" defTabSz="457200" rtl="0" eaLnBrk="1" latinLnBrk="0" hangingPunct="1">
+              <a:spcBef>
+                <a:spcPct val="20000"/>
+              </a:spcBef>
+              <a:spcAft>
+                <a:spcPts val="600"/>
+              </a:spcAft>
+              <a:buClr>
+                <a:schemeClr val="tx1"/>
+              </a:buClr>
+              <a:buSzPct val="100000"/>
+              <a:buFont typeface="Arial"/>
+              <a:buChar char="•"/>
+              <a:defRPr sz="2000" kern="1200" cap="small">
+                <a:gradFill flip="none" rotWithShape="1">
+                  <a:gsLst>
+                    <a:gs pos="0">
+                      <a:schemeClr val="tx1"/>
+                    </a:gs>
+                    <a:gs pos="100000">
+                      <a:schemeClr val="tx1">
+                        <a:lumMod val="75000"/>
+                      </a:schemeClr>
+                    </a:gs>
+                  </a:gsLst>
+                  <a:lin ang="5580000" scaled="0"/>
+                  <a:tileRect/>
+                </a:gradFill>
+                <a:effectLst>
+                  <a:glow rad="38100">
+                    <a:schemeClr val="bg1">
+                      <a:lumMod val="50000"/>
+                      <a:lumOff val="50000"/>
+                      <a:alpha val="20000"/>
+                    </a:schemeClr>
+                  </a:glow>
+                  <a:outerShdw blurRad="44450" dist="12700" dir="13860000" algn="tl" rotWithShape="0">
+                    <a:srgbClr val="000000">
+                      <a:alpha val="20000"/>
+                    </a:srgbClr>
+                  </a:outerShdw>
+                </a:effectLst>
+                <a:latin typeface="+mn-lt"/>
+                <a:ea typeface="+mn-ea"/>
+                <a:cs typeface="+mn-cs"/>
+              </a:defRPr>
+            </a:lvl1pPr>
+            <a:lvl2pPr marL="742950" indent="-285750" algn="l" defTabSz="457200" rtl="0" eaLnBrk="1" latinLnBrk="0" hangingPunct="1">
+              <a:spcBef>
+                <a:spcPct val="20000"/>
+              </a:spcBef>
+              <a:spcAft>
+                <a:spcPts val="600"/>
+              </a:spcAft>
+              <a:buClr>
+                <a:schemeClr val="tx1"/>
+              </a:buClr>
+              <a:buSzPct val="100000"/>
+              <a:buFont typeface="Arial"/>
+              <a:buChar char="•"/>
+              <a:defRPr sz="1800" kern="1200" cap="small">
+                <a:gradFill flip="none" rotWithShape="1">
+                  <a:gsLst>
+                    <a:gs pos="0">
+                      <a:schemeClr val="tx1"/>
+                    </a:gs>
+                    <a:gs pos="100000">
+                      <a:schemeClr val="tx1">
+                        <a:lumMod val="75000"/>
+                      </a:schemeClr>
+                    </a:gs>
+                  </a:gsLst>
+                  <a:lin ang="5580000" scaled="0"/>
+                  <a:tileRect/>
+                </a:gradFill>
+                <a:effectLst>
+                  <a:glow rad="38100">
+                    <a:schemeClr val="bg1">
+                      <a:lumMod val="50000"/>
+                      <a:lumOff val="50000"/>
+                      <a:alpha val="20000"/>
+                    </a:schemeClr>
+                  </a:glow>
+                  <a:outerShdw blurRad="44450" dist="12700" dir="13860000" algn="tl" rotWithShape="0">
+                    <a:srgbClr val="000000">
+                      <a:alpha val="20000"/>
+                    </a:srgbClr>
+                  </a:outerShdw>
+                </a:effectLst>
+                <a:latin typeface="+mn-lt"/>
+                <a:ea typeface="+mn-ea"/>
+                <a:cs typeface="+mn-cs"/>
+              </a:defRPr>
+            </a:lvl2pPr>
+            <a:lvl3pPr marL="1200150" indent="-285750" algn="l" defTabSz="457200" rtl="0" eaLnBrk="1" latinLnBrk="0" hangingPunct="1">
+              <a:spcBef>
+                <a:spcPct val="20000"/>
+              </a:spcBef>
+              <a:spcAft>
+                <a:spcPts val="600"/>
+              </a:spcAft>
+              <a:buClr>
+                <a:schemeClr val="tx1"/>
+              </a:buClr>
+              <a:buSzPct val="100000"/>
+              <a:buFont typeface="Arial"/>
+              <a:buChar char="•"/>
+              <a:defRPr sz="1600" kern="1200" cap="small">
+                <a:gradFill flip="none" rotWithShape="1">
+                  <a:gsLst>
+                    <a:gs pos="0">
+                      <a:schemeClr val="tx1"/>
+                    </a:gs>
+                    <a:gs pos="100000">
+                      <a:schemeClr val="tx1">
+                        <a:lumMod val="75000"/>
+                      </a:schemeClr>
+                    </a:gs>
+                  </a:gsLst>
+                  <a:lin ang="5580000" scaled="0"/>
+                  <a:tileRect/>
+                </a:gradFill>
+                <a:effectLst>
+                  <a:glow rad="38100">
+                    <a:schemeClr val="bg1">
+                      <a:lumMod val="50000"/>
+                      <a:lumOff val="50000"/>
+                      <a:alpha val="20000"/>
+                    </a:schemeClr>
+                  </a:glow>
+                  <a:outerShdw blurRad="44450" dist="12700" dir="13860000" algn="tl" rotWithShape="0">
+                    <a:srgbClr val="000000">
+                      <a:alpha val="20000"/>
+                    </a:srgbClr>
+                  </a:outerShdw>
+                </a:effectLst>
+                <a:latin typeface="+mn-lt"/>
+                <a:ea typeface="+mn-ea"/>
+                <a:cs typeface="+mn-cs"/>
+              </a:defRPr>
+            </a:lvl3pPr>
+            <a:lvl4pPr marL="1543050" indent="-171450" algn="l" defTabSz="457200" rtl="0" eaLnBrk="1" latinLnBrk="0" hangingPunct="1">
+              <a:spcBef>
+                <a:spcPct val="20000"/>
+              </a:spcBef>
+              <a:spcAft>
+                <a:spcPts val="600"/>
+              </a:spcAft>
+              <a:buClr>
+                <a:schemeClr val="tx1"/>
+              </a:buClr>
+              <a:buSzPct val="100000"/>
+              <a:buFont typeface="Arial"/>
+              <a:buChar char="•"/>
+              <a:defRPr sz="1400" kern="1200" cap="small">
+                <a:gradFill flip="none" rotWithShape="1">
+                  <a:gsLst>
+                    <a:gs pos="0">
+                      <a:schemeClr val="tx1"/>
+                    </a:gs>
+                    <a:gs pos="100000">
+                      <a:schemeClr val="tx1">
+                        <a:lumMod val="75000"/>
+                      </a:schemeClr>
+                    </a:gs>
+                  </a:gsLst>
+                  <a:lin ang="5580000" scaled="0"/>
+                  <a:tileRect/>
+                </a:gradFill>
+                <a:effectLst>
+                  <a:glow rad="38100">
+                    <a:schemeClr val="bg1">
+                      <a:lumMod val="50000"/>
+                      <a:lumOff val="50000"/>
+                      <a:alpha val="20000"/>
+                    </a:schemeClr>
+                  </a:glow>
+                  <a:outerShdw blurRad="44450" dist="12700" dir="13860000" algn="tl" rotWithShape="0">
+                    <a:srgbClr val="000000">
+                      <a:alpha val="20000"/>
+                    </a:srgbClr>
+                  </a:outerShdw>
+                </a:effectLst>
+                <a:latin typeface="+mn-lt"/>
+                <a:ea typeface="+mn-ea"/>
+                <a:cs typeface="+mn-cs"/>
+              </a:defRPr>
+            </a:lvl4pPr>
+            <a:lvl5pPr marL="2000250" indent="-171450" algn="l" defTabSz="457200" rtl="0" eaLnBrk="1" latinLnBrk="0" hangingPunct="1">
+              <a:spcBef>
+                <a:spcPct val="20000"/>
+              </a:spcBef>
+              <a:spcAft>
+                <a:spcPts val="600"/>
+              </a:spcAft>
+              <a:buClr>
+                <a:schemeClr val="tx1"/>
+              </a:buClr>
+              <a:buSzPct val="100000"/>
+              <a:buFont typeface="Arial"/>
+              <a:buChar char="•"/>
+              <a:defRPr sz="1400" kern="1200" cap="small">
+                <a:gradFill flip="none" rotWithShape="1">
+                  <a:gsLst>
+                    <a:gs pos="0">
+                      <a:schemeClr val="tx1"/>
+                    </a:gs>
+                    <a:gs pos="100000">
+                      <a:schemeClr val="tx1">
+                        <a:lumMod val="75000"/>
+                      </a:schemeClr>
+                    </a:gs>
+                  </a:gsLst>
+                  <a:lin ang="5580000" scaled="0"/>
+                  <a:tileRect/>
+                </a:gradFill>
+                <a:effectLst>
+                  <a:glow rad="38100">
+                    <a:schemeClr val="bg1">
+                      <a:lumMod val="50000"/>
+                      <a:lumOff val="50000"/>
+                      <a:alpha val="20000"/>
+                    </a:schemeClr>
+                  </a:glow>
+                  <a:outerShdw blurRad="44450" dist="12700" dir="13860000" algn="tl" rotWithShape="0">
+                    <a:srgbClr val="000000">
+                      <a:alpha val="20000"/>
+                    </a:srgbClr>
+                  </a:outerShdw>
+                </a:effectLst>
+                <a:latin typeface="+mn-lt"/>
+                <a:ea typeface="+mn-ea"/>
+                <a:cs typeface="+mn-cs"/>
+              </a:defRPr>
+            </a:lvl5pPr>
+            <a:lvl6pPr marL="2514600" indent="-228600" algn="l" defTabSz="457200" rtl="0" eaLnBrk="1" latinLnBrk="0" hangingPunct="1">
+              <a:spcBef>
+                <a:spcPct val="20000"/>
+              </a:spcBef>
+              <a:spcAft>
+                <a:spcPts val="600"/>
+              </a:spcAft>
+              <a:buClr>
+                <a:schemeClr val="tx1"/>
+              </a:buClr>
+              <a:buSzPct val="100000"/>
+              <a:buFont typeface="Arial"/>
+              <a:buChar char="•"/>
+              <a:defRPr sz="1200" kern="1200" cap="small">
+                <a:gradFill flip="none" rotWithShape="1">
+                  <a:gsLst>
+                    <a:gs pos="0">
+                      <a:schemeClr val="tx1"/>
+                    </a:gs>
+                    <a:gs pos="100000">
+                      <a:schemeClr val="tx1">
+                        <a:lumMod val="75000"/>
+                      </a:schemeClr>
+                    </a:gs>
+                  </a:gsLst>
+                  <a:lin ang="5580000" scaled="0"/>
+                  <a:tileRect/>
+                </a:gradFill>
+                <a:effectLst>
+                  <a:glow rad="38100">
+                    <a:schemeClr val="bg1">
+                      <a:lumMod val="50000"/>
+                      <a:lumOff val="50000"/>
+                      <a:alpha val="20000"/>
+                    </a:schemeClr>
+                  </a:glow>
+                  <a:outerShdw blurRad="44450" dist="12700" dir="13860000" algn="tl" rotWithShape="0">
+                    <a:srgbClr val="000000">
+                      <a:alpha val="20000"/>
+                    </a:srgbClr>
+                  </a:outerShdw>
+                </a:effectLst>
+                <a:latin typeface="+mn-lt"/>
+                <a:ea typeface="+mn-ea"/>
+                <a:cs typeface="+mn-cs"/>
+              </a:defRPr>
+            </a:lvl6pPr>
+            <a:lvl7pPr marL="2971800" indent="-228600" algn="l" defTabSz="457200" rtl="0" eaLnBrk="1" latinLnBrk="0" hangingPunct="1">
+              <a:spcBef>
+                <a:spcPct val="20000"/>
+              </a:spcBef>
+              <a:spcAft>
+                <a:spcPts val="600"/>
+              </a:spcAft>
+              <a:buClr>
+                <a:schemeClr val="tx1"/>
+              </a:buClr>
+              <a:buSzPct val="100000"/>
+              <a:buFont typeface="Arial"/>
+              <a:buChar char="•"/>
+              <a:defRPr sz="1200" kern="1200" cap="small">
+                <a:gradFill flip="none" rotWithShape="1">
+                  <a:gsLst>
+                    <a:gs pos="0">
+                      <a:schemeClr val="tx1"/>
+                    </a:gs>
+                    <a:gs pos="100000">
+                      <a:schemeClr val="tx1">
+                        <a:lumMod val="75000"/>
+                      </a:schemeClr>
+                    </a:gs>
+                  </a:gsLst>
+                  <a:lin ang="5580000" scaled="0"/>
+                  <a:tileRect/>
+                </a:gradFill>
+                <a:effectLst>
+                  <a:glow rad="38100">
+                    <a:schemeClr val="bg1">
+                      <a:lumMod val="50000"/>
+                      <a:lumOff val="50000"/>
+                      <a:alpha val="20000"/>
+                    </a:schemeClr>
+                  </a:glow>
+                  <a:outerShdw blurRad="44450" dist="12700" dir="13860000" algn="tl" rotWithShape="0">
+                    <a:srgbClr val="000000">
+                      <a:alpha val="20000"/>
+                    </a:srgbClr>
+                  </a:outerShdw>
+                </a:effectLst>
+                <a:latin typeface="+mn-lt"/>
+                <a:ea typeface="+mn-ea"/>
+                <a:cs typeface="+mn-cs"/>
+              </a:defRPr>
+            </a:lvl7pPr>
+            <a:lvl8pPr marL="3429000" indent="-228600" algn="l" defTabSz="457200" rtl="0" eaLnBrk="1" latinLnBrk="0" hangingPunct="1">
+              <a:spcBef>
+                <a:spcPct val="20000"/>
+              </a:spcBef>
+              <a:spcAft>
+                <a:spcPts val="600"/>
+              </a:spcAft>
+              <a:buClr>
+                <a:schemeClr val="tx1"/>
+              </a:buClr>
+              <a:buSzPct val="100000"/>
+              <a:buFont typeface="Arial"/>
+              <a:buChar char="•"/>
+              <a:defRPr sz="1200" kern="1200" cap="small">
+                <a:gradFill flip="none" rotWithShape="1">
+                  <a:gsLst>
+                    <a:gs pos="0">
+                      <a:schemeClr val="tx1"/>
+                    </a:gs>
+                    <a:gs pos="100000">
+                      <a:schemeClr val="tx1">
+                        <a:lumMod val="75000"/>
+                      </a:schemeClr>
+                    </a:gs>
+                  </a:gsLst>
+                  <a:lin ang="5580000" scaled="0"/>
+                  <a:tileRect/>
+                </a:gradFill>
+                <a:effectLst>
+                  <a:glow rad="38100">
+                    <a:schemeClr val="bg1">
+                      <a:lumMod val="50000"/>
+                      <a:lumOff val="50000"/>
+                      <a:alpha val="20000"/>
+                    </a:schemeClr>
+                  </a:glow>
+                  <a:outerShdw blurRad="44450" dist="12700" dir="13860000" algn="tl" rotWithShape="0">
+                    <a:srgbClr val="000000">
+                      <a:alpha val="20000"/>
+                    </a:srgbClr>
+                  </a:outerShdw>
+                </a:effectLst>
+                <a:latin typeface="+mn-lt"/>
+                <a:ea typeface="+mn-ea"/>
+                <a:cs typeface="+mn-cs"/>
+              </a:defRPr>
+            </a:lvl8pPr>
+            <a:lvl9pPr marL="3886200" indent="-228600" algn="l" defTabSz="457200" rtl="0" eaLnBrk="1" latinLnBrk="0" hangingPunct="1">
+              <a:spcBef>
+                <a:spcPct val="20000"/>
+              </a:spcBef>
+              <a:spcAft>
+                <a:spcPts val="600"/>
+              </a:spcAft>
+              <a:buClr>
+                <a:schemeClr val="tx1"/>
+              </a:buClr>
+              <a:buSzPct val="100000"/>
+              <a:buFont typeface="Arial"/>
+              <a:buChar char="•"/>
+              <a:defRPr sz="1200" kern="1200" cap="small">
+                <a:gradFill flip="none" rotWithShape="1">
+                  <a:gsLst>
+                    <a:gs pos="0">
+                      <a:schemeClr val="tx1"/>
+                    </a:gs>
+                    <a:gs pos="100000">
+                      <a:schemeClr val="tx1">
+                        <a:lumMod val="75000"/>
+                      </a:schemeClr>
+                    </a:gs>
+                  </a:gsLst>
+                  <a:lin ang="5580000" scaled="0"/>
+                  <a:tileRect/>
+                </a:gradFill>
+                <a:effectLst>
+                  <a:glow rad="38100">
+                    <a:schemeClr val="bg1">
+                      <a:lumMod val="50000"/>
+                      <a:lumOff val="50000"/>
+                      <a:alpha val="20000"/>
+                    </a:schemeClr>
+                  </a:glow>
+                  <a:outerShdw blurRad="44450" dist="12700" dir="13860000" algn="tl" rotWithShape="0">
+                    <a:srgbClr val="000000">
+                      <a:alpha val="20000"/>
+                    </a:srgbClr>
+                  </a:outerShdw>
+                </a:effectLst>
+                <a:latin typeface="+mn-lt"/>
+                <a:ea typeface="+mn-ea"/>
+                <a:cs typeface="+mn-cs"/>
+              </a:defRPr>
+            </a:lvl9pPr>
+          </a:lstStyle>
+          <a:p>
+            <a:pPr marL="0" indent="0">
+              <a:buNone/>
+            </a:pPr>
+            <a:r>
+              <a:rPr lang="en-US" dirty="0" err="1"/>
+              <a:t>Hyperparamater</a:t>
+            </a:r>
+            <a:r>
+              <a:rPr lang="en-US" dirty="0"/>
+              <a:t> tuning shows 200 estimators and 20 depth as the optimal shape for handling the features</a:t>
+            </a:r>
+          </a:p>
+          <a:p>
+            <a:pPr marL="0" indent="0">
+              <a:buNone/>
+            </a:pPr>
+            <a:endParaRPr lang="en-US" dirty="0"/>
+          </a:p>
+        </p:txBody>
+      </p:sp>
+      <p:sp>
+        <p:nvSpPr>
+          <p:cNvPr id="17" name="Content Placeholder 2">
+            <a:extLst>
+              <a:ext uri="{FF2B5EF4-FFF2-40B4-BE49-F238E27FC236}">
+                <a16:creationId xmlns:a16="http://schemas.microsoft.com/office/drawing/2014/main" id="{F2AC65F2-DC52-A04E-A9B4-6BB8E49303AC}"/>
+              </a:ext>
+            </a:extLst>
+          </p:cNvPr>
+          <p:cNvSpPr txBox="1">
+            <a:spLocks/>
+          </p:cNvSpPr>
+          <p:nvPr/>
+        </p:nvSpPr>
+        <p:spPr>
+          <a:xfrm>
+            <a:off x="484976" y="4888706"/>
+            <a:ext cx="5218240" cy="1210436"/>
+          </a:xfrm>
+          <a:prstGeom prst="rect">
+            <a:avLst/>
+          </a:prstGeom>
+        </p:spPr>
+        <p:txBody>
+          <a:bodyPr vert="horz" lIns="91440" tIns="45720" rIns="91440" bIns="45720" rtlCol="0" anchor="ctr">
+            <a:normAutofit lnSpcReduction="10000"/>
+          </a:bodyPr>
+          <a:lstStyle>
+            <a:lvl1pPr marL="285750" indent="-285750" algn="l" defTabSz="457200" rtl="0" eaLnBrk="1" latinLnBrk="0" hangingPunct="1">
+              <a:spcBef>
+                <a:spcPct val="20000"/>
+              </a:spcBef>
+              <a:spcAft>
+                <a:spcPts val="600"/>
+              </a:spcAft>
+              <a:buClr>
+                <a:schemeClr val="tx1"/>
+              </a:buClr>
+              <a:buSzPct val="100000"/>
+              <a:buFont typeface="Arial"/>
+              <a:buChar char="•"/>
+              <a:defRPr sz="2000" kern="1200" cap="small">
+                <a:gradFill flip="none" rotWithShape="1">
+                  <a:gsLst>
+                    <a:gs pos="0">
+                      <a:schemeClr val="tx1"/>
+                    </a:gs>
+                    <a:gs pos="100000">
+                      <a:schemeClr val="tx1">
+                        <a:lumMod val="75000"/>
+                      </a:schemeClr>
+                    </a:gs>
+                  </a:gsLst>
+                  <a:lin ang="5580000" scaled="0"/>
+                  <a:tileRect/>
+                </a:gradFill>
+                <a:effectLst>
+                  <a:glow rad="38100">
+                    <a:schemeClr val="bg1">
+                      <a:lumMod val="50000"/>
+                      <a:lumOff val="50000"/>
+                      <a:alpha val="20000"/>
+                    </a:schemeClr>
+                  </a:glow>
+                  <a:outerShdw blurRad="44450" dist="12700" dir="13860000" algn="tl" rotWithShape="0">
+                    <a:srgbClr val="000000">
+                      <a:alpha val="20000"/>
+                    </a:srgbClr>
+                  </a:outerShdw>
+                </a:effectLst>
+                <a:latin typeface="+mn-lt"/>
+                <a:ea typeface="+mn-ea"/>
+                <a:cs typeface="+mn-cs"/>
+              </a:defRPr>
+            </a:lvl1pPr>
+            <a:lvl2pPr marL="742950" indent="-285750" algn="l" defTabSz="457200" rtl="0" eaLnBrk="1" latinLnBrk="0" hangingPunct="1">
+              <a:spcBef>
+                <a:spcPct val="20000"/>
+              </a:spcBef>
+              <a:spcAft>
+                <a:spcPts val="600"/>
+              </a:spcAft>
+              <a:buClr>
+                <a:schemeClr val="tx1"/>
+              </a:buClr>
+              <a:buSzPct val="100000"/>
+              <a:buFont typeface="Arial"/>
+              <a:buChar char="•"/>
+              <a:defRPr sz="1800" kern="1200" cap="small">
+                <a:gradFill flip="none" rotWithShape="1">
+                  <a:gsLst>
+                    <a:gs pos="0">
+                      <a:schemeClr val="tx1"/>
+                    </a:gs>
+                    <a:gs pos="100000">
+                      <a:schemeClr val="tx1">
+                        <a:lumMod val="75000"/>
+                      </a:schemeClr>
+                    </a:gs>
+                  </a:gsLst>
+                  <a:lin ang="5580000" scaled="0"/>
+                  <a:tileRect/>
+                </a:gradFill>
+                <a:effectLst>
+                  <a:glow rad="38100">
+                    <a:schemeClr val="bg1">
+                      <a:lumMod val="50000"/>
+                      <a:lumOff val="50000"/>
+                      <a:alpha val="20000"/>
+                    </a:schemeClr>
+                  </a:glow>
+                  <a:outerShdw blurRad="44450" dist="12700" dir="13860000" algn="tl" rotWithShape="0">
+                    <a:srgbClr val="000000">
+                      <a:alpha val="20000"/>
+                    </a:srgbClr>
+                  </a:outerShdw>
+                </a:effectLst>
+                <a:latin typeface="+mn-lt"/>
+                <a:ea typeface="+mn-ea"/>
+                <a:cs typeface="+mn-cs"/>
+              </a:defRPr>
+            </a:lvl2pPr>
+            <a:lvl3pPr marL="1200150" indent="-285750" algn="l" defTabSz="457200" rtl="0" eaLnBrk="1" latinLnBrk="0" hangingPunct="1">
+              <a:spcBef>
+                <a:spcPct val="20000"/>
+              </a:spcBef>
+              <a:spcAft>
+                <a:spcPts val="600"/>
+              </a:spcAft>
+              <a:buClr>
+                <a:schemeClr val="tx1"/>
+              </a:buClr>
+              <a:buSzPct val="100000"/>
+              <a:buFont typeface="Arial"/>
+              <a:buChar char="•"/>
+              <a:defRPr sz="1600" kern="1200" cap="small">
+                <a:gradFill flip="none" rotWithShape="1">
+                  <a:gsLst>
+                    <a:gs pos="0">
+                      <a:schemeClr val="tx1"/>
+                    </a:gs>
+                    <a:gs pos="100000">
+                      <a:schemeClr val="tx1">
+                        <a:lumMod val="75000"/>
+                      </a:schemeClr>
+                    </a:gs>
+                  </a:gsLst>
+                  <a:lin ang="5580000" scaled="0"/>
+                  <a:tileRect/>
+                </a:gradFill>
+                <a:effectLst>
+                  <a:glow rad="38100">
+                    <a:schemeClr val="bg1">
+                      <a:lumMod val="50000"/>
+                      <a:lumOff val="50000"/>
+                      <a:alpha val="20000"/>
+                    </a:schemeClr>
+                  </a:glow>
+                  <a:outerShdw blurRad="44450" dist="12700" dir="13860000" algn="tl" rotWithShape="0">
+                    <a:srgbClr val="000000">
+                      <a:alpha val="20000"/>
+                    </a:srgbClr>
+                  </a:outerShdw>
+                </a:effectLst>
+                <a:latin typeface="+mn-lt"/>
+                <a:ea typeface="+mn-ea"/>
+                <a:cs typeface="+mn-cs"/>
+              </a:defRPr>
+            </a:lvl3pPr>
+            <a:lvl4pPr marL="1543050" indent="-171450" algn="l" defTabSz="457200" rtl="0" eaLnBrk="1" latinLnBrk="0" hangingPunct="1">
+              <a:spcBef>
+                <a:spcPct val="20000"/>
+              </a:spcBef>
+              <a:spcAft>
+                <a:spcPts val="600"/>
+              </a:spcAft>
+              <a:buClr>
+                <a:schemeClr val="tx1"/>
+              </a:buClr>
+              <a:buSzPct val="100000"/>
+              <a:buFont typeface="Arial"/>
+              <a:buChar char="•"/>
+              <a:defRPr sz="1400" kern="1200" cap="small">
+                <a:gradFill flip="none" rotWithShape="1">
+                  <a:gsLst>
+                    <a:gs pos="0">
+                      <a:schemeClr val="tx1"/>
+                    </a:gs>
+                    <a:gs pos="100000">
+                      <a:schemeClr val="tx1">
+                        <a:lumMod val="75000"/>
+                      </a:schemeClr>
+                    </a:gs>
+                  </a:gsLst>
+                  <a:lin ang="5580000" scaled="0"/>
+                  <a:tileRect/>
+                </a:gradFill>
+                <a:effectLst>
+                  <a:glow rad="38100">
+                    <a:schemeClr val="bg1">
+                      <a:lumMod val="50000"/>
+                      <a:lumOff val="50000"/>
+                      <a:alpha val="20000"/>
+                    </a:schemeClr>
+                  </a:glow>
+                  <a:outerShdw blurRad="44450" dist="12700" dir="13860000" algn="tl" rotWithShape="0">
+                    <a:srgbClr val="000000">
+                      <a:alpha val="20000"/>
+                    </a:srgbClr>
+                  </a:outerShdw>
+                </a:effectLst>
+                <a:latin typeface="+mn-lt"/>
+                <a:ea typeface="+mn-ea"/>
+                <a:cs typeface="+mn-cs"/>
+              </a:defRPr>
+            </a:lvl4pPr>
+            <a:lvl5pPr marL="2000250" indent="-171450" algn="l" defTabSz="457200" rtl="0" eaLnBrk="1" latinLnBrk="0" hangingPunct="1">
+              <a:spcBef>
+                <a:spcPct val="20000"/>
+              </a:spcBef>
+              <a:spcAft>
+                <a:spcPts val="600"/>
+              </a:spcAft>
+              <a:buClr>
+                <a:schemeClr val="tx1"/>
+              </a:buClr>
+              <a:buSzPct val="100000"/>
+              <a:buFont typeface="Arial"/>
+              <a:buChar char="•"/>
+              <a:defRPr sz="1400" kern="1200" cap="small">
+                <a:gradFill flip="none" rotWithShape="1">
+                  <a:gsLst>
+                    <a:gs pos="0">
+                      <a:schemeClr val="tx1"/>
+                    </a:gs>
+                    <a:gs pos="100000">
+                      <a:schemeClr val="tx1">
+                        <a:lumMod val="75000"/>
+                      </a:schemeClr>
+                    </a:gs>
+                  </a:gsLst>
+                  <a:lin ang="5580000" scaled="0"/>
+                  <a:tileRect/>
+                </a:gradFill>
+                <a:effectLst>
+                  <a:glow rad="38100">
+                    <a:schemeClr val="bg1">
+                      <a:lumMod val="50000"/>
+                      <a:lumOff val="50000"/>
+                      <a:alpha val="20000"/>
+                    </a:schemeClr>
+                  </a:glow>
+                  <a:outerShdw blurRad="44450" dist="12700" dir="13860000" algn="tl" rotWithShape="0">
+                    <a:srgbClr val="000000">
+                      <a:alpha val="20000"/>
+                    </a:srgbClr>
+                  </a:outerShdw>
+                </a:effectLst>
+                <a:latin typeface="+mn-lt"/>
+                <a:ea typeface="+mn-ea"/>
+                <a:cs typeface="+mn-cs"/>
+              </a:defRPr>
+            </a:lvl5pPr>
+            <a:lvl6pPr marL="2514600" indent="-228600" algn="l" defTabSz="457200" rtl="0" eaLnBrk="1" latinLnBrk="0" hangingPunct="1">
+              <a:spcBef>
+                <a:spcPct val="20000"/>
+              </a:spcBef>
+              <a:spcAft>
+                <a:spcPts val="600"/>
+              </a:spcAft>
+              <a:buClr>
+                <a:schemeClr val="tx1"/>
+              </a:buClr>
+              <a:buSzPct val="100000"/>
+              <a:buFont typeface="Arial"/>
+              <a:buChar char="•"/>
+              <a:defRPr sz="1200" kern="1200" cap="small">
+                <a:gradFill flip="none" rotWithShape="1">
+                  <a:gsLst>
+                    <a:gs pos="0">
+                      <a:schemeClr val="tx1"/>
+                    </a:gs>
+                    <a:gs pos="100000">
+                      <a:schemeClr val="tx1">
+                        <a:lumMod val="75000"/>
+                      </a:schemeClr>
+                    </a:gs>
+                  </a:gsLst>
+                  <a:lin ang="5580000" scaled="0"/>
+                  <a:tileRect/>
+                </a:gradFill>
+                <a:effectLst>
+                  <a:glow rad="38100">
+                    <a:schemeClr val="bg1">
+                      <a:lumMod val="50000"/>
+                      <a:lumOff val="50000"/>
+                      <a:alpha val="20000"/>
+                    </a:schemeClr>
+                  </a:glow>
+                  <a:outerShdw blurRad="44450" dist="12700" dir="13860000" algn="tl" rotWithShape="0">
+                    <a:srgbClr val="000000">
+                      <a:alpha val="20000"/>
+                    </a:srgbClr>
+                  </a:outerShdw>
+                </a:effectLst>
+                <a:latin typeface="+mn-lt"/>
+                <a:ea typeface="+mn-ea"/>
+                <a:cs typeface="+mn-cs"/>
+              </a:defRPr>
+            </a:lvl6pPr>
+            <a:lvl7pPr marL="2971800" indent="-228600" algn="l" defTabSz="457200" rtl="0" eaLnBrk="1" latinLnBrk="0" hangingPunct="1">
+              <a:spcBef>
+                <a:spcPct val="20000"/>
+              </a:spcBef>
+              <a:spcAft>
+                <a:spcPts val="600"/>
+              </a:spcAft>
+              <a:buClr>
+                <a:schemeClr val="tx1"/>
+              </a:buClr>
+              <a:buSzPct val="100000"/>
+              <a:buFont typeface="Arial"/>
+              <a:buChar char="•"/>
+              <a:defRPr sz="1200" kern="1200" cap="small">
+                <a:gradFill flip="none" rotWithShape="1">
+                  <a:gsLst>
+                    <a:gs pos="0">
+                      <a:schemeClr val="tx1"/>
+                    </a:gs>
+                    <a:gs pos="100000">
+                      <a:schemeClr val="tx1">
+                        <a:lumMod val="75000"/>
+                      </a:schemeClr>
+                    </a:gs>
+                  </a:gsLst>
+                  <a:lin ang="5580000" scaled="0"/>
+                  <a:tileRect/>
+                </a:gradFill>
+                <a:effectLst>
+                  <a:glow rad="38100">
+                    <a:schemeClr val="bg1">
+                      <a:lumMod val="50000"/>
+                      <a:lumOff val="50000"/>
+                      <a:alpha val="20000"/>
+                    </a:schemeClr>
+                  </a:glow>
+                  <a:outerShdw blurRad="44450" dist="12700" dir="13860000" algn="tl" rotWithShape="0">
+                    <a:srgbClr val="000000">
+                      <a:alpha val="20000"/>
+                    </a:srgbClr>
+                  </a:outerShdw>
+                </a:effectLst>
+                <a:latin typeface="+mn-lt"/>
+                <a:ea typeface="+mn-ea"/>
+                <a:cs typeface="+mn-cs"/>
+              </a:defRPr>
+            </a:lvl7pPr>
+            <a:lvl8pPr marL="3429000" indent="-228600" algn="l" defTabSz="457200" rtl="0" eaLnBrk="1" latinLnBrk="0" hangingPunct="1">
+              <a:spcBef>
+                <a:spcPct val="20000"/>
+              </a:spcBef>
+              <a:spcAft>
+                <a:spcPts val="600"/>
+              </a:spcAft>
+              <a:buClr>
+                <a:schemeClr val="tx1"/>
+              </a:buClr>
+              <a:buSzPct val="100000"/>
+              <a:buFont typeface="Arial"/>
+              <a:buChar char="•"/>
+              <a:defRPr sz="1200" kern="1200" cap="small">
+                <a:gradFill flip="none" rotWithShape="1">
+                  <a:gsLst>
+                    <a:gs pos="0">
+                      <a:schemeClr val="tx1"/>
+                    </a:gs>
+                    <a:gs pos="100000">
+                      <a:schemeClr val="tx1">
+                        <a:lumMod val="75000"/>
+                      </a:schemeClr>
+                    </a:gs>
+                  </a:gsLst>
+                  <a:lin ang="5580000" scaled="0"/>
+                  <a:tileRect/>
+                </a:gradFill>
+                <a:effectLst>
+                  <a:glow rad="38100">
+                    <a:schemeClr val="bg1">
+                      <a:lumMod val="50000"/>
+                      <a:lumOff val="50000"/>
+                      <a:alpha val="20000"/>
+                    </a:schemeClr>
+                  </a:glow>
+                  <a:outerShdw blurRad="44450" dist="12700" dir="13860000" algn="tl" rotWithShape="0">
+                    <a:srgbClr val="000000">
+                      <a:alpha val="20000"/>
+                    </a:srgbClr>
+                  </a:outerShdw>
+                </a:effectLst>
+                <a:latin typeface="+mn-lt"/>
+                <a:ea typeface="+mn-ea"/>
+                <a:cs typeface="+mn-cs"/>
+              </a:defRPr>
+            </a:lvl8pPr>
+            <a:lvl9pPr marL="3886200" indent="-228600" algn="l" defTabSz="457200" rtl="0" eaLnBrk="1" latinLnBrk="0" hangingPunct="1">
+              <a:spcBef>
+                <a:spcPct val="20000"/>
+              </a:spcBef>
+              <a:spcAft>
+                <a:spcPts val="600"/>
+              </a:spcAft>
+              <a:buClr>
+                <a:schemeClr val="tx1"/>
+              </a:buClr>
+              <a:buSzPct val="100000"/>
+              <a:buFont typeface="Arial"/>
+              <a:buChar char="•"/>
+              <a:defRPr sz="1200" kern="1200" cap="small">
+                <a:gradFill flip="none" rotWithShape="1">
+                  <a:gsLst>
+                    <a:gs pos="0">
+                      <a:schemeClr val="tx1"/>
+                    </a:gs>
+                    <a:gs pos="100000">
+                      <a:schemeClr val="tx1">
+                        <a:lumMod val="75000"/>
+                      </a:schemeClr>
+                    </a:gs>
+                  </a:gsLst>
+                  <a:lin ang="5580000" scaled="0"/>
+                  <a:tileRect/>
+                </a:gradFill>
+                <a:effectLst>
+                  <a:glow rad="38100">
+                    <a:schemeClr val="bg1">
+                      <a:lumMod val="50000"/>
+                      <a:lumOff val="50000"/>
+                      <a:alpha val="20000"/>
+                    </a:schemeClr>
+                  </a:glow>
+                  <a:outerShdw blurRad="44450" dist="12700" dir="13860000" algn="tl" rotWithShape="0">
+                    <a:srgbClr val="000000">
+                      <a:alpha val="20000"/>
+                    </a:srgbClr>
+                  </a:outerShdw>
+                </a:effectLst>
+                <a:latin typeface="+mn-lt"/>
+                <a:ea typeface="+mn-ea"/>
+                <a:cs typeface="+mn-cs"/>
+              </a:defRPr>
+            </a:lvl9pPr>
+          </a:lstStyle>
+          <a:p>
+            <a:pPr marL="0" indent="0">
+              <a:buNone/>
+            </a:pPr>
+            <a:r>
+              <a:rPr lang="en-US" b="1" dirty="0"/>
+              <a:t>Fandom forest </a:t>
+            </a:r>
+            <a:r>
+              <a:rPr lang="en-US" dirty="0"/>
+              <a:t>is our top achieving tree with 90.8%accuracy and 0.93 F1 score, and a balance between recall and </a:t>
+            </a:r>
+            <a:r>
+              <a:rPr lang="en-US" dirty="0" err="1"/>
+              <a:t>presicion</a:t>
+            </a:r>
+            <a:endParaRPr lang="en-US" dirty="0"/>
+          </a:p>
+        </p:txBody>
+      </p:sp>
+      <p:sp>
+        <p:nvSpPr>
+          <p:cNvPr id="18" name="Content Placeholder 2">
+            <a:extLst>
+              <a:ext uri="{FF2B5EF4-FFF2-40B4-BE49-F238E27FC236}">
+                <a16:creationId xmlns:a16="http://schemas.microsoft.com/office/drawing/2014/main" id="{3AD6CA0E-A1AD-59FA-67EA-ADD8C4C545D7}"/>
+              </a:ext>
+            </a:extLst>
+          </p:cNvPr>
+          <p:cNvSpPr txBox="1">
+            <a:spLocks/>
+          </p:cNvSpPr>
+          <p:nvPr/>
+        </p:nvSpPr>
+        <p:spPr>
+          <a:xfrm>
+            <a:off x="7017980" y="3146464"/>
+            <a:ext cx="5174019" cy="709099"/>
+          </a:xfrm>
+          <a:prstGeom prst="rect">
+            <a:avLst/>
+          </a:prstGeom>
+        </p:spPr>
+        <p:txBody>
+          <a:bodyPr vert="horz" lIns="91440" tIns="45720" rIns="91440" bIns="45720" rtlCol="0" anchor="ctr">
+            <a:normAutofit fontScale="77500" lnSpcReduction="20000"/>
+          </a:bodyPr>
+          <a:lstStyle>
+            <a:lvl1pPr marL="285750" indent="-285750" algn="l" defTabSz="457200" rtl="0" eaLnBrk="1" latinLnBrk="0" hangingPunct="1">
+              <a:spcBef>
+                <a:spcPct val="20000"/>
+              </a:spcBef>
+              <a:spcAft>
+                <a:spcPts val="600"/>
+              </a:spcAft>
+              <a:buClr>
+                <a:schemeClr val="tx1"/>
+              </a:buClr>
+              <a:buSzPct val="100000"/>
+              <a:buFont typeface="Arial"/>
+              <a:buChar char="•"/>
+              <a:defRPr sz="2000" kern="1200" cap="small">
+                <a:gradFill flip="none" rotWithShape="1">
+                  <a:gsLst>
+                    <a:gs pos="0">
+                      <a:schemeClr val="tx1"/>
+                    </a:gs>
+                    <a:gs pos="100000">
+                      <a:schemeClr val="tx1">
+                        <a:lumMod val="75000"/>
+                      </a:schemeClr>
+                    </a:gs>
+                  </a:gsLst>
+                  <a:lin ang="5580000" scaled="0"/>
+                  <a:tileRect/>
+                </a:gradFill>
+                <a:effectLst>
+                  <a:glow rad="38100">
+                    <a:schemeClr val="bg1">
+                      <a:lumMod val="50000"/>
+                      <a:lumOff val="50000"/>
+                      <a:alpha val="20000"/>
+                    </a:schemeClr>
+                  </a:glow>
+                  <a:outerShdw blurRad="44450" dist="12700" dir="13860000" algn="tl" rotWithShape="0">
+                    <a:srgbClr val="000000">
+                      <a:alpha val="20000"/>
+                    </a:srgbClr>
+                  </a:outerShdw>
+                </a:effectLst>
+                <a:latin typeface="+mn-lt"/>
+                <a:ea typeface="+mn-ea"/>
+                <a:cs typeface="+mn-cs"/>
+              </a:defRPr>
+            </a:lvl1pPr>
+            <a:lvl2pPr marL="742950" indent="-285750" algn="l" defTabSz="457200" rtl="0" eaLnBrk="1" latinLnBrk="0" hangingPunct="1">
+              <a:spcBef>
+                <a:spcPct val="20000"/>
+              </a:spcBef>
+              <a:spcAft>
+                <a:spcPts val="600"/>
+              </a:spcAft>
+              <a:buClr>
+                <a:schemeClr val="tx1"/>
+              </a:buClr>
+              <a:buSzPct val="100000"/>
+              <a:buFont typeface="Arial"/>
+              <a:buChar char="•"/>
+              <a:defRPr sz="1800" kern="1200" cap="small">
+                <a:gradFill flip="none" rotWithShape="1">
+                  <a:gsLst>
+                    <a:gs pos="0">
+                      <a:schemeClr val="tx1"/>
+                    </a:gs>
+                    <a:gs pos="100000">
+                      <a:schemeClr val="tx1">
+                        <a:lumMod val="75000"/>
+                      </a:schemeClr>
+                    </a:gs>
+                  </a:gsLst>
+                  <a:lin ang="5580000" scaled="0"/>
+                  <a:tileRect/>
+                </a:gradFill>
+                <a:effectLst>
+                  <a:glow rad="38100">
+                    <a:schemeClr val="bg1">
+                      <a:lumMod val="50000"/>
+                      <a:lumOff val="50000"/>
+                      <a:alpha val="20000"/>
+                    </a:schemeClr>
+                  </a:glow>
+                  <a:outerShdw blurRad="44450" dist="12700" dir="13860000" algn="tl" rotWithShape="0">
+                    <a:srgbClr val="000000">
+                      <a:alpha val="20000"/>
+                    </a:srgbClr>
+                  </a:outerShdw>
+                </a:effectLst>
+                <a:latin typeface="+mn-lt"/>
+                <a:ea typeface="+mn-ea"/>
+                <a:cs typeface="+mn-cs"/>
+              </a:defRPr>
+            </a:lvl2pPr>
+            <a:lvl3pPr marL="1200150" indent="-285750" algn="l" defTabSz="457200" rtl="0" eaLnBrk="1" latinLnBrk="0" hangingPunct="1">
+              <a:spcBef>
+                <a:spcPct val="20000"/>
+              </a:spcBef>
+              <a:spcAft>
+                <a:spcPts val="600"/>
+              </a:spcAft>
+              <a:buClr>
+                <a:schemeClr val="tx1"/>
+              </a:buClr>
+              <a:buSzPct val="100000"/>
+              <a:buFont typeface="Arial"/>
+              <a:buChar char="•"/>
+              <a:defRPr sz="1600" kern="1200" cap="small">
+                <a:gradFill flip="none" rotWithShape="1">
+                  <a:gsLst>
+                    <a:gs pos="0">
+                      <a:schemeClr val="tx1"/>
+                    </a:gs>
+                    <a:gs pos="100000">
+                      <a:schemeClr val="tx1">
+                        <a:lumMod val="75000"/>
+                      </a:schemeClr>
+                    </a:gs>
+                  </a:gsLst>
+                  <a:lin ang="5580000" scaled="0"/>
+                  <a:tileRect/>
+                </a:gradFill>
+                <a:effectLst>
+                  <a:glow rad="38100">
+                    <a:schemeClr val="bg1">
+                      <a:lumMod val="50000"/>
+                      <a:lumOff val="50000"/>
+                      <a:alpha val="20000"/>
+                    </a:schemeClr>
+                  </a:glow>
+                  <a:outerShdw blurRad="44450" dist="12700" dir="13860000" algn="tl" rotWithShape="0">
+                    <a:srgbClr val="000000">
+                      <a:alpha val="20000"/>
+                    </a:srgbClr>
+                  </a:outerShdw>
+                </a:effectLst>
+                <a:latin typeface="+mn-lt"/>
+                <a:ea typeface="+mn-ea"/>
+                <a:cs typeface="+mn-cs"/>
+              </a:defRPr>
+            </a:lvl3pPr>
+            <a:lvl4pPr marL="1543050" indent="-171450" algn="l" defTabSz="457200" rtl="0" eaLnBrk="1" latinLnBrk="0" hangingPunct="1">
+              <a:spcBef>
+                <a:spcPct val="20000"/>
+              </a:spcBef>
+              <a:spcAft>
+                <a:spcPts val="600"/>
+              </a:spcAft>
+              <a:buClr>
+                <a:schemeClr val="tx1"/>
+              </a:buClr>
+              <a:buSzPct val="100000"/>
+              <a:buFont typeface="Arial"/>
+              <a:buChar char="•"/>
+              <a:defRPr sz="1400" kern="1200" cap="small">
+                <a:gradFill flip="none" rotWithShape="1">
+                  <a:gsLst>
+                    <a:gs pos="0">
+                      <a:schemeClr val="tx1"/>
+                    </a:gs>
+                    <a:gs pos="100000">
+                      <a:schemeClr val="tx1">
+                        <a:lumMod val="75000"/>
+                      </a:schemeClr>
+                    </a:gs>
+                  </a:gsLst>
+                  <a:lin ang="5580000" scaled="0"/>
+                  <a:tileRect/>
+                </a:gradFill>
+                <a:effectLst>
+                  <a:glow rad="38100">
+                    <a:schemeClr val="bg1">
+                      <a:lumMod val="50000"/>
+                      <a:lumOff val="50000"/>
+                      <a:alpha val="20000"/>
+                    </a:schemeClr>
+                  </a:glow>
+                  <a:outerShdw blurRad="44450" dist="12700" dir="13860000" algn="tl" rotWithShape="0">
+                    <a:srgbClr val="000000">
+                      <a:alpha val="20000"/>
+                    </a:srgbClr>
+                  </a:outerShdw>
+                </a:effectLst>
+                <a:latin typeface="+mn-lt"/>
+                <a:ea typeface="+mn-ea"/>
+                <a:cs typeface="+mn-cs"/>
+              </a:defRPr>
+            </a:lvl4pPr>
+            <a:lvl5pPr marL="2000250" indent="-171450" algn="l" defTabSz="457200" rtl="0" eaLnBrk="1" latinLnBrk="0" hangingPunct="1">
+              <a:spcBef>
+                <a:spcPct val="20000"/>
+              </a:spcBef>
+              <a:spcAft>
+                <a:spcPts val="600"/>
+              </a:spcAft>
+              <a:buClr>
+                <a:schemeClr val="tx1"/>
+              </a:buClr>
+              <a:buSzPct val="100000"/>
+              <a:buFont typeface="Arial"/>
+              <a:buChar char="•"/>
+              <a:defRPr sz="1400" kern="1200" cap="small">
+                <a:gradFill flip="none" rotWithShape="1">
+                  <a:gsLst>
+                    <a:gs pos="0">
+                      <a:schemeClr val="tx1"/>
+                    </a:gs>
+                    <a:gs pos="100000">
+                      <a:schemeClr val="tx1">
+                        <a:lumMod val="75000"/>
+                      </a:schemeClr>
+                    </a:gs>
+                  </a:gsLst>
+                  <a:lin ang="5580000" scaled="0"/>
+                  <a:tileRect/>
+                </a:gradFill>
+                <a:effectLst>
+                  <a:glow rad="38100">
+                    <a:schemeClr val="bg1">
+                      <a:lumMod val="50000"/>
+                      <a:lumOff val="50000"/>
+                      <a:alpha val="20000"/>
+                    </a:schemeClr>
+                  </a:glow>
+                  <a:outerShdw blurRad="44450" dist="12700" dir="13860000" algn="tl" rotWithShape="0">
+                    <a:srgbClr val="000000">
+                      <a:alpha val="20000"/>
+                    </a:srgbClr>
+                  </a:outerShdw>
+                </a:effectLst>
+                <a:latin typeface="+mn-lt"/>
+                <a:ea typeface="+mn-ea"/>
+                <a:cs typeface="+mn-cs"/>
+              </a:defRPr>
+            </a:lvl5pPr>
+            <a:lvl6pPr marL="2514600" indent="-228600" algn="l" defTabSz="457200" rtl="0" eaLnBrk="1" latinLnBrk="0" hangingPunct="1">
+              <a:spcBef>
+                <a:spcPct val="20000"/>
+              </a:spcBef>
+              <a:spcAft>
+                <a:spcPts val="600"/>
+              </a:spcAft>
+              <a:buClr>
+                <a:schemeClr val="tx1"/>
+              </a:buClr>
+              <a:buSzPct val="100000"/>
+              <a:buFont typeface="Arial"/>
+              <a:buChar char="•"/>
+              <a:defRPr sz="1200" kern="1200" cap="small">
+                <a:gradFill flip="none" rotWithShape="1">
+                  <a:gsLst>
+                    <a:gs pos="0">
+                      <a:schemeClr val="tx1"/>
+                    </a:gs>
+                    <a:gs pos="100000">
+                      <a:schemeClr val="tx1">
+                        <a:lumMod val="75000"/>
+                      </a:schemeClr>
+                    </a:gs>
+                  </a:gsLst>
+                  <a:lin ang="5580000" scaled="0"/>
+                  <a:tileRect/>
+                </a:gradFill>
+                <a:effectLst>
+                  <a:glow rad="38100">
+                    <a:schemeClr val="bg1">
+                      <a:lumMod val="50000"/>
+                      <a:lumOff val="50000"/>
+                      <a:alpha val="20000"/>
+                    </a:schemeClr>
+                  </a:glow>
+                  <a:outerShdw blurRad="44450" dist="12700" dir="13860000" algn="tl" rotWithShape="0">
+                    <a:srgbClr val="000000">
+                      <a:alpha val="20000"/>
+                    </a:srgbClr>
+                  </a:outerShdw>
+                </a:effectLst>
+                <a:latin typeface="+mn-lt"/>
+                <a:ea typeface="+mn-ea"/>
+                <a:cs typeface="+mn-cs"/>
+              </a:defRPr>
+            </a:lvl6pPr>
+            <a:lvl7pPr marL="2971800" indent="-228600" algn="l" defTabSz="457200" rtl="0" eaLnBrk="1" latinLnBrk="0" hangingPunct="1">
+              <a:spcBef>
+                <a:spcPct val="20000"/>
+              </a:spcBef>
+              <a:spcAft>
+                <a:spcPts val="600"/>
+              </a:spcAft>
+              <a:buClr>
+                <a:schemeClr val="tx1"/>
+              </a:buClr>
+              <a:buSzPct val="100000"/>
+              <a:buFont typeface="Arial"/>
+              <a:buChar char="•"/>
+              <a:defRPr sz="1200" kern="1200" cap="small">
+                <a:gradFill flip="none" rotWithShape="1">
+                  <a:gsLst>
+                    <a:gs pos="0">
+                      <a:schemeClr val="tx1"/>
+                    </a:gs>
+                    <a:gs pos="100000">
+                      <a:schemeClr val="tx1">
+                        <a:lumMod val="75000"/>
+                      </a:schemeClr>
+                    </a:gs>
+                  </a:gsLst>
+                  <a:lin ang="5580000" scaled="0"/>
+                  <a:tileRect/>
+                </a:gradFill>
+                <a:effectLst>
+                  <a:glow rad="38100">
+                    <a:schemeClr val="bg1">
+                      <a:lumMod val="50000"/>
+                      <a:lumOff val="50000"/>
+                      <a:alpha val="20000"/>
+                    </a:schemeClr>
+                  </a:glow>
+                  <a:outerShdw blurRad="44450" dist="12700" dir="13860000" algn="tl" rotWithShape="0">
+                    <a:srgbClr val="000000">
+                      <a:alpha val="20000"/>
+                    </a:srgbClr>
+                  </a:outerShdw>
+                </a:effectLst>
+                <a:latin typeface="+mn-lt"/>
+                <a:ea typeface="+mn-ea"/>
+                <a:cs typeface="+mn-cs"/>
+              </a:defRPr>
+            </a:lvl7pPr>
+            <a:lvl8pPr marL="3429000" indent="-228600" algn="l" defTabSz="457200" rtl="0" eaLnBrk="1" latinLnBrk="0" hangingPunct="1">
+              <a:spcBef>
+                <a:spcPct val="20000"/>
+              </a:spcBef>
+              <a:spcAft>
+                <a:spcPts val="600"/>
+              </a:spcAft>
+              <a:buClr>
+                <a:schemeClr val="tx1"/>
+              </a:buClr>
+              <a:buSzPct val="100000"/>
+              <a:buFont typeface="Arial"/>
+              <a:buChar char="•"/>
+              <a:defRPr sz="1200" kern="1200" cap="small">
+                <a:gradFill flip="none" rotWithShape="1">
+                  <a:gsLst>
+                    <a:gs pos="0">
+                      <a:schemeClr val="tx1"/>
+                    </a:gs>
+                    <a:gs pos="100000">
+                      <a:schemeClr val="tx1">
+                        <a:lumMod val="75000"/>
+                      </a:schemeClr>
+                    </a:gs>
+                  </a:gsLst>
+                  <a:lin ang="5580000" scaled="0"/>
+                  <a:tileRect/>
+                </a:gradFill>
+                <a:effectLst>
+                  <a:glow rad="38100">
+                    <a:schemeClr val="bg1">
+                      <a:lumMod val="50000"/>
+                      <a:lumOff val="50000"/>
+                      <a:alpha val="20000"/>
+                    </a:schemeClr>
+                  </a:glow>
+                  <a:outerShdw blurRad="44450" dist="12700" dir="13860000" algn="tl" rotWithShape="0">
+                    <a:srgbClr val="000000">
+                      <a:alpha val="20000"/>
+                    </a:srgbClr>
+                  </a:outerShdw>
+                </a:effectLst>
+                <a:latin typeface="+mn-lt"/>
+                <a:ea typeface="+mn-ea"/>
+                <a:cs typeface="+mn-cs"/>
+              </a:defRPr>
+            </a:lvl8pPr>
+            <a:lvl9pPr marL="3886200" indent="-228600" algn="l" defTabSz="457200" rtl="0" eaLnBrk="1" latinLnBrk="0" hangingPunct="1">
+              <a:spcBef>
+                <a:spcPct val="20000"/>
+              </a:spcBef>
+              <a:spcAft>
+                <a:spcPts val="600"/>
+              </a:spcAft>
+              <a:buClr>
+                <a:schemeClr val="tx1"/>
+              </a:buClr>
+              <a:buSzPct val="100000"/>
+              <a:buFont typeface="Arial"/>
+              <a:buChar char="•"/>
+              <a:defRPr sz="1200" kern="1200" cap="small">
+                <a:gradFill flip="none" rotWithShape="1">
+                  <a:gsLst>
+                    <a:gs pos="0">
+                      <a:schemeClr val="tx1"/>
+                    </a:gs>
+                    <a:gs pos="100000">
+                      <a:schemeClr val="tx1">
+                        <a:lumMod val="75000"/>
+                      </a:schemeClr>
+                    </a:gs>
+                  </a:gsLst>
+                  <a:lin ang="5580000" scaled="0"/>
+                  <a:tileRect/>
+                </a:gradFill>
+                <a:effectLst>
+                  <a:glow rad="38100">
+                    <a:schemeClr val="bg1">
+                      <a:lumMod val="50000"/>
+                      <a:lumOff val="50000"/>
+                      <a:alpha val="20000"/>
+                    </a:schemeClr>
+                  </a:glow>
+                  <a:outerShdw blurRad="44450" dist="12700" dir="13860000" algn="tl" rotWithShape="0">
+                    <a:srgbClr val="000000">
+                      <a:alpha val="20000"/>
+                    </a:srgbClr>
+                  </a:outerShdw>
+                </a:effectLst>
+                <a:latin typeface="+mn-lt"/>
+                <a:ea typeface="+mn-ea"/>
+                <a:cs typeface="+mn-cs"/>
+              </a:defRPr>
+            </a:lvl9pPr>
+          </a:lstStyle>
+          <a:p>
+            <a:pPr marL="0" indent="0">
+              <a:buNone/>
+            </a:pPr>
+            <a:r>
+              <a:rPr lang="en-GB" dirty="0">
+                <a:solidFill>
+                  <a:schemeClr val="tx1"/>
+                </a:solidFill>
+                <a:effectLst/>
+              </a:rPr>
+              <a:t>Best RF Params: {'</a:t>
+            </a:r>
+            <a:r>
+              <a:rPr lang="en-GB" dirty="0" err="1">
+                <a:solidFill>
+                  <a:schemeClr val="tx1"/>
+                </a:solidFill>
+                <a:effectLst/>
+              </a:rPr>
+              <a:t>n_estimators</a:t>
+            </a:r>
+            <a:r>
+              <a:rPr lang="en-GB" dirty="0">
+                <a:solidFill>
+                  <a:schemeClr val="tx1"/>
+                </a:solidFill>
+                <a:effectLst/>
+              </a:rPr>
+              <a:t>': 200, '</a:t>
+            </a:r>
+            <a:r>
+              <a:rPr lang="en-GB" dirty="0" err="1">
+                <a:solidFill>
+                  <a:schemeClr val="tx1"/>
+                </a:solidFill>
+                <a:effectLst/>
+              </a:rPr>
+              <a:t>max_depth</a:t>
+            </a:r>
+            <a:r>
+              <a:rPr lang="en-GB" dirty="0">
+                <a:solidFill>
+                  <a:schemeClr val="tx1"/>
+                </a:solidFill>
+                <a:effectLst/>
+              </a:rPr>
+              <a:t>': 20} </a:t>
+            </a:r>
+          </a:p>
+          <a:p>
+            <a:pPr marL="0" indent="0">
+              <a:buNone/>
+            </a:pPr>
+            <a:br>
+              <a:rPr lang="en-GB" sz="1600" dirty="0"/>
+            </a:br>
+            <a:endParaRPr lang="en-US" sz="1600" dirty="0"/>
+          </a:p>
+        </p:txBody>
+      </p:sp>
+    </p:spTree>
+    <p:extLst>
+      <p:ext uri="{BB962C8B-B14F-4D97-AF65-F5344CB8AC3E}">
+        <p14:creationId xmlns:p14="http://schemas.microsoft.com/office/powerpoint/2010/main" val="3492026298"/>
+      </p:ext>
+    </p:extLst>
+  </p:cSld>
+  <p:clrMapOvr>
+    <a:masterClrMapping/>
+  </p:clrMapOvr>
+</p:sld>
+</file>
+
+<file path=ppt/slides/slide5.xml><?xml version="1.0" encoding="utf-8"?>
+<p:sld xmlns:a="http://schemas.openxmlformats.org/drawingml/2006/main" xmlns:r="http://schemas.openxmlformats.org/officeDocument/2006/relationships" xmlns:p="http://schemas.openxmlformats.org/presentationml/2006/main">
+  <p:cSld>
+    <p:bg>
+      <p:bgPr>
+        <a:blipFill rotWithShape="1">
+          <a:blip r:embed="rId2">
+            <a:duotone>
+              <a:schemeClr val="bg2">
+                <a:shade val="28000"/>
+                <a:satMod val="94000"/>
+                <a:lumMod val="20000"/>
+              </a:schemeClr>
+              <a:schemeClr val="bg2">
+                <a:tint val="94000"/>
+                <a:shade val="84000"/>
+                <a:satMod val="148000"/>
+                <a:lumMod val="114000"/>
+              </a:schemeClr>
+            </a:duotone>
+          </a:blip>
+          <a:stretch/>
+        </a:blipFill>
+        <a:effectLst/>
+      </p:bgPr>
+    </p:bg>
+    <p:spTree>
+      <p:nvGrpSpPr>
+        <p:cNvPr id="1" name=""/>
+        <p:cNvGrpSpPr/>
+        <p:nvPr/>
+      </p:nvGrpSpPr>
+      <p:grpSpPr>
+        <a:xfrm>
+          <a:off x="0" y="0"/>
+          <a:ext cx="0" cy="0"/>
+          <a:chOff x="0" y="0"/>
+          <a:chExt cx="0" cy="0"/>
+        </a:xfrm>
+      </p:grpSpPr>
+      <p:sp>
+        <p:nvSpPr>
+          <p:cNvPr id="8" name="Rectangle 7">
+            <a:extLst>
+              <a:ext uri="{FF2B5EF4-FFF2-40B4-BE49-F238E27FC236}">
+                <a16:creationId xmlns:a16="http://schemas.microsoft.com/office/drawing/2014/main" id="{5690F3EE-0CD1-4520-B020-4E1DF3141C74}"/>
+              </a:ext>
+              <a:ext uri="{C183D7F6-B498-43B3-948B-1728B52AA6E4}">
+                <adec:decorative xmlns:adec="http://schemas.microsoft.com/office/drawing/2017/decorative" val="1"/>
+              </a:ext>
+            </a:extLst>
+          </p:cNvPr>
+          <p:cNvSpPr>
+            <a:spLocks noGrp="1" noRot="1" noChangeAspect="1" noMove="1" noResize="1" noEditPoints="1" noAdjustHandles="1" noChangeArrowheads="1" noChangeShapeType="1" noTextEdit="1"/>
+          </p:cNvSpPr>
+          <p:nvPr>
+            <p:extLst>
+              <p:ext uri="{386F3935-93C4-4BCD-93E2-E3B085C9AB24}">
+                <p16:designElem xmlns:p16="http://schemas.microsoft.com/office/powerpoint/2015/main" val="1"/>
+              </p:ext>
+            </p:extLst>
+          </p:nvPr>
+        </p:nvSpPr>
+        <p:spPr>
+          <a:xfrm>
+            <a:off x="0" y="-1"/>
+            <a:ext cx="12192000" cy="6858001"/>
+          </a:xfrm>
+          <a:prstGeom prst="rect">
+            <a:avLst/>
+          </a:prstGeom>
+          <a:solidFill>
+            <a:schemeClr val="bg2"/>
+          </a:solidFill>
+          <a:ln>
+            <a:noFill/>
+          </a:ln>
+        </p:spPr>
+        <p:style>
+          <a:lnRef idx="2">
+            <a:schemeClr val="accent1">
+              <a:shade val="50000"/>
+            </a:schemeClr>
+          </a:lnRef>
+          <a:fillRef idx="1">
+            <a:schemeClr val="accent1"/>
+          </a:fillRef>
+          <a:effectRef idx="0">
+            <a:schemeClr val="accent1"/>
+          </a:effectRef>
+          <a:fontRef idx="minor">
+            <a:schemeClr val="lt1"/>
+          </a:fontRef>
+        </p:style>
+        <p:txBody>
+          <a:bodyPr rtlCol="0" anchor="ctr"/>
+          <a:lstStyle/>
+          <a:p>
+            <a:pPr algn="ctr"/>
+            <a:endParaRPr lang="en-US"/>
+          </a:p>
+        </p:txBody>
+      </p:sp>
+      <p:sp useBgFill="1">
+        <p:nvSpPr>
+          <p:cNvPr id="10" name="Freeform: Shape 9">
+            <a:extLst>
+              <a:ext uri="{FF2B5EF4-FFF2-40B4-BE49-F238E27FC236}">
+                <a16:creationId xmlns:a16="http://schemas.microsoft.com/office/drawing/2014/main" id="{9EFDE1E9-7FE0-45CA-9DE2-237F77319A9F}"/>
+              </a:ext>
+              <a:ext uri="{C183D7F6-B498-43B3-948B-1728B52AA6E4}">
+                <adec:decorative xmlns:adec="http://schemas.microsoft.com/office/drawing/2017/decorative" val="1"/>
+              </a:ext>
+            </a:extLst>
+          </p:cNvPr>
+          <p:cNvSpPr>
+            <a:spLocks noGrp="1" noRot="1" noChangeAspect="1" noMove="1" noResize="1" noEditPoints="1" noAdjustHandles="1" noChangeArrowheads="1" noChangeShapeType="1" noTextEdit="1"/>
+          </p:cNvSpPr>
+          <p:nvPr>
+            <p:extLst>
+              <p:ext uri="{386F3935-93C4-4BCD-93E2-E3B085C9AB24}">
+                <p16:designElem xmlns:p16="http://schemas.microsoft.com/office/powerpoint/2015/main" val="1"/>
+              </p:ext>
+            </p:extLst>
+          </p:nvPr>
+        </p:nvSpPr>
+        <p:spPr>
+          <a:xfrm>
+            <a:off x="0" y="-1"/>
+            <a:ext cx="12192000" cy="2270840"/>
+          </a:xfrm>
+          <a:custGeom>
+            <a:avLst/>
+            <a:gdLst>
+              <a:gd name="connsiteX0" fmla="*/ 0 w 12192000"/>
+              <a:gd name="connsiteY0" fmla="*/ 0 h 2270840"/>
+              <a:gd name="connsiteX1" fmla="*/ 12192000 w 12192000"/>
+              <a:gd name="connsiteY1" fmla="*/ 0 h 2270840"/>
+              <a:gd name="connsiteX2" fmla="*/ 12192000 w 12192000"/>
+              <a:gd name="connsiteY2" fmla="*/ 519831 h 2270840"/>
+              <a:gd name="connsiteX3" fmla="*/ 12192000 w 12192000"/>
+              <a:gd name="connsiteY3" fmla="*/ 744794 h 2270840"/>
+              <a:gd name="connsiteX4" fmla="*/ 12192000 w 12192000"/>
+              <a:gd name="connsiteY4" fmla="*/ 1754022 h 2270840"/>
+              <a:gd name="connsiteX5" fmla="*/ 11957522 w 12192000"/>
+              <a:gd name="connsiteY5" fmla="*/ 1797924 h 2270840"/>
+              <a:gd name="connsiteX6" fmla="*/ 11679973 w 12192000"/>
+              <a:gd name="connsiteY6" fmla="*/ 1847668 h 2270840"/>
+              <a:gd name="connsiteX7" fmla="*/ 11401197 w 12192000"/>
+              <a:gd name="connsiteY7" fmla="*/ 1896361 h 2270840"/>
+              <a:gd name="connsiteX8" fmla="*/ 11121192 w 12192000"/>
+              <a:gd name="connsiteY8" fmla="*/ 1938047 h 2270840"/>
+              <a:gd name="connsiteX9" fmla="*/ 10842416 w 12192000"/>
+              <a:gd name="connsiteY9" fmla="*/ 1980084 h 2270840"/>
+              <a:gd name="connsiteX10" fmla="*/ 10562411 w 12192000"/>
+              <a:gd name="connsiteY10" fmla="*/ 2019319 h 2270840"/>
+              <a:gd name="connsiteX11" fmla="*/ 10286091 w 12192000"/>
+              <a:gd name="connsiteY11" fmla="*/ 2052948 h 2270840"/>
+              <a:gd name="connsiteX12" fmla="*/ 10006086 w 12192000"/>
+              <a:gd name="connsiteY12" fmla="*/ 2084826 h 2270840"/>
+              <a:gd name="connsiteX13" fmla="*/ 9727310 w 12192000"/>
+              <a:gd name="connsiteY13" fmla="*/ 2113902 h 2270840"/>
+              <a:gd name="connsiteX14" fmla="*/ 9453445 w 12192000"/>
+              <a:gd name="connsiteY14" fmla="*/ 2139124 h 2270840"/>
+              <a:gd name="connsiteX15" fmla="*/ 9175897 w 12192000"/>
+              <a:gd name="connsiteY15" fmla="*/ 2164346 h 2270840"/>
+              <a:gd name="connsiteX16" fmla="*/ 8902033 w 12192000"/>
+              <a:gd name="connsiteY16" fmla="*/ 2185365 h 2270840"/>
+              <a:gd name="connsiteX17" fmla="*/ 8628169 w 12192000"/>
+              <a:gd name="connsiteY17" fmla="*/ 2201829 h 2270840"/>
+              <a:gd name="connsiteX18" fmla="*/ 8355533 w 12192000"/>
+              <a:gd name="connsiteY18" fmla="*/ 2218995 h 2270840"/>
+              <a:gd name="connsiteX19" fmla="*/ 8085353 w 12192000"/>
+              <a:gd name="connsiteY19" fmla="*/ 2233357 h 2270840"/>
+              <a:gd name="connsiteX20" fmla="*/ 7817629 w 12192000"/>
+              <a:gd name="connsiteY20" fmla="*/ 2243516 h 2270840"/>
+              <a:gd name="connsiteX21" fmla="*/ 7549905 w 12192000"/>
+              <a:gd name="connsiteY21" fmla="*/ 2252274 h 2270840"/>
+              <a:gd name="connsiteX22" fmla="*/ 7284638 w 12192000"/>
+              <a:gd name="connsiteY22" fmla="*/ 2260681 h 2270840"/>
+              <a:gd name="connsiteX23" fmla="*/ 7023055 w 12192000"/>
+              <a:gd name="connsiteY23" fmla="*/ 2264535 h 2270840"/>
+              <a:gd name="connsiteX24" fmla="*/ 6761472 w 12192000"/>
+              <a:gd name="connsiteY24" fmla="*/ 2268738 h 2270840"/>
+              <a:gd name="connsiteX25" fmla="*/ 6503573 w 12192000"/>
+              <a:gd name="connsiteY25" fmla="*/ 2270840 h 2270840"/>
+              <a:gd name="connsiteX26" fmla="*/ 6248130 w 12192000"/>
+              <a:gd name="connsiteY26" fmla="*/ 2268738 h 2270840"/>
+              <a:gd name="connsiteX27" fmla="*/ 5995144 w 12192000"/>
+              <a:gd name="connsiteY27" fmla="*/ 2268738 h 2270840"/>
+              <a:gd name="connsiteX28" fmla="*/ 5744613 w 12192000"/>
+              <a:gd name="connsiteY28" fmla="*/ 2264535 h 2270840"/>
+              <a:gd name="connsiteX29" fmla="*/ 5498995 w 12192000"/>
+              <a:gd name="connsiteY29" fmla="*/ 2258229 h 2270840"/>
+              <a:gd name="connsiteX30" fmla="*/ 5255834 w 12192000"/>
+              <a:gd name="connsiteY30" fmla="*/ 2252274 h 2270840"/>
+              <a:gd name="connsiteX31" fmla="*/ 5017584 w 12192000"/>
+              <a:gd name="connsiteY31" fmla="*/ 2245618 h 2270840"/>
+              <a:gd name="connsiteX32" fmla="*/ 4780562 w 12192000"/>
+              <a:gd name="connsiteY32" fmla="*/ 2235459 h 2270840"/>
+              <a:gd name="connsiteX33" fmla="*/ 4547227 w 12192000"/>
+              <a:gd name="connsiteY33" fmla="*/ 2224599 h 2270840"/>
+              <a:gd name="connsiteX34" fmla="*/ 4318800 w 12192000"/>
+              <a:gd name="connsiteY34" fmla="*/ 2214791 h 2270840"/>
+              <a:gd name="connsiteX35" fmla="*/ 3873004 w 12192000"/>
+              <a:gd name="connsiteY35" fmla="*/ 2187116 h 2270840"/>
+              <a:gd name="connsiteX36" fmla="*/ 3445628 w 12192000"/>
+              <a:gd name="connsiteY36" fmla="*/ 2157691 h 2270840"/>
+              <a:gd name="connsiteX37" fmla="*/ 3035446 w 12192000"/>
+              <a:gd name="connsiteY37" fmla="*/ 2126863 h 2270840"/>
+              <a:gd name="connsiteX38" fmla="*/ 2647370 w 12192000"/>
+              <a:gd name="connsiteY38" fmla="*/ 2092884 h 2270840"/>
+              <a:gd name="connsiteX39" fmla="*/ 2276487 w 12192000"/>
+              <a:gd name="connsiteY39" fmla="*/ 2057502 h 2270840"/>
+              <a:gd name="connsiteX40" fmla="*/ 1932621 w 12192000"/>
+              <a:gd name="connsiteY40" fmla="*/ 2019319 h 2270840"/>
+              <a:gd name="connsiteX41" fmla="*/ 1609634 w 12192000"/>
+              <a:gd name="connsiteY41" fmla="*/ 1981836 h 2270840"/>
+              <a:gd name="connsiteX42" fmla="*/ 1312435 w 12192000"/>
+              <a:gd name="connsiteY42" fmla="*/ 1944353 h 2270840"/>
+              <a:gd name="connsiteX43" fmla="*/ 1039799 w 12192000"/>
+              <a:gd name="connsiteY43" fmla="*/ 1908972 h 2270840"/>
+              <a:gd name="connsiteX44" fmla="*/ 797865 w 12192000"/>
+              <a:gd name="connsiteY44" fmla="*/ 1875342 h 2270840"/>
+              <a:gd name="connsiteX45" fmla="*/ 579265 w 12192000"/>
+              <a:gd name="connsiteY45" fmla="*/ 1843464 h 2270840"/>
+              <a:gd name="connsiteX46" fmla="*/ 395052 w 12192000"/>
+              <a:gd name="connsiteY46" fmla="*/ 1816841 h 2270840"/>
+              <a:gd name="connsiteX47" fmla="*/ 240312 w 12192000"/>
+              <a:gd name="connsiteY47" fmla="*/ 1791618 h 2270840"/>
+              <a:gd name="connsiteX48" fmla="*/ 27853 w 12192000"/>
+              <a:gd name="connsiteY48" fmla="*/ 1755537 h 2270840"/>
+              <a:gd name="connsiteX49" fmla="*/ 0 w 12192000"/>
+              <a:gd name="connsiteY49" fmla="*/ 1750824 h 2270840"/>
+              <a:gd name="connsiteX50" fmla="*/ 0 w 12192000"/>
+              <a:gd name="connsiteY50" fmla="*/ 744794 h 2270840"/>
+              <a:gd name="connsiteX51" fmla="*/ 0 w 12192000"/>
+              <a:gd name="connsiteY51" fmla="*/ 519831 h 2270840"/>
+            </a:gdLst>
+            <a:ahLst/>
+            <a:cxnLst>
+              <a:cxn ang="0">
+                <a:pos x="connsiteX0" y="connsiteY0"/>
+              </a:cxn>
+              <a:cxn ang="0">
+                <a:pos x="connsiteX1" y="connsiteY1"/>
+              </a:cxn>
+              <a:cxn ang="0">
+                <a:pos x="connsiteX2" y="connsiteY2"/>
+              </a:cxn>
+              <a:cxn ang="0">
+                <a:pos x="connsiteX3" y="connsiteY3"/>
+              </a:cxn>
+              <a:cxn ang="0">
+                <a:pos x="connsiteX4" y="connsiteY4"/>
+              </a:cxn>
+              <a:cxn ang="0">
+                <a:pos x="connsiteX5" y="connsiteY5"/>
+              </a:cxn>
+              <a:cxn ang="0">
+                <a:pos x="connsiteX6" y="connsiteY6"/>
+              </a:cxn>
+              <a:cxn ang="0">
+                <a:pos x="connsiteX7" y="connsiteY7"/>
+              </a:cxn>
+              <a:cxn ang="0">
+                <a:pos x="connsiteX8" y="connsiteY8"/>
+              </a:cxn>
+              <a:cxn ang="0">
+                <a:pos x="connsiteX9" y="connsiteY9"/>
+              </a:cxn>
+              <a:cxn ang="0">
+                <a:pos x="connsiteX10" y="connsiteY10"/>
+              </a:cxn>
+              <a:cxn ang="0">
+                <a:pos x="connsiteX11" y="connsiteY11"/>
+              </a:cxn>
+              <a:cxn ang="0">
+                <a:pos x="connsiteX12" y="connsiteY12"/>
+              </a:cxn>
+              <a:cxn ang="0">
+                <a:pos x="connsiteX13" y="connsiteY13"/>
+              </a:cxn>
+              <a:cxn ang="0">
+                <a:pos x="connsiteX14" y="connsiteY14"/>
+              </a:cxn>
+              <a:cxn ang="0">
+                <a:pos x="connsiteX15" y="connsiteY15"/>
+              </a:cxn>
+              <a:cxn ang="0">
+                <a:pos x="connsiteX16" y="connsiteY16"/>
+              </a:cxn>
+              <a:cxn ang="0">
+                <a:pos x="connsiteX17" y="connsiteY17"/>
+              </a:cxn>
+              <a:cxn ang="0">
+                <a:pos x="connsiteX18" y="connsiteY18"/>
+              </a:cxn>
+              <a:cxn ang="0">
+                <a:pos x="connsiteX19" y="connsiteY19"/>
+              </a:cxn>
+              <a:cxn ang="0">
+                <a:pos x="connsiteX20" y="connsiteY20"/>
+              </a:cxn>
+              <a:cxn ang="0">
+                <a:pos x="connsiteX21" y="connsiteY21"/>
+              </a:cxn>
+              <a:cxn ang="0">
+                <a:pos x="connsiteX22" y="connsiteY22"/>
+              </a:cxn>
+              <a:cxn ang="0">
+                <a:pos x="connsiteX23" y="connsiteY23"/>
+              </a:cxn>
+              <a:cxn ang="0">
+                <a:pos x="connsiteX24" y="connsiteY24"/>
+              </a:cxn>
+              <a:cxn ang="0">
+                <a:pos x="connsiteX25" y="connsiteY25"/>
+              </a:cxn>
+              <a:cxn ang="0">
+                <a:pos x="connsiteX26" y="connsiteY26"/>
+              </a:cxn>
+              <a:cxn ang="0">
+                <a:pos x="connsiteX27" y="connsiteY27"/>
+              </a:cxn>
+              <a:cxn ang="0">
+                <a:pos x="connsiteX28" y="connsiteY28"/>
+              </a:cxn>
+              <a:cxn ang="0">
+                <a:pos x="connsiteX29" y="connsiteY29"/>
+              </a:cxn>
+              <a:cxn ang="0">
+                <a:pos x="connsiteX30" y="connsiteY30"/>
+              </a:cxn>
+              <a:cxn ang="0">
+                <a:pos x="connsiteX31" y="connsiteY31"/>
+              </a:cxn>
+              <a:cxn ang="0">
+                <a:pos x="connsiteX32" y="connsiteY32"/>
+              </a:cxn>
+              <a:cxn ang="0">
+                <a:pos x="connsiteX33" y="connsiteY33"/>
+              </a:cxn>
+              <a:cxn ang="0">
+                <a:pos x="connsiteX34" y="connsiteY34"/>
+              </a:cxn>
+              <a:cxn ang="0">
+                <a:pos x="connsiteX35" y="connsiteY35"/>
+              </a:cxn>
+              <a:cxn ang="0">
+                <a:pos x="connsiteX36" y="connsiteY36"/>
+              </a:cxn>
+              <a:cxn ang="0">
+                <a:pos x="connsiteX37" y="connsiteY37"/>
+              </a:cxn>
+              <a:cxn ang="0">
+                <a:pos x="connsiteX38" y="connsiteY38"/>
+              </a:cxn>
+              <a:cxn ang="0">
+                <a:pos x="connsiteX39" y="connsiteY39"/>
+              </a:cxn>
+              <a:cxn ang="0">
+                <a:pos x="connsiteX40" y="connsiteY40"/>
+              </a:cxn>
+              <a:cxn ang="0">
+                <a:pos x="connsiteX41" y="connsiteY41"/>
+              </a:cxn>
+              <a:cxn ang="0">
+                <a:pos x="connsiteX42" y="connsiteY42"/>
+              </a:cxn>
+              <a:cxn ang="0">
+                <a:pos x="connsiteX43" y="connsiteY43"/>
+              </a:cxn>
+              <a:cxn ang="0">
+                <a:pos x="connsiteX44" y="connsiteY44"/>
+              </a:cxn>
+              <a:cxn ang="0">
+                <a:pos x="connsiteX45" y="connsiteY45"/>
+              </a:cxn>
+              <a:cxn ang="0">
+                <a:pos x="connsiteX46" y="connsiteY46"/>
+              </a:cxn>
+              <a:cxn ang="0">
+                <a:pos x="connsiteX47" y="connsiteY47"/>
+              </a:cxn>
+              <a:cxn ang="0">
+                <a:pos x="connsiteX48" y="connsiteY48"/>
+              </a:cxn>
+              <a:cxn ang="0">
+                <a:pos x="connsiteX49" y="connsiteY49"/>
+              </a:cxn>
+              <a:cxn ang="0">
+                <a:pos x="connsiteX50" y="connsiteY50"/>
+              </a:cxn>
+              <a:cxn ang="0">
+                <a:pos x="connsiteX51" y="connsiteY51"/>
+              </a:cxn>
+            </a:cxnLst>
+            <a:rect l="l" t="t" r="r" b="b"/>
+            <a:pathLst>
+              <a:path w="12192000" h="2270840">
+                <a:moveTo>
+                  <a:pt x="0" y="0"/>
+                </a:moveTo>
+                <a:lnTo>
+                  <a:pt x="12192000" y="0"/>
+                </a:lnTo>
+                <a:lnTo>
+                  <a:pt x="12192000" y="519831"/>
+                </a:lnTo>
+                <a:lnTo>
+                  <a:pt x="12192000" y="744794"/>
+                </a:lnTo>
+                <a:lnTo>
+                  <a:pt x="12192000" y="1754022"/>
+                </a:lnTo>
+                <a:lnTo>
+                  <a:pt x="11957522" y="1797924"/>
+                </a:lnTo>
+                <a:lnTo>
+                  <a:pt x="11679973" y="1847668"/>
+                </a:lnTo>
+                <a:lnTo>
+                  <a:pt x="11401197" y="1896361"/>
+                </a:lnTo>
+                <a:lnTo>
+                  <a:pt x="11121192" y="1938047"/>
+                </a:lnTo>
+                <a:lnTo>
+                  <a:pt x="10842416" y="1980084"/>
+                </a:lnTo>
+                <a:lnTo>
+                  <a:pt x="10562411" y="2019319"/>
+                </a:lnTo>
+                <a:lnTo>
+                  <a:pt x="10286091" y="2052948"/>
+                </a:lnTo>
+                <a:lnTo>
+                  <a:pt x="10006086" y="2084826"/>
+                </a:lnTo>
+                <a:lnTo>
+                  <a:pt x="9727310" y="2113902"/>
+                </a:lnTo>
+                <a:lnTo>
+                  <a:pt x="9453445" y="2139124"/>
+                </a:lnTo>
+                <a:lnTo>
+                  <a:pt x="9175897" y="2164346"/>
+                </a:lnTo>
+                <a:lnTo>
+                  <a:pt x="8902033" y="2185365"/>
+                </a:lnTo>
+                <a:lnTo>
+                  <a:pt x="8628169" y="2201829"/>
+                </a:lnTo>
+                <a:lnTo>
+                  <a:pt x="8355533" y="2218995"/>
+                </a:lnTo>
+                <a:lnTo>
+                  <a:pt x="8085353" y="2233357"/>
+                </a:lnTo>
+                <a:lnTo>
+                  <a:pt x="7817629" y="2243516"/>
+                </a:lnTo>
+                <a:lnTo>
+                  <a:pt x="7549905" y="2252274"/>
+                </a:lnTo>
+                <a:lnTo>
+                  <a:pt x="7284638" y="2260681"/>
+                </a:lnTo>
+                <a:lnTo>
+                  <a:pt x="7023055" y="2264535"/>
+                </a:lnTo>
+                <a:lnTo>
+                  <a:pt x="6761472" y="2268738"/>
+                </a:lnTo>
+                <a:lnTo>
+                  <a:pt x="6503573" y="2270840"/>
+                </a:lnTo>
+                <a:lnTo>
+                  <a:pt x="6248130" y="2268738"/>
+                </a:lnTo>
+                <a:lnTo>
+                  <a:pt x="5995144" y="2268738"/>
+                </a:lnTo>
+                <a:lnTo>
+                  <a:pt x="5744613" y="2264535"/>
+                </a:lnTo>
+                <a:lnTo>
+                  <a:pt x="5498995" y="2258229"/>
+                </a:lnTo>
+                <a:lnTo>
+                  <a:pt x="5255834" y="2252274"/>
+                </a:lnTo>
+                <a:lnTo>
+                  <a:pt x="5017584" y="2245618"/>
+                </a:lnTo>
+                <a:lnTo>
+                  <a:pt x="4780562" y="2235459"/>
+                </a:lnTo>
+                <a:lnTo>
+                  <a:pt x="4547227" y="2224599"/>
+                </a:lnTo>
+                <a:lnTo>
+                  <a:pt x="4318800" y="2214791"/>
+                </a:lnTo>
+                <a:lnTo>
+                  <a:pt x="3873004" y="2187116"/>
+                </a:lnTo>
+                <a:lnTo>
+                  <a:pt x="3445628" y="2157691"/>
+                </a:lnTo>
+                <a:lnTo>
+                  <a:pt x="3035446" y="2126863"/>
+                </a:lnTo>
+                <a:lnTo>
+                  <a:pt x="2647370" y="2092884"/>
+                </a:lnTo>
+                <a:lnTo>
+                  <a:pt x="2276487" y="2057502"/>
+                </a:lnTo>
+                <a:lnTo>
+                  <a:pt x="1932621" y="2019319"/>
+                </a:lnTo>
+                <a:lnTo>
+                  <a:pt x="1609634" y="1981836"/>
+                </a:lnTo>
+                <a:lnTo>
+                  <a:pt x="1312435" y="1944353"/>
+                </a:lnTo>
+                <a:lnTo>
+                  <a:pt x="1039799" y="1908972"/>
+                </a:lnTo>
+                <a:lnTo>
+                  <a:pt x="797865" y="1875342"/>
+                </a:lnTo>
+                <a:lnTo>
+                  <a:pt x="579265" y="1843464"/>
+                </a:lnTo>
+                <a:lnTo>
+                  <a:pt x="395052" y="1816841"/>
+                </a:lnTo>
+                <a:lnTo>
+                  <a:pt x="240312" y="1791618"/>
+                </a:lnTo>
+                <a:lnTo>
+                  <a:pt x="27853" y="1755537"/>
+                </a:lnTo>
+                <a:lnTo>
+                  <a:pt x="0" y="1750824"/>
+                </a:lnTo>
+                <a:lnTo>
+                  <a:pt x="0" y="744794"/>
+                </a:lnTo>
+                <a:lnTo>
+                  <a:pt x="0" y="519831"/>
+                </a:lnTo>
+                <a:close/>
+              </a:path>
+            </a:pathLst>
+          </a:custGeom>
+          <a:ln w="44450">
+            <a:gradFill>
+              <a:gsLst>
+                <a:gs pos="0">
+                  <a:schemeClr val="bg2">
+                    <a:alpha val="65000"/>
+                  </a:schemeClr>
+                </a:gs>
+                <a:gs pos="98000">
+                  <a:schemeClr val="bg2">
+                    <a:lumMod val="75000"/>
+                    <a:alpha val="55000"/>
+                  </a:schemeClr>
+                </a:gs>
+              </a:gsLst>
+              <a:lin ang="5400000" scaled="1"/>
+            </a:gradFill>
+          </a:ln>
+          <a:effectLst>
+            <a:outerShdw blurRad="50800" dist="38100" dir="5400000" algn="t" rotWithShape="0">
+              <a:prstClr val="black">
+                <a:alpha val="50000"/>
+              </a:prstClr>
+            </a:outerShdw>
+          </a:effectLst>
+        </p:spPr>
+        <p:style>
+          <a:lnRef idx="2">
+            <a:schemeClr val="accent1">
+              <a:shade val="50000"/>
+            </a:schemeClr>
+          </a:lnRef>
+          <a:fillRef idx="1003">
+            <a:schemeClr val="dk2"/>
+          </a:fillRef>
+          <a:effectRef idx="0">
+            <a:schemeClr val="accent1"/>
+          </a:effectRef>
+          <a:fontRef idx="minor">
+            <a:schemeClr val="lt1"/>
+          </a:fontRef>
+        </p:style>
+        <p:txBody>
+          <a:bodyPr wrap="square" rtlCol="0" anchor="ctr">
+            <a:noAutofit/>
+          </a:bodyPr>
+          <a:lstStyle/>
+          <a:p>
+            <a:pPr algn="ctr"/>
+            <a:endParaRPr lang="en-US"/>
+          </a:p>
+        </p:txBody>
+      </p:sp>
+      <p:sp>
+        <p:nvSpPr>
+          <p:cNvPr id="2" name="Title 1">
+            <a:extLst>
+              <a:ext uri="{FF2B5EF4-FFF2-40B4-BE49-F238E27FC236}">
+                <a16:creationId xmlns:a16="http://schemas.microsoft.com/office/drawing/2014/main" id="{18E9F9D0-2793-E44C-5684-582DAADEB46E}"/>
+              </a:ext>
+            </a:extLst>
+          </p:cNvPr>
+          <p:cNvSpPr>
+            <a:spLocks noGrp="1"/>
+          </p:cNvSpPr>
+          <p:nvPr>
+            <p:ph type="title"/>
+          </p:nvPr>
+        </p:nvSpPr>
+        <p:spPr>
+          <a:xfrm>
+            <a:off x="1141413" y="609600"/>
+            <a:ext cx="9905998" cy="1173480"/>
+          </a:xfrm>
+        </p:spPr>
+        <p:txBody>
+          <a:bodyPr>
+            <a:normAutofit/>
+          </a:bodyPr>
+          <a:lstStyle/>
+          <a:p>
+            <a:pPr algn="ctr"/>
+            <a:r>
+              <a:rPr lang="en-US" b="1" dirty="0"/>
+              <a:t>clustering</a:t>
+            </a:r>
+            <a:endParaRPr lang="en-GB" b="1" dirty="0"/>
+          </a:p>
+        </p:txBody>
+      </p:sp>
+      <p:graphicFrame>
+        <p:nvGraphicFramePr>
+          <p:cNvPr id="4" name="Content Placeholder 3">
+            <a:extLst>
+              <a:ext uri="{FF2B5EF4-FFF2-40B4-BE49-F238E27FC236}">
+                <a16:creationId xmlns:a16="http://schemas.microsoft.com/office/drawing/2014/main" id="{10FD1615-B603-326A-5A32-F2F0051507F8}"/>
+              </a:ext>
+            </a:extLst>
+          </p:cNvPr>
+          <p:cNvGraphicFramePr>
+            <a:graphicFrameLocks noGrp="1"/>
+          </p:cNvGraphicFramePr>
+          <p:nvPr>
+            <p:ph idx="1"/>
+            <p:extLst>
+              <p:ext uri="{D42A27DB-BD31-4B8C-83A1-F6EECF244321}">
+                <p14:modId xmlns:p14="http://schemas.microsoft.com/office/powerpoint/2010/main" val="297005399"/>
+              </p:ext>
+            </p:extLst>
+          </p:nvPr>
+        </p:nvGraphicFramePr>
+        <p:xfrm>
+          <a:off x="1047145" y="2392681"/>
+          <a:ext cx="10535397" cy="1859280"/>
+        </p:xfrm>
+        <a:graphic>
+          <a:graphicData uri="http://schemas.openxmlformats.org/drawingml/2006/table">
+            <a:tbl>
+              <a:tblPr firstRow="1" bandRow="1">
+                <a:tableStyleId>{0660B408-B3CF-4A94-85FC-2B1E0A45F4A2}</a:tableStyleId>
+              </a:tblPr>
+              <a:tblGrid>
+                <a:gridCol w="731520">
+                  <a:extLst>
+                    <a:ext uri="{9D8B030D-6E8A-4147-A177-3AD203B41FA5}">
+                      <a16:colId xmlns:a16="http://schemas.microsoft.com/office/drawing/2014/main" val="1992855441"/>
+                    </a:ext>
+                  </a:extLst>
+                </a:gridCol>
+                <a:gridCol w="731520">
+                  <a:extLst>
+                    <a:ext uri="{9D8B030D-6E8A-4147-A177-3AD203B41FA5}">
+                      <a16:colId xmlns:a16="http://schemas.microsoft.com/office/drawing/2014/main" val="2776252282"/>
+                    </a:ext>
+                  </a:extLst>
+                </a:gridCol>
+                <a:gridCol w="1188720">
+                  <a:extLst>
+                    <a:ext uri="{9D8B030D-6E8A-4147-A177-3AD203B41FA5}">
+                      <a16:colId xmlns:a16="http://schemas.microsoft.com/office/drawing/2014/main" val="1857189033"/>
+                    </a:ext>
+                  </a:extLst>
+                </a:gridCol>
+                <a:gridCol w="4480560">
+                  <a:extLst>
+                    <a:ext uri="{9D8B030D-6E8A-4147-A177-3AD203B41FA5}">
+                      <a16:colId xmlns:a16="http://schemas.microsoft.com/office/drawing/2014/main" val="3943478546"/>
+                    </a:ext>
+                  </a:extLst>
+                </a:gridCol>
+                <a:gridCol w="3403077">
+                  <a:extLst>
+                    <a:ext uri="{9D8B030D-6E8A-4147-A177-3AD203B41FA5}">
+                      <a16:colId xmlns:a16="http://schemas.microsoft.com/office/drawing/2014/main" val="4014212960"/>
+                    </a:ext>
+                  </a:extLst>
+                </a:gridCol>
+              </a:tblGrid>
+              <a:tr h="457200">
+                <a:tc>
+                  <a:txBody>
+                    <a:bodyPr/>
+                    <a:lstStyle/>
+                    <a:p>
+                      <a:pPr algn="ctr" fontAlgn="ctr">
+                        <a:buNone/>
+                      </a:pPr>
+                      <a:br>
+                        <a:rPr lang="en-GB" sz="1400" dirty="0">
+                          <a:effectLst/>
+                        </a:rPr>
+                      </a:br>
+                      <a:r>
+                        <a:rPr lang="en-GB" sz="1400" dirty="0">
+                          <a:effectLst/>
+                        </a:rPr>
+                        <a:t>cluster</a:t>
+                      </a:r>
+                    </a:p>
+                  </a:txBody>
+                  <a:tcPr marL="60960" marR="60960" marT="30480" marB="30480" anchor="ctr"/>
+                </a:tc>
+                <a:tc>
+                  <a:txBody>
+                    <a:bodyPr/>
+                    <a:lstStyle/>
+                    <a:p>
+                      <a:pPr algn="ctr" fontAlgn="ctr">
+                        <a:buNone/>
+                      </a:pPr>
+                      <a:r>
+                        <a:rPr lang="en-GB" sz="1400" dirty="0">
+                          <a:effectLst/>
+                        </a:rPr>
+                        <a:t>size</a:t>
+                      </a:r>
+                    </a:p>
+                  </a:txBody>
+                  <a:tcPr marL="60960" marR="60960" marT="30480" marB="30480" anchor="ctr"/>
+                </a:tc>
+                <a:tc>
+                  <a:txBody>
+                    <a:bodyPr/>
+                    <a:lstStyle/>
+                    <a:p>
+                      <a:pPr algn="ctr" fontAlgn="ctr">
+                        <a:buNone/>
+                      </a:pPr>
+                      <a:r>
+                        <a:rPr lang="en-GB" sz="1400" dirty="0">
+                          <a:effectLst/>
+                        </a:rPr>
+                        <a:t>answer rate</a:t>
+                      </a:r>
+                    </a:p>
+                  </a:txBody>
+                  <a:tcPr marL="60960" marR="60960" marT="30480" marB="30480" anchor="ctr"/>
+                </a:tc>
+                <a:tc>
+                  <a:txBody>
+                    <a:bodyPr/>
+                    <a:lstStyle/>
+                    <a:p>
+                      <a:pPr algn="ctr" fontAlgn="ctr">
+                        <a:buNone/>
+                      </a:pPr>
+                      <a:r>
+                        <a:rPr lang="en-GB" sz="1400" dirty="0">
+                          <a:effectLst/>
+                        </a:rPr>
+                        <a:t>key pattern</a:t>
+                      </a:r>
+                    </a:p>
+                  </a:txBody>
+                  <a:tcPr marL="60960" marR="60960" marT="30480" marB="30480" anchor="ctr"/>
+                </a:tc>
+                <a:tc>
+                  <a:txBody>
+                    <a:bodyPr/>
+                    <a:lstStyle/>
+                    <a:p>
+                      <a:pPr algn="ctr" fontAlgn="ctr">
+                        <a:buNone/>
+                      </a:pPr>
+                      <a:r>
+                        <a:rPr lang="en-GB" sz="1400" dirty="0">
+                          <a:effectLst/>
+                        </a:rPr>
+                        <a:t>descriptive name</a:t>
+                      </a:r>
+                    </a:p>
+                  </a:txBody>
+                  <a:tcPr marL="60960" marR="60960" marT="30480" marB="30480" anchor="ctr"/>
+                </a:tc>
+                <a:extLst>
+                  <a:ext uri="{0D108BD9-81ED-4DB2-BD59-A6C34878D82A}">
+                    <a16:rowId xmlns:a16="http://schemas.microsoft.com/office/drawing/2014/main" val="10814174"/>
+                  </a:ext>
+                </a:extLst>
+              </a:tr>
+              <a:tr h="457200">
+                <a:tc>
+                  <a:txBody>
+                    <a:bodyPr/>
+                    <a:lstStyle/>
+                    <a:p>
+                      <a:pPr algn="ctr">
+                        <a:buNone/>
+                      </a:pPr>
+                      <a:r>
+                        <a:rPr lang="en-GB" sz="1400">
+                          <a:effectLst/>
+                        </a:rPr>
+                        <a:t>1</a:t>
+                      </a:r>
+                    </a:p>
+                  </a:txBody>
+                  <a:tcPr marL="60960" marR="60960" marT="30480" marB="30480" anchor="ctr"/>
+                </a:tc>
+                <a:tc>
+                  <a:txBody>
+                    <a:bodyPr/>
+                    <a:lstStyle/>
+                    <a:p>
+                      <a:pPr algn="ctr">
+                        <a:buNone/>
+                      </a:pPr>
+                      <a:r>
+                        <a:rPr lang="en-GB" sz="1400" dirty="0">
+                          <a:effectLst/>
+                        </a:rPr>
+                        <a:t>3</a:t>
+                      </a:r>
+                    </a:p>
+                  </a:txBody>
+                  <a:tcPr marL="60960" marR="60960" marT="30480" marB="30480" anchor="ctr"/>
+                </a:tc>
+                <a:tc>
+                  <a:txBody>
+                    <a:bodyPr/>
+                    <a:lstStyle/>
+                    <a:p>
+                      <a:pPr algn="ctr">
+                        <a:buNone/>
+                      </a:pPr>
+                      <a:r>
+                        <a:rPr lang="en-GB" sz="1400" dirty="0">
+                          <a:effectLst/>
+                        </a:rPr>
+                        <a:t>0.0%</a:t>
+                      </a:r>
+                    </a:p>
+                  </a:txBody>
+                  <a:tcPr marL="60960" marR="60960" marT="30480" marB="30480" anchor="ctr"/>
+                </a:tc>
+                <a:tc>
+                  <a:txBody>
+                    <a:bodyPr/>
+                    <a:lstStyle/>
+                    <a:p>
+                      <a:pPr>
+                        <a:buNone/>
+                      </a:pPr>
+                      <a:r>
+                        <a:rPr lang="en-GB" sz="1400" dirty="0">
+                          <a:effectLst/>
+                        </a:rPr>
+                        <a:t>Low aspect coverage, zero Jaccard similarity, ...</a:t>
+                      </a:r>
+                    </a:p>
+                  </a:txBody>
+                  <a:tcPr marL="60960" marR="60960" marT="30480" marB="30480" anchor="ctr"/>
+                </a:tc>
+                <a:tc>
+                  <a:txBody>
+                    <a:bodyPr/>
+                    <a:lstStyle/>
+                    <a:p>
+                      <a:pPr>
+                        <a:buNone/>
+                      </a:pPr>
+                      <a:r>
+                        <a:rPr lang="en-GB" sz="1400" dirty="0">
+                          <a:effectLst/>
+                        </a:rPr>
+                        <a:t>Unmatched / Refusal Candidates</a:t>
+                      </a:r>
+                    </a:p>
+                  </a:txBody>
+                  <a:tcPr marL="60960" marR="60960" marT="30480" marB="30480" anchor="ctr"/>
+                </a:tc>
+                <a:extLst>
+                  <a:ext uri="{0D108BD9-81ED-4DB2-BD59-A6C34878D82A}">
+                    <a16:rowId xmlns:a16="http://schemas.microsoft.com/office/drawing/2014/main" val="1842338819"/>
+                  </a:ext>
+                </a:extLst>
+              </a:tr>
+              <a:tr h="457200">
+                <a:tc>
+                  <a:txBody>
+                    <a:bodyPr/>
+                    <a:lstStyle/>
+                    <a:p>
+                      <a:pPr algn="ctr">
+                        <a:buNone/>
+                      </a:pPr>
+                      <a:r>
+                        <a:rPr lang="en-GB" sz="1400">
+                          <a:effectLst/>
+                        </a:rPr>
+                        <a:t>0</a:t>
+                      </a:r>
+                    </a:p>
+                  </a:txBody>
+                  <a:tcPr marL="60960" marR="60960" marT="30480" marB="30480" anchor="ctr"/>
+                </a:tc>
+                <a:tc>
+                  <a:txBody>
+                    <a:bodyPr/>
+                    <a:lstStyle/>
+                    <a:p>
+                      <a:pPr algn="ctr">
+                        <a:buNone/>
+                      </a:pPr>
+                      <a:r>
+                        <a:rPr lang="en-GB" sz="1400" dirty="0">
+                          <a:effectLst/>
+                        </a:rPr>
+                        <a:t>2555</a:t>
+                      </a:r>
+                    </a:p>
+                  </a:txBody>
+                  <a:tcPr marL="60960" marR="60960" marT="30480" marB="30480" anchor="ctr"/>
+                </a:tc>
+                <a:tc>
+                  <a:txBody>
+                    <a:bodyPr/>
+                    <a:lstStyle/>
+                    <a:p>
+                      <a:pPr algn="ctr">
+                        <a:buNone/>
+                      </a:pPr>
+                      <a:r>
+                        <a:rPr lang="en-GB" sz="1400" dirty="0">
+                          <a:effectLst/>
+                        </a:rPr>
+                        <a:t>65.6%</a:t>
+                      </a:r>
+                    </a:p>
+                  </a:txBody>
+                  <a:tcPr marL="60960" marR="60960" marT="30480" marB="30480" anchor="ctr"/>
+                </a:tc>
+                <a:tc>
+                  <a:txBody>
+                    <a:bodyPr/>
+                    <a:lstStyle/>
+                    <a:p>
+                      <a:pPr>
+                        <a:buNone/>
+                      </a:pPr>
+                      <a:r>
+                        <a:rPr lang="en-GB" sz="1400">
+                          <a:effectLst/>
+                        </a:rPr>
+                        <a:t>High tool count, high params, long complex que...</a:t>
+                      </a:r>
+                    </a:p>
+                  </a:txBody>
+                  <a:tcPr marL="60960" marR="60960" marT="30480" marB="30480" anchor="ctr"/>
+                </a:tc>
+                <a:tc>
+                  <a:txBody>
+                    <a:bodyPr/>
+                    <a:lstStyle/>
+                    <a:p>
+                      <a:pPr>
+                        <a:buNone/>
+                      </a:pPr>
+                      <a:r>
+                        <a:rPr lang="en-GB" sz="1400" dirty="0">
+                          <a:effectLst/>
+                        </a:rPr>
+                        <a:t>Complex Multi-Tool Scenarios</a:t>
+                      </a:r>
+                    </a:p>
+                  </a:txBody>
+                  <a:tcPr marL="60960" marR="60960" marT="30480" marB="30480" anchor="ctr"/>
+                </a:tc>
+                <a:extLst>
+                  <a:ext uri="{0D108BD9-81ED-4DB2-BD59-A6C34878D82A}">
+                    <a16:rowId xmlns:a16="http://schemas.microsoft.com/office/drawing/2014/main" val="3447888965"/>
+                  </a:ext>
+                </a:extLst>
+              </a:tr>
+              <a:tr h="457200">
+                <a:tc>
+                  <a:txBody>
+                    <a:bodyPr/>
+                    <a:lstStyle/>
+                    <a:p>
+                      <a:pPr algn="ctr">
+                        <a:buNone/>
+                      </a:pPr>
+                      <a:r>
+                        <a:rPr lang="en-GB" sz="1400" dirty="0">
+                          <a:effectLst/>
+                        </a:rPr>
+                        <a:t>2</a:t>
+                      </a:r>
+                    </a:p>
+                  </a:txBody>
+                  <a:tcPr marL="60960" marR="60960" marT="30480" marB="30480" anchor="ctr"/>
+                </a:tc>
+                <a:tc>
+                  <a:txBody>
+                    <a:bodyPr/>
+                    <a:lstStyle/>
+                    <a:p>
+                      <a:pPr algn="ctr">
+                        <a:buNone/>
+                      </a:pPr>
+                      <a:r>
+                        <a:rPr lang="en-GB" sz="1400" dirty="0">
+                          <a:effectLst/>
+                        </a:rPr>
+                        <a:t>933</a:t>
+                      </a:r>
+                    </a:p>
+                  </a:txBody>
+                  <a:tcPr marL="60960" marR="60960" marT="30480" marB="30480" anchor="ctr"/>
+                </a:tc>
+                <a:tc>
+                  <a:txBody>
+                    <a:bodyPr/>
+                    <a:lstStyle/>
+                    <a:p>
+                      <a:pPr algn="ctr">
+                        <a:buNone/>
+                      </a:pPr>
+                      <a:r>
+                        <a:rPr lang="en-GB" sz="1400" dirty="0">
+                          <a:effectLst/>
+                        </a:rPr>
+                        <a:t>74.0%</a:t>
+                      </a:r>
+                    </a:p>
+                  </a:txBody>
+                  <a:tcPr marL="60960" marR="60960" marT="30480" marB="30480" anchor="ctr"/>
+                </a:tc>
+                <a:tc>
+                  <a:txBody>
+                    <a:bodyPr/>
+                    <a:lstStyle/>
+                    <a:p>
+                      <a:pPr>
+                        <a:buNone/>
+                      </a:pPr>
+                      <a:r>
+                        <a:rPr lang="en-GB" sz="1400">
+                          <a:effectLst/>
+                        </a:rPr>
+                        <a:t>High aspect coverage, few tools, direct token ...</a:t>
+                      </a:r>
+                    </a:p>
+                  </a:txBody>
+                  <a:tcPr marL="60960" marR="60960" marT="30480" marB="30480" anchor="ctr"/>
+                </a:tc>
+                <a:tc>
+                  <a:txBody>
+                    <a:bodyPr/>
+                    <a:lstStyle/>
+                    <a:p>
+                      <a:pPr>
+                        <a:buNone/>
+                      </a:pPr>
+                      <a:r>
+                        <a:rPr lang="en-GB" sz="1400" dirty="0">
+                          <a:effectLst/>
+                        </a:rPr>
+                        <a:t>Simple Direct Matches</a:t>
+                      </a:r>
+                    </a:p>
+                  </a:txBody>
+                  <a:tcPr marL="60960" marR="60960" marT="30480" marB="30480" anchor="ctr"/>
+                </a:tc>
+                <a:extLst>
+                  <a:ext uri="{0D108BD9-81ED-4DB2-BD59-A6C34878D82A}">
+                    <a16:rowId xmlns:a16="http://schemas.microsoft.com/office/drawing/2014/main" val="4197678085"/>
+                  </a:ext>
+                </a:extLst>
+              </a:tr>
+            </a:tbl>
+          </a:graphicData>
+        </a:graphic>
+      </p:graphicFrame>
+      <p:sp>
+        <p:nvSpPr>
+          <p:cNvPr id="7" name="Content Placeholder 2">
+            <a:extLst>
+              <a:ext uri="{FF2B5EF4-FFF2-40B4-BE49-F238E27FC236}">
+                <a16:creationId xmlns:a16="http://schemas.microsoft.com/office/drawing/2014/main" id="{2CF7EE47-944B-89A6-068C-7C8B5C086B00}"/>
+              </a:ext>
+            </a:extLst>
+          </p:cNvPr>
+          <p:cNvSpPr txBox="1">
+            <a:spLocks/>
+          </p:cNvSpPr>
+          <p:nvPr/>
+        </p:nvSpPr>
+        <p:spPr>
+          <a:xfrm>
+            <a:off x="546754" y="4775583"/>
+            <a:ext cx="11246177" cy="1362745"/>
+          </a:xfrm>
+          <a:prstGeom prst="rect">
+            <a:avLst/>
+          </a:prstGeom>
+        </p:spPr>
+        <p:txBody>
+          <a:bodyPr vert="horz" lIns="91440" tIns="45720" rIns="91440" bIns="45720" rtlCol="0" anchor="ctr">
+            <a:normAutofit lnSpcReduction="10000"/>
+          </a:bodyPr>
+          <a:lstStyle>
+            <a:lvl1pPr marL="285750" indent="-285750" algn="l" defTabSz="457200" rtl="0" eaLnBrk="1" latinLnBrk="0" hangingPunct="1">
+              <a:spcBef>
+                <a:spcPct val="20000"/>
+              </a:spcBef>
+              <a:spcAft>
+                <a:spcPts val="600"/>
+              </a:spcAft>
+              <a:buClr>
+                <a:schemeClr val="tx1"/>
+              </a:buClr>
+              <a:buSzPct val="100000"/>
+              <a:buFont typeface="Arial"/>
+              <a:buChar char="•"/>
+              <a:defRPr sz="2000" kern="1200" cap="small">
+                <a:gradFill flip="none" rotWithShape="1">
+                  <a:gsLst>
+                    <a:gs pos="0">
+                      <a:schemeClr val="tx1"/>
+                    </a:gs>
+                    <a:gs pos="100000">
+                      <a:schemeClr val="tx1">
+                        <a:lumMod val="75000"/>
+                      </a:schemeClr>
+                    </a:gs>
+                  </a:gsLst>
+                  <a:lin ang="5580000" scaled="0"/>
+                  <a:tileRect/>
+                </a:gradFill>
+                <a:effectLst>
+                  <a:glow rad="38100">
+                    <a:schemeClr val="bg1">
+                      <a:lumMod val="50000"/>
+                      <a:lumOff val="50000"/>
+                      <a:alpha val="20000"/>
+                    </a:schemeClr>
+                  </a:glow>
+                  <a:outerShdw blurRad="44450" dist="12700" dir="13860000" algn="tl" rotWithShape="0">
+                    <a:srgbClr val="000000">
+                      <a:alpha val="20000"/>
+                    </a:srgbClr>
+                  </a:outerShdw>
+                </a:effectLst>
+                <a:latin typeface="+mn-lt"/>
+                <a:ea typeface="+mn-ea"/>
+                <a:cs typeface="+mn-cs"/>
+              </a:defRPr>
+            </a:lvl1pPr>
+            <a:lvl2pPr marL="742950" indent="-285750" algn="l" defTabSz="457200" rtl="0" eaLnBrk="1" latinLnBrk="0" hangingPunct="1">
+              <a:spcBef>
+                <a:spcPct val="20000"/>
+              </a:spcBef>
+              <a:spcAft>
+                <a:spcPts val="600"/>
+              </a:spcAft>
+              <a:buClr>
+                <a:schemeClr val="tx1"/>
+              </a:buClr>
+              <a:buSzPct val="100000"/>
+              <a:buFont typeface="Arial"/>
+              <a:buChar char="•"/>
+              <a:defRPr sz="1800" kern="1200" cap="small">
+                <a:gradFill flip="none" rotWithShape="1">
+                  <a:gsLst>
+                    <a:gs pos="0">
+                      <a:schemeClr val="tx1"/>
+                    </a:gs>
+                    <a:gs pos="100000">
+                      <a:schemeClr val="tx1">
+                        <a:lumMod val="75000"/>
+                      </a:schemeClr>
+                    </a:gs>
+                  </a:gsLst>
+                  <a:lin ang="5580000" scaled="0"/>
+                  <a:tileRect/>
+                </a:gradFill>
+                <a:effectLst>
+                  <a:glow rad="38100">
+                    <a:schemeClr val="bg1">
+                      <a:lumMod val="50000"/>
+                      <a:lumOff val="50000"/>
+                      <a:alpha val="20000"/>
+                    </a:schemeClr>
+                  </a:glow>
+                  <a:outerShdw blurRad="44450" dist="12700" dir="13860000" algn="tl" rotWithShape="0">
+                    <a:srgbClr val="000000">
+                      <a:alpha val="20000"/>
+                    </a:srgbClr>
+                  </a:outerShdw>
+                </a:effectLst>
+                <a:latin typeface="+mn-lt"/>
+                <a:ea typeface="+mn-ea"/>
+                <a:cs typeface="+mn-cs"/>
+              </a:defRPr>
+            </a:lvl2pPr>
+            <a:lvl3pPr marL="1200150" indent="-285750" algn="l" defTabSz="457200" rtl="0" eaLnBrk="1" latinLnBrk="0" hangingPunct="1">
+              <a:spcBef>
+                <a:spcPct val="20000"/>
+              </a:spcBef>
+              <a:spcAft>
+                <a:spcPts val="600"/>
+              </a:spcAft>
+              <a:buClr>
+                <a:schemeClr val="tx1"/>
+              </a:buClr>
+              <a:buSzPct val="100000"/>
+              <a:buFont typeface="Arial"/>
+              <a:buChar char="•"/>
+              <a:defRPr sz="1600" kern="1200" cap="small">
+                <a:gradFill flip="none" rotWithShape="1">
+                  <a:gsLst>
+                    <a:gs pos="0">
+                      <a:schemeClr val="tx1"/>
+                    </a:gs>
+                    <a:gs pos="100000">
+                      <a:schemeClr val="tx1">
+                        <a:lumMod val="75000"/>
+                      </a:schemeClr>
+                    </a:gs>
+                  </a:gsLst>
+                  <a:lin ang="5580000" scaled="0"/>
+                  <a:tileRect/>
+                </a:gradFill>
+                <a:effectLst>
+                  <a:glow rad="38100">
+                    <a:schemeClr val="bg1">
+                      <a:lumMod val="50000"/>
+                      <a:lumOff val="50000"/>
+                      <a:alpha val="20000"/>
+                    </a:schemeClr>
+                  </a:glow>
+                  <a:outerShdw blurRad="44450" dist="12700" dir="13860000" algn="tl" rotWithShape="0">
+                    <a:srgbClr val="000000">
+                      <a:alpha val="20000"/>
+                    </a:srgbClr>
+                  </a:outerShdw>
+                </a:effectLst>
+                <a:latin typeface="+mn-lt"/>
+                <a:ea typeface="+mn-ea"/>
+                <a:cs typeface="+mn-cs"/>
+              </a:defRPr>
+            </a:lvl3pPr>
+            <a:lvl4pPr marL="1543050" indent="-171450" algn="l" defTabSz="457200" rtl="0" eaLnBrk="1" latinLnBrk="0" hangingPunct="1">
+              <a:spcBef>
+                <a:spcPct val="20000"/>
+              </a:spcBef>
+              <a:spcAft>
+                <a:spcPts val="600"/>
+              </a:spcAft>
+              <a:buClr>
+                <a:schemeClr val="tx1"/>
+              </a:buClr>
+              <a:buSzPct val="100000"/>
+              <a:buFont typeface="Arial"/>
+              <a:buChar char="•"/>
+              <a:defRPr sz="1400" kern="1200" cap="small">
+                <a:gradFill flip="none" rotWithShape="1">
+                  <a:gsLst>
+                    <a:gs pos="0">
+                      <a:schemeClr val="tx1"/>
+                    </a:gs>
+                    <a:gs pos="100000">
+                      <a:schemeClr val="tx1">
+                        <a:lumMod val="75000"/>
+                      </a:schemeClr>
+                    </a:gs>
+                  </a:gsLst>
+                  <a:lin ang="5580000" scaled="0"/>
+                  <a:tileRect/>
+                </a:gradFill>
+                <a:effectLst>
+                  <a:glow rad="38100">
+                    <a:schemeClr val="bg1">
+                      <a:lumMod val="50000"/>
+                      <a:lumOff val="50000"/>
+                      <a:alpha val="20000"/>
+                    </a:schemeClr>
+                  </a:glow>
+                  <a:outerShdw blurRad="44450" dist="12700" dir="13860000" algn="tl" rotWithShape="0">
+                    <a:srgbClr val="000000">
+                      <a:alpha val="20000"/>
+                    </a:srgbClr>
+                  </a:outerShdw>
+                </a:effectLst>
+                <a:latin typeface="+mn-lt"/>
+                <a:ea typeface="+mn-ea"/>
+                <a:cs typeface="+mn-cs"/>
+              </a:defRPr>
+            </a:lvl4pPr>
+            <a:lvl5pPr marL="2000250" indent="-171450" algn="l" defTabSz="457200" rtl="0" eaLnBrk="1" latinLnBrk="0" hangingPunct="1">
+              <a:spcBef>
+                <a:spcPct val="20000"/>
+              </a:spcBef>
+              <a:spcAft>
+                <a:spcPts val="600"/>
+              </a:spcAft>
+              <a:buClr>
+                <a:schemeClr val="tx1"/>
+              </a:buClr>
+              <a:buSzPct val="100000"/>
+              <a:buFont typeface="Arial"/>
+              <a:buChar char="•"/>
+              <a:defRPr sz="1400" kern="1200" cap="small">
+                <a:gradFill flip="none" rotWithShape="1">
+                  <a:gsLst>
+                    <a:gs pos="0">
+                      <a:schemeClr val="tx1"/>
+                    </a:gs>
+                    <a:gs pos="100000">
+                      <a:schemeClr val="tx1">
+                        <a:lumMod val="75000"/>
+                      </a:schemeClr>
+                    </a:gs>
+                  </a:gsLst>
+                  <a:lin ang="5580000" scaled="0"/>
+                  <a:tileRect/>
+                </a:gradFill>
+                <a:effectLst>
+                  <a:glow rad="38100">
+                    <a:schemeClr val="bg1">
+                      <a:lumMod val="50000"/>
+                      <a:lumOff val="50000"/>
+                      <a:alpha val="20000"/>
+                    </a:schemeClr>
+                  </a:glow>
+                  <a:outerShdw blurRad="44450" dist="12700" dir="13860000" algn="tl" rotWithShape="0">
+                    <a:srgbClr val="000000">
+                      <a:alpha val="20000"/>
+                    </a:srgbClr>
+                  </a:outerShdw>
+                </a:effectLst>
+                <a:latin typeface="+mn-lt"/>
+                <a:ea typeface="+mn-ea"/>
+                <a:cs typeface="+mn-cs"/>
+              </a:defRPr>
+            </a:lvl5pPr>
+            <a:lvl6pPr marL="2514600" indent="-228600" algn="l" defTabSz="457200" rtl="0" eaLnBrk="1" latinLnBrk="0" hangingPunct="1">
+              <a:spcBef>
+                <a:spcPct val="20000"/>
+              </a:spcBef>
+              <a:spcAft>
+                <a:spcPts val="600"/>
+              </a:spcAft>
+              <a:buClr>
+                <a:schemeClr val="tx1"/>
+              </a:buClr>
+              <a:buSzPct val="100000"/>
+              <a:buFont typeface="Arial"/>
+              <a:buChar char="•"/>
+              <a:defRPr sz="1200" kern="1200" cap="small">
+                <a:gradFill flip="none" rotWithShape="1">
+                  <a:gsLst>
+                    <a:gs pos="0">
+                      <a:schemeClr val="tx1"/>
+                    </a:gs>
+                    <a:gs pos="100000">
+                      <a:schemeClr val="tx1">
+                        <a:lumMod val="75000"/>
+                      </a:schemeClr>
+                    </a:gs>
+                  </a:gsLst>
+                  <a:lin ang="5580000" scaled="0"/>
+                  <a:tileRect/>
+                </a:gradFill>
+                <a:effectLst>
+                  <a:glow rad="38100">
+                    <a:schemeClr val="bg1">
+                      <a:lumMod val="50000"/>
+                      <a:lumOff val="50000"/>
+                      <a:alpha val="20000"/>
+                    </a:schemeClr>
+                  </a:glow>
+                  <a:outerShdw blurRad="44450" dist="12700" dir="13860000" algn="tl" rotWithShape="0">
+                    <a:srgbClr val="000000">
+                      <a:alpha val="20000"/>
+                    </a:srgbClr>
+                  </a:outerShdw>
+                </a:effectLst>
+                <a:latin typeface="+mn-lt"/>
+                <a:ea typeface="+mn-ea"/>
+                <a:cs typeface="+mn-cs"/>
+              </a:defRPr>
+            </a:lvl6pPr>
+            <a:lvl7pPr marL="2971800" indent="-228600" algn="l" defTabSz="457200" rtl="0" eaLnBrk="1" latinLnBrk="0" hangingPunct="1">
+              <a:spcBef>
+                <a:spcPct val="20000"/>
+              </a:spcBef>
+              <a:spcAft>
+                <a:spcPts val="600"/>
+              </a:spcAft>
+              <a:buClr>
+                <a:schemeClr val="tx1"/>
+              </a:buClr>
+              <a:buSzPct val="100000"/>
+              <a:buFont typeface="Arial"/>
+              <a:buChar char="•"/>
+              <a:defRPr sz="1200" kern="1200" cap="small">
+                <a:gradFill flip="none" rotWithShape="1">
+                  <a:gsLst>
+                    <a:gs pos="0">
+                      <a:schemeClr val="tx1"/>
+                    </a:gs>
+                    <a:gs pos="100000">
+                      <a:schemeClr val="tx1">
+                        <a:lumMod val="75000"/>
+                      </a:schemeClr>
+                    </a:gs>
+                  </a:gsLst>
+                  <a:lin ang="5580000" scaled="0"/>
+                  <a:tileRect/>
+                </a:gradFill>
+                <a:effectLst>
+                  <a:glow rad="38100">
+                    <a:schemeClr val="bg1">
+                      <a:lumMod val="50000"/>
+                      <a:lumOff val="50000"/>
+                      <a:alpha val="20000"/>
+                    </a:schemeClr>
+                  </a:glow>
+                  <a:outerShdw blurRad="44450" dist="12700" dir="13860000" algn="tl" rotWithShape="0">
+                    <a:srgbClr val="000000">
+                      <a:alpha val="20000"/>
+                    </a:srgbClr>
+                  </a:outerShdw>
+                </a:effectLst>
+                <a:latin typeface="+mn-lt"/>
+                <a:ea typeface="+mn-ea"/>
+                <a:cs typeface="+mn-cs"/>
+              </a:defRPr>
+            </a:lvl7pPr>
+            <a:lvl8pPr marL="3429000" indent="-228600" algn="l" defTabSz="457200" rtl="0" eaLnBrk="1" latinLnBrk="0" hangingPunct="1">
+              <a:spcBef>
+                <a:spcPct val="20000"/>
+              </a:spcBef>
+              <a:spcAft>
+                <a:spcPts val="600"/>
+              </a:spcAft>
+              <a:buClr>
+                <a:schemeClr val="tx1"/>
+              </a:buClr>
+              <a:buSzPct val="100000"/>
+              <a:buFont typeface="Arial"/>
+              <a:buChar char="•"/>
+              <a:defRPr sz="1200" kern="1200" cap="small">
+                <a:gradFill flip="none" rotWithShape="1">
+                  <a:gsLst>
+                    <a:gs pos="0">
+                      <a:schemeClr val="tx1"/>
+                    </a:gs>
+                    <a:gs pos="100000">
+                      <a:schemeClr val="tx1">
+                        <a:lumMod val="75000"/>
+                      </a:schemeClr>
+                    </a:gs>
+                  </a:gsLst>
+                  <a:lin ang="5580000" scaled="0"/>
+                  <a:tileRect/>
+                </a:gradFill>
+                <a:effectLst>
+                  <a:glow rad="38100">
+                    <a:schemeClr val="bg1">
+                      <a:lumMod val="50000"/>
+                      <a:lumOff val="50000"/>
+                      <a:alpha val="20000"/>
+                    </a:schemeClr>
+                  </a:glow>
+                  <a:outerShdw blurRad="44450" dist="12700" dir="13860000" algn="tl" rotWithShape="0">
+                    <a:srgbClr val="000000">
+                      <a:alpha val="20000"/>
+                    </a:srgbClr>
+                  </a:outerShdw>
+                </a:effectLst>
+                <a:latin typeface="+mn-lt"/>
+                <a:ea typeface="+mn-ea"/>
+                <a:cs typeface="+mn-cs"/>
+              </a:defRPr>
+            </a:lvl8pPr>
+            <a:lvl9pPr marL="3886200" indent="-228600" algn="l" defTabSz="457200" rtl="0" eaLnBrk="1" latinLnBrk="0" hangingPunct="1">
+              <a:spcBef>
+                <a:spcPct val="20000"/>
+              </a:spcBef>
+              <a:spcAft>
+                <a:spcPts val="600"/>
+              </a:spcAft>
+              <a:buClr>
+                <a:schemeClr val="tx1"/>
+              </a:buClr>
+              <a:buSzPct val="100000"/>
+              <a:buFont typeface="Arial"/>
+              <a:buChar char="•"/>
+              <a:defRPr sz="1200" kern="1200" cap="small">
+                <a:gradFill flip="none" rotWithShape="1">
+                  <a:gsLst>
+                    <a:gs pos="0">
+                      <a:schemeClr val="tx1"/>
+                    </a:gs>
+                    <a:gs pos="100000">
+                      <a:schemeClr val="tx1">
+                        <a:lumMod val="75000"/>
+                      </a:schemeClr>
+                    </a:gs>
+                  </a:gsLst>
+                  <a:lin ang="5580000" scaled="0"/>
+                  <a:tileRect/>
+                </a:gradFill>
+                <a:effectLst>
+                  <a:glow rad="38100">
+                    <a:schemeClr val="bg1">
+                      <a:lumMod val="50000"/>
+                      <a:lumOff val="50000"/>
+                      <a:alpha val="20000"/>
+                    </a:schemeClr>
+                  </a:glow>
+                  <a:outerShdw blurRad="44450" dist="12700" dir="13860000" algn="tl" rotWithShape="0">
+                    <a:srgbClr val="000000">
+                      <a:alpha val="20000"/>
+                    </a:srgbClr>
+                  </a:outerShdw>
+                </a:effectLst>
+                <a:latin typeface="+mn-lt"/>
+                <a:ea typeface="+mn-ea"/>
+                <a:cs typeface="+mn-cs"/>
+              </a:defRPr>
+            </a:lvl9pPr>
+          </a:lstStyle>
+          <a:p>
+            <a:pPr marL="0" indent="0">
+              <a:buNone/>
+            </a:pPr>
+            <a:r>
+              <a:rPr lang="en-US" dirty="0"/>
+              <a:t>We know that lower token similarity is a strong indicator for refusal to answer and so We isolated the pure refusal group, which will have 0% answerable rate, using ward linkage clustering. Picking those with token </a:t>
+            </a:r>
+            <a:r>
+              <a:rPr lang="en-US" dirty="0" err="1"/>
+              <a:t>jaccard</a:t>
+            </a:r>
+            <a:r>
+              <a:rPr lang="en-US" dirty="0"/>
+              <a:t> →0 meaning it has almost no overlap between the user’s words and the tokens.</a:t>
+            </a:r>
+          </a:p>
+          <a:p>
+            <a:pPr marL="0" indent="0">
+              <a:buNone/>
+            </a:pPr>
+            <a:endParaRPr lang="en-US" dirty="0"/>
+          </a:p>
+        </p:txBody>
+      </p:sp>
+    </p:spTree>
+    <p:extLst>
+      <p:ext uri="{BB962C8B-B14F-4D97-AF65-F5344CB8AC3E}">
+        <p14:creationId xmlns:p14="http://schemas.microsoft.com/office/powerpoint/2010/main" val="1097784871"/>
+      </p:ext>
+    </p:extLst>
+  </p:cSld>
+  <p:clrMapOvr>
+    <a:masterClrMapping/>
+  </p:clrMapOvr>
+</p:sld>
+</file>
+
+<file path=ppt/slides/slide6.xml><?xml version="1.0" encoding="utf-8"?>
+<p:sld xmlns:a="http://schemas.openxmlformats.org/drawingml/2006/main" xmlns:r="http://schemas.openxmlformats.org/officeDocument/2006/relationships" xmlns:p="http://schemas.openxmlformats.org/presentationml/2006/main">
+  <p:cSld>
+    <p:bg>
+      <p:bgPr>
+        <a:blipFill rotWithShape="1">
+          <a:blip r:embed="rId2">
+            <a:duotone>
+              <a:schemeClr val="bg2">
+                <a:shade val="28000"/>
+                <a:satMod val="94000"/>
+                <a:lumMod val="20000"/>
+              </a:schemeClr>
+              <a:schemeClr val="bg2">
+                <a:tint val="94000"/>
+                <a:shade val="84000"/>
+                <a:satMod val="148000"/>
+                <a:lumMod val="114000"/>
+              </a:schemeClr>
+            </a:duotone>
+          </a:blip>
+          <a:stretch/>
+        </a:blipFill>
+        <a:effectLst/>
+      </p:bgPr>
+    </p:bg>
+    <p:spTree>
+      <p:nvGrpSpPr>
+        <p:cNvPr id="1" name=""/>
+        <p:cNvGrpSpPr/>
+        <p:nvPr/>
+      </p:nvGrpSpPr>
+      <p:grpSpPr>
+        <a:xfrm>
+          <a:off x="0" y="0"/>
+          <a:ext cx="0" cy="0"/>
+          <a:chOff x="0" y="0"/>
+          <a:chExt cx="0" cy="0"/>
+        </a:xfrm>
+      </p:grpSpPr>
+      <p:sp>
+        <p:nvSpPr>
+          <p:cNvPr id="2" name="Title 1">
+            <a:extLst>
+              <a:ext uri="{FF2B5EF4-FFF2-40B4-BE49-F238E27FC236}">
+                <a16:creationId xmlns:a16="http://schemas.microsoft.com/office/drawing/2014/main" id="{DF705ED6-164E-6ED4-97AB-B7B5A62CD61A}"/>
+              </a:ext>
+            </a:extLst>
+          </p:cNvPr>
+          <p:cNvSpPr>
+            <a:spLocks noGrp="1"/>
+          </p:cNvSpPr>
+          <p:nvPr>
+            <p:ph type="title"/>
+          </p:nvPr>
+        </p:nvSpPr>
+        <p:spPr>
+          <a:xfrm>
+            <a:off x="669851" y="1430179"/>
+            <a:ext cx="3029313" cy="3675908"/>
+          </a:xfrm>
+        </p:spPr>
+        <p:txBody>
+          <a:bodyPr anchor="ctr">
+            <a:normAutofit/>
+          </a:bodyPr>
+          <a:lstStyle/>
+          <a:p>
+            <a:r>
+              <a:rPr lang="en-US" sz="4000" b="1" dirty="0"/>
+              <a:t>summary</a:t>
+            </a:r>
+            <a:endParaRPr lang="en-GB" sz="4000" b="1" dirty="0"/>
+          </a:p>
+        </p:txBody>
+      </p:sp>
+      <p:sp>
+        <p:nvSpPr>
+          <p:cNvPr id="18" name="Rectangle 17">
+            <a:extLst>
+              <a:ext uri="{FF2B5EF4-FFF2-40B4-BE49-F238E27FC236}">
+                <a16:creationId xmlns:a16="http://schemas.microsoft.com/office/drawing/2014/main" id="{7E475056-B0EB-44BE-8568-61ABEFB2E99D}"/>
+              </a:ext>
+              <a:ext uri="{C183D7F6-B498-43B3-948B-1728B52AA6E4}">
+                <adec:decorative xmlns:adec="http://schemas.microsoft.com/office/drawing/2017/decorative" val="1"/>
+              </a:ext>
+            </a:extLst>
+          </p:cNvPr>
+          <p:cNvSpPr>
+            <a:spLocks noGrp="1" noRot="1" noChangeAspect="1" noMove="1" noResize="1" noEditPoints="1" noAdjustHandles="1" noChangeArrowheads="1" noChangeShapeType="1" noTextEdit="1"/>
+          </p:cNvSpPr>
+          <p:nvPr>
+            <p:extLst>
+              <p:ext uri="{386F3935-93C4-4BCD-93E2-E3B085C9AB24}">
+                <p16:designElem xmlns:p16="http://schemas.microsoft.com/office/powerpoint/2015/main" val="1"/>
+              </p:ext>
+            </p:extLst>
+          </p:nvPr>
+        </p:nvSpPr>
+        <p:spPr>
+          <a:xfrm>
+            <a:off x="4059934" y="0"/>
+            <a:ext cx="8132066" cy="6858000"/>
+          </a:xfrm>
+          <a:prstGeom prst="rect">
+            <a:avLst/>
+          </a:prstGeom>
+          <a:solidFill>
+            <a:schemeClr val="bg2"/>
+          </a:solidFill>
+          <a:ln>
+            <a:noFill/>
+          </a:ln>
+          <a:effectLst>
+            <a:innerShdw blurRad="63500" dist="50800" dir="10800000">
+              <a:prstClr val="black">
+                <a:alpha val="50000"/>
+              </a:prstClr>
+            </a:innerShdw>
+          </a:effectLst>
+        </p:spPr>
+        <p:style>
+          <a:lnRef idx="2">
+            <a:schemeClr val="accent1">
+              <a:shade val="50000"/>
+            </a:schemeClr>
+          </a:lnRef>
+          <a:fillRef idx="1">
+            <a:schemeClr val="accent1"/>
+          </a:fillRef>
+          <a:effectRef idx="0">
+            <a:schemeClr val="accent1"/>
+          </a:effectRef>
+          <a:fontRef idx="minor">
+            <a:schemeClr val="lt1"/>
+          </a:fontRef>
+        </p:style>
+        <p:txBody>
+          <a:bodyPr rtlCol="0" anchor="ctr"/>
+          <a:lstStyle/>
+          <a:p>
+            <a:pPr algn="ctr"/>
+            <a:endParaRPr lang="en-US"/>
+          </a:p>
+        </p:txBody>
+      </p:sp>
+      <p:cxnSp>
+        <p:nvCxnSpPr>
+          <p:cNvPr id="20" name="Straight Connector 19">
+            <a:extLst>
+              <a:ext uri="{FF2B5EF4-FFF2-40B4-BE49-F238E27FC236}">
+                <a16:creationId xmlns:a16="http://schemas.microsoft.com/office/drawing/2014/main" id="{F2C8E2EC-73A4-48C2-B4D7-D7726BD908EE}"/>
+              </a:ext>
+              <a:ext uri="{C183D7F6-B498-43B3-948B-1728B52AA6E4}">
+                <adec:decorative xmlns:adec="http://schemas.microsoft.com/office/drawing/2017/decorative" val="1"/>
+              </a:ext>
+            </a:extLst>
+          </p:cNvPr>
+          <p:cNvCxnSpPr>
+            <a:cxnSpLocks noGrp="1" noRot="1" noChangeAspect="1" noMove="1" noResize="1" noEditPoints="1" noAdjustHandles="1" noChangeArrowheads="1" noChangeShapeType="1"/>
+          </p:cNvCxnSpPr>
+          <p:nvPr>
+            <p:extLst>
+              <p:ext uri="{386F3935-93C4-4BCD-93E2-E3B085C9AB24}">
+                <p16:designElem xmlns:p16="http://schemas.microsoft.com/office/powerpoint/2015/main" val="1"/>
+              </p:ext>
+            </p:extLst>
+          </p:nvPr>
+        </p:nvCxnSpPr>
+        <p:spPr>
+          <a:xfrm>
+            <a:off x="4069971" y="0"/>
+            <a:ext cx="0" cy="6858000"/>
+          </a:xfrm>
+          <a:prstGeom prst="line">
+            <a:avLst/>
+          </a:prstGeom>
+          <a:solidFill>
+            <a:srgbClr val="FFFFFF"/>
+          </a:solidFill>
+          <a:ln w="38100" cap="flat">
+            <a:gradFill flip="none" rotWithShape="1">
+              <a:gsLst>
+                <a:gs pos="0">
+                  <a:srgbClr val="363D46"/>
+                </a:gs>
+                <a:gs pos="100000">
+                  <a:srgbClr val="363D46">
+                    <a:lumMod val="75000"/>
+                  </a:srgbClr>
+                </a:gs>
+              </a:gsLst>
+              <a:lin ang="5400000" scaled="0"/>
+              <a:tileRect/>
+            </a:gradFill>
+            <a:miter lim="800000"/>
+          </a:ln>
+          <a:effectLst>
+            <a:innerShdw blurRad="57150" dist="38100" dir="14460000">
+              <a:srgbClr val="000000">
+                <a:alpha val="70000"/>
+              </a:srgbClr>
+            </a:innerShdw>
+          </a:effectLst>
+        </p:spPr>
+        <p:style>
+          <a:lnRef idx="2">
+            <a:schemeClr val="accent1">
+              <a:shade val="50000"/>
+            </a:schemeClr>
+          </a:lnRef>
+          <a:fillRef idx="1">
+            <a:schemeClr val="accent1"/>
+          </a:fillRef>
+          <a:effectRef idx="0">
+            <a:schemeClr val="accent1"/>
+          </a:effectRef>
+          <a:fontRef idx="minor">
+            <a:schemeClr val="lt1"/>
+          </a:fontRef>
+        </p:style>
+      </p:cxnSp>
+      <p:sp>
+        <p:nvSpPr>
+          <p:cNvPr id="22" name="Rectangle 21">
+            <a:extLst>
+              <a:ext uri="{FF2B5EF4-FFF2-40B4-BE49-F238E27FC236}">
+                <a16:creationId xmlns:a16="http://schemas.microsoft.com/office/drawing/2014/main" id="{E82ABBDC-7A44-4AE8-A04F-B5495481B9F2}"/>
+              </a:ext>
+              <a:ext uri="{C183D7F6-B498-43B3-948B-1728B52AA6E4}">
+                <adec:decorative xmlns:adec="http://schemas.microsoft.com/office/drawing/2017/decorative" val="1"/>
+              </a:ext>
+            </a:extLst>
+          </p:cNvPr>
+          <p:cNvSpPr>
+            <a:spLocks noGrp="1" noRot="1" noChangeAspect="1" noMove="1" noResize="1" noEditPoints="1" noAdjustHandles="1" noChangeArrowheads="1" noChangeShapeType="1" noTextEdit="1"/>
+          </p:cNvSpPr>
+          <p:nvPr>
+            <p:extLst>
+              <p:ext uri="{386F3935-93C4-4BCD-93E2-E3B085C9AB24}">
+                <p16:designElem xmlns:p16="http://schemas.microsoft.com/office/powerpoint/2015/main" val="1"/>
+              </p:ext>
+            </p:extLst>
+          </p:nvPr>
+        </p:nvSpPr>
+        <p:spPr>
+          <a:xfrm rot="5400000" flipH="1">
+            <a:off x="894952" y="3195797"/>
+            <a:ext cx="6858000" cy="466406"/>
+          </a:xfrm>
+          <a:prstGeom prst="rect">
+            <a:avLst/>
+          </a:prstGeom>
+          <a:gradFill>
+            <a:gsLst>
+              <a:gs pos="0">
+                <a:srgbClr val="363D46">
+                  <a:alpha val="0"/>
+                </a:srgbClr>
+              </a:gs>
+              <a:gs pos="100000">
+                <a:srgbClr val="363D46">
+                  <a:lumMod val="75000"/>
+                </a:srgbClr>
+              </a:gs>
+            </a:gsLst>
+            <a:lin ang="5400000" scaled="0"/>
+          </a:gradFill>
+          <a:ln>
+            <a:noFill/>
+          </a:ln>
+          <a:effectLst/>
+        </p:spPr>
+        <p:style>
+          <a:lnRef idx="2">
+            <a:schemeClr val="accent1">
+              <a:shade val="50000"/>
+            </a:schemeClr>
+          </a:lnRef>
+          <a:fillRef idx="1">
+            <a:schemeClr val="accent1"/>
+          </a:fillRef>
+          <a:effectRef idx="0">
+            <a:schemeClr val="accent1"/>
+          </a:effectRef>
+          <a:fontRef idx="minor">
+            <a:schemeClr val="lt1"/>
+          </a:fontRef>
+        </p:style>
+        <p:txBody>
+          <a:bodyPr rot="0" spcFirstLastPara="0" vertOverflow="overflow" horzOverflow="overflow" vert="horz" wrap="square" lIns="91440" tIns="45720" rIns="91440" bIns="45720" numCol="1" spcCol="0" rtlCol="0" fromWordArt="0" anchor="ctr" anchorCtr="0" forceAA="0" compatLnSpc="1">
+            <a:prstTxWarp prst="textNoShape">
+              <a:avLst/>
+            </a:prstTxWarp>
+            <a:noAutofit/>
+          </a:bodyPr>
+          <a:lstStyle/>
+          <a:p>
+            <a:pPr algn="ctr"/>
+            <a:endParaRPr lang="en-US"/>
+          </a:p>
+        </p:txBody>
+      </p:sp>
+      <p:graphicFrame>
+        <p:nvGraphicFramePr>
+          <p:cNvPr id="4" name="Content Placeholder 3">
+            <a:extLst>
+              <a:ext uri="{FF2B5EF4-FFF2-40B4-BE49-F238E27FC236}">
+                <a16:creationId xmlns:a16="http://schemas.microsoft.com/office/drawing/2014/main" id="{5024BF29-434D-AAB1-392E-1D35284C2953}"/>
+              </a:ext>
+            </a:extLst>
+          </p:cNvPr>
+          <p:cNvGraphicFramePr>
+            <a:graphicFrameLocks noGrp="1"/>
+          </p:cNvGraphicFramePr>
+          <p:nvPr>
+            <p:ph idx="1"/>
+            <p:extLst>
+              <p:ext uri="{D42A27DB-BD31-4B8C-83A1-F6EECF244321}">
+                <p14:modId xmlns:p14="http://schemas.microsoft.com/office/powerpoint/2010/main" val="711282493"/>
+              </p:ext>
+            </p:extLst>
+          </p:nvPr>
+        </p:nvGraphicFramePr>
+        <p:xfrm>
+          <a:off x="5054375" y="1998535"/>
+          <a:ext cx="6046134" cy="3087726"/>
+        </p:xfrm>
+        <a:graphic>
+          <a:graphicData uri="http://schemas.openxmlformats.org/drawingml/2006/table">
+            <a:tbl>
+              <a:tblPr firstRow="1" bandRow="1">
+                <a:tableStyleId>{0660B408-B3CF-4A94-85FC-2B1E0A45F4A2}</a:tableStyleId>
+              </a:tblPr>
+              <a:tblGrid>
+                <a:gridCol w="1760343">
+                  <a:extLst>
+                    <a:ext uri="{9D8B030D-6E8A-4147-A177-3AD203B41FA5}">
+                      <a16:colId xmlns:a16="http://schemas.microsoft.com/office/drawing/2014/main" val="4130571992"/>
+                    </a:ext>
+                  </a:extLst>
+                </a:gridCol>
+                <a:gridCol w="4285791">
+                  <a:extLst>
+                    <a:ext uri="{9D8B030D-6E8A-4147-A177-3AD203B41FA5}">
+                      <a16:colId xmlns:a16="http://schemas.microsoft.com/office/drawing/2014/main" val="3030552245"/>
+                    </a:ext>
+                  </a:extLst>
+                </a:gridCol>
+              </a:tblGrid>
+              <a:tr h="473410">
+                <a:tc>
+                  <a:txBody>
+                    <a:bodyPr/>
+                    <a:lstStyle/>
+                    <a:p>
+                      <a:pPr marL="0" algn="l" defTabSz="457200" rtl="0" eaLnBrk="1" latinLnBrk="0" hangingPunct="1"/>
+                      <a:r>
+                        <a:rPr lang="en-US" sz="2100" b="0" kern="1200" dirty="0">
+                          <a:ln>
+                            <a:solidFill>
+                              <a:schemeClr val="tx1"/>
+                            </a:solidFill>
+                          </a:ln>
+                          <a:solidFill>
+                            <a:schemeClr val="tx1"/>
+                          </a:solidFill>
+                          <a:latin typeface="+mn-lt"/>
+                          <a:ea typeface="+mn-ea"/>
+                          <a:cs typeface="+mn-cs"/>
+                        </a:rPr>
+                        <a:t>Best model</a:t>
+                      </a:r>
+                      <a:endParaRPr lang="en-GB" sz="2100" b="0" kern="1200" dirty="0">
+                        <a:ln>
+                          <a:solidFill>
+                            <a:schemeClr val="tx1"/>
+                          </a:solidFill>
+                        </a:ln>
+                        <a:solidFill>
+                          <a:schemeClr val="tx1"/>
+                        </a:solidFill>
+                        <a:latin typeface="+mn-lt"/>
+                        <a:ea typeface="+mn-ea"/>
+                        <a:cs typeface="+mn-cs"/>
+                      </a:endParaRPr>
+                    </a:p>
+                  </a:txBody>
+                  <a:tcPr marL="107593" marR="107593" marT="53797" marB="53797">
+                    <a:solidFill>
+                      <a:srgbClr val="000000">
+                        <a:alpha val="30196"/>
+                      </a:srgbClr>
+                    </a:solidFill>
+                  </a:tcPr>
+                </a:tc>
+                <a:tc>
+                  <a:txBody>
+                    <a:bodyPr/>
+                    <a:lstStyle/>
+                    <a:p>
+                      <a:pPr marL="0" algn="l" defTabSz="457200" rtl="0" eaLnBrk="1" latinLnBrk="0" hangingPunct="1"/>
+                      <a:r>
+                        <a:rPr lang="en-US" sz="2100" b="0" kern="1200" dirty="0">
+                          <a:ln>
+                            <a:solidFill>
+                              <a:schemeClr val="tx1"/>
+                            </a:solidFill>
+                          </a:ln>
+                          <a:solidFill>
+                            <a:schemeClr val="tx1"/>
+                          </a:solidFill>
+                          <a:latin typeface="+mn-lt"/>
+                          <a:ea typeface="+mn-ea"/>
+                          <a:cs typeface="+mn-cs"/>
+                        </a:rPr>
+                        <a:t>Random forest - 90.8% accuracy</a:t>
+                      </a:r>
+                      <a:endParaRPr lang="en-GB" sz="2100" b="0" kern="1200" dirty="0">
+                        <a:ln>
+                          <a:solidFill>
+                            <a:schemeClr val="tx1"/>
+                          </a:solidFill>
+                        </a:ln>
+                        <a:solidFill>
+                          <a:schemeClr val="tx1"/>
+                        </a:solidFill>
+                        <a:latin typeface="+mn-lt"/>
+                        <a:ea typeface="+mn-ea"/>
+                        <a:cs typeface="+mn-cs"/>
+                      </a:endParaRPr>
+                    </a:p>
+                  </a:txBody>
+                  <a:tcPr marL="107593" marR="107593" marT="53797" marB="53797">
+                    <a:solidFill>
+                      <a:srgbClr val="000000">
+                        <a:alpha val="30196"/>
+                      </a:srgbClr>
+                    </a:solidFill>
+                  </a:tcPr>
+                </a:tc>
+                <a:extLst>
+                  <a:ext uri="{0D108BD9-81ED-4DB2-BD59-A6C34878D82A}">
+                    <a16:rowId xmlns:a16="http://schemas.microsoft.com/office/drawing/2014/main" val="1316902998"/>
+                  </a:ext>
+                </a:extLst>
+              </a:tr>
+              <a:tr h="796189">
+                <a:tc>
+                  <a:txBody>
+                    <a:bodyPr/>
+                    <a:lstStyle/>
+                    <a:p>
+                      <a:r>
+                        <a:rPr lang="en-US" sz="2100" dirty="0">
+                          <a:ln>
+                            <a:solidFill>
+                              <a:schemeClr val="tx1"/>
+                            </a:solidFill>
+                          </a:ln>
+                          <a:solidFill>
+                            <a:schemeClr val="tx1"/>
+                          </a:solidFill>
+                        </a:rPr>
+                        <a:t>Main metric</a:t>
+                      </a:r>
+                      <a:endParaRPr lang="en-GB" sz="2100" dirty="0">
+                        <a:ln>
+                          <a:solidFill>
+                            <a:schemeClr val="tx1"/>
+                          </a:solidFill>
+                        </a:ln>
+                        <a:solidFill>
+                          <a:schemeClr val="tx1"/>
+                        </a:solidFill>
+                      </a:endParaRPr>
+                    </a:p>
+                  </a:txBody>
+                  <a:tcPr marL="107593" marR="107593" marT="53797" marB="53797">
+                    <a:solidFill>
+                      <a:schemeClr val="tx1">
+                        <a:alpha val="30196"/>
+                      </a:schemeClr>
+                    </a:solidFill>
+                  </a:tcPr>
+                </a:tc>
+                <a:tc>
+                  <a:txBody>
+                    <a:bodyPr/>
+                    <a:lstStyle/>
+                    <a:p>
+                      <a:r>
+                        <a:rPr lang="en-US" sz="2100" dirty="0">
+                          <a:ln>
+                            <a:solidFill>
+                              <a:schemeClr val="tx1"/>
+                            </a:solidFill>
+                          </a:ln>
+                          <a:solidFill>
+                            <a:schemeClr val="tx1"/>
+                          </a:solidFill>
+                        </a:rPr>
+                        <a:t>F1 score</a:t>
+                      </a:r>
+                      <a:r>
+                        <a:rPr lang="he-IL" sz="2100" dirty="0">
+                          <a:ln>
+                            <a:solidFill>
+                              <a:schemeClr val="tx1"/>
+                            </a:solidFill>
+                          </a:ln>
+                          <a:solidFill>
+                            <a:schemeClr val="tx1"/>
+                          </a:solidFill>
+                        </a:rPr>
+                        <a:t> 0.934</a:t>
+                      </a:r>
+                      <a:r>
+                        <a:rPr lang="en-US" sz="2100" dirty="0">
+                          <a:ln>
+                            <a:solidFill>
+                              <a:schemeClr val="tx1"/>
+                            </a:solidFill>
+                          </a:ln>
+                          <a:solidFill>
+                            <a:schemeClr val="tx1"/>
+                          </a:solidFill>
+                        </a:rPr>
+                        <a:t> – robust to class imbalance</a:t>
+                      </a:r>
+                      <a:endParaRPr lang="en-GB" sz="2100" dirty="0">
+                        <a:ln>
+                          <a:solidFill>
+                            <a:schemeClr val="tx1"/>
+                          </a:solidFill>
+                        </a:ln>
+                        <a:solidFill>
+                          <a:schemeClr val="tx1"/>
+                        </a:solidFill>
+                      </a:endParaRPr>
+                    </a:p>
+                  </a:txBody>
+                  <a:tcPr marL="107593" marR="107593" marT="53797" marB="53797">
+                    <a:solidFill>
+                      <a:schemeClr val="tx1">
+                        <a:alpha val="30196"/>
+                      </a:schemeClr>
+                    </a:solidFill>
+                  </a:tcPr>
+                </a:tc>
+                <a:extLst>
+                  <a:ext uri="{0D108BD9-81ED-4DB2-BD59-A6C34878D82A}">
+                    <a16:rowId xmlns:a16="http://schemas.microsoft.com/office/drawing/2014/main" val="1025177339"/>
+                  </a:ext>
+                </a:extLst>
+              </a:tr>
+              <a:tr h="473410">
+                <a:tc>
+                  <a:txBody>
+                    <a:bodyPr/>
+                    <a:lstStyle/>
+                    <a:p>
+                      <a:r>
+                        <a:rPr lang="en-US" sz="2100">
+                          <a:ln>
+                            <a:solidFill>
+                              <a:schemeClr val="tx1"/>
+                            </a:solidFill>
+                          </a:ln>
+                          <a:solidFill>
+                            <a:schemeClr val="tx1"/>
+                          </a:solidFill>
+                        </a:rPr>
+                        <a:t>Critical error</a:t>
+                      </a:r>
+                      <a:endParaRPr lang="en-GB" sz="2100">
+                        <a:ln>
+                          <a:solidFill>
+                            <a:schemeClr val="tx1"/>
+                          </a:solidFill>
+                        </a:ln>
+                        <a:solidFill>
+                          <a:schemeClr val="tx1"/>
+                        </a:solidFill>
+                      </a:endParaRPr>
+                    </a:p>
+                  </a:txBody>
+                  <a:tcPr marL="107593" marR="107593" marT="53797" marB="53797">
+                    <a:solidFill>
+                      <a:srgbClr val="000000">
+                        <a:alpha val="30196"/>
+                      </a:srgbClr>
+                    </a:solidFill>
+                  </a:tcPr>
+                </a:tc>
+                <a:tc>
+                  <a:txBody>
+                    <a:bodyPr/>
+                    <a:lstStyle/>
+                    <a:p>
+                      <a:r>
+                        <a:rPr lang="en-US" sz="2100" dirty="0">
+                          <a:ln>
+                            <a:solidFill>
+                              <a:schemeClr val="tx1"/>
+                            </a:solidFill>
+                          </a:ln>
+                          <a:solidFill>
+                            <a:schemeClr val="tx1"/>
+                          </a:solidFill>
+                        </a:rPr>
+                        <a:t>False positive</a:t>
+                      </a:r>
+                      <a:endParaRPr lang="en-GB" sz="2100" dirty="0">
+                        <a:ln>
+                          <a:solidFill>
+                            <a:schemeClr val="tx1"/>
+                          </a:solidFill>
+                        </a:ln>
+                        <a:solidFill>
+                          <a:schemeClr val="tx1"/>
+                        </a:solidFill>
+                      </a:endParaRPr>
+                    </a:p>
+                  </a:txBody>
+                  <a:tcPr marL="107593" marR="107593" marT="53797" marB="53797">
+                    <a:solidFill>
+                      <a:srgbClr val="000000">
+                        <a:alpha val="30196"/>
+                      </a:srgbClr>
+                    </a:solidFill>
+                  </a:tcPr>
+                </a:tc>
+                <a:extLst>
+                  <a:ext uri="{0D108BD9-81ED-4DB2-BD59-A6C34878D82A}">
+                    <a16:rowId xmlns:a16="http://schemas.microsoft.com/office/drawing/2014/main" val="1412165078"/>
+                  </a:ext>
+                </a:extLst>
+              </a:tr>
+              <a:tr h="796189">
+                <a:tc>
+                  <a:txBody>
+                    <a:bodyPr/>
+                    <a:lstStyle/>
+                    <a:p>
+                      <a:r>
+                        <a:rPr lang="en-US" sz="2100" dirty="0">
+                          <a:ln>
+                            <a:solidFill>
+                              <a:schemeClr val="tx1"/>
+                            </a:solidFill>
+                          </a:ln>
+                          <a:solidFill>
+                            <a:schemeClr val="tx1"/>
+                          </a:solidFill>
+                        </a:rPr>
+                        <a:t>Data noise</a:t>
+                      </a:r>
+                      <a:endParaRPr lang="en-GB" sz="2100" dirty="0">
+                        <a:ln>
+                          <a:solidFill>
+                            <a:schemeClr val="tx1"/>
+                          </a:solidFill>
+                        </a:ln>
+                        <a:solidFill>
+                          <a:schemeClr val="tx1"/>
+                        </a:solidFill>
+                      </a:endParaRPr>
+                    </a:p>
+                  </a:txBody>
+                  <a:tcPr marL="107593" marR="107593" marT="53797" marB="53797">
+                    <a:solidFill>
+                      <a:schemeClr val="tx1">
+                        <a:alpha val="30196"/>
+                      </a:schemeClr>
+                    </a:solidFill>
+                  </a:tcPr>
+                </a:tc>
+                <a:tc>
+                  <a:txBody>
+                    <a:bodyPr/>
+                    <a:lstStyle/>
+                    <a:p>
+                      <a:r>
+                        <a:rPr lang="en-US" sz="2100" dirty="0">
+                          <a:ln>
+                            <a:solidFill>
+                              <a:schemeClr val="tx1"/>
+                            </a:solidFill>
+                          </a:ln>
+                          <a:solidFill>
+                            <a:schemeClr val="tx1"/>
+                          </a:solidFill>
+                        </a:rPr>
+                        <a:t>Too many of “other”  domain, </a:t>
+                      </a:r>
+                      <a:r>
+                        <a:rPr lang="en-US" sz="2100" dirty="0" err="1">
+                          <a:ln>
+                            <a:solidFill>
+                              <a:schemeClr val="tx1"/>
+                            </a:solidFill>
+                          </a:ln>
+                          <a:solidFill>
+                            <a:schemeClr val="tx1"/>
+                          </a:solidFill>
+                        </a:rPr>
+                        <a:t>thowing</a:t>
+                      </a:r>
+                      <a:r>
+                        <a:rPr lang="en-US" sz="2100" dirty="0">
+                          <a:ln>
+                            <a:solidFill>
+                              <a:schemeClr val="tx1"/>
+                            </a:solidFill>
+                          </a:ln>
+                          <a:solidFill>
+                            <a:schemeClr val="tx1"/>
+                          </a:solidFill>
+                        </a:rPr>
+                        <a:t> off the system</a:t>
+                      </a:r>
+                      <a:endParaRPr lang="en-GB" sz="2100" dirty="0">
+                        <a:ln>
+                          <a:solidFill>
+                            <a:schemeClr val="tx1"/>
+                          </a:solidFill>
+                        </a:ln>
+                        <a:solidFill>
+                          <a:schemeClr val="tx1"/>
+                        </a:solidFill>
+                      </a:endParaRPr>
+                    </a:p>
+                  </a:txBody>
+                  <a:tcPr marL="107593" marR="107593" marT="53797" marB="53797">
+                    <a:solidFill>
+                      <a:schemeClr val="tx1">
+                        <a:alpha val="30196"/>
+                      </a:schemeClr>
+                    </a:solidFill>
+                  </a:tcPr>
+                </a:tc>
+                <a:extLst>
+                  <a:ext uri="{0D108BD9-81ED-4DB2-BD59-A6C34878D82A}">
+                    <a16:rowId xmlns:a16="http://schemas.microsoft.com/office/drawing/2014/main" val="492238510"/>
+                  </a:ext>
+                </a:extLst>
+              </a:tr>
+            </a:tbl>
+          </a:graphicData>
+        </a:graphic>
+      </p:graphicFrame>
+    </p:spTree>
+    <p:extLst>
+      <p:ext uri="{BB962C8B-B14F-4D97-AF65-F5344CB8AC3E}">
+        <p14:creationId xmlns:p14="http://schemas.microsoft.com/office/powerpoint/2010/main" val="3576788779"/>
       </p:ext>
     </p:extLst>
   </p:cSld>

--- a/exe2/presentation.pptx
+++ b/exe2/presentation.pptx
@@ -8,9 +8,6 @@
     <p:sldId id="256" r:id="rId2"/>
     <p:sldId id="257" r:id="rId3"/>
     <p:sldId id="258" r:id="rId4"/>
-    <p:sldId id="259" r:id="rId5"/>
-    <p:sldId id="260" r:id="rId6"/>
-    <p:sldId id="261" r:id="rId7"/>
   </p:sldIdLst>
   <p:sldSz cx="12192000" cy="6858000"/>
   <p:notesSz cx="6858000" cy="9144000"/>
@@ -5829,10 +5826,95 @@
           <a:lstStyle/>
           <a:p>
             <a:r>
-              <a:rPr lang="en-US" b="1" dirty="0"/>
-              <a:t>Problem: can the agent answer?</a:t>
-            </a:r>
-            <a:endParaRPr lang="en-GB" b="1" dirty="0"/>
+              <a:rPr lang="en-US" dirty="0"/>
+              <a:t>Problem: can </a:t>
+            </a:r>
+            <a:r>
+              <a:rPr lang="en-US" dirty="0" err="1"/>
+              <a:t>theagent</a:t>
+            </a:r>
+            <a:r>
+              <a:rPr lang="en-US" dirty="0"/>
+              <a:t> answer?</a:t>
+            </a:r>
+            <a:endParaRPr lang="en-GB" dirty="0"/>
+          </a:p>
+        </p:txBody>
+      </p:sp>
+      <p:sp>
+        <p:nvSpPr>
+          <p:cNvPr id="3" name="Content Placeholder 2">
+            <a:extLst>
+              <a:ext uri="{FF2B5EF4-FFF2-40B4-BE49-F238E27FC236}">
+                <a16:creationId xmlns:a16="http://schemas.microsoft.com/office/drawing/2014/main" id="{5F359643-5B90-5775-DB15-811F84BF1579}"/>
+              </a:ext>
+            </a:extLst>
+          </p:cNvPr>
+          <p:cNvSpPr>
+            <a:spLocks noGrp="1"/>
+          </p:cNvSpPr>
+          <p:nvPr>
+            <p:ph idx="1"/>
+          </p:nvPr>
+        </p:nvSpPr>
+        <p:spPr>
+          <a:xfrm>
+            <a:off x="838200" y="1825625"/>
+            <a:ext cx="4421957" cy="4351338"/>
+          </a:xfrm>
+        </p:spPr>
+        <p:txBody>
+          <a:bodyPr/>
+          <a:lstStyle/>
+          <a:p>
+            <a:pPr marL="0" indent="0">
+              <a:buNone/>
+            </a:pPr>
+            <a:r>
+              <a:rPr lang="en-US" dirty="0"/>
+              <a:t>Objective</a:t>
+            </a:r>
+          </a:p>
+          <a:p>
+            <a:pPr marL="0" indent="0">
+              <a:buNone/>
+            </a:pPr>
+            <a:r>
+              <a:rPr lang="en-US" sz="1600" dirty="0"/>
+              <a:t>Improve reliability, preventing the agent from being overconfident. Giving it the ability to reject a prompt\ ask based on the users query.</a:t>
+            </a:r>
+          </a:p>
+          <a:p>
+            <a:r>
+              <a:rPr lang="en-US" sz="1600" dirty="0"/>
+              <a:t>Detect not </a:t>
+            </a:r>
+            <a:r>
+              <a:rPr lang="en-US" sz="1600" dirty="0" err="1"/>
+              <a:t>can_answer</a:t>
+            </a:r>
+            <a:r>
+              <a:rPr lang="en-US" sz="1600" dirty="0"/>
+              <a:t> </a:t>
+            </a:r>
+          </a:p>
+          <a:p>
+            <a:r>
+              <a:rPr lang="en-US" sz="1600" dirty="0"/>
+              <a:t>Optimize resource allocation</a:t>
+            </a:r>
+          </a:p>
+          <a:p>
+            <a:r>
+              <a:rPr lang="en-US" sz="1600" dirty="0"/>
+              <a:t>Enhance users trust</a:t>
+            </a:r>
+          </a:p>
+          <a:p>
+            <a:pPr marL="0" indent="0">
+              <a:buNone/>
+            </a:pPr>
+            <a:endParaRPr lang="en-GB" dirty="0"/>
           </a:p>
         </p:txBody>
       </p:sp>
@@ -6489,453 +6571,44 @@
               <a:buFont typeface="Arial" panose="020B0604020202020204" pitchFamily="34" charset="0"/>
               <a:buNone/>
             </a:pPr>
+            <a:r>
+              <a:rPr lang="en-US" dirty="0"/>
+              <a:t>Dataset </a:t>
+            </a:r>
+          </a:p>
+          <a:p>
+            <a:pPr marL="0" indent="0">
+              <a:buFont typeface="Arial" panose="020B0604020202020204" pitchFamily="34" charset="0"/>
+              <a:buNone/>
+            </a:pPr>
+            <a:r>
+              <a:rPr lang="en-US" dirty="0"/>
+              <a:t>A collection of over 3.4k task records measuring how compatible a prompt is to the domains of the AI</a:t>
+            </a:r>
+          </a:p>
+          <a:p>
+            <a:r>
+              <a:rPr lang="en-US" dirty="0"/>
+              <a:t>Binary </a:t>
+            </a:r>
+            <a:r>
+              <a:rPr lang="en-US" dirty="0" err="1"/>
+              <a:t>resilts</a:t>
+            </a:r>
+            <a:endParaRPr lang="en-US" dirty="0"/>
+          </a:p>
+          <a:p>
+            <a:r>
+              <a:rPr lang="en-US" dirty="0"/>
+              <a:t>Benchmark being 64% live  tasks</a:t>
+            </a:r>
+          </a:p>
+          <a:p>
+            <a:r>
+              <a:rPr lang="en-US" dirty="0"/>
+              <a:t>Dominant domain: gender\other</a:t>
+            </a:r>
             <a:endParaRPr lang="en-GB" dirty="0"/>
-          </a:p>
-        </p:txBody>
-      </p:sp>
-      <p:sp>
-        <p:nvSpPr>
-          <p:cNvPr id="7" name="Rectangle: Rounded Corners 6">
-            <a:extLst>
-              <a:ext uri="{FF2B5EF4-FFF2-40B4-BE49-F238E27FC236}">
-                <a16:creationId xmlns:a16="http://schemas.microsoft.com/office/drawing/2014/main" id="{2ECE2C88-6E35-6411-2E87-9176C5A66D9E}"/>
-              </a:ext>
-            </a:extLst>
-          </p:cNvPr>
-          <p:cNvSpPr/>
-          <p:nvPr/>
-        </p:nvSpPr>
-        <p:spPr>
-          <a:xfrm>
-            <a:off x="1065195" y="2263365"/>
-            <a:ext cx="4130512" cy="3475858"/>
-          </a:xfrm>
-          <a:prstGeom prst="roundRect">
-            <a:avLst/>
-          </a:prstGeom>
-          <a:solidFill>
-            <a:srgbClr val="000000">
-              <a:alpha val="30196"/>
-            </a:srgbClr>
-          </a:solidFill>
-          <a:ln>
-            <a:noFill/>
-          </a:ln>
-        </p:spPr>
-        <p:style>
-          <a:lnRef idx="2">
-            <a:schemeClr val="accent1">
-              <a:shade val="15000"/>
-            </a:schemeClr>
-          </a:lnRef>
-          <a:fillRef idx="1">
-            <a:schemeClr val="accent1"/>
-          </a:fillRef>
-          <a:effectRef idx="0">
-            <a:schemeClr val="accent1"/>
-          </a:effectRef>
-          <a:fontRef idx="minor">
-            <a:schemeClr val="lt1"/>
-          </a:fontRef>
-        </p:style>
-        <p:txBody>
-          <a:bodyPr rtlCol="0" anchor="ctr"/>
-          <a:lstStyle/>
-          <a:p>
-            <a:r>
-              <a:rPr lang="en-US" sz="2000" cap="small" dirty="0">
-                <a:solidFill>
-                  <a:schemeClr val="tx1"/>
-                </a:solidFill>
-                <a:effectLst>
-                  <a:glow rad="38100">
-                    <a:schemeClr val="bg1">
-                      <a:lumMod val="50000"/>
-                      <a:lumOff val="50000"/>
-                      <a:alpha val="20000"/>
-                    </a:schemeClr>
-                  </a:glow>
-                  <a:outerShdw blurRad="44450" dist="12700" dir="13860000" algn="tl" rotWithShape="0">
-                    <a:srgbClr val="000000">
-                      <a:alpha val="20000"/>
-                    </a:srgbClr>
-                  </a:outerShdw>
-                </a:effectLst>
-              </a:rPr>
-              <a:t>Objective</a:t>
-            </a:r>
-            <a:endParaRPr lang="en-US" sz="1600" cap="small" dirty="0">
-              <a:solidFill>
-                <a:schemeClr val="tx1"/>
-              </a:solidFill>
-              <a:effectLst>
-                <a:glow rad="38100">
-                  <a:schemeClr val="bg1">
-                    <a:lumMod val="50000"/>
-                    <a:lumOff val="50000"/>
-                    <a:alpha val="20000"/>
-                  </a:schemeClr>
-                </a:glow>
-                <a:outerShdw blurRad="44450" dist="12700" dir="13860000" algn="tl" rotWithShape="0">
-                  <a:srgbClr val="000000">
-                    <a:alpha val="20000"/>
-                  </a:srgbClr>
-                </a:outerShdw>
-              </a:effectLst>
-            </a:endParaRPr>
-          </a:p>
-          <a:p>
-            <a:r>
-              <a:rPr lang="en-US" sz="1600" cap="small" dirty="0">
-                <a:solidFill>
-                  <a:schemeClr val="tx1"/>
-                </a:solidFill>
-                <a:effectLst>
-                  <a:glow rad="38100">
-                    <a:schemeClr val="bg1">
-                      <a:lumMod val="50000"/>
-                      <a:lumOff val="50000"/>
-                      <a:alpha val="20000"/>
-                    </a:schemeClr>
-                  </a:glow>
-                  <a:outerShdw blurRad="44450" dist="12700" dir="13860000" algn="tl" rotWithShape="0">
-                    <a:srgbClr val="000000">
-                      <a:alpha val="20000"/>
-                    </a:srgbClr>
-                  </a:outerShdw>
-                </a:effectLst>
-              </a:rPr>
-              <a:t>Improve reliability, preventing the agent from being overconfident. Giving it the ability to reject a prompt\ ask based on the users query.</a:t>
-            </a:r>
-          </a:p>
-          <a:p>
-            <a:pPr marL="285750" indent="-285750">
-              <a:buFont typeface="Arial" panose="020B0604020202020204" pitchFamily="34" charset="0"/>
-              <a:buChar char="•"/>
-            </a:pPr>
-            <a:r>
-              <a:rPr lang="en-US" sz="1600" cap="small" dirty="0">
-                <a:solidFill>
-                  <a:schemeClr val="tx1"/>
-                </a:solidFill>
-                <a:effectLst>
-                  <a:glow rad="38100">
-                    <a:schemeClr val="bg1">
-                      <a:lumMod val="50000"/>
-                      <a:lumOff val="50000"/>
-                      <a:alpha val="20000"/>
-                    </a:schemeClr>
-                  </a:glow>
-                  <a:outerShdw blurRad="44450" dist="12700" dir="13860000" algn="tl" rotWithShape="0">
-                    <a:srgbClr val="000000">
-                      <a:alpha val="20000"/>
-                    </a:srgbClr>
-                  </a:outerShdw>
-                </a:effectLst>
-              </a:rPr>
-              <a:t>Detect not </a:t>
-            </a:r>
-            <a:r>
-              <a:rPr lang="en-US" sz="1600" cap="small" dirty="0" err="1">
-                <a:solidFill>
-                  <a:schemeClr val="tx1"/>
-                </a:solidFill>
-                <a:effectLst>
-                  <a:glow rad="38100">
-                    <a:schemeClr val="bg1">
-                      <a:lumMod val="50000"/>
-                      <a:lumOff val="50000"/>
-                      <a:alpha val="20000"/>
-                    </a:schemeClr>
-                  </a:glow>
-                  <a:outerShdw blurRad="44450" dist="12700" dir="13860000" algn="tl" rotWithShape="0">
-                    <a:srgbClr val="000000">
-                      <a:alpha val="20000"/>
-                    </a:srgbClr>
-                  </a:outerShdw>
-                </a:effectLst>
-              </a:rPr>
-              <a:t>can_answer</a:t>
-            </a:r>
-            <a:r>
-              <a:rPr lang="en-US" sz="1600" cap="small" dirty="0">
-                <a:solidFill>
-                  <a:schemeClr val="tx1"/>
-                </a:solidFill>
-                <a:effectLst>
-                  <a:glow rad="38100">
-                    <a:schemeClr val="bg1">
-                      <a:lumMod val="50000"/>
-                      <a:lumOff val="50000"/>
-                      <a:alpha val="20000"/>
-                    </a:schemeClr>
-                  </a:glow>
-                  <a:outerShdw blurRad="44450" dist="12700" dir="13860000" algn="tl" rotWithShape="0">
-                    <a:srgbClr val="000000">
-                      <a:alpha val="20000"/>
-                    </a:srgbClr>
-                  </a:outerShdw>
-                </a:effectLst>
-              </a:rPr>
-              <a:t> </a:t>
-            </a:r>
-          </a:p>
-          <a:p>
-            <a:pPr marL="285750" indent="-285750">
-              <a:buFont typeface="Arial" panose="020B0604020202020204" pitchFamily="34" charset="0"/>
-              <a:buChar char="•"/>
-            </a:pPr>
-            <a:r>
-              <a:rPr lang="en-US" sz="1600" cap="small" dirty="0">
-                <a:solidFill>
-                  <a:schemeClr val="tx1"/>
-                </a:solidFill>
-                <a:effectLst>
-                  <a:glow rad="38100">
-                    <a:schemeClr val="bg1">
-                      <a:lumMod val="50000"/>
-                      <a:lumOff val="50000"/>
-                      <a:alpha val="20000"/>
-                    </a:schemeClr>
-                  </a:glow>
-                  <a:outerShdw blurRad="44450" dist="12700" dir="13860000" algn="tl" rotWithShape="0">
-                    <a:srgbClr val="000000">
-                      <a:alpha val="20000"/>
-                    </a:srgbClr>
-                  </a:outerShdw>
-                </a:effectLst>
-              </a:rPr>
-              <a:t>Optimize resource allocation</a:t>
-            </a:r>
-          </a:p>
-          <a:p>
-            <a:pPr marL="285750" indent="-285750">
-              <a:buFont typeface="Arial" panose="020B0604020202020204" pitchFamily="34" charset="0"/>
-              <a:buChar char="•"/>
-            </a:pPr>
-            <a:r>
-              <a:rPr lang="en-US" sz="1600" cap="small" dirty="0">
-                <a:solidFill>
-                  <a:schemeClr val="tx1"/>
-                </a:solidFill>
-                <a:effectLst>
-                  <a:glow rad="38100">
-                    <a:schemeClr val="bg1">
-                      <a:lumMod val="50000"/>
-                      <a:lumOff val="50000"/>
-                      <a:alpha val="20000"/>
-                    </a:schemeClr>
-                  </a:glow>
-                  <a:outerShdw blurRad="44450" dist="12700" dir="13860000" algn="tl" rotWithShape="0">
-                    <a:srgbClr val="000000">
-                      <a:alpha val="20000"/>
-                    </a:srgbClr>
-                  </a:outerShdw>
-                </a:effectLst>
-              </a:rPr>
-              <a:t>Enhance users trust</a:t>
-            </a:r>
-          </a:p>
-        </p:txBody>
-      </p:sp>
-      <p:sp>
-        <p:nvSpPr>
-          <p:cNvPr id="10" name="Rectangle: Rounded Corners 9">
-            <a:extLst>
-              <a:ext uri="{FF2B5EF4-FFF2-40B4-BE49-F238E27FC236}">
-                <a16:creationId xmlns:a16="http://schemas.microsoft.com/office/drawing/2014/main" id="{62F7CECE-EC22-5C21-CDB1-04D0DB7169CE}"/>
-              </a:ext>
-            </a:extLst>
-          </p:cNvPr>
-          <p:cNvSpPr/>
-          <p:nvPr/>
-        </p:nvSpPr>
-        <p:spPr>
-          <a:xfrm>
-            <a:off x="6230350" y="2263365"/>
-            <a:ext cx="4130512" cy="3475858"/>
-          </a:xfrm>
-          <a:prstGeom prst="roundRect">
-            <a:avLst/>
-          </a:prstGeom>
-          <a:solidFill>
-            <a:srgbClr val="000000">
-              <a:alpha val="30196"/>
-            </a:srgbClr>
-          </a:solidFill>
-          <a:ln>
-            <a:noFill/>
-          </a:ln>
-        </p:spPr>
-        <p:style>
-          <a:lnRef idx="2">
-            <a:schemeClr val="accent1">
-              <a:shade val="15000"/>
-            </a:schemeClr>
-          </a:lnRef>
-          <a:fillRef idx="1">
-            <a:schemeClr val="accent1"/>
-          </a:fillRef>
-          <a:effectRef idx="0">
-            <a:schemeClr val="accent1"/>
-          </a:effectRef>
-          <a:fontRef idx="minor">
-            <a:schemeClr val="lt1"/>
-          </a:fontRef>
-        </p:style>
-        <p:txBody>
-          <a:bodyPr rtlCol="0" anchor="ctr"/>
-          <a:lstStyle/>
-          <a:p>
-            <a:r>
-              <a:rPr lang="en-US" sz="2000" cap="small" dirty="0">
-                <a:solidFill>
-                  <a:schemeClr val="tx1"/>
-                </a:solidFill>
-                <a:effectLst>
-                  <a:glow rad="38100">
-                    <a:schemeClr val="bg1">
-                      <a:lumMod val="50000"/>
-                      <a:lumOff val="50000"/>
-                      <a:alpha val="20000"/>
-                    </a:schemeClr>
-                  </a:glow>
-                  <a:outerShdw blurRad="44450" dist="12700" dir="13860000" algn="tl" rotWithShape="0">
-                    <a:srgbClr val="000000">
-                      <a:alpha val="20000"/>
-                    </a:srgbClr>
-                  </a:outerShdw>
-                </a:effectLst>
-              </a:rPr>
-              <a:t>Dataset </a:t>
-            </a:r>
-          </a:p>
-          <a:p>
-            <a:r>
-              <a:rPr lang="en-US" sz="1600" cap="small" dirty="0">
-                <a:solidFill>
-                  <a:schemeClr val="tx1"/>
-                </a:solidFill>
-                <a:effectLst>
-                  <a:glow rad="38100">
-                    <a:schemeClr val="bg1">
-                      <a:lumMod val="50000"/>
-                      <a:lumOff val="50000"/>
-                      <a:alpha val="20000"/>
-                    </a:schemeClr>
-                  </a:glow>
-                  <a:outerShdw blurRad="44450" dist="12700" dir="13860000" algn="tl" rotWithShape="0">
-                    <a:srgbClr val="000000">
-                      <a:alpha val="20000"/>
-                    </a:srgbClr>
-                  </a:outerShdw>
-                </a:effectLst>
-              </a:rPr>
-              <a:t>A collection of over 3.4k task records measuring how compatible a prompt is to the domains of the AI</a:t>
-            </a:r>
-          </a:p>
-          <a:p>
-            <a:pPr marL="285750" indent="-285750">
-              <a:buFont typeface="Arial" panose="020B0604020202020204" pitchFamily="34" charset="0"/>
-              <a:buChar char="•"/>
-            </a:pPr>
-            <a:r>
-              <a:rPr lang="en-US" sz="1600" cap="small" dirty="0">
-                <a:solidFill>
-                  <a:schemeClr val="tx1"/>
-                </a:solidFill>
-                <a:effectLst>
-                  <a:glow rad="38100">
-                    <a:schemeClr val="bg1">
-                      <a:lumMod val="50000"/>
-                      <a:lumOff val="50000"/>
-                      <a:alpha val="20000"/>
-                    </a:schemeClr>
-                  </a:glow>
-                  <a:outerShdw blurRad="44450" dist="12700" dir="13860000" algn="tl" rotWithShape="0">
-                    <a:srgbClr val="000000">
-                      <a:alpha val="20000"/>
-                    </a:srgbClr>
-                  </a:outerShdw>
-                </a:effectLst>
-              </a:rPr>
-              <a:t>Binary results</a:t>
-            </a:r>
-          </a:p>
-          <a:p>
-            <a:pPr marL="285750" indent="-285750">
-              <a:buFont typeface="Arial" panose="020B0604020202020204" pitchFamily="34" charset="0"/>
-              <a:buChar char="•"/>
-            </a:pPr>
-            <a:r>
-              <a:rPr lang="en-US" sz="1600" cap="small" dirty="0">
-                <a:solidFill>
-                  <a:schemeClr val="tx1"/>
-                </a:solidFill>
-                <a:effectLst>
-                  <a:glow rad="38100">
-                    <a:schemeClr val="bg1">
-                      <a:lumMod val="50000"/>
-                      <a:lumOff val="50000"/>
-                      <a:alpha val="20000"/>
-                    </a:schemeClr>
-                  </a:glow>
-                  <a:outerShdw blurRad="44450" dist="12700" dir="13860000" algn="tl" rotWithShape="0">
-                    <a:srgbClr val="000000">
-                      <a:alpha val="20000"/>
-                    </a:srgbClr>
-                  </a:outerShdw>
-                </a:effectLst>
-              </a:rPr>
-              <a:t>Benchmark being 64% live  tasks</a:t>
-            </a:r>
-          </a:p>
-          <a:p>
-            <a:pPr marL="285750" indent="-285750">
-              <a:buFont typeface="Arial" panose="020B0604020202020204" pitchFamily="34" charset="0"/>
-              <a:buChar char="•"/>
-            </a:pPr>
-            <a:r>
-              <a:rPr lang="en-US" sz="1600" cap="small" dirty="0">
-                <a:solidFill>
-                  <a:schemeClr val="tx1"/>
-                </a:solidFill>
-                <a:effectLst>
-                  <a:glow rad="38100">
-                    <a:schemeClr val="bg1">
-                      <a:lumMod val="50000"/>
-                      <a:lumOff val="50000"/>
-                      <a:alpha val="20000"/>
-                    </a:schemeClr>
-                  </a:glow>
-                  <a:outerShdw blurRad="44450" dist="12700" dir="13860000" algn="tl" rotWithShape="0">
-                    <a:srgbClr val="000000">
-                      <a:alpha val="20000"/>
-                    </a:srgbClr>
-                  </a:outerShdw>
-                </a:effectLst>
-              </a:rPr>
-              <a:t>Dominant domain: gender\other</a:t>
-            </a:r>
-            <a:endParaRPr lang="en-GB" sz="1600" cap="small" dirty="0">
-              <a:solidFill>
-                <a:schemeClr val="tx1"/>
-              </a:solidFill>
-              <a:effectLst>
-                <a:glow rad="38100">
-                  <a:schemeClr val="bg1">
-                    <a:lumMod val="50000"/>
-                    <a:lumOff val="50000"/>
-                    <a:alpha val="20000"/>
-                  </a:schemeClr>
-                </a:glow>
-                <a:outerShdw blurRad="44450" dist="12700" dir="13860000" algn="tl" rotWithShape="0">
-                  <a:srgbClr val="000000">
-                    <a:alpha val="20000"/>
-                  </a:srgbClr>
-                </a:outerShdw>
-              </a:effectLst>
-            </a:endParaRPr>
           </a:p>
         </p:txBody>
       </p:sp>
@@ -7021,10 +6694,10 @@
           <a:lstStyle/>
           <a:p>
             <a:r>
-              <a:rPr lang="en-US" sz="4000" b="1" dirty="0"/>
+              <a:rPr lang="en-US" sz="4000"/>
               <a:t>Refusal insights</a:t>
             </a:r>
-            <a:endParaRPr lang="en-GB" sz="4000" b="1" dirty="0"/>
+            <a:endParaRPr lang="en-GB" sz="4000"/>
           </a:p>
         </p:txBody>
       </p:sp>
@@ -7764,62 +7437,27 @@
           <a:p>
             <a:r>
               <a:rPr lang="en-US" sz="1600" dirty="0"/>
-              <a:t>The more </a:t>
-            </a:r>
-            <a:r>
-              <a:rPr lang="en-US" sz="1600" b="1" dirty="0"/>
-              <a:t>complex</a:t>
-            </a:r>
+              <a:t>The more complex the prompt the more prone it is to be “can answer”</a:t>
+            </a:r>
+          </a:p>
+          <a:p>
             <a:r>
               <a:rPr lang="en-US" sz="1600" dirty="0"/>
-              <a:t> the prompt the more prone it is to be “can answer”</a:t>
-            </a:r>
-          </a:p>
-          <a:p>
-            <a:r>
-              <a:rPr lang="en-GB" sz="1600" b="1" dirty="0" err="1"/>
-              <a:t>aspect_coverage_ratio</a:t>
-            </a:r>
-            <a:r>
-              <a:rPr lang="en-GB" sz="1600" dirty="0"/>
-              <a:t> is our strongest indicator if a query is answerable . Rejected queries rarely match tool’s aspects</a:t>
-            </a:r>
-            <a:endParaRPr lang="en-US" sz="1600" dirty="0"/>
-          </a:p>
-          <a:p>
-            <a:r>
-              <a:rPr lang="en-GB" sz="1600" b="1" dirty="0"/>
-              <a:t>Data Noise</a:t>
-            </a:r>
-            <a:r>
-              <a:rPr lang="he-IL" sz="1600" b="1" dirty="0"/>
-              <a:t> </a:t>
-            </a:r>
-            <a:r>
-              <a:rPr lang="en-GB" sz="1600" dirty="0"/>
-              <a:t>In the "Other" domain</a:t>
-            </a:r>
-            <a:r>
-              <a:rPr lang="he-IL" sz="1600" dirty="0"/>
-              <a:t>  </a:t>
-            </a:r>
-            <a:r>
-              <a:rPr lang="en-US" sz="1600" dirty="0" err="1"/>
-              <a:t>tehres</a:t>
-            </a:r>
+              <a:t>There are more answerable cases</a:t>
+            </a:r>
+          </a:p>
+          <a:p>
             <a:r>
               <a:rPr lang="en-US" sz="1600" dirty="0"/>
-              <a:t> no </a:t>
-            </a:r>
-            <a:r>
-              <a:rPr lang="en-US" sz="1600" dirty="0" err="1"/>
-              <a:t>predicrting</a:t>
-            </a:r>
-            <a:r>
-              <a:rPr lang="en-US" sz="1600" dirty="0"/>
-              <a:t> which aspects will turn us to refusal</a:t>
-            </a:r>
-            <a:endParaRPr lang="en-US" sz="1600" b="1" dirty="0"/>
+              <a:t>Enhance users trust</a:t>
+            </a:r>
+          </a:p>
+          <a:p>
+            <a:pPr marL="0" indent="0">
+              <a:buFont typeface="Arial"/>
+              <a:buNone/>
+            </a:pPr>
+            <a:endParaRPr lang="en-GB" dirty="0"/>
           </a:p>
         </p:txBody>
       </p:sp>
@@ -7827,4784 +7465,6 @@
     <p:extLst>
       <p:ext uri="{BB962C8B-B14F-4D97-AF65-F5344CB8AC3E}">
         <p14:creationId xmlns:p14="http://schemas.microsoft.com/office/powerpoint/2010/main" val="2667558626"/>
-      </p:ext>
-    </p:extLst>
-  </p:cSld>
-  <p:clrMapOvr>
-    <a:masterClrMapping/>
-  </p:clrMapOvr>
-</p:sld>
-</file>
-
-<file path=ppt/slides/slide4.xml><?xml version="1.0" encoding="utf-8"?>
-<p:sld xmlns:a="http://schemas.openxmlformats.org/drawingml/2006/main" xmlns:r="http://schemas.openxmlformats.org/officeDocument/2006/relationships" xmlns:p="http://schemas.openxmlformats.org/presentationml/2006/main">
-  <p:cSld>
-    <p:bg>
-      <p:bgPr>
-        <a:blipFill rotWithShape="1">
-          <a:blip r:embed="rId2">
-            <a:duotone>
-              <a:schemeClr val="bg2">
-                <a:shade val="28000"/>
-                <a:satMod val="94000"/>
-                <a:lumMod val="20000"/>
-              </a:schemeClr>
-              <a:schemeClr val="bg2">
-                <a:tint val="94000"/>
-                <a:shade val="84000"/>
-                <a:satMod val="148000"/>
-                <a:lumMod val="114000"/>
-              </a:schemeClr>
-            </a:duotone>
-          </a:blip>
-          <a:stretch/>
-        </a:blipFill>
-        <a:effectLst/>
-      </p:bgPr>
-    </p:bg>
-    <p:spTree>
-      <p:nvGrpSpPr>
-        <p:cNvPr id="1" name=""/>
-        <p:cNvGrpSpPr/>
-        <p:nvPr/>
-      </p:nvGrpSpPr>
-      <p:grpSpPr>
-        <a:xfrm>
-          <a:off x="0" y="0"/>
-          <a:ext cx="0" cy="0"/>
-          <a:chOff x="0" y="0"/>
-          <a:chExt cx="0" cy="0"/>
-        </a:xfrm>
-      </p:grpSpPr>
-      <p:sp>
-        <p:nvSpPr>
-          <p:cNvPr id="8" name="Rectangle 7">
-            <a:extLst>
-              <a:ext uri="{FF2B5EF4-FFF2-40B4-BE49-F238E27FC236}">
-                <a16:creationId xmlns:a16="http://schemas.microsoft.com/office/drawing/2014/main" id="{C138CEDA-0C7F-4A0D-9089-CD1E70084AEC}"/>
-              </a:ext>
-              <a:ext uri="{C183D7F6-B498-43B3-948B-1728B52AA6E4}">
-                <adec:decorative xmlns:adec="http://schemas.microsoft.com/office/drawing/2017/decorative" val="1"/>
-              </a:ext>
-            </a:extLst>
-          </p:cNvPr>
-          <p:cNvSpPr>
-            <a:spLocks noGrp="1" noRot="1" noChangeAspect="1" noMove="1" noResize="1" noEditPoints="1" noAdjustHandles="1" noChangeArrowheads="1" noChangeShapeType="1" noTextEdit="1"/>
-          </p:cNvSpPr>
-          <p:nvPr>
-            <p:extLst>
-              <p:ext uri="{386F3935-93C4-4BCD-93E2-E3B085C9AB24}">
-                <p16:designElem xmlns:p16="http://schemas.microsoft.com/office/powerpoint/2015/main" val="1"/>
-              </p:ext>
-            </p:extLst>
-          </p:nvPr>
-        </p:nvSpPr>
-        <p:spPr>
-          <a:xfrm>
-            <a:off x="0" y="-1"/>
-            <a:ext cx="12192000" cy="4515367"/>
-          </a:xfrm>
-          <a:prstGeom prst="rect">
-            <a:avLst/>
-          </a:prstGeom>
-          <a:solidFill>
-            <a:schemeClr val="bg2"/>
-          </a:solidFill>
-          <a:ln>
-            <a:noFill/>
-          </a:ln>
-          <a:effectLst/>
-        </p:spPr>
-        <p:style>
-          <a:lnRef idx="2">
-            <a:schemeClr val="accent1">
-              <a:shade val="50000"/>
-            </a:schemeClr>
-          </a:lnRef>
-          <a:fillRef idx="1">
-            <a:schemeClr val="accent1"/>
-          </a:fillRef>
-          <a:effectRef idx="0">
-            <a:schemeClr val="accent1"/>
-          </a:effectRef>
-          <a:fontRef idx="minor">
-            <a:schemeClr val="lt1"/>
-          </a:fontRef>
-        </p:style>
-        <p:txBody>
-          <a:bodyPr rtlCol="0" anchor="ctr"/>
-          <a:lstStyle/>
-          <a:p>
-            <a:pPr algn="ctr"/>
-            <a:endParaRPr lang="en-US"/>
-          </a:p>
-        </p:txBody>
-      </p:sp>
-      <p:sp>
-        <p:nvSpPr>
-          <p:cNvPr id="10" name="Rectangle 9">
-            <a:extLst>
-              <a:ext uri="{FF2B5EF4-FFF2-40B4-BE49-F238E27FC236}">
-                <a16:creationId xmlns:a16="http://schemas.microsoft.com/office/drawing/2014/main" id="{44B231A0-304E-4E17-94F9-17C05B0E7FB3}"/>
-              </a:ext>
-              <a:ext uri="{C183D7F6-B498-43B3-948B-1728B52AA6E4}">
-                <adec:decorative xmlns:adec="http://schemas.microsoft.com/office/drawing/2017/decorative" val="1"/>
-              </a:ext>
-            </a:extLst>
-          </p:cNvPr>
-          <p:cNvSpPr>
-            <a:spLocks noGrp="1" noRot="1" noChangeAspect="1" noMove="1" noResize="1" noEditPoints="1" noAdjustHandles="1" noChangeArrowheads="1" noChangeShapeType="1" noTextEdit="1"/>
-          </p:cNvSpPr>
-          <p:nvPr>
-            <p:extLst>
-              <p:ext uri="{386F3935-93C4-4BCD-93E2-E3B085C9AB24}">
-                <p16:designElem xmlns:p16="http://schemas.microsoft.com/office/powerpoint/2015/main" val="1"/>
-              </p:ext>
-            </p:extLst>
-          </p:nvPr>
-        </p:nvSpPr>
-        <p:spPr>
-          <a:xfrm rot="10800000">
-            <a:off x="0" y="4048959"/>
-            <a:ext cx="12192000" cy="466406"/>
-          </a:xfrm>
-          <a:prstGeom prst="rect">
-            <a:avLst/>
-          </a:prstGeom>
-          <a:gradFill>
-            <a:gsLst>
-              <a:gs pos="0">
-                <a:schemeClr val="bg1">
-                  <a:alpha val="50000"/>
-                </a:schemeClr>
-              </a:gs>
-              <a:gs pos="100000">
-                <a:srgbClr val="363D46">
-                  <a:lumMod val="75000"/>
-                  <a:alpha val="0"/>
-                </a:srgbClr>
-              </a:gs>
-            </a:gsLst>
-            <a:lin ang="5400000" scaled="0"/>
-          </a:gradFill>
-          <a:ln>
-            <a:noFill/>
-          </a:ln>
-          <a:effectLst/>
-        </p:spPr>
-        <p:style>
-          <a:lnRef idx="2">
-            <a:schemeClr val="accent1">
-              <a:shade val="50000"/>
-            </a:schemeClr>
-          </a:lnRef>
-          <a:fillRef idx="1">
-            <a:schemeClr val="accent1"/>
-          </a:fillRef>
-          <a:effectRef idx="0">
-            <a:schemeClr val="accent1"/>
-          </a:effectRef>
-          <a:fontRef idx="minor">
-            <a:schemeClr val="lt1"/>
-          </a:fontRef>
-        </p:style>
-        <p:txBody>
-          <a:bodyPr rot="0" spcFirstLastPara="0" vertOverflow="overflow" horzOverflow="overflow" vert="horz" wrap="square" lIns="91440" tIns="45720" rIns="91440" bIns="45720" numCol="1" spcCol="0" rtlCol="0" fromWordArt="0" anchor="ctr" anchorCtr="0" forceAA="0" compatLnSpc="1">
-            <a:prstTxWarp prst="textNoShape">
-              <a:avLst/>
-            </a:prstTxWarp>
-            <a:noAutofit/>
-          </a:bodyPr>
-          <a:lstStyle/>
-          <a:p>
-            <a:pPr algn="ctr"/>
-            <a:endParaRPr lang="en-US"/>
-          </a:p>
-        </p:txBody>
-      </p:sp>
-      <p:cxnSp>
-        <p:nvCxnSpPr>
-          <p:cNvPr id="12" name="Straight Connector 11">
-            <a:extLst>
-              <a:ext uri="{FF2B5EF4-FFF2-40B4-BE49-F238E27FC236}">
-                <a16:creationId xmlns:a16="http://schemas.microsoft.com/office/drawing/2014/main" id="{183525D7-E53C-447D-B126-70F2345DB1CE}"/>
-              </a:ext>
-              <a:ext uri="{C183D7F6-B498-43B3-948B-1728B52AA6E4}">
-                <adec:decorative xmlns:adec="http://schemas.microsoft.com/office/drawing/2017/decorative" val="1"/>
-              </a:ext>
-            </a:extLst>
-          </p:cNvPr>
-          <p:cNvCxnSpPr>
-            <a:cxnSpLocks noGrp="1" noRot="1" noChangeAspect="1" noMove="1" noResize="1" noEditPoints="1" noAdjustHandles="1" noChangeArrowheads="1" noChangeShapeType="1"/>
-          </p:cNvCxnSpPr>
-          <p:nvPr>
-            <p:extLst>
-              <p:ext uri="{386F3935-93C4-4BCD-93E2-E3B085C9AB24}">
-                <p16:designElem xmlns:p16="http://schemas.microsoft.com/office/powerpoint/2015/main" val="1"/>
-              </p:ext>
-            </p:extLst>
-          </p:nvPr>
-        </p:nvCxnSpPr>
-        <p:spPr>
-          <a:xfrm>
-            <a:off x="7296" y="4515366"/>
-            <a:ext cx="12192000" cy="0"/>
-          </a:xfrm>
-          <a:prstGeom prst="line">
-            <a:avLst/>
-          </a:prstGeom>
-          <a:solidFill>
-            <a:srgbClr val="FFFFFF"/>
-          </a:solidFill>
-          <a:ln w="38100" cap="flat">
-            <a:gradFill flip="none" rotWithShape="1">
-              <a:gsLst>
-                <a:gs pos="0">
-                  <a:srgbClr val="363D46"/>
-                </a:gs>
-                <a:gs pos="100000">
-                  <a:srgbClr val="363D46">
-                    <a:lumMod val="75000"/>
-                  </a:srgbClr>
-                </a:gs>
-              </a:gsLst>
-              <a:lin ang="5400000" scaled="0"/>
-              <a:tileRect/>
-            </a:gradFill>
-            <a:miter lim="800000"/>
-          </a:ln>
-          <a:effectLst/>
-        </p:spPr>
-        <p:style>
-          <a:lnRef idx="2">
-            <a:schemeClr val="accent1">
-              <a:shade val="50000"/>
-            </a:schemeClr>
-          </a:lnRef>
-          <a:fillRef idx="1">
-            <a:schemeClr val="accent1"/>
-          </a:fillRef>
-          <a:effectRef idx="0">
-            <a:schemeClr val="accent1"/>
-          </a:effectRef>
-          <a:fontRef idx="minor">
-            <a:schemeClr val="lt1"/>
-          </a:fontRef>
-        </p:style>
-      </p:cxnSp>
-      <p:pic>
-        <p:nvPicPr>
-          <p:cNvPr id="11" name="Picture 10">
-            <a:extLst>
-              <a:ext uri="{FF2B5EF4-FFF2-40B4-BE49-F238E27FC236}">
-                <a16:creationId xmlns:a16="http://schemas.microsoft.com/office/drawing/2014/main" id="{C666C0D5-A20D-A808-31C1-49AE10B9E8F7}"/>
-              </a:ext>
-            </a:extLst>
-          </p:cNvPr>
-          <p:cNvPicPr>
-            <a:picLocks noChangeAspect="1"/>
-          </p:cNvPicPr>
-          <p:nvPr/>
-        </p:nvPicPr>
-        <p:blipFill>
-          <a:blip r:embed="rId3"/>
-          <a:stretch>
-            <a:fillRect/>
-          </a:stretch>
-        </p:blipFill>
-        <p:spPr>
-          <a:xfrm>
-            <a:off x="354888" y="88527"/>
-            <a:ext cx="6481073" cy="4193635"/>
-          </a:xfrm>
-          <a:prstGeom prst="rect">
-            <a:avLst/>
-          </a:prstGeom>
-        </p:spPr>
-      </p:pic>
-      <p:graphicFrame>
-        <p:nvGraphicFramePr>
-          <p:cNvPr id="15" name="Table 14">
-            <a:extLst>
-              <a:ext uri="{FF2B5EF4-FFF2-40B4-BE49-F238E27FC236}">
-                <a16:creationId xmlns:a16="http://schemas.microsoft.com/office/drawing/2014/main" id="{578B9D7C-579C-1856-8E39-20DB4A0E8378}"/>
-              </a:ext>
-            </a:extLst>
-          </p:cNvPr>
-          <p:cNvGraphicFramePr>
-            <a:graphicFrameLocks noGrp="1"/>
-          </p:cNvGraphicFramePr>
-          <p:nvPr>
-            <p:extLst>
-              <p:ext uri="{D42A27DB-BD31-4B8C-83A1-F6EECF244321}">
-                <p14:modId xmlns:p14="http://schemas.microsoft.com/office/powerpoint/2010/main" val="2690427375"/>
-              </p:ext>
-            </p:extLst>
-          </p:nvPr>
-        </p:nvGraphicFramePr>
-        <p:xfrm>
-          <a:off x="7190848" y="606543"/>
-          <a:ext cx="4811860" cy="1966973"/>
-        </p:xfrm>
-        <a:graphic>
-          <a:graphicData uri="http://schemas.openxmlformats.org/drawingml/2006/table">
-            <a:tbl>
-              <a:tblPr firstRow="1" bandRow="1">
-                <a:tableStyleId>{0660B408-B3CF-4A94-85FC-2B1E0A45F4A2}</a:tableStyleId>
-              </a:tblPr>
-              <a:tblGrid>
-                <a:gridCol w="369449">
-                  <a:extLst>
-                    <a:ext uri="{9D8B030D-6E8A-4147-A177-3AD203B41FA5}">
-                      <a16:colId xmlns:a16="http://schemas.microsoft.com/office/drawing/2014/main" val="3703669866"/>
-                    </a:ext>
-                  </a:extLst>
-                </a:gridCol>
-                <a:gridCol w="1093509">
-                  <a:extLst>
-                    <a:ext uri="{9D8B030D-6E8A-4147-A177-3AD203B41FA5}">
-                      <a16:colId xmlns:a16="http://schemas.microsoft.com/office/drawing/2014/main" val="704636194"/>
-                    </a:ext>
-                  </a:extLst>
-                </a:gridCol>
-                <a:gridCol w="782425">
-                  <a:extLst>
-                    <a:ext uri="{9D8B030D-6E8A-4147-A177-3AD203B41FA5}">
-                      <a16:colId xmlns:a16="http://schemas.microsoft.com/office/drawing/2014/main" val="2444234231"/>
-                    </a:ext>
-                  </a:extLst>
-                </a:gridCol>
-                <a:gridCol w="823449">
-                  <a:extLst>
-                    <a:ext uri="{9D8B030D-6E8A-4147-A177-3AD203B41FA5}">
-                      <a16:colId xmlns:a16="http://schemas.microsoft.com/office/drawing/2014/main" val="132631571"/>
-                    </a:ext>
-                  </a:extLst>
-                </a:gridCol>
-                <a:gridCol w="871514">
-                  <a:extLst>
-                    <a:ext uri="{9D8B030D-6E8A-4147-A177-3AD203B41FA5}">
-                      <a16:colId xmlns:a16="http://schemas.microsoft.com/office/drawing/2014/main" val="116675373"/>
-                    </a:ext>
-                  </a:extLst>
-                </a:gridCol>
-                <a:gridCol w="871514">
-                  <a:extLst>
-                    <a:ext uri="{9D8B030D-6E8A-4147-A177-3AD203B41FA5}">
-                      <a16:colId xmlns:a16="http://schemas.microsoft.com/office/drawing/2014/main" val="2052860894"/>
-                    </a:ext>
-                  </a:extLst>
-                </a:gridCol>
-              </a:tblGrid>
-              <a:tr h="348517">
-                <a:tc>
-                  <a:txBody>
-                    <a:bodyPr/>
-                    <a:lstStyle/>
-                    <a:p>
-                      <a:pPr algn="r" fontAlgn="ctr">
-                        <a:buNone/>
-                      </a:pPr>
-                      <a:endParaRPr lang="en-GB" sz="1050">
-                        <a:effectLst/>
-                      </a:endParaRPr>
-                    </a:p>
-                  </a:txBody>
-                  <a:tcPr marL="60960" marR="60960" marT="30480" marB="30480" anchor="ctr"/>
-                </a:tc>
-                <a:tc>
-                  <a:txBody>
-                    <a:bodyPr/>
-                    <a:lstStyle/>
-                    <a:p>
-                      <a:pPr algn="r" fontAlgn="ctr">
-                        <a:buNone/>
-                      </a:pPr>
-                      <a:r>
-                        <a:rPr lang="en-GB" sz="1050" dirty="0">
-                          <a:effectLst/>
-                        </a:rPr>
-                        <a:t>Model</a:t>
-                      </a:r>
-                    </a:p>
-                  </a:txBody>
-                  <a:tcPr marL="60960" marR="60960" marT="30480" marB="30480" anchor="ctr"/>
-                </a:tc>
-                <a:tc>
-                  <a:txBody>
-                    <a:bodyPr/>
-                    <a:lstStyle/>
-                    <a:p>
-                      <a:pPr algn="ctr" fontAlgn="ctr">
-                        <a:buNone/>
-                      </a:pPr>
-                      <a:r>
-                        <a:rPr lang="en-GB" sz="1050" dirty="0">
-                          <a:effectLst/>
-                        </a:rPr>
-                        <a:t>Accuracy</a:t>
-                      </a:r>
-                    </a:p>
-                  </a:txBody>
-                  <a:tcPr marL="60960" marR="60960" marT="30480" marB="30480" anchor="ctr"/>
-                </a:tc>
-                <a:tc>
-                  <a:txBody>
-                    <a:bodyPr/>
-                    <a:lstStyle/>
-                    <a:p>
-                      <a:pPr algn="ctr" fontAlgn="ctr">
-                        <a:buNone/>
-                      </a:pPr>
-                      <a:r>
-                        <a:rPr lang="en-GB" sz="1050" dirty="0">
-                          <a:effectLst/>
-                        </a:rPr>
-                        <a:t>Precision</a:t>
-                      </a:r>
-                    </a:p>
-                  </a:txBody>
-                  <a:tcPr marL="60960" marR="60960" marT="30480" marB="30480" anchor="ctr"/>
-                </a:tc>
-                <a:tc>
-                  <a:txBody>
-                    <a:bodyPr/>
-                    <a:lstStyle/>
-                    <a:p>
-                      <a:pPr algn="ctr" fontAlgn="ctr">
-                        <a:buNone/>
-                      </a:pPr>
-                      <a:r>
-                        <a:rPr lang="en-GB" sz="1050" dirty="0">
-                          <a:effectLst/>
-                        </a:rPr>
-                        <a:t>Recall</a:t>
-                      </a:r>
-                    </a:p>
-                  </a:txBody>
-                  <a:tcPr marL="60960" marR="60960" marT="30480" marB="30480" anchor="ctr"/>
-                </a:tc>
-                <a:tc>
-                  <a:txBody>
-                    <a:bodyPr/>
-                    <a:lstStyle/>
-                    <a:p>
-                      <a:pPr algn="ctr" fontAlgn="ctr">
-                        <a:buNone/>
-                      </a:pPr>
-                      <a:r>
-                        <a:rPr lang="en-GB" sz="1050" dirty="0">
-                          <a:effectLst/>
-                        </a:rPr>
-                        <a:t>F1-Score</a:t>
-                      </a:r>
-                    </a:p>
-                  </a:txBody>
-                  <a:tcPr marL="60960" marR="60960" marT="30480" marB="30480" anchor="ctr"/>
-                </a:tc>
-                <a:extLst>
-                  <a:ext uri="{0D108BD9-81ED-4DB2-BD59-A6C34878D82A}">
-                    <a16:rowId xmlns:a16="http://schemas.microsoft.com/office/drawing/2014/main" val="1655261947"/>
-                  </a:ext>
-                </a:extLst>
-              </a:tr>
-              <a:tr h="404614">
-                <a:tc>
-                  <a:txBody>
-                    <a:bodyPr/>
-                    <a:lstStyle/>
-                    <a:p>
-                      <a:pPr algn="ctr" fontAlgn="ctr">
-                        <a:buNone/>
-                      </a:pPr>
-                      <a:r>
-                        <a:rPr lang="en-GB" sz="1050" b="0" dirty="0">
-                          <a:effectLst/>
-                        </a:rPr>
-                        <a:t>0</a:t>
-                      </a:r>
-                    </a:p>
-                  </a:txBody>
-                  <a:tcPr marL="60960" marR="60960" marT="30480" marB="30480" anchor="ctr"/>
-                </a:tc>
-                <a:tc>
-                  <a:txBody>
-                    <a:bodyPr/>
-                    <a:lstStyle/>
-                    <a:p>
-                      <a:pPr>
-                        <a:buNone/>
-                      </a:pPr>
-                      <a:r>
-                        <a:rPr lang="en-GB" sz="1050" dirty="0">
-                          <a:effectLst/>
-                        </a:rPr>
-                        <a:t>Baseline</a:t>
-                      </a:r>
-                    </a:p>
-                  </a:txBody>
-                  <a:tcPr marL="60960" marR="60960" marT="30480" marB="30480" anchor="ctr"/>
-                </a:tc>
-                <a:tc>
-                  <a:txBody>
-                    <a:bodyPr/>
-                    <a:lstStyle/>
-                    <a:p>
-                      <a:pPr algn="ctr">
-                        <a:buNone/>
-                      </a:pPr>
-                      <a:r>
-                        <a:rPr lang="en-GB" sz="1050" b="1" dirty="0">
-                          <a:effectLst/>
-                        </a:rPr>
-                        <a:t>67.7 %</a:t>
-                      </a:r>
-                    </a:p>
-                  </a:txBody>
-                  <a:tcPr marL="60960" marR="60960" marT="30480" marB="30480" anchor="ctr"/>
-                </a:tc>
-                <a:tc>
-                  <a:txBody>
-                    <a:bodyPr/>
-                    <a:lstStyle/>
-                    <a:p>
-                      <a:pPr>
-                        <a:buNone/>
-                      </a:pPr>
-                      <a:r>
-                        <a:rPr lang="en-GB" sz="1050" dirty="0">
-                          <a:effectLst/>
-                        </a:rPr>
-                        <a:t>0.677143</a:t>
-                      </a:r>
-                    </a:p>
-                  </a:txBody>
-                  <a:tcPr marL="60960" marR="60960" marT="30480" marB="30480" anchor="ctr"/>
-                </a:tc>
-                <a:tc>
-                  <a:txBody>
-                    <a:bodyPr/>
-                    <a:lstStyle/>
-                    <a:p>
-                      <a:pPr>
-                        <a:buNone/>
-                      </a:pPr>
-                      <a:r>
-                        <a:rPr lang="en-GB" sz="1050">
-                          <a:effectLst/>
-                        </a:rPr>
-                        <a:t>1.000000</a:t>
-                      </a:r>
-                    </a:p>
-                  </a:txBody>
-                  <a:tcPr marL="60960" marR="60960" marT="30480" marB="30480" anchor="ctr"/>
-                </a:tc>
-                <a:tc>
-                  <a:txBody>
-                    <a:bodyPr/>
-                    <a:lstStyle/>
-                    <a:p>
-                      <a:pPr>
-                        <a:buNone/>
-                      </a:pPr>
-                      <a:r>
-                        <a:rPr lang="en-GB" sz="1050" dirty="0">
-                          <a:effectLst/>
-                        </a:rPr>
-                        <a:t>0.807496</a:t>
-                      </a:r>
-                    </a:p>
-                  </a:txBody>
-                  <a:tcPr marL="60960" marR="60960" marT="30480" marB="30480" anchor="ctr"/>
-                </a:tc>
-                <a:extLst>
-                  <a:ext uri="{0D108BD9-81ED-4DB2-BD59-A6C34878D82A}">
-                    <a16:rowId xmlns:a16="http://schemas.microsoft.com/office/drawing/2014/main" val="1307038135"/>
-                  </a:ext>
-                </a:extLst>
-              </a:tr>
-              <a:tr h="404614">
-                <a:tc>
-                  <a:txBody>
-                    <a:bodyPr/>
-                    <a:lstStyle/>
-                    <a:p>
-                      <a:pPr algn="ctr" fontAlgn="ctr">
-                        <a:buNone/>
-                      </a:pPr>
-                      <a:r>
-                        <a:rPr lang="en-GB" sz="1050" b="0" dirty="0">
-                          <a:effectLst/>
-                        </a:rPr>
-                        <a:t>1</a:t>
-                      </a:r>
-                    </a:p>
-                  </a:txBody>
-                  <a:tcPr marL="60960" marR="60960" marT="30480" marB="30480" anchor="ctr"/>
-                </a:tc>
-                <a:tc>
-                  <a:txBody>
-                    <a:bodyPr/>
-                    <a:lstStyle/>
-                    <a:p>
-                      <a:pPr>
-                        <a:buNone/>
-                      </a:pPr>
-                      <a:r>
-                        <a:rPr lang="en-GB" sz="1050" dirty="0">
-                          <a:effectLst/>
-                        </a:rPr>
-                        <a:t>KNN</a:t>
-                      </a:r>
-                    </a:p>
-                  </a:txBody>
-                  <a:tcPr marL="60960" marR="60960" marT="30480" marB="30480" anchor="ctr"/>
-                </a:tc>
-                <a:tc>
-                  <a:txBody>
-                    <a:bodyPr/>
-                    <a:lstStyle/>
-                    <a:p>
-                      <a:pPr algn="ctr">
-                        <a:buNone/>
-                      </a:pPr>
-                      <a:r>
-                        <a:rPr lang="en-GB" sz="1050" b="1" dirty="0">
-                          <a:effectLst/>
-                        </a:rPr>
-                        <a:t>82.8 %</a:t>
-                      </a:r>
-                    </a:p>
-                  </a:txBody>
-                  <a:tcPr marL="60960" marR="60960" marT="30480" marB="30480" anchor="ctr"/>
-                </a:tc>
-                <a:tc>
-                  <a:txBody>
-                    <a:bodyPr/>
-                    <a:lstStyle/>
-                    <a:p>
-                      <a:pPr>
-                        <a:buNone/>
-                      </a:pPr>
-                      <a:r>
-                        <a:rPr lang="en-GB" sz="1050" dirty="0">
-                          <a:effectLst/>
-                        </a:rPr>
-                        <a:t>0.841699</a:t>
-                      </a:r>
-                    </a:p>
-                  </a:txBody>
-                  <a:tcPr marL="60960" marR="60960" marT="30480" marB="30480" anchor="ctr"/>
-                </a:tc>
-                <a:tc>
-                  <a:txBody>
-                    <a:bodyPr/>
-                    <a:lstStyle/>
-                    <a:p>
-                      <a:pPr>
-                        <a:buNone/>
-                      </a:pPr>
-                      <a:r>
-                        <a:rPr lang="en-GB" sz="1050" dirty="0">
-                          <a:effectLst/>
-                        </a:rPr>
-                        <a:t>0.919831</a:t>
-                      </a:r>
-                    </a:p>
-                  </a:txBody>
-                  <a:tcPr marL="60960" marR="60960" marT="30480" marB="30480" anchor="ctr"/>
-                </a:tc>
-                <a:tc>
-                  <a:txBody>
-                    <a:bodyPr/>
-                    <a:lstStyle/>
-                    <a:p>
-                      <a:pPr>
-                        <a:buNone/>
-                      </a:pPr>
-                      <a:r>
-                        <a:rPr lang="en-GB" sz="1050" dirty="0">
-                          <a:effectLst/>
-                        </a:rPr>
-                        <a:t>0.879032</a:t>
-                      </a:r>
-                    </a:p>
-                  </a:txBody>
-                  <a:tcPr marL="60960" marR="60960" marT="30480" marB="30480" anchor="ctr"/>
-                </a:tc>
-                <a:extLst>
-                  <a:ext uri="{0D108BD9-81ED-4DB2-BD59-A6C34878D82A}">
-                    <a16:rowId xmlns:a16="http://schemas.microsoft.com/office/drawing/2014/main" val="3604233230"/>
-                  </a:ext>
-                </a:extLst>
-              </a:tr>
-              <a:tr h="404614">
-                <a:tc>
-                  <a:txBody>
-                    <a:bodyPr/>
-                    <a:lstStyle/>
-                    <a:p>
-                      <a:pPr algn="ctr" fontAlgn="ctr">
-                        <a:buNone/>
-                      </a:pPr>
-                      <a:r>
-                        <a:rPr lang="en-GB" sz="1050" b="0" dirty="0">
-                          <a:effectLst/>
-                        </a:rPr>
-                        <a:t>2</a:t>
-                      </a:r>
-                    </a:p>
-                  </a:txBody>
-                  <a:tcPr marL="60960" marR="60960" marT="30480" marB="30480" anchor="ctr"/>
-                </a:tc>
-                <a:tc>
-                  <a:txBody>
-                    <a:bodyPr/>
-                    <a:lstStyle/>
-                    <a:p>
-                      <a:pPr>
-                        <a:buNone/>
-                      </a:pPr>
-                      <a:r>
-                        <a:rPr lang="en-GB" sz="1050" dirty="0">
-                          <a:effectLst/>
-                        </a:rPr>
-                        <a:t>AdaBoost</a:t>
-                      </a:r>
-                    </a:p>
-                  </a:txBody>
-                  <a:tcPr marL="60960" marR="60960" marT="30480" marB="30480" anchor="ctr"/>
-                </a:tc>
-                <a:tc>
-                  <a:txBody>
-                    <a:bodyPr/>
-                    <a:lstStyle/>
-                    <a:p>
-                      <a:pPr algn="ctr">
-                        <a:buNone/>
-                      </a:pPr>
-                      <a:r>
-                        <a:rPr lang="en-GB" sz="1050" b="1" dirty="0">
-                          <a:effectLst/>
-                        </a:rPr>
-                        <a:t>87.7 %</a:t>
-                      </a:r>
-                    </a:p>
-                  </a:txBody>
-                  <a:tcPr marL="60960" marR="60960" marT="30480" marB="30480" anchor="ctr"/>
-                </a:tc>
-                <a:tc>
-                  <a:txBody>
-                    <a:bodyPr/>
-                    <a:lstStyle/>
-                    <a:p>
-                      <a:pPr>
-                        <a:buNone/>
-                      </a:pPr>
-                      <a:r>
-                        <a:rPr lang="en-GB" sz="1050">
-                          <a:effectLst/>
-                        </a:rPr>
-                        <a:t>0.867424</a:t>
-                      </a:r>
-                    </a:p>
-                  </a:txBody>
-                  <a:tcPr marL="60960" marR="60960" marT="30480" marB="30480" anchor="ctr"/>
-                </a:tc>
-                <a:tc>
-                  <a:txBody>
-                    <a:bodyPr/>
-                    <a:lstStyle/>
-                    <a:p>
-                      <a:pPr>
-                        <a:buNone/>
-                      </a:pPr>
-                      <a:r>
-                        <a:rPr lang="en-GB" sz="1050" dirty="0">
-                          <a:effectLst/>
-                        </a:rPr>
-                        <a:t>0.966245</a:t>
-                      </a:r>
-                    </a:p>
-                  </a:txBody>
-                  <a:tcPr marL="60960" marR="60960" marT="30480" marB="30480" anchor="ctr"/>
-                </a:tc>
-                <a:tc>
-                  <a:txBody>
-                    <a:bodyPr/>
-                    <a:lstStyle/>
-                    <a:p>
-                      <a:pPr>
-                        <a:buNone/>
-                      </a:pPr>
-                      <a:r>
-                        <a:rPr lang="en-GB" sz="1050" dirty="0">
-                          <a:effectLst/>
-                        </a:rPr>
-                        <a:t>0.914172</a:t>
-                      </a:r>
-                    </a:p>
-                  </a:txBody>
-                  <a:tcPr marL="60960" marR="60960" marT="30480" marB="30480" anchor="ctr"/>
-                </a:tc>
-                <a:extLst>
-                  <a:ext uri="{0D108BD9-81ED-4DB2-BD59-A6C34878D82A}">
-                    <a16:rowId xmlns:a16="http://schemas.microsoft.com/office/drawing/2014/main" val="2970700451"/>
-                  </a:ext>
-                </a:extLst>
-              </a:tr>
-              <a:tr h="404614">
-                <a:tc>
-                  <a:txBody>
-                    <a:bodyPr/>
-                    <a:lstStyle/>
-                    <a:p>
-                      <a:pPr algn="ctr" fontAlgn="ctr">
-                        <a:buNone/>
-                      </a:pPr>
-                      <a:r>
-                        <a:rPr lang="en-GB" sz="1050" b="0" dirty="0">
-                          <a:effectLst/>
-                        </a:rPr>
-                        <a:t>3</a:t>
-                      </a:r>
-                    </a:p>
-                  </a:txBody>
-                  <a:tcPr marL="60960" marR="60960" marT="30480" marB="30480" anchor="ctr"/>
-                </a:tc>
-                <a:tc>
-                  <a:txBody>
-                    <a:bodyPr/>
-                    <a:lstStyle/>
-                    <a:p>
-                      <a:pPr>
-                        <a:buNone/>
-                      </a:pPr>
-                      <a:r>
-                        <a:rPr lang="en-GB" sz="1050" dirty="0">
-                          <a:effectLst/>
-                        </a:rPr>
-                        <a:t>Random Forest</a:t>
-                      </a:r>
-                    </a:p>
-                  </a:txBody>
-                  <a:tcPr marL="60960" marR="60960" marT="30480" marB="30480" anchor="ctr"/>
-                </a:tc>
-                <a:tc>
-                  <a:txBody>
-                    <a:bodyPr/>
-                    <a:lstStyle/>
-                    <a:p>
-                      <a:pPr algn="ctr">
-                        <a:buNone/>
-                      </a:pPr>
-                      <a:r>
-                        <a:rPr lang="en-GB" sz="1050" b="1" dirty="0">
-                          <a:effectLst/>
-                        </a:rPr>
-                        <a:t>90.8 %</a:t>
-                      </a:r>
-                    </a:p>
-                  </a:txBody>
-                  <a:tcPr marL="60960" marR="60960" marT="30480" marB="30480" anchor="ctr"/>
-                </a:tc>
-                <a:tc>
-                  <a:txBody>
-                    <a:bodyPr/>
-                    <a:lstStyle/>
-                    <a:p>
-                      <a:pPr>
-                        <a:buNone/>
-                      </a:pPr>
-                      <a:r>
-                        <a:rPr lang="en-GB" sz="1050">
-                          <a:effectLst/>
-                        </a:rPr>
-                        <a:t>0.908367</a:t>
-                      </a:r>
-                    </a:p>
-                  </a:txBody>
-                  <a:tcPr marL="60960" marR="60960" marT="30480" marB="30480" anchor="ctr"/>
-                </a:tc>
-                <a:tc>
-                  <a:txBody>
-                    <a:bodyPr/>
-                    <a:lstStyle/>
-                    <a:p>
-                      <a:pPr>
-                        <a:buNone/>
-                      </a:pPr>
-                      <a:r>
-                        <a:rPr lang="en-GB" sz="1050">
-                          <a:effectLst/>
-                        </a:rPr>
-                        <a:t>0.962025</a:t>
-                      </a:r>
-                    </a:p>
-                  </a:txBody>
-                  <a:tcPr marL="60960" marR="60960" marT="30480" marB="30480" anchor="ctr"/>
-                </a:tc>
-                <a:tc>
-                  <a:txBody>
-                    <a:bodyPr/>
-                    <a:lstStyle/>
-                    <a:p>
-                      <a:pPr>
-                        <a:buNone/>
-                      </a:pPr>
-                      <a:r>
-                        <a:rPr lang="en-GB" sz="1050" dirty="0">
-                          <a:effectLst/>
-                        </a:rPr>
-                        <a:t>0.934426</a:t>
-                      </a:r>
-                    </a:p>
-                  </a:txBody>
-                  <a:tcPr marL="60960" marR="60960" marT="30480" marB="30480" anchor="ctr"/>
-                </a:tc>
-                <a:extLst>
-                  <a:ext uri="{0D108BD9-81ED-4DB2-BD59-A6C34878D82A}">
-                    <a16:rowId xmlns:a16="http://schemas.microsoft.com/office/drawing/2014/main" val="1804940953"/>
-                  </a:ext>
-                </a:extLst>
-              </a:tr>
-            </a:tbl>
-          </a:graphicData>
-        </a:graphic>
-      </p:graphicFrame>
-      <p:sp>
-        <p:nvSpPr>
-          <p:cNvPr id="16" name="Content Placeholder 2">
-            <a:extLst>
-              <a:ext uri="{FF2B5EF4-FFF2-40B4-BE49-F238E27FC236}">
-                <a16:creationId xmlns:a16="http://schemas.microsoft.com/office/drawing/2014/main" id="{3E043C1C-8E12-ACF5-345B-3DF394C27A98}"/>
-              </a:ext>
-            </a:extLst>
-          </p:cNvPr>
-          <p:cNvSpPr txBox="1">
-            <a:spLocks/>
-          </p:cNvSpPr>
-          <p:nvPr/>
-        </p:nvSpPr>
-        <p:spPr>
-          <a:xfrm>
-            <a:off x="5961947" y="4888705"/>
-            <a:ext cx="5218240" cy="1362745"/>
-          </a:xfrm>
-          <a:prstGeom prst="rect">
-            <a:avLst/>
-          </a:prstGeom>
-        </p:spPr>
-        <p:txBody>
-          <a:bodyPr vert="horz" lIns="91440" tIns="45720" rIns="91440" bIns="45720" rtlCol="0" anchor="ctr">
-            <a:normAutofit/>
-          </a:bodyPr>
-          <a:lstStyle>
-            <a:lvl1pPr marL="285750" indent="-285750" algn="l" defTabSz="457200" rtl="0" eaLnBrk="1" latinLnBrk="0" hangingPunct="1">
-              <a:spcBef>
-                <a:spcPct val="20000"/>
-              </a:spcBef>
-              <a:spcAft>
-                <a:spcPts val="600"/>
-              </a:spcAft>
-              <a:buClr>
-                <a:schemeClr val="tx1"/>
-              </a:buClr>
-              <a:buSzPct val="100000"/>
-              <a:buFont typeface="Arial"/>
-              <a:buChar char="•"/>
-              <a:defRPr sz="2000" kern="1200" cap="small">
-                <a:gradFill flip="none" rotWithShape="1">
-                  <a:gsLst>
-                    <a:gs pos="0">
-                      <a:schemeClr val="tx1"/>
-                    </a:gs>
-                    <a:gs pos="100000">
-                      <a:schemeClr val="tx1">
-                        <a:lumMod val="75000"/>
-                      </a:schemeClr>
-                    </a:gs>
-                  </a:gsLst>
-                  <a:lin ang="5580000" scaled="0"/>
-                  <a:tileRect/>
-                </a:gradFill>
-                <a:effectLst>
-                  <a:glow rad="38100">
-                    <a:schemeClr val="bg1">
-                      <a:lumMod val="50000"/>
-                      <a:lumOff val="50000"/>
-                      <a:alpha val="20000"/>
-                    </a:schemeClr>
-                  </a:glow>
-                  <a:outerShdw blurRad="44450" dist="12700" dir="13860000" algn="tl" rotWithShape="0">
-                    <a:srgbClr val="000000">
-                      <a:alpha val="20000"/>
-                    </a:srgbClr>
-                  </a:outerShdw>
-                </a:effectLst>
-                <a:latin typeface="+mn-lt"/>
-                <a:ea typeface="+mn-ea"/>
-                <a:cs typeface="+mn-cs"/>
-              </a:defRPr>
-            </a:lvl1pPr>
-            <a:lvl2pPr marL="742950" indent="-285750" algn="l" defTabSz="457200" rtl="0" eaLnBrk="1" latinLnBrk="0" hangingPunct="1">
-              <a:spcBef>
-                <a:spcPct val="20000"/>
-              </a:spcBef>
-              <a:spcAft>
-                <a:spcPts val="600"/>
-              </a:spcAft>
-              <a:buClr>
-                <a:schemeClr val="tx1"/>
-              </a:buClr>
-              <a:buSzPct val="100000"/>
-              <a:buFont typeface="Arial"/>
-              <a:buChar char="•"/>
-              <a:defRPr sz="1800" kern="1200" cap="small">
-                <a:gradFill flip="none" rotWithShape="1">
-                  <a:gsLst>
-                    <a:gs pos="0">
-                      <a:schemeClr val="tx1"/>
-                    </a:gs>
-                    <a:gs pos="100000">
-                      <a:schemeClr val="tx1">
-                        <a:lumMod val="75000"/>
-                      </a:schemeClr>
-                    </a:gs>
-                  </a:gsLst>
-                  <a:lin ang="5580000" scaled="0"/>
-                  <a:tileRect/>
-                </a:gradFill>
-                <a:effectLst>
-                  <a:glow rad="38100">
-                    <a:schemeClr val="bg1">
-                      <a:lumMod val="50000"/>
-                      <a:lumOff val="50000"/>
-                      <a:alpha val="20000"/>
-                    </a:schemeClr>
-                  </a:glow>
-                  <a:outerShdw blurRad="44450" dist="12700" dir="13860000" algn="tl" rotWithShape="0">
-                    <a:srgbClr val="000000">
-                      <a:alpha val="20000"/>
-                    </a:srgbClr>
-                  </a:outerShdw>
-                </a:effectLst>
-                <a:latin typeface="+mn-lt"/>
-                <a:ea typeface="+mn-ea"/>
-                <a:cs typeface="+mn-cs"/>
-              </a:defRPr>
-            </a:lvl2pPr>
-            <a:lvl3pPr marL="1200150" indent="-285750" algn="l" defTabSz="457200" rtl="0" eaLnBrk="1" latinLnBrk="0" hangingPunct="1">
-              <a:spcBef>
-                <a:spcPct val="20000"/>
-              </a:spcBef>
-              <a:spcAft>
-                <a:spcPts val="600"/>
-              </a:spcAft>
-              <a:buClr>
-                <a:schemeClr val="tx1"/>
-              </a:buClr>
-              <a:buSzPct val="100000"/>
-              <a:buFont typeface="Arial"/>
-              <a:buChar char="•"/>
-              <a:defRPr sz="1600" kern="1200" cap="small">
-                <a:gradFill flip="none" rotWithShape="1">
-                  <a:gsLst>
-                    <a:gs pos="0">
-                      <a:schemeClr val="tx1"/>
-                    </a:gs>
-                    <a:gs pos="100000">
-                      <a:schemeClr val="tx1">
-                        <a:lumMod val="75000"/>
-                      </a:schemeClr>
-                    </a:gs>
-                  </a:gsLst>
-                  <a:lin ang="5580000" scaled="0"/>
-                  <a:tileRect/>
-                </a:gradFill>
-                <a:effectLst>
-                  <a:glow rad="38100">
-                    <a:schemeClr val="bg1">
-                      <a:lumMod val="50000"/>
-                      <a:lumOff val="50000"/>
-                      <a:alpha val="20000"/>
-                    </a:schemeClr>
-                  </a:glow>
-                  <a:outerShdw blurRad="44450" dist="12700" dir="13860000" algn="tl" rotWithShape="0">
-                    <a:srgbClr val="000000">
-                      <a:alpha val="20000"/>
-                    </a:srgbClr>
-                  </a:outerShdw>
-                </a:effectLst>
-                <a:latin typeface="+mn-lt"/>
-                <a:ea typeface="+mn-ea"/>
-                <a:cs typeface="+mn-cs"/>
-              </a:defRPr>
-            </a:lvl3pPr>
-            <a:lvl4pPr marL="1543050" indent="-171450" algn="l" defTabSz="457200" rtl="0" eaLnBrk="1" latinLnBrk="0" hangingPunct="1">
-              <a:spcBef>
-                <a:spcPct val="20000"/>
-              </a:spcBef>
-              <a:spcAft>
-                <a:spcPts val="600"/>
-              </a:spcAft>
-              <a:buClr>
-                <a:schemeClr val="tx1"/>
-              </a:buClr>
-              <a:buSzPct val="100000"/>
-              <a:buFont typeface="Arial"/>
-              <a:buChar char="•"/>
-              <a:defRPr sz="1400" kern="1200" cap="small">
-                <a:gradFill flip="none" rotWithShape="1">
-                  <a:gsLst>
-                    <a:gs pos="0">
-                      <a:schemeClr val="tx1"/>
-                    </a:gs>
-                    <a:gs pos="100000">
-                      <a:schemeClr val="tx1">
-                        <a:lumMod val="75000"/>
-                      </a:schemeClr>
-                    </a:gs>
-                  </a:gsLst>
-                  <a:lin ang="5580000" scaled="0"/>
-                  <a:tileRect/>
-                </a:gradFill>
-                <a:effectLst>
-                  <a:glow rad="38100">
-                    <a:schemeClr val="bg1">
-                      <a:lumMod val="50000"/>
-                      <a:lumOff val="50000"/>
-                      <a:alpha val="20000"/>
-                    </a:schemeClr>
-                  </a:glow>
-                  <a:outerShdw blurRad="44450" dist="12700" dir="13860000" algn="tl" rotWithShape="0">
-                    <a:srgbClr val="000000">
-                      <a:alpha val="20000"/>
-                    </a:srgbClr>
-                  </a:outerShdw>
-                </a:effectLst>
-                <a:latin typeface="+mn-lt"/>
-                <a:ea typeface="+mn-ea"/>
-                <a:cs typeface="+mn-cs"/>
-              </a:defRPr>
-            </a:lvl4pPr>
-            <a:lvl5pPr marL="2000250" indent="-171450" algn="l" defTabSz="457200" rtl="0" eaLnBrk="1" latinLnBrk="0" hangingPunct="1">
-              <a:spcBef>
-                <a:spcPct val="20000"/>
-              </a:spcBef>
-              <a:spcAft>
-                <a:spcPts val="600"/>
-              </a:spcAft>
-              <a:buClr>
-                <a:schemeClr val="tx1"/>
-              </a:buClr>
-              <a:buSzPct val="100000"/>
-              <a:buFont typeface="Arial"/>
-              <a:buChar char="•"/>
-              <a:defRPr sz="1400" kern="1200" cap="small">
-                <a:gradFill flip="none" rotWithShape="1">
-                  <a:gsLst>
-                    <a:gs pos="0">
-                      <a:schemeClr val="tx1"/>
-                    </a:gs>
-                    <a:gs pos="100000">
-                      <a:schemeClr val="tx1">
-                        <a:lumMod val="75000"/>
-                      </a:schemeClr>
-                    </a:gs>
-                  </a:gsLst>
-                  <a:lin ang="5580000" scaled="0"/>
-                  <a:tileRect/>
-                </a:gradFill>
-                <a:effectLst>
-                  <a:glow rad="38100">
-                    <a:schemeClr val="bg1">
-                      <a:lumMod val="50000"/>
-                      <a:lumOff val="50000"/>
-                      <a:alpha val="20000"/>
-                    </a:schemeClr>
-                  </a:glow>
-                  <a:outerShdw blurRad="44450" dist="12700" dir="13860000" algn="tl" rotWithShape="0">
-                    <a:srgbClr val="000000">
-                      <a:alpha val="20000"/>
-                    </a:srgbClr>
-                  </a:outerShdw>
-                </a:effectLst>
-                <a:latin typeface="+mn-lt"/>
-                <a:ea typeface="+mn-ea"/>
-                <a:cs typeface="+mn-cs"/>
-              </a:defRPr>
-            </a:lvl5pPr>
-            <a:lvl6pPr marL="2514600" indent="-228600" algn="l" defTabSz="457200" rtl="0" eaLnBrk="1" latinLnBrk="0" hangingPunct="1">
-              <a:spcBef>
-                <a:spcPct val="20000"/>
-              </a:spcBef>
-              <a:spcAft>
-                <a:spcPts val="600"/>
-              </a:spcAft>
-              <a:buClr>
-                <a:schemeClr val="tx1"/>
-              </a:buClr>
-              <a:buSzPct val="100000"/>
-              <a:buFont typeface="Arial"/>
-              <a:buChar char="•"/>
-              <a:defRPr sz="1200" kern="1200" cap="small">
-                <a:gradFill flip="none" rotWithShape="1">
-                  <a:gsLst>
-                    <a:gs pos="0">
-                      <a:schemeClr val="tx1"/>
-                    </a:gs>
-                    <a:gs pos="100000">
-                      <a:schemeClr val="tx1">
-                        <a:lumMod val="75000"/>
-                      </a:schemeClr>
-                    </a:gs>
-                  </a:gsLst>
-                  <a:lin ang="5580000" scaled="0"/>
-                  <a:tileRect/>
-                </a:gradFill>
-                <a:effectLst>
-                  <a:glow rad="38100">
-                    <a:schemeClr val="bg1">
-                      <a:lumMod val="50000"/>
-                      <a:lumOff val="50000"/>
-                      <a:alpha val="20000"/>
-                    </a:schemeClr>
-                  </a:glow>
-                  <a:outerShdw blurRad="44450" dist="12700" dir="13860000" algn="tl" rotWithShape="0">
-                    <a:srgbClr val="000000">
-                      <a:alpha val="20000"/>
-                    </a:srgbClr>
-                  </a:outerShdw>
-                </a:effectLst>
-                <a:latin typeface="+mn-lt"/>
-                <a:ea typeface="+mn-ea"/>
-                <a:cs typeface="+mn-cs"/>
-              </a:defRPr>
-            </a:lvl6pPr>
-            <a:lvl7pPr marL="2971800" indent="-228600" algn="l" defTabSz="457200" rtl="0" eaLnBrk="1" latinLnBrk="0" hangingPunct="1">
-              <a:spcBef>
-                <a:spcPct val="20000"/>
-              </a:spcBef>
-              <a:spcAft>
-                <a:spcPts val="600"/>
-              </a:spcAft>
-              <a:buClr>
-                <a:schemeClr val="tx1"/>
-              </a:buClr>
-              <a:buSzPct val="100000"/>
-              <a:buFont typeface="Arial"/>
-              <a:buChar char="•"/>
-              <a:defRPr sz="1200" kern="1200" cap="small">
-                <a:gradFill flip="none" rotWithShape="1">
-                  <a:gsLst>
-                    <a:gs pos="0">
-                      <a:schemeClr val="tx1"/>
-                    </a:gs>
-                    <a:gs pos="100000">
-                      <a:schemeClr val="tx1">
-                        <a:lumMod val="75000"/>
-                      </a:schemeClr>
-                    </a:gs>
-                  </a:gsLst>
-                  <a:lin ang="5580000" scaled="0"/>
-                  <a:tileRect/>
-                </a:gradFill>
-                <a:effectLst>
-                  <a:glow rad="38100">
-                    <a:schemeClr val="bg1">
-                      <a:lumMod val="50000"/>
-                      <a:lumOff val="50000"/>
-                      <a:alpha val="20000"/>
-                    </a:schemeClr>
-                  </a:glow>
-                  <a:outerShdw blurRad="44450" dist="12700" dir="13860000" algn="tl" rotWithShape="0">
-                    <a:srgbClr val="000000">
-                      <a:alpha val="20000"/>
-                    </a:srgbClr>
-                  </a:outerShdw>
-                </a:effectLst>
-                <a:latin typeface="+mn-lt"/>
-                <a:ea typeface="+mn-ea"/>
-                <a:cs typeface="+mn-cs"/>
-              </a:defRPr>
-            </a:lvl7pPr>
-            <a:lvl8pPr marL="3429000" indent="-228600" algn="l" defTabSz="457200" rtl="0" eaLnBrk="1" latinLnBrk="0" hangingPunct="1">
-              <a:spcBef>
-                <a:spcPct val="20000"/>
-              </a:spcBef>
-              <a:spcAft>
-                <a:spcPts val="600"/>
-              </a:spcAft>
-              <a:buClr>
-                <a:schemeClr val="tx1"/>
-              </a:buClr>
-              <a:buSzPct val="100000"/>
-              <a:buFont typeface="Arial"/>
-              <a:buChar char="•"/>
-              <a:defRPr sz="1200" kern="1200" cap="small">
-                <a:gradFill flip="none" rotWithShape="1">
-                  <a:gsLst>
-                    <a:gs pos="0">
-                      <a:schemeClr val="tx1"/>
-                    </a:gs>
-                    <a:gs pos="100000">
-                      <a:schemeClr val="tx1">
-                        <a:lumMod val="75000"/>
-                      </a:schemeClr>
-                    </a:gs>
-                  </a:gsLst>
-                  <a:lin ang="5580000" scaled="0"/>
-                  <a:tileRect/>
-                </a:gradFill>
-                <a:effectLst>
-                  <a:glow rad="38100">
-                    <a:schemeClr val="bg1">
-                      <a:lumMod val="50000"/>
-                      <a:lumOff val="50000"/>
-                      <a:alpha val="20000"/>
-                    </a:schemeClr>
-                  </a:glow>
-                  <a:outerShdw blurRad="44450" dist="12700" dir="13860000" algn="tl" rotWithShape="0">
-                    <a:srgbClr val="000000">
-                      <a:alpha val="20000"/>
-                    </a:srgbClr>
-                  </a:outerShdw>
-                </a:effectLst>
-                <a:latin typeface="+mn-lt"/>
-                <a:ea typeface="+mn-ea"/>
-                <a:cs typeface="+mn-cs"/>
-              </a:defRPr>
-            </a:lvl8pPr>
-            <a:lvl9pPr marL="3886200" indent="-228600" algn="l" defTabSz="457200" rtl="0" eaLnBrk="1" latinLnBrk="0" hangingPunct="1">
-              <a:spcBef>
-                <a:spcPct val="20000"/>
-              </a:spcBef>
-              <a:spcAft>
-                <a:spcPts val="600"/>
-              </a:spcAft>
-              <a:buClr>
-                <a:schemeClr val="tx1"/>
-              </a:buClr>
-              <a:buSzPct val="100000"/>
-              <a:buFont typeface="Arial"/>
-              <a:buChar char="•"/>
-              <a:defRPr sz="1200" kern="1200" cap="small">
-                <a:gradFill flip="none" rotWithShape="1">
-                  <a:gsLst>
-                    <a:gs pos="0">
-                      <a:schemeClr val="tx1"/>
-                    </a:gs>
-                    <a:gs pos="100000">
-                      <a:schemeClr val="tx1">
-                        <a:lumMod val="75000"/>
-                      </a:schemeClr>
-                    </a:gs>
-                  </a:gsLst>
-                  <a:lin ang="5580000" scaled="0"/>
-                  <a:tileRect/>
-                </a:gradFill>
-                <a:effectLst>
-                  <a:glow rad="38100">
-                    <a:schemeClr val="bg1">
-                      <a:lumMod val="50000"/>
-                      <a:lumOff val="50000"/>
-                      <a:alpha val="20000"/>
-                    </a:schemeClr>
-                  </a:glow>
-                  <a:outerShdw blurRad="44450" dist="12700" dir="13860000" algn="tl" rotWithShape="0">
-                    <a:srgbClr val="000000">
-                      <a:alpha val="20000"/>
-                    </a:srgbClr>
-                  </a:outerShdw>
-                </a:effectLst>
-                <a:latin typeface="+mn-lt"/>
-                <a:ea typeface="+mn-ea"/>
-                <a:cs typeface="+mn-cs"/>
-              </a:defRPr>
-            </a:lvl9pPr>
-          </a:lstStyle>
-          <a:p>
-            <a:pPr marL="0" indent="0">
-              <a:buNone/>
-            </a:pPr>
-            <a:r>
-              <a:rPr lang="en-US" dirty="0" err="1"/>
-              <a:t>Hyperparamater</a:t>
-            </a:r>
-            <a:r>
-              <a:rPr lang="en-US" dirty="0"/>
-              <a:t> tuning shows 200 estimators and 20 depth as the optimal shape for handling the features</a:t>
-            </a:r>
-          </a:p>
-          <a:p>
-            <a:pPr marL="0" indent="0">
-              <a:buNone/>
-            </a:pPr>
-            <a:endParaRPr lang="en-US" dirty="0"/>
-          </a:p>
-        </p:txBody>
-      </p:sp>
-      <p:sp>
-        <p:nvSpPr>
-          <p:cNvPr id="17" name="Content Placeholder 2">
-            <a:extLst>
-              <a:ext uri="{FF2B5EF4-FFF2-40B4-BE49-F238E27FC236}">
-                <a16:creationId xmlns:a16="http://schemas.microsoft.com/office/drawing/2014/main" id="{F2AC65F2-DC52-A04E-A9B4-6BB8E49303AC}"/>
-              </a:ext>
-            </a:extLst>
-          </p:cNvPr>
-          <p:cNvSpPr txBox="1">
-            <a:spLocks/>
-          </p:cNvSpPr>
-          <p:nvPr/>
-        </p:nvSpPr>
-        <p:spPr>
-          <a:xfrm>
-            <a:off x="484976" y="4888706"/>
-            <a:ext cx="5218240" cy="1210436"/>
-          </a:xfrm>
-          <a:prstGeom prst="rect">
-            <a:avLst/>
-          </a:prstGeom>
-        </p:spPr>
-        <p:txBody>
-          <a:bodyPr vert="horz" lIns="91440" tIns="45720" rIns="91440" bIns="45720" rtlCol="0" anchor="ctr">
-            <a:normAutofit lnSpcReduction="10000"/>
-          </a:bodyPr>
-          <a:lstStyle>
-            <a:lvl1pPr marL="285750" indent="-285750" algn="l" defTabSz="457200" rtl="0" eaLnBrk="1" latinLnBrk="0" hangingPunct="1">
-              <a:spcBef>
-                <a:spcPct val="20000"/>
-              </a:spcBef>
-              <a:spcAft>
-                <a:spcPts val="600"/>
-              </a:spcAft>
-              <a:buClr>
-                <a:schemeClr val="tx1"/>
-              </a:buClr>
-              <a:buSzPct val="100000"/>
-              <a:buFont typeface="Arial"/>
-              <a:buChar char="•"/>
-              <a:defRPr sz="2000" kern="1200" cap="small">
-                <a:gradFill flip="none" rotWithShape="1">
-                  <a:gsLst>
-                    <a:gs pos="0">
-                      <a:schemeClr val="tx1"/>
-                    </a:gs>
-                    <a:gs pos="100000">
-                      <a:schemeClr val="tx1">
-                        <a:lumMod val="75000"/>
-                      </a:schemeClr>
-                    </a:gs>
-                  </a:gsLst>
-                  <a:lin ang="5580000" scaled="0"/>
-                  <a:tileRect/>
-                </a:gradFill>
-                <a:effectLst>
-                  <a:glow rad="38100">
-                    <a:schemeClr val="bg1">
-                      <a:lumMod val="50000"/>
-                      <a:lumOff val="50000"/>
-                      <a:alpha val="20000"/>
-                    </a:schemeClr>
-                  </a:glow>
-                  <a:outerShdw blurRad="44450" dist="12700" dir="13860000" algn="tl" rotWithShape="0">
-                    <a:srgbClr val="000000">
-                      <a:alpha val="20000"/>
-                    </a:srgbClr>
-                  </a:outerShdw>
-                </a:effectLst>
-                <a:latin typeface="+mn-lt"/>
-                <a:ea typeface="+mn-ea"/>
-                <a:cs typeface="+mn-cs"/>
-              </a:defRPr>
-            </a:lvl1pPr>
-            <a:lvl2pPr marL="742950" indent="-285750" algn="l" defTabSz="457200" rtl="0" eaLnBrk="1" latinLnBrk="0" hangingPunct="1">
-              <a:spcBef>
-                <a:spcPct val="20000"/>
-              </a:spcBef>
-              <a:spcAft>
-                <a:spcPts val="600"/>
-              </a:spcAft>
-              <a:buClr>
-                <a:schemeClr val="tx1"/>
-              </a:buClr>
-              <a:buSzPct val="100000"/>
-              <a:buFont typeface="Arial"/>
-              <a:buChar char="•"/>
-              <a:defRPr sz="1800" kern="1200" cap="small">
-                <a:gradFill flip="none" rotWithShape="1">
-                  <a:gsLst>
-                    <a:gs pos="0">
-                      <a:schemeClr val="tx1"/>
-                    </a:gs>
-                    <a:gs pos="100000">
-                      <a:schemeClr val="tx1">
-                        <a:lumMod val="75000"/>
-                      </a:schemeClr>
-                    </a:gs>
-                  </a:gsLst>
-                  <a:lin ang="5580000" scaled="0"/>
-                  <a:tileRect/>
-                </a:gradFill>
-                <a:effectLst>
-                  <a:glow rad="38100">
-                    <a:schemeClr val="bg1">
-                      <a:lumMod val="50000"/>
-                      <a:lumOff val="50000"/>
-                      <a:alpha val="20000"/>
-                    </a:schemeClr>
-                  </a:glow>
-                  <a:outerShdw blurRad="44450" dist="12700" dir="13860000" algn="tl" rotWithShape="0">
-                    <a:srgbClr val="000000">
-                      <a:alpha val="20000"/>
-                    </a:srgbClr>
-                  </a:outerShdw>
-                </a:effectLst>
-                <a:latin typeface="+mn-lt"/>
-                <a:ea typeface="+mn-ea"/>
-                <a:cs typeface="+mn-cs"/>
-              </a:defRPr>
-            </a:lvl2pPr>
-            <a:lvl3pPr marL="1200150" indent="-285750" algn="l" defTabSz="457200" rtl="0" eaLnBrk="1" latinLnBrk="0" hangingPunct="1">
-              <a:spcBef>
-                <a:spcPct val="20000"/>
-              </a:spcBef>
-              <a:spcAft>
-                <a:spcPts val="600"/>
-              </a:spcAft>
-              <a:buClr>
-                <a:schemeClr val="tx1"/>
-              </a:buClr>
-              <a:buSzPct val="100000"/>
-              <a:buFont typeface="Arial"/>
-              <a:buChar char="•"/>
-              <a:defRPr sz="1600" kern="1200" cap="small">
-                <a:gradFill flip="none" rotWithShape="1">
-                  <a:gsLst>
-                    <a:gs pos="0">
-                      <a:schemeClr val="tx1"/>
-                    </a:gs>
-                    <a:gs pos="100000">
-                      <a:schemeClr val="tx1">
-                        <a:lumMod val="75000"/>
-                      </a:schemeClr>
-                    </a:gs>
-                  </a:gsLst>
-                  <a:lin ang="5580000" scaled="0"/>
-                  <a:tileRect/>
-                </a:gradFill>
-                <a:effectLst>
-                  <a:glow rad="38100">
-                    <a:schemeClr val="bg1">
-                      <a:lumMod val="50000"/>
-                      <a:lumOff val="50000"/>
-                      <a:alpha val="20000"/>
-                    </a:schemeClr>
-                  </a:glow>
-                  <a:outerShdw blurRad="44450" dist="12700" dir="13860000" algn="tl" rotWithShape="0">
-                    <a:srgbClr val="000000">
-                      <a:alpha val="20000"/>
-                    </a:srgbClr>
-                  </a:outerShdw>
-                </a:effectLst>
-                <a:latin typeface="+mn-lt"/>
-                <a:ea typeface="+mn-ea"/>
-                <a:cs typeface="+mn-cs"/>
-              </a:defRPr>
-            </a:lvl3pPr>
-            <a:lvl4pPr marL="1543050" indent="-171450" algn="l" defTabSz="457200" rtl="0" eaLnBrk="1" latinLnBrk="0" hangingPunct="1">
-              <a:spcBef>
-                <a:spcPct val="20000"/>
-              </a:spcBef>
-              <a:spcAft>
-                <a:spcPts val="600"/>
-              </a:spcAft>
-              <a:buClr>
-                <a:schemeClr val="tx1"/>
-              </a:buClr>
-              <a:buSzPct val="100000"/>
-              <a:buFont typeface="Arial"/>
-              <a:buChar char="•"/>
-              <a:defRPr sz="1400" kern="1200" cap="small">
-                <a:gradFill flip="none" rotWithShape="1">
-                  <a:gsLst>
-                    <a:gs pos="0">
-                      <a:schemeClr val="tx1"/>
-                    </a:gs>
-                    <a:gs pos="100000">
-                      <a:schemeClr val="tx1">
-                        <a:lumMod val="75000"/>
-                      </a:schemeClr>
-                    </a:gs>
-                  </a:gsLst>
-                  <a:lin ang="5580000" scaled="0"/>
-                  <a:tileRect/>
-                </a:gradFill>
-                <a:effectLst>
-                  <a:glow rad="38100">
-                    <a:schemeClr val="bg1">
-                      <a:lumMod val="50000"/>
-                      <a:lumOff val="50000"/>
-                      <a:alpha val="20000"/>
-                    </a:schemeClr>
-                  </a:glow>
-                  <a:outerShdw blurRad="44450" dist="12700" dir="13860000" algn="tl" rotWithShape="0">
-                    <a:srgbClr val="000000">
-                      <a:alpha val="20000"/>
-                    </a:srgbClr>
-                  </a:outerShdw>
-                </a:effectLst>
-                <a:latin typeface="+mn-lt"/>
-                <a:ea typeface="+mn-ea"/>
-                <a:cs typeface="+mn-cs"/>
-              </a:defRPr>
-            </a:lvl4pPr>
-            <a:lvl5pPr marL="2000250" indent="-171450" algn="l" defTabSz="457200" rtl="0" eaLnBrk="1" latinLnBrk="0" hangingPunct="1">
-              <a:spcBef>
-                <a:spcPct val="20000"/>
-              </a:spcBef>
-              <a:spcAft>
-                <a:spcPts val="600"/>
-              </a:spcAft>
-              <a:buClr>
-                <a:schemeClr val="tx1"/>
-              </a:buClr>
-              <a:buSzPct val="100000"/>
-              <a:buFont typeface="Arial"/>
-              <a:buChar char="•"/>
-              <a:defRPr sz="1400" kern="1200" cap="small">
-                <a:gradFill flip="none" rotWithShape="1">
-                  <a:gsLst>
-                    <a:gs pos="0">
-                      <a:schemeClr val="tx1"/>
-                    </a:gs>
-                    <a:gs pos="100000">
-                      <a:schemeClr val="tx1">
-                        <a:lumMod val="75000"/>
-                      </a:schemeClr>
-                    </a:gs>
-                  </a:gsLst>
-                  <a:lin ang="5580000" scaled="0"/>
-                  <a:tileRect/>
-                </a:gradFill>
-                <a:effectLst>
-                  <a:glow rad="38100">
-                    <a:schemeClr val="bg1">
-                      <a:lumMod val="50000"/>
-                      <a:lumOff val="50000"/>
-                      <a:alpha val="20000"/>
-                    </a:schemeClr>
-                  </a:glow>
-                  <a:outerShdw blurRad="44450" dist="12700" dir="13860000" algn="tl" rotWithShape="0">
-                    <a:srgbClr val="000000">
-                      <a:alpha val="20000"/>
-                    </a:srgbClr>
-                  </a:outerShdw>
-                </a:effectLst>
-                <a:latin typeface="+mn-lt"/>
-                <a:ea typeface="+mn-ea"/>
-                <a:cs typeface="+mn-cs"/>
-              </a:defRPr>
-            </a:lvl5pPr>
-            <a:lvl6pPr marL="2514600" indent="-228600" algn="l" defTabSz="457200" rtl="0" eaLnBrk="1" latinLnBrk="0" hangingPunct="1">
-              <a:spcBef>
-                <a:spcPct val="20000"/>
-              </a:spcBef>
-              <a:spcAft>
-                <a:spcPts val="600"/>
-              </a:spcAft>
-              <a:buClr>
-                <a:schemeClr val="tx1"/>
-              </a:buClr>
-              <a:buSzPct val="100000"/>
-              <a:buFont typeface="Arial"/>
-              <a:buChar char="•"/>
-              <a:defRPr sz="1200" kern="1200" cap="small">
-                <a:gradFill flip="none" rotWithShape="1">
-                  <a:gsLst>
-                    <a:gs pos="0">
-                      <a:schemeClr val="tx1"/>
-                    </a:gs>
-                    <a:gs pos="100000">
-                      <a:schemeClr val="tx1">
-                        <a:lumMod val="75000"/>
-                      </a:schemeClr>
-                    </a:gs>
-                  </a:gsLst>
-                  <a:lin ang="5580000" scaled="0"/>
-                  <a:tileRect/>
-                </a:gradFill>
-                <a:effectLst>
-                  <a:glow rad="38100">
-                    <a:schemeClr val="bg1">
-                      <a:lumMod val="50000"/>
-                      <a:lumOff val="50000"/>
-                      <a:alpha val="20000"/>
-                    </a:schemeClr>
-                  </a:glow>
-                  <a:outerShdw blurRad="44450" dist="12700" dir="13860000" algn="tl" rotWithShape="0">
-                    <a:srgbClr val="000000">
-                      <a:alpha val="20000"/>
-                    </a:srgbClr>
-                  </a:outerShdw>
-                </a:effectLst>
-                <a:latin typeface="+mn-lt"/>
-                <a:ea typeface="+mn-ea"/>
-                <a:cs typeface="+mn-cs"/>
-              </a:defRPr>
-            </a:lvl6pPr>
-            <a:lvl7pPr marL="2971800" indent="-228600" algn="l" defTabSz="457200" rtl="0" eaLnBrk="1" latinLnBrk="0" hangingPunct="1">
-              <a:spcBef>
-                <a:spcPct val="20000"/>
-              </a:spcBef>
-              <a:spcAft>
-                <a:spcPts val="600"/>
-              </a:spcAft>
-              <a:buClr>
-                <a:schemeClr val="tx1"/>
-              </a:buClr>
-              <a:buSzPct val="100000"/>
-              <a:buFont typeface="Arial"/>
-              <a:buChar char="•"/>
-              <a:defRPr sz="1200" kern="1200" cap="small">
-                <a:gradFill flip="none" rotWithShape="1">
-                  <a:gsLst>
-                    <a:gs pos="0">
-                      <a:schemeClr val="tx1"/>
-                    </a:gs>
-                    <a:gs pos="100000">
-                      <a:schemeClr val="tx1">
-                        <a:lumMod val="75000"/>
-                      </a:schemeClr>
-                    </a:gs>
-                  </a:gsLst>
-                  <a:lin ang="5580000" scaled="0"/>
-                  <a:tileRect/>
-                </a:gradFill>
-                <a:effectLst>
-                  <a:glow rad="38100">
-                    <a:schemeClr val="bg1">
-                      <a:lumMod val="50000"/>
-                      <a:lumOff val="50000"/>
-                      <a:alpha val="20000"/>
-                    </a:schemeClr>
-                  </a:glow>
-                  <a:outerShdw blurRad="44450" dist="12700" dir="13860000" algn="tl" rotWithShape="0">
-                    <a:srgbClr val="000000">
-                      <a:alpha val="20000"/>
-                    </a:srgbClr>
-                  </a:outerShdw>
-                </a:effectLst>
-                <a:latin typeface="+mn-lt"/>
-                <a:ea typeface="+mn-ea"/>
-                <a:cs typeface="+mn-cs"/>
-              </a:defRPr>
-            </a:lvl7pPr>
-            <a:lvl8pPr marL="3429000" indent="-228600" algn="l" defTabSz="457200" rtl="0" eaLnBrk="1" latinLnBrk="0" hangingPunct="1">
-              <a:spcBef>
-                <a:spcPct val="20000"/>
-              </a:spcBef>
-              <a:spcAft>
-                <a:spcPts val="600"/>
-              </a:spcAft>
-              <a:buClr>
-                <a:schemeClr val="tx1"/>
-              </a:buClr>
-              <a:buSzPct val="100000"/>
-              <a:buFont typeface="Arial"/>
-              <a:buChar char="•"/>
-              <a:defRPr sz="1200" kern="1200" cap="small">
-                <a:gradFill flip="none" rotWithShape="1">
-                  <a:gsLst>
-                    <a:gs pos="0">
-                      <a:schemeClr val="tx1"/>
-                    </a:gs>
-                    <a:gs pos="100000">
-                      <a:schemeClr val="tx1">
-                        <a:lumMod val="75000"/>
-                      </a:schemeClr>
-                    </a:gs>
-                  </a:gsLst>
-                  <a:lin ang="5580000" scaled="0"/>
-                  <a:tileRect/>
-                </a:gradFill>
-                <a:effectLst>
-                  <a:glow rad="38100">
-                    <a:schemeClr val="bg1">
-                      <a:lumMod val="50000"/>
-                      <a:lumOff val="50000"/>
-                      <a:alpha val="20000"/>
-                    </a:schemeClr>
-                  </a:glow>
-                  <a:outerShdw blurRad="44450" dist="12700" dir="13860000" algn="tl" rotWithShape="0">
-                    <a:srgbClr val="000000">
-                      <a:alpha val="20000"/>
-                    </a:srgbClr>
-                  </a:outerShdw>
-                </a:effectLst>
-                <a:latin typeface="+mn-lt"/>
-                <a:ea typeface="+mn-ea"/>
-                <a:cs typeface="+mn-cs"/>
-              </a:defRPr>
-            </a:lvl8pPr>
-            <a:lvl9pPr marL="3886200" indent="-228600" algn="l" defTabSz="457200" rtl="0" eaLnBrk="1" latinLnBrk="0" hangingPunct="1">
-              <a:spcBef>
-                <a:spcPct val="20000"/>
-              </a:spcBef>
-              <a:spcAft>
-                <a:spcPts val="600"/>
-              </a:spcAft>
-              <a:buClr>
-                <a:schemeClr val="tx1"/>
-              </a:buClr>
-              <a:buSzPct val="100000"/>
-              <a:buFont typeface="Arial"/>
-              <a:buChar char="•"/>
-              <a:defRPr sz="1200" kern="1200" cap="small">
-                <a:gradFill flip="none" rotWithShape="1">
-                  <a:gsLst>
-                    <a:gs pos="0">
-                      <a:schemeClr val="tx1"/>
-                    </a:gs>
-                    <a:gs pos="100000">
-                      <a:schemeClr val="tx1">
-                        <a:lumMod val="75000"/>
-                      </a:schemeClr>
-                    </a:gs>
-                  </a:gsLst>
-                  <a:lin ang="5580000" scaled="0"/>
-                  <a:tileRect/>
-                </a:gradFill>
-                <a:effectLst>
-                  <a:glow rad="38100">
-                    <a:schemeClr val="bg1">
-                      <a:lumMod val="50000"/>
-                      <a:lumOff val="50000"/>
-                      <a:alpha val="20000"/>
-                    </a:schemeClr>
-                  </a:glow>
-                  <a:outerShdw blurRad="44450" dist="12700" dir="13860000" algn="tl" rotWithShape="0">
-                    <a:srgbClr val="000000">
-                      <a:alpha val="20000"/>
-                    </a:srgbClr>
-                  </a:outerShdw>
-                </a:effectLst>
-                <a:latin typeface="+mn-lt"/>
-                <a:ea typeface="+mn-ea"/>
-                <a:cs typeface="+mn-cs"/>
-              </a:defRPr>
-            </a:lvl9pPr>
-          </a:lstStyle>
-          <a:p>
-            <a:pPr marL="0" indent="0">
-              <a:buNone/>
-            </a:pPr>
-            <a:r>
-              <a:rPr lang="en-US" b="1" dirty="0"/>
-              <a:t>Fandom forest </a:t>
-            </a:r>
-            <a:r>
-              <a:rPr lang="en-US" dirty="0"/>
-              <a:t>is our top achieving tree with 90.8%accuracy and 0.93 F1 score, and a balance between recall and </a:t>
-            </a:r>
-            <a:r>
-              <a:rPr lang="en-US" dirty="0" err="1"/>
-              <a:t>presicion</a:t>
-            </a:r>
-            <a:endParaRPr lang="en-US" dirty="0"/>
-          </a:p>
-        </p:txBody>
-      </p:sp>
-      <p:sp>
-        <p:nvSpPr>
-          <p:cNvPr id="18" name="Content Placeholder 2">
-            <a:extLst>
-              <a:ext uri="{FF2B5EF4-FFF2-40B4-BE49-F238E27FC236}">
-                <a16:creationId xmlns:a16="http://schemas.microsoft.com/office/drawing/2014/main" id="{3AD6CA0E-A1AD-59FA-67EA-ADD8C4C545D7}"/>
-              </a:ext>
-            </a:extLst>
-          </p:cNvPr>
-          <p:cNvSpPr txBox="1">
-            <a:spLocks/>
-          </p:cNvSpPr>
-          <p:nvPr/>
-        </p:nvSpPr>
-        <p:spPr>
-          <a:xfrm>
-            <a:off x="7017980" y="3146464"/>
-            <a:ext cx="5174019" cy="709099"/>
-          </a:xfrm>
-          <a:prstGeom prst="rect">
-            <a:avLst/>
-          </a:prstGeom>
-        </p:spPr>
-        <p:txBody>
-          <a:bodyPr vert="horz" lIns="91440" tIns="45720" rIns="91440" bIns="45720" rtlCol="0" anchor="ctr">
-            <a:normAutofit fontScale="77500" lnSpcReduction="20000"/>
-          </a:bodyPr>
-          <a:lstStyle>
-            <a:lvl1pPr marL="285750" indent="-285750" algn="l" defTabSz="457200" rtl="0" eaLnBrk="1" latinLnBrk="0" hangingPunct="1">
-              <a:spcBef>
-                <a:spcPct val="20000"/>
-              </a:spcBef>
-              <a:spcAft>
-                <a:spcPts val="600"/>
-              </a:spcAft>
-              <a:buClr>
-                <a:schemeClr val="tx1"/>
-              </a:buClr>
-              <a:buSzPct val="100000"/>
-              <a:buFont typeface="Arial"/>
-              <a:buChar char="•"/>
-              <a:defRPr sz="2000" kern="1200" cap="small">
-                <a:gradFill flip="none" rotWithShape="1">
-                  <a:gsLst>
-                    <a:gs pos="0">
-                      <a:schemeClr val="tx1"/>
-                    </a:gs>
-                    <a:gs pos="100000">
-                      <a:schemeClr val="tx1">
-                        <a:lumMod val="75000"/>
-                      </a:schemeClr>
-                    </a:gs>
-                  </a:gsLst>
-                  <a:lin ang="5580000" scaled="0"/>
-                  <a:tileRect/>
-                </a:gradFill>
-                <a:effectLst>
-                  <a:glow rad="38100">
-                    <a:schemeClr val="bg1">
-                      <a:lumMod val="50000"/>
-                      <a:lumOff val="50000"/>
-                      <a:alpha val="20000"/>
-                    </a:schemeClr>
-                  </a:glow>
-                  <a:outerShdw blurRad="44450" dist="12700" dir="13860000" algn="tl" rotWithShape="0">
-                    <a:srgbClr val="000000">
-                      <a:alpha val="20000"/>
-                    </a:srgbClr>
-                  </a:outerShdw>
-                </a:effectLst>
-                <a:latin typeface="+mn-lt"/>
-                <a:ea typeface="+mn-ea"/>
-                <a:cs typeface="+mn-cs"/>
-              </a:defRPr>
-            </a:lvl1pPr>
-            <a:lvl2pPr marL="742950" indent="-285750" algn="l" defTabSz="457200" rtl="0" eaLnBrk="1" latinLnBrk="0" hangingPunct="1">
-              <a:spcBef>
-                <a:spcPct val="20000"/>
-              </a:spcBef>
-              <a:spcAft>
-                <a:spcPts val="600"/>
-              </a:spcAft>
-              <a:buClr>
-                <a:schemeClr val="tx1"/>
-              </a:buClr>
-              <a:buSzPct val="100000"/>
-              <a:buFont typeface="Arial"/>
-              <a:buChar char="•"/>
-              <a:defRPr sz="1800" kern="1200" cap="small">
-                <a:gradFill flip="none" rotWithShape="1">
-                  <a:gsLst>
-                    <a:gs pos="0">
-                      <a:schemeClr val="tx1"/>
-                    </a:gs>
-                    <a:gs pos="100000">
-                      <a:schemeClr val="tx1">
-                        <a:lumMod val="75000"/>
-                      </a:schemeClr>
-                    </a:gs>
-                  </a:gsLst>
-                  <a:lin ang="5580000" scaled="0"/>
-                  <a:tileRect/>
-                </a:gradFill>
-                <a:effectLst>
-                  <a:glow rad="38100">
-                    <a:schemeClr val="bg1">
-                      <a:lumMod val="50000"/>
-                      <a:lumOff val="50000"/>
-                      <a:alpha val="20000"/>
-                    </a:schemeClr>
-                  </a:glow>
-                  <a:outerShdw blurRad="44450" dist="12700" dir="13860000" algn="tl" rotWithShape="0">
-                    <a:srgbClr val="000000">
-                      <a:alpha val="20000"/>
-                    </a:srgbClr>
-                  </a:outerShdw>
-                </a:effectLst>
-                <a:latin typeface="+mn-lt"/>
-                <a:ea typeface="+mn-ea"/>
-                <a:cs typeface="+mn-cs"/>
-              </a:defRPr>
-            </a:lvl2pPr>
-            <a:lvl3pPr marL="1200150" indent="-285750" algn="l" defTabSz="457200" rtl="0" eaLnBrk="1" latinLnBrk="0" hangingPunct="1">
-              <a:spcBef>
-                <a:spcPct val="20000"/>
-              </a:spcBef>
-              <a:spcAft>
-                <a:spcPts val="600"/>
-              </a:spcAft>
-              <a:buClr>
-                <a:schemeClr val="tx1"/>
-              </a:buClr>
-              <a:buSzPct val="100000"/>
-              <a:buFont typeface="Arial"/>
-              <a:buChar char="•"/>
-              <a:defRPr sz="1600" kern="1200" cap="small">
-                <a:gradFill flip="none" rotWithShape="1">
-                  <a:gsLst>
-                    <a:gs pos="0">
-                      <a:schemeClr val="tx1"/>
-                    </a:gs>
-                    <a:gs pos="100000">
-                      <a:schemeClr val="tx1">
-                        <a:lumMod val="75000"/>
-                      </a:schemeClr>
-                    </a:gs>
-                  </a:gsLst>
-                  <a:lin ang="5580000" scaled="0"/>
-                  <a:tileRect/>
-                </a:gradFill>
-                <a:effectLst>
-                  <a:glow rad="38100">
-                    <a:schemeClr val="bg1">
-                      <a:lumMod val="50000"/>
-                      <a:lumOff val="50000"/>
-                      <a:alpha val="20000"/>
-                    </a:schemeClr>
-                  </a:glow>
-                  <a:outerShdw blurRad="44450" dist="12700" dir="13860000" algn="tl" rotWithShape="0">
-                    <a:srgbClr val="000000">
-                      <a:alpha val="20000"/>
-                    </a:srgbClr>
-                  </a:outerShdw>
-                </a:effectLst>
-                <a:latin typeface="+mn-lt"/>
-                <a:ea typeface="+mn-ea"/>
-                <a:cs typeface="+mn-cs"/>
-              </a:defRPr>
-            </a:lvl3pPr>
-            <a:lvl4pPr marL="1543050" indent="-171450" algn="l" defTabSz="457200" rtl="0" eaLnBrk="1" latinLnBrk="0" hangingPunct="1">
-              <a:spcBef>
-                <a:spcPct val="20000"/>
-              </a:spcBef>
-              <a:spcAft>
-                <a:spcPts val="600"/>
-              </a:spcAft>
-              <a:buClr>
-                <a:schemeClr val="tx1"/>
-              </a:buClr>
-              <a:buSzPct val="100000"/>
-              <a:buFont typeface="Arial"/>
-              <a:buChar char="•"/>
-              <a:defRPr sz="1400" kern="1200" cap="small">
-                <a:gradFill flip="none" rotWithShape="1">
-                  <a:gsLst>
-                    <a:gs pos="0">
-                      <a:schemeClr val="tx1"/>
-                    </a:gs>
-                    <a:gs pos="100000">
-                      <a:schemeClr val="tx1">
-                        <a:lumMod val="75000"/>
-                      </a:schemeClr>
-                    </a:gs>
-                  </a:gsLst>
-                  <a:lin ang="5580000" scaled="0"/>
-                  <a:tileRect/>
-                </a:gradFill>
-                <a:effectLst>
-                  <a:glow rad="38100">
-                    <a:schemeClr val="bg1">
-                      <a:lumMod val="50000"/>
-                      <a:lumOff val="50000"/>
-                      <a:alpha val="20000"/>
-                    </a:schemeClr>
-                  </a:glow>
-                  <a:outerShdw blurRad="44450" dist="12700" dir="13860000" algn="tl" rotWithShape="0">
-                    <a:srgbClr val="000000">
-                      <a:alpha val="20000"/>
-                    </a:srgbClr>
-                  </a:outerShdw>
-                </a:effectLst>
-                <a:latin typeface="+mn-lt"/>
-                <a:ea typeface="+mn-ea"/>
-                <a:cs typeface="+mn-cs"/>
-              </a:defRPr>
-            </a:lvl4pPr>
-            <a:lvl5pPr marL="2000250" indent="-171450" algn="l" defTabSz="457200" rtl="0" eaLnBrk="1" latinLnBrk="0" hangingPunct="1">
-              <a:spcBef>
-                <a:spcPct val="20000"/>
-              </a:spcBef>
-              <a:spcAft>
-                <a:spcPts val="600"/>
-              </a:spcAft>
-              <a:buClr>
-                <a:schemeClr val="tx1"/>
-              </a:buClr>
-              <a:buSzPct val="100000"/>
-              <a:buFont typeface="Arial"/>
-              <a:buChar char="•"/>
-              <a:defRPr sz="1400" kern="1200" cap="small">
-                <a:gradFill flip="none" rotWithShape="1">
-                  <a:gsLst>
-                    <a:gs pos="0">
-                      <a:schemeClr val="tx1"/>
-                    </a:gs>
-                    <a:gs pos="100000">
-                      <a:schemeClr val="tx1">
-                        <a:lumMod val="75000"/>
-                      </a:schemeClr>
-                    </a:gs>
-                  </a:gsLst>
-                  <a:lin ang="5580000" scaled="0"/>
-                  <a:tileRect/>
-                </a:gradFill>
-                <a:effectLst>
-                  <a:glow rad="38100">
-                    <a:schemeClr val="bg1">
-                      <a:lumMod val="50000"/>
-                      <a:lumOff val="50000"/>
-                      <a:alpha val="20000"/>
-                    </a:schemeClr>
-                  </a:glow>
-                  <a:outerShdw blurRad="44450" dist="12700" dir="13860000" algn="tl" rotWithShape="0">
-                    <a:srgbClr val="000000">
-                      <a:alpha val="20000"/>
-                    </a:srgbClr>
-                  </a:outerShdw>
-                </a:effectLst>
-                <a:latin typeface="+mn-lt"/>
-                <a:ea typeface="+mn-ea"/>
-                <a:cs typeface="+mn-cs"/>
-              </a:defRPr>
-            </a:lvl5pPr>
-            <a:lvl6pPr marL="2514600" indent="-228600" algn="l" defTabSz="457200" rtl="0" eaLnBrk="1" latinLnBrk="0" hangingPunct="1">
-              <a:spcBef>
-                <a:spcPct val="20000"/>
-              </a:spcBef>
-              <a:spcAft>
-                <a:spcPts val="600"/>
-              </a:spcAft>
-              <a:buClr>
-                <a:schemeClr val="tx1"/>
-              </a:buClr>
-              <a:buSzPct val="100000"/>
-              <a:buFont typeface="Arial"/>
-              <a:buChar char="•"/>
-              <a:defRPr sz="1200" kern="1200" cap="small">
-                <a:gradFill flip="none" rotWithShape="1">
-                  <a:gsLst>
-                    <a:gs pos="0">
-                      <a:schemeClr val="tx1"/>
-                    </a:gs>
-                    <a:gs pos="100000">
-                      <a:schemeClr val="tx1">
-                        <a:lumMod val="75000"/>
-                      </a:schemeClr>
-                    </a:gs>
-                  </a:gsLst>
-                  <a:lin ang="5580000" scaled="0"/>
-                  <a:tileRect/>
-                </a:gradFill>
-                <a:effectLst>
-                  <a:glow rad="38100">
-                    <a:schemeClr val="bg1">
-                      <a:lumMod val="50000"/>
-                      <a:lumOff val="50000"/>
-                      <a:alpha val="20000"/>
-                    </a:schemeClr>
-                  </a:glow>
-                  <a:outerShdw blurRad="44450" dist="12700" dir="13860000" algn="tl" rotWithShape="0">
-                    <a:srgbClr val="000000">
-                      <a:alpha val="20000"/>
-                    </a:srgbClr>
-                  </a:outerShdw>
-                </a:effectLst>
-                <a:latin typeface="+mn-lt"/>
-                <a:ea typeface="+mn-ea"/>
-                <a:cs typeface="+mn-cs"/>
-              </a:defRPr>
-            </a:lvl6pPr>
-            <a:lvl7pPr marL="2971800" indent="-228600" algn="l" defTabSz="457200" rtl="0" eaLnBrk="1" latinLnBrk="0" hangingPunct="1">
-              <a:spcBef>
-                <a:spcPct val="20000"/>
-              </a:spcBef>
-              <a:spcAft>
-                <a:spcPts val="600"/>
-              </a:spcAft>
-              <a:buClr>
-                <a:schemeClr val="tx1"/>
-              </a:buClr>
-              <a:buSzPct val="100000"/>
-              <a:buFont typeface="Arial"/>
-              <a:buChar char="•"/>
-              <a:defRPr sz="1200" kern="1200" cap="small">
-                <a:gradFill flip="none" rotWithShape="1">
-                  <a:gsLst>
-                    <a:gs pos="0">
-                      <a:schemeClr val="tx1"/>
-                    </a:gs>
-                    <a:gs pos="100000">
-                      <a:schemeClr val="tx1">
-                        <a:lumMod val="75000"/>
-                      </a:schemeClr>
-                    </a:gs>
-                  </a:gsLst>
-                  <a:lin ang="5580000" scaled="0"/>
-                  <a:tileRect/>
-                </a:gradFill>
-                <a:effectLst>
-                  <a:glow rad="38100">
-                    <a:schemeClr val="bg1">
-                      <a:lumMod val="50000"/>
-                      <a:lumOff val="50000"/>
-                      <a:alpha val="20000"/>
-                    </a:schemeClr>
-                  </a:glow>
-                  <a:outerShdw blurRad="44450" dist="12700" dir="13860000" algn="tl" rotWithShape="0">
-                    <a:srgbClr val="000000">
-                      <a:alpha val="20000"/>
-                    </a:srgbClr>
-                  </a:outerShdw>
-                </a:effectLst>
-                <a:latin typeface="+mn-lt"/>
-                <a:ea typeface="+mn-ea"/>
-                <a:cs typeface="+mn-cs"/>
-              </a:defRPr>
-            </a:lvl7pPr>
-            <a:lvl8pPr marL="3429000" indent="-228600" algn="l" defTabSz="457200" rtl="0" eaLnBrk="1" latinLnBrk="0" hangingPunct="1">
-              <a:spcBef>
-                <a:spcPct val="20000"/>
-              </a:spcBef>
-              <a:spcAft>
-                <a:spcPts val="600"/>
-              </a:spcAft>
-              <a:buClr>
-                <a:schemeClr val="tx1"/>
-              </a:buClr>
-              <a:buSzPct val="100000"/>
-              <a:buFont typeface="Arial"/>
-              <a:buChar char="•"/>
-              <a:defRPr sz="1200" kern="1200" cap="small">
-                <a:gradFill flip="none" rotWithShape="1">
-                  <a:gsLst>
-                    <a:gs pos="0">
-                      <a:schemeClr val="tx1"/>
-                    </a:gs>
-                    <a:gs pos="100000">
-                      <a:schemeClr val="tx1">
-                        <a:lumMod val="75000"/>
-                      </a:schemeClr>
-                    </a:gs>
-                  </a:gsLst>
-                  <a:lin ang="5580000" scaled="0"/>
-                  <a:tileRect/>
-                </a:gradFill>
-                <a:effectLst>
-                  <a:glow rad="38100">
-                    <a:schemeClr val="bg1">
-                      <a:lumMod val="50000"/>
-                      <a:lumOff val="50000"/>
-                      <a:alpha val="20000"/>
-                    </a:schemeClr>
-                  </a:glow>
-                  <a:outerShdw blurRad="44450" dist="12700" dir="13860000" algn="tl" rotWithShape="0">
-                    <a:srgbClr val="000000">
-                      <a:alpha val="20000"/>
-                    </a:srgbClr>
-                  </a:outerShdw>
-                </a:effectLst>
-                <a:latin typeface="+mn-lt"/>
-                <a:ea typeface="+mn-ea"/>
-                <a:cs typeface="+mn-cs"/>
-              </a:defRPr>
-            </a:lvl8pPr>
-            <a:lvl9pPr marL="3886200" indent="-228600" algn="l" defTabSz="457200" rtl="0" eaLnBrk="1" latinLnBrk="0" hangingPunct="1">
-              <a:spcBef>
-                <a:spcPct val="20000"/>
-              </a:spcBef>
-              <a:spcAft>
-                <a:spcPts val="600"/>
-              </a:spcAft>
-              <a:buClr>
-                <a:schemeClr val="tx1"/>
-              </a:buClr>
-              <a:buSzPct val="100000"/>
-              <a:buFont typeface="Arial"/>
-              <a:buChar char="•"/>
-              <a:defRPr sz="1200" kern="1200" cap="small">
-                <a:gradFill flip="none" rotWithShape="1">
-                  <a:gsLst>
-                    <a:gs pos="0">
-                      <a:schemeClr val="tx1"/>
-                    </a:gs>
-                    <a:gs pos="100000">
-                      <a:schemeClr val="tx1">
-                        <a:lumMod val="75000"/>
-                      </a:schemeClr>
-                    </a:gs>
-                  </a:gsLst>
-                  <a:lin ang="5580000" scaled="0"/>
-                  <a:tileRect/>
-                </a:gradFill>
-                <a:effectLst>
-                  <a:glow rad="38100">
-                    <a:schemeClr val="bg1">
-                      <a:lumMod val="50000"/>
-                      <a:lumOff val="50000"/>
-                      <a:alpha val="20000"/>
-                    </a:schemeClr>
-                  </a:glow>
-                  <a:outerShdw blurRad="44450" dist="12700" dir="13860000" algn="tl" rotWithShape="0">
-                    <a:srgbClr val="000000">
-                      <a:alpha val="20000"/>
-                    </a:srgbClr>
-                  </a:outerShdw>
-                </a:effectLst>
-                <a:latin typeface="+mn-lt"/>
-                <a:ea typeface="+mn-ea"/>
-                <a:cs typeface="+mn-cs"/>
-              </a:defRPr>
-            </a:lvl9pPr>
-          </a:lstStyle>
-          <a:p>
-            <a:pPr marL="0" indent="0">
-              <a:buNone/>
-            </a:pPr>
-            <a:r>
-              <a:rPr lang="en-GB" dirty="0">
-                <a:solidFill>
-                  <a:schemeClr val="tx1"/>
-                </a:solidFill>
-                <a:effectLst/>
-              </a:rPr>
-              <a:t>Best RF Params: {'</a:t>
-            </a:r>
-            <a:r>
-              <a:rPr lang="en-GB" dirty="0" err="1">
-                <a:solidFill>
-                  <a:schemeClr val="tx1"/>
-                </a:solidFill>
-                <a:effectLst/>
-              </a:rPr>
-              <a:t>n_estimators</a:t>
-            </a:r>
-            <a:r>
-              <a:rPr lang="en-GB" dirty="0">
-                <a:solidFill>
-                  <a:schemeClr val="tx1"/>
-                </a:solidFill>
-                <a:effectLst/>
-              </a:rPr>
-              <a:t>': 200, '</a:t>
-            </a:r>
-            <a:r>
-              <a:rPr lang="en-GB" dirty="0" err="1">
-                <a:solidFill>
-                  <a:schemeClr val="tx1"/>
-                </a:solidFill>
-                <a:effectLst/>
-              </a:rPr>
-              <a:t>max_depth</a:t>
-            </a:r>
-            <a:r>
-              <a:rPr lang="en-GB" dirty="0">
-                <a:solidFill>
-                  <a:schemeClr val="tx1"/>
-                </a:solidFill>
-                <a:effectLst/>
-              </a:rPr>
-              <a:t>': 20} </a:t>
-            </a:r>
-          </a:p>
-          <a:p>
-            <a:pPr marL="0" indent="0">
-              <a:buNone/>
-            </a:pPr>
-            <a:br>
-              <a:rPr lang="en-GB" sz="1600" dirty="0"/>
-            </a:br>
-            <a:endParaRPr lang="en-US" sz="1600" dirty="0"/>
-          </a:p>
-        </p:txBody>
-      </p:sp>
-    </p:spTree>
-    <p:extLst>
-      <p:ext uri="{BB962C8B-B14F-4D97-AF65-F5344CB8AC3E}">
-        <p14:creationId xmlns:p14="http://schemas.microsoft.com/office/powerpoint/2010/main" val="3492026298"/>
-      </p:ext>
-    </p:extLst>
-  </p:cSld>
-  <p:clrMapOvr>
-    <a:masterClrMapping/>
-  </p:clrMapOvr>
-</p:sld>
-</file>
-
-<file path=ppt/slides/slide5.xml><?xml version="1.0" encoding="utf-8"?>
-<p:sld xmlns:a="http://schemas.openxmlformats.org/drawingml/2006/main" xmlns:r="http://schemas.openxmlformats.org/officeDocument/2006/relationships" xmlns:p="http://schemas.openxmlformats.org/presentationml/2006/main">
-  <p:cSld>
-    <p:bg>
-      <p:bgPr>
-        <a:blipFill rotWithShape="1">
-          <a:blip r:embed="rId2">
-            <a:duotone>
-              <a:schemeClr val="bg2">
-                <a:shade val="28000"/>
-                <a:satMod val="94000"/>
-                <a:lumMod val="20000"/>
-              </a:schemeClr>
-              <a:schemeClr val="bg2">
-                <a:tint val="94000"/>
-                <a:shade val="84000"/>
-                <a:satMod val="148000"/>
-                <a:lumMod val="114000"/>
-              </a:schemeClr>
-            </a:duotone>
-          </a:blip>
-          <a:stretch/>
-        </a:blipFill>
-        <a:effectLst/>
-      </p:bgPr>
-    </p:bg>
-    <p:spTree>
-      <p:nvGrpSpPr>
-        <p:cNvPr id="1" name=""/>
-        <p:cNvGrpSpPr/>
-        <p:nvPr/>
-      </p:nvGrpSpPr>
-      <p:grpSpPr>
-        <a:xfrm>
-          <a:off x="0" y="0"/>
-          <a:ext cx="0" cy="0"/>
-          <a:chOff x="0" y="0"/>
-          <a:chExt cx="0" cy="0"/>
-        </a:xfrm>
-      </p:grpSpPr>
-      <p:sp>
-        <p:nvSpPr>
-          <p:cNvPr id="8" name="Rectangle 7">
-            <a:extLst>
-              <a:ext uri="{FF2B5EF4-FFF2-40B4-BE49-F238E27FC236}">
-                <a16:creationId xmlns:a16="http://schemas.microsoft.com/office/drawing/2014/main" id="{5690F3EE-0CD1-4520-B020-4E1DF3141C74}"/>
-              </a:ext>
-              <a:ext uri="{C183D7F6-B498-43B3-948B-1728B52AA6E4}">
-                <adec:decorative xmlns:adec="http://schemas.microsoft.com/office/drawing/2017/decorative" val="1"/>
-              </a:ext>
-            </a:extLst>
-          </p:cNvPr>
-          <p:cNvSpPr>
-            <a:spLocks noGrp="1" noRot="1" noChangeAspect="1" noMove="1" noResize="1" noEditPoints="1" noAdjustHandles="1" noChangeArrowheads="1" noChangeShapeType="1" noTextEdit="1"/>
-          </p:cNvSpPr>
-          <p:nvPr>
-            <p:extLst>
-              <p:ext uri="{386F3935-93C4-4BCD-93E2-E3B085C9AB24}">
-                <p16:designElem xmlns:p16="http://schemas.microsoft.com/office/powerpoint/2015/main" val="1"/>
-              </p:ext>
-            </p:extLst>
-          </p:nvPr>
-        </p:nvSpPr>
-        <p:spPr>
-          <a:xfrm>
-            <a:off x="0" y="-1"/>
-            <a:ext cx="12192000" cy="6858001"/>
-          </a:xfrm>
-          <a:prstGeom prst="rect">
-            <a:avLst/>
-          </a:prstGeom>
-          <a:solidFill>
-            <a:schemeClr val="bg2"/>
-          </a:solidFill>
-          <a:ln>
-            <a:noFill/>
-          </a:ln>
-        </p:spPr>
-        <p:style>
-          <a:lnRef idx="2">
-            <a:schemeClr val="accent1">
-              <a:shade val="50000"/>
-            </a:schemeClr>
-          </a:lnRef>
-          <a:fillRef idx="1">
-            <a:schemeClr val="accent1"/>
-          </a:fillRef>
-          <a:effectRef idx="0">
-            <a:schemeClr val="accent1"/>
-          </a:effectRef>
-          <a:fontRef idx="minor">
-            <a:schemeClr val="lt1"/>
-          </a:fontRef>
-        </p:style>
-        <p:txBody>
-          <a:bodyPr rtlCol="0" anchor="ctr"/>
-          <a:lstStyle/>
-          <a:p>
-            <a:pPr algn="ctr"/>
-            <a:endParaRPr lang="en-US"/>
-          </a:p>
-        </p:txBody>
-      </p:sp>
-      <p:sp useBgFill="1">
-        <p:nvSpPr>
-          <p:cNvPr id="10" name="Freeform: Shape 9">
-            <a:extLst>
-              <a:ext uri="{FF2B5EF4-FFF2-40B4-BE49-F238E27FC236}">
-                <a16:creationId xmlns:a16="http://schemas.microsoft.com/office/drawing/2014/main" id="{9EFDE1E9-7FE0-45CA-9DE2-237F77319A9F}"/>
-              </a:ext>
-              <a:ext uri="{C183D7F6-B498-43B3-948B-1728B52AA6E4}">
-                <adec:decorative xmlns:adec="http://schemas.microsoft.com/office/drawing/2017/decorative" val="1"/>
-              </a:ext>
-            </a:extLst>
-          </p:cNvPr>
-          <p:cNvSpPr>
-            <a:spLocks noGrp="1" noRot="1" noChangeAspect="1" noMove="1" noResize="1" noEditPoints="1" noAdjustHandles="1" noChangeArrowheads="1" noChangeShapeType="1" noTextEdit="1"/>
-          </p:cNvSpPr>
-          <p:nvPr>
-            <p:extLst>
-              <p:ext uri="{386F3935-93C4-4BCD-93E2-E3B085C9AB24}">
-                <p16:designElem xmlns:p16="http://schemas.microsoft.com/office/powerpoint/2015/main" val="1"/>
-              </p:ext>
-            </p:extLst>
-          </p:nvPr>
-        </p:nvSpPr>
-        <p:spPr>
-          <a:xfrm>
-            <a:off x="0" y="-1"/>
-            <a:ext cx="12192000" cy="2270840"/>
-          </a:xfrm>
-          <a:custGeom>
-            <a:avLst/>
-            <a:gdLst>
-              <a:gd name="connsiteX0" fmla="*/ 0 w 12192000"/>
-              <a:gd name="connsiteY0" fmla="*/ 0 h 2270840"/>
-              <a:gd name="connsiteX1" fmla="*/ 12192000 w 12192000"/>
-              <a:gd name="connsiteY1" fmla="*/ 0 h 2270840"/>
-              <a:gd name="connsiteX2" fmla="*/ 12192000 w 12192000"/>
-              <a:gd name="connsiteY2" fmla="*/ 519831 h 2270840"/>
-              <a:gd name="connsiteX3" fmla="*/ 12192000 w 12192000"/>
-              <a:gd name="connsiteY3" fmla="*/ 744794 h 2270840"/>
-              <a:gd name="connsiteX4" fmla="*/ 12192000 w 12192000"/>
-              <a:gd name="connsiteY4" fmla="*/ 1754022 h 2270840"/>
-              <a:gd name="connsiteX5" fmla="*/ 11957522 w 12192000"/>
-              <a:gd name="connsiteY5" fmla="*/ 1797924 h 2270840"/>
-              <a:gd name="connsiteX6" fmla="*/ 11679973 w 12192000"/>
-              <a:gd name="connsiteY6" fmla="*/ 1847668 h 2270840"/>
-              <a:gd name="connsiteX7" fmla="*/ 11401197 w 12192000"/>
-              <a:gd name="connsiteY7" fmla="*/ 1896361 h 2270840"/>
-              <a:gd name="connsiteX8" fmla="*/ 11121192 w 12192000"/>
-              <a:gd name="connsiteY8" fmla="*/ 1938047 h 2270840"/>
-              <a:gd name="connsiteX9" fmla="*/ 10842416 w 12192000"/>
-              <a:gd name="connsiteY9" fmla="*/ 1980084 h 2270840"/>
-              <a:gd name="connsiteX10" fmla="*/ 10562411 w 12192000"/>
-              <a:gd name="connsiteY10" fmla="*/ 2019319 h 2270840"/>
-              <a:gd name="connsiteX11" fmla="*/ 10286091 w 12192000"/>
-              <a:gd name="connsiteY11" fmla="*/ 2052948 h 2270840"/>
-              <a:gd name="connsiteX12" fmla="*/ 10006086 w 12192000"/>
-              <a:gd name="connsiteY12" fmla="*/ 2084826 h 2270840"/>
-              <a:gd name="connsiteX13" fmla="*/ 9727310 w 12192000"/>
-              <a:gd name="connsiteY13" fmla="*/ 2113902 h 2270840"/>
-              <a:gd name="connsiteX14" fmla="*/ 9453445 w 12192000"/>
-              <a:gd name="connsiteY14" fmla="*/ 2139124 h 2270840"/>
-              <a:gd name="connsiteX15" fmla="*/ 9175897 w 12192000"/>
-              <a:gd name="connsiteY15" fmla="*/ 2164346 h 2270840"/>
-              <a:gd name="connsiteX16" fmla="*/ 8902033 w 12192000"/>
-              <a:gd name="connsiteY16" fmla="*/ 2185365 h 2270840"/>
-              <a:gd name="connsiteX17" fmla="*/ 8628169 w 12192000"/>
-              <a:gd name="connsiteY17" fmla="*/ 2201829 h 2270840"/>
-              <a:gd name="connsiteX18" fmla="*/ 8355533 w 12192000"/>
-              <a:gd name="connsiteY18" fmla="*/ 2218995 h 2270840"/>
-              <a:gd name="connsiteX19" fmla="*/ 8085353 w 12192000"/>
-              <a:gd name="connsiteY19" fmla="*/ 2233357 h 2270840"/>
-              <a:gd name="connsiteX20" fmla="*/ 7817629 w 12192000"/>
-              <a:gd name="connsiteY20" fmla="*/ 2243516 h 2270840"/>
-              <a:gd name="connsiteX21" fmla="*/ 7549905 w 12192000"/>
-              <a:gd name="connsiteY21" fmla="*/ 2252274 h 2270840"/>
-              <a:gd name="connsiteX22" fmla="*/ 7284638 w 12192000"/>
-              <a:gd name="connsiteY22" fmla="*/ 2260681 h 2270840"/>
-              <a:gd name="connsiteX23" fmla="*/ 7023055 w 12192000"/>
-              <a:gd name="connsiteY23" fmla="*/ 2264535 h 2270840"/>
-              <a:gd name="connsiteX24" fmla="*/ 6761472 w 12192000"/>
-              <a:gd name="connsiteY24" fmla="*/ 2268738 h 2270840"/>
-              <a:gd name="connsiteX25" fmla="*/ 6503573 w 12192000"/>
-              <a:gd name="connsiteY25" fmla="*/ 2270840 h 2270840"/>
-              <a:gd name="connsiteX26" fmla="*/ 6248130 w 12192000"/>
-              <a:gd name="connsiteY26" fmla="*/ 2268738 h 2270840"/>
-              <a:gd name="connsiteX27" fmla="*/ 5995144 w 12192000"/>
-              <a:gd name="connsiteY27" fmla="*/ 2268738 h 2270840"/>
-              <a:gd name="connsiteX28" fmla="*/ 5744613 w 12192000"/>
-              <a:gd name="connsiteY28" fmla="*/ 2264535 h 2270840"/>
-              <a:gd name="connsiteX29" fmla="*/ 5498995 w 12192000"/>
-              <a:gd name="connsiteY29" fmla="*/ 2258229 h 2270840"/>
-              <a:gd name="connsiteX30" fmla="*/ 5255834 w 12192000"/>
-              <a:gd name="connsiteY30" fmla="*/ 2252274 h 2270840"/>
-              <a:gd name="connsiteX31" fmla="*/ 5017584 w 12192000"/>
-              <a:gd name="connsiteY31" fmla="*/ 2245618 h 2270840"/>
-              <a:gd name="connsiteX32" fmla="*/ 4780562 w 12192000"/>
-              <a:gd name="connsiteY32" fmla="*/ 2235459 h 2270840"/>
-              <a:gd name="connsiteX33" fmla="*/ 4547227 w 12192000"/>
-              <a:gd name="connsiteY33" fmla="*/ 2224599 h 2270840"/>
-              <a:gd name="connsiteX34" fmla="*/ 4318800 w 12192000"/>
-              <a:gd name="connsiteY34" fmla="*/ 2214791 h 2270840"/>
-              <a:gd name="connsiteX35" fmla="*/ 3873004 w 12192000"/>
-              <a:gd name="connsiteY35" fmla="*/ 2187116 h 2270840"/>
-              <a:gd name="connsiteX36" fmla="*/ 3445628 w 12192000"/>
-              <a:gd name="connsiteY36" fmla="*/ 2157691 h 2270840"/>
-              <a:gd name="connsiteX37" fmla="*/ 3035446 w 12192000"/>
-              <a:gd name="connsiteY37" fmla="*/ 2126863 h 2270840"/>
-              <a:gd name="connsiteX38" fmla="*/ 2647370 w 12192000"/>
-              <a:gd name="connsiteY38" fmla="*/ 2092884 h 2270840"/>
-              <a:gd name="connsiteX39" fmla="*/ 2276487 w 12192000"/>
-              <a:gd name="connsiteY39" fmla="*/ 2057502 h 2270840"/>
-              <a:gd name="connsiteX40" fmla="*/ 1932621 w 12192000"/>
-              <a:gd name="connsiteY40" fmla="*/ 2019319 h 2270840"/>
-              <a:gd name="connsiteX41" fmla="*/ 1609634 w 12192000"/>
-              <a:gd name="connsiteY41" fmla="*/ 1981836 h 2270840"/>
-              <a:gd name="connsiteX42" fmla="*/ 1312435 w 12192000"/>
-              <a:gd name="connsiteY42" fmla="*/ 1944353 h 2270840"/>
-              <a:gd name="connsiteX43" fmla="*/ 1039799 w 12192000"/>
-              <a:gd name="connsiteY43" fmla="*/ 1908972 h 2270840"/>
-              <a:gd name="connsiteX44" fmla="*/ 797865 w 12192000"/>
-              <a:gd name="connsiteY44" fmla="*/ 1875342 h 2270840"/>
-              <a:gd name="connsiteX45" fmla="*/ 579265 w 12192000"/>
-              <a:gd name="connsiteY45" fmla="*/ 1843464 h 2270840"/>
-              <a:gd name="connsiteX46" fmla="*/ 395052 w 12192000"/>
-              <a:gd name="connsiteY46" fmla="*/ 1816841 h 2270840"/>
-              <a:gd name="connsiteX47" fmla="*/ 240312 w 12192000"/>
-              <a:gd name="connsiteY47" fmla="*/ 1791618 h 2270840"/>
-              <a:gd name="connsiteX48" fmla="*/ 27853 w 12192000"/>
-              <a:gd name="connsiteY48" fmla="*/ 1755537 h 2270840"/>
-              <a:gd name="connsiteX49" fmla="*/ 0 w 12192000"/>
-              <a:gd name="connsiteY49" fmla="*/ 1750824 h 2270840"/>
-              <a:gd name="connsiteX50" fmla="*/ 0 w 12192000"/>
-              <a:gd name="connsiteY50" fmla="*/ 744794 h 2270840"/>
-              <a:gd name="connsiteX51" fmla="*/ 0 w 12192000"/>
-              <a:gd name="connsiteY51" fmla="*/ 519831 h 2270840"/>
-            </a:gdLst>
-            <a:ahLst/>
-            <a:cxnLst>
-              <a:cxn ang="0">
-                <a:pos x="connsiteX0" y="connsiteY0"/>
-              </a:cxn>
-              <a:cxn ang="0">
-                <a:pos x="connsiteX1" y="connsiteY1"/>
-              </a:cxn>
-              <a:cxn ang="0">
-                <a:pos x="connsiteX2" y="connsiteY2"/>
-              </a:cxn>
-              <a:cxn ang="0">
-                <a:pos x="connsiteX3" y="connsiteY3"/>
-              </a:cxn>
-              <a:cxn ang="0">
-                <a:pos x="connsiteX4" y="connsiteY4"/>
-              </a:cxn>
-              <a:cxn ang="0">
-                <a:pos x="connsiteX5" y="connsiteY5"/>
-              </a:cxn>
-              <a:cxn ang="0">
-                <a:pos x="connsiteX6" y="connsiteY6"/>
-              </a:cxn>
-              <a:cxn ang="0">
-                <a:pos x="connsiteX7" y="connsiteY7"/>
-              </a:cxn>
-              <a:cxn ang="0">
-                <a:pos x="connsiteX8" y="connsiteY8"/>
-              </a:cxn>
-              <a:cxn ang="0">
-                <a:pos x="connsiteX9" y="connsiteY9"/>
-              </a:cxn>
-              <a:cxn ang="0">
-                <a:pos x="connsiteX10" y="connsiteY10"/>
-              </a:cxn>
-              <a:cxn ang="0">
-                <a:pos x="connsiteX11" y="connsiteY11"/>
-              </a:cxn>
-              <a:cxn ang="0">
-                <a:pos x="connsiteX12" y="connsiteY12"/>
-              </a:cxn>
-              <a:cxn ang="0">
-                <a:pos x="connsiteX13" y="connsiteY13"/>
-              </a:cxn>
-              <a:cxn ang="0">
-                <a:pos x="connsiteX14" y="connsiteY14"/>
-              </a:cxn>
-              <a:cxn ang="0">
-                <a:pos x="connsiteX15" y="connsiteY15"/>
-              </a:cxn>
-              <a:cxn ang="0">
-                <a:pos x="connsiteX16" y="connsiteY16"/>
-              </a:cxn>
-              <a:cxn ang="0">
-                <a:pos x="connsiteX17" y="connsiteY17"/>
-              </a:cxn>
-              <a:cxn ang="0">
-                <a:pos x="connsiteX18" y="connsiteY18"/>
-              </a:cxn>
-              <a:cxn ang="0">
-                <a:pos x="connsiteX19" y="connsiteY19"/>
-              </a:cxn>
-              <a:cxn ang="0">
-                <a:pos x="connsiteX20" y="connsiteY20"/>
-              </a:cxn>
-              <a:cxn ang="0">
-                <a:pos x="connsiteX21" y="connsiteY21"/>
-              </a:cxn>
-              <a:cxn ang="0">
-                <a:pos x="connsiteX22" y="connsiteY22"/>
-              </a:cxn>
-              <a:cxn ang="0">
-                <a:pos x="connsiteX23" y="connsiteY23"/>
-              </a:cxn>
-              <a:cxn ang="0">
-                <a:pos x="connsiteX24" y="connsiteY24"/>
-              </a:cxn>
-              <a:cxn ang="0">
-                <a:pos x="connsiteX25" y="connsiteY25"/>
-              </a:cxn>
-              <a:cxn ang="0">
-                <a:pos x="connsiteX26" y="connsiteY26"/>
-              </a:cxn>
-              <a:cxn ang="0">
-                <a:pos x="connsiteX27" y="connsiteY27"/>
-              </a:cxn>
-              <a:cxn ang="0">
-                <a:pos x="connsiteX28" y="connsiteY28"/>
-              </a:cxn>
-              <a:cxn ang="0">
-                <a:pos x="connsiteX29" y="connsiteY29"/>
-              </a:cxn>
-              <a:cxn ang="0">
-                <a:pos x="connsiteX30" y="connsiteY30"/>
-              </a:cxn>
-              <a:cxn ang="0">
-                <a:pos x="connsiteX31" y="connsiteY31"/>
-              </a:cxn>
-              <a:cxn ang="0">
-                <a:pos x="connsiteX32" y="connsiteY32"/>
-              </a:cxn>
-              <a:cxn ang="0">
-                <a:pos x="connsiteX33" y="connsiteY33"/>
-              </a:cxn>
-              <a:cxn ang="0">
-                <a:pos x="connsiteX34" y="connsiteY34"/>
-              </a:cxn>
-              <a:cxn ang="0">
-                <a:pos x="connsiteX35" y="connsiteY35"/>
-              </a:cxn>
-              <a:cxn ang="0">
-                <a:pos x="connsiteX36" y="connsiteY36"/>
-              </a:cxn>
-              <a:cxn ang="0">
-                <a:pos x="connsiteX37" y="connsiteY37"/>
-              </a:cxn>
-              <a:cxn ang="0">
-                <a:pos x="connsiteX38" y="connsiteY38"/>
-              </a:cxn>
-              <a:cxn ang="0">
-                <a:pos x="connsiteX39" y="connsiteY39"/>
-              </a:cxn>
-              <a:cxn ang="0">
-                <a:pos x="connsiteX40" y="connsiteY40"/>
-              </a:cxn>
-              <a:cxn ang="0">
-                <a:pos x="connsiteX41" y="connsiteY41"/>
-              </a:cxn>
-              <a:cxn ang="0">
-                <a:pos x="connsiteX42" y="connsiteY42"/>
-              </a:cxn>
-              <a:cxn ang="0">
-                <a:pos x="connsiteX43" y="connsiteY43"/>
-              </a:cxn>
-              <a:cxn ang="0">
-                <a:pos x="connsiteX44" y="connsiteY44"/>
-              </a:cxn>
-              <a:cxn ang="0">
-                <a:pos x="connsiteX45" y="connsiteY45"/>
-              </a:cxn>
-              <a:cxn ang="0">
-                <a:pos x="connsiteX46" y="connsiteY46"/>
-              </a:cxn>
-              <a:cxn ang="0">
-                <a:pos x="connsiteX47" y="connsiteY47"/>
-              </a:cxn>
-              <a:cxn ang="0">
-                <a:pos x="connsiteX48" y="connsiteY48"/>
-              </a:cxn>
-              <a:cxn ang="0">
-                <a:pos x="connsiteX49" y="connsiteY49"/>
-              </a:cxn>
-              <a:cxn ang="0">
-                <a:pos x="connsiteX50" y="connsiteY50"/>
-              </a:cxn>
-              <a:cxn ang="0">
-                <a:pos x="connsiteX51" y="connsiteY51"/>
-              </a:cxn>
-            </a:cxnLst>
-            <a:rect l="l" t="t" r="r" b="b"/>
-            <a:pathLst>
-              <a:path w="12192000" h="2270840">
-                <a:moveTo>
-                  <a:pt x="0" y="0"/>
-                </a:moveTo>
-                <a:lnTo>
-                  <a:pt x="12192000" y="0"/>
-                </a:lnTo>
-                <a:lnTo>
-                  <a:pt x="12192000" y="519831"/>
-                </a:lnTo>
-                <a:lnTo>
-                  <a:pt x="12192000" y="744794"/>
-                </a:lnTo>
-                <a:lnTo>
-                  <a:pt x="12192000" y="1754022"/>
-                </a:lnTo>
-                <a:lnTo>
-                  <a:pt x="11957522" y="1797924"/>
-                </a:lnTo>
-                <a:lnTo>
-                  <a:pt x="11679973" y="1847668"/>
-                </a:lnTo>
-                <a:lnTo>
-                  <a:pt x="11401197" y="1896361"/>
-                </a:lnTo>
-                <a:lnTo>
-                  <a:pt x="11121192" y="1938047"/>
-                </a:lnTo>
-                <a:lnTo>
-                  <a:pt x="10842416" y="1980084"/>
-                </a:lnTo>
-                <a:lnTo>
-                  <a:pt x="10562411" y="2019319"/>
-                </a:lnTo>
-                <a:lnTo>
-                  <a:pt x="10286091" y="2052948"/>
-                </a:lnTo>
-                <a:lnTo>
-                  <a:pt x="10006086" y="2084826"/>
-                </a:lnTo>
-                <a:lnTo>
-                  <a:pt x="9727310" y="2113902"/>
-                </a:lnTo>
-                <a:lnTo>
-                  <a:pt x="9453445" y="2139124"/>
-                </a:lnTo>
-                <a:lnTo>
-                  <a:pt x="9175897" y="2164346"/>
-                </a:lnTo>
-                <a:lnTo>
-                  <a:pt x="8902033" y="2185365"/>
-                </a:lnTo>
-                <a:lnTo>
-                  <a:pt x="8628169" y="2201829"/>
-                </a:lnTo>
-                <a:lnTo>
-                  <a:pt x="8355533" y="2218995"/>
-                </a:lnTo>
-                <a:lnTo>
-                  <a:pt x="8085353" y="2233357"/>
-                </a:lnTo>
-                <a:lnTo>
-                  <a:pt x="7817629" y="2243516"/>
-                </a:lnTo>
-                <a:lnTo>
-                  <a:pt x="7549905" y="2252274"/>
-                </a:lnTo>
-                <a:lnTo>
-                  <a:pt x="7284638" y="2260681"/>
-                </a:lnTo>
-                <a:lnTo>
-                  <a:pt x="7023055" y="2264535"/>
-                </a:lnTo>
-                <a:lnTo>
-                  <a:pt x="6761472" y="2268738"/>
-                </a:lnTo>
-                <a:lnTo>
-                  <a:pt x="6503573" y="2270840"/>
-                </a:lnTo>
-                <a:lnTo>
-                  <a:pt x="6248130" y="2268738"/>
-                </a:lnTo>
-                <a:lnTo>
-                  <a:pt x="5995144" y="2268738"/>
-                </a:lnTo>
-                <a:lnTo>
-                  <a:pt x="5744613" y="2264535"/>
-                </a:lnTo>
-                <a:lnTo>
-                  <a:pt x="5498995" y="2258229"/>
-                </a:lnTo>
-                <a:lnTo>
-                  <a:pt x="5255834" y="2252274"/>
-                </a:lnTo>
-                <a:lnTo>
-                  <a:pt x="5017584" y="2245618"/>
-                </a:lnTo>
-                <a:lnTo>
-                  <a:pt x="4780562" y="2235459"/>
-                </a:lnTo>
-                <a:lnTo>
-                  <a:pt x="4547227" y="2224599"/>
-                </a:lnTo>
-                <a:lnTo>
-                  <a:pt x="4318800" y="2214791"/>
-                </a:lnTo>
-                <a:lnTo>
-                  <a:pt x="3873004" y="2187116"/>
-                </a:lnTo>
-                <a:lnTo>
-                  <a:pt x="3445628" y="2157691"/>
-                </a:lnTo>
-                <a:lnTo>
-                  <a:pt x="3035446" y="2126863"/>
-                </a:lnTo>
-                <a:lnTo>
-                  <a:pt x="2647370" y="2092884"/>
-                </a:lnTo>
-                <a:lnTo>
-                  <a:pt x="2276487" y="2057502"/>
-                </a:lnTo>
-                <a:lnTo>
-                  <a:pt x="1932621" y="2019319"/>
-                </a:lnTo>
-                <a:lnTo>
-                  <a:pt x="1609634" y="1981836"/>
-                </a:lnTo>
-                <a:lnTo>
-                  <a:pt x="1312435" y="1944353"/>
-                </a:lnTo>
-                <a:lnTo>
-                  <a:pt x="1039799" y="1908972"/>
-                </a:lnTo>
-                <a:lnTo>
-                  <a:pt x="797865" y="1875342"/>
-                </a:lnTo>
-                <a:lnTo>
-                  <a:pt x="579265" y="1843464"/>
-                </a:lnTo>
-                <a:lnTo>
-                  <a:pt x="395052" y="1816841"/>
-                </a:lnTo>
-                <a:lnTo>
-                  <a:pt x="240312" y="1791618"/>
-                </a:lnTo>
-                <a:lnTo>
-                  <a:pt x="27853" y="1755537"/>
-                </a:lnTo>
-                <a:lnTo>
-                  <a:pt x="0" y="1750824"/>
-                </a:lnTo>
-                <a:lnTo>
-                  <a:pt x="0" y="744794"/>
-                </a:lnTo>
-                <a:lnTo>
-                  <a:pt x="0" y="519831"/>
-                </a:lnTo>
-                <a:close/>
-              </a:path>
-            </a:pathLst>
-          </a:custGeom>
-          <a:ln w="44450">
-            <a:gradFill>
-              <a:gsLst>
-                <a:gs pos="0">
-                  <a:schemeClr val="bg2">
-                    <a:alpha val="65000"/>
-                  </a:schemeClr>
-                </a:gs>
-                <a:gs pos="98000">
-                  <a:schemeClr val="bg2">
-                    <a:lumMod val="75000"/>
-                    <a:alpha val="55000"/>
-                  </a:schemeClr>
-                </a:gs>
-              </a:gsLst>
-              <a:lin ang="5400000" scaled="1"/>
-            </a:gradFill>
-          </a:ln>
-          <a:effectLst>
-            <a:outerShdw blurRad="50800" dist="38100" dir="5400000" algn="t" rotWithShape="0">
-              <a:prstClr val="black">
-                <a:alpha val="50000"/>
-              </a:prstClr>
-            </a:outerShdw>
-          </a:effectLst>
-        </p:spPr>
-        <p:style>
-          <a:lnRef idx="2">
-            <a:schemeClr val="accent1">
-              <a:shade val="50000"/>
-            </a:schemeClr>
-          </a:lnRef>
-          <a:fillRef idx="1003">
-            <a:schemeClr val="dk2"/>
-          </a:fillRef>
-          <a:effectRef idx="0">
-            <a:schemeClr val="accent1"/>
-          </a:effectRef>
-          <a:fontRef idx="minor">
-            <a:schemeClr val="lt1"/>
-          </a:fontRef>
-        </p:style>
-        <p:txBody>
-          <a:bodyPr wrap="square" rtlCol="0" anchor="ctr">
-            <a:noAutofit/>
-          </a:bodyPr>
-          <a:lstStyle/>
-          <a:p>
-            <a:pPr algn="ctr"/>
-            <a:endParaRPr lang="en-US"/>
-          </a:p>
-        </p:txBody>
-      </p:sp>
-      <p:sp>
-        <p:nvSpPr>
-          <p:cNvPr id="2" name="Title 1">
-            <a:extLst>
-              <a:ext uri="{FF2B5EF4-FFF2-40B4-BE49-F238E27FC236}">
-                <a16:creationId xmlns:a16="http://schemas.microsoft.com/office/drawing/2014/main" id="{18E9F9D0-2793-E44C-5684-582DAADEB46E}"/>
-              </a:ext>
-            </a:extLst>
-          </p:cNvPr>
-          <p:cNvSpPr>
-            <a:spLocks noGrp="1"/>
-          </p:cNvSpPr>
-          <p:nvPr>
-            <p:ph type="title"/>
-          </p:nvPr>
-        </p:nvSpPr>
-        <p:spPr>
-          <a:xfrm>
-            <a:off x="1141413" y="609600"/>
-            <a:ext cx="9905998" cy="1173480"/>
-          </a:xfrm>
-        </p:spPr>
-        <p:txBody>
-          <a:bodyPr>
-            <a:normAutofit/>
-          </a:bodyPr>
-          <a:lstStyle/>
-          <a:p>
-            <a:pPr algn="ctr"/>
-            <a:r>
-              <a:rPr lang="en-US" b="1" dirty="0"/>
-              <a:t>clustering</a:t>
-            </a:r>
-            <a:endParaRPr lang="en-GB" b="1" dirty="0"/>
-          </a:p>
-        </p:txBody>
-      </p:sp>
-      <p:graphicFrame>
-        <p:nvGraphicFramePr>
-          <p:cNvPr id="4" name="Content Placeholder 3">
-            <a:extLst>
-              <a:ext uri="{FF2B5EF4-FFF2-40B4-BE49-F238E27FC236}">
-                <a16:creationId xmlns:a16="http://schemas.microsoft.com/office/drawing/2014/main" id="{10FD1615-B603-326A-5A32-F2F0051507F8}"/>
-              </a:ext>
-            </a:extLst>
-          </p:cNvPr>
-          <p:cNvGraphicFramePr>
-            <a:graphicFrameLocks noGrp="1"/>
-          </p:cNvGraphicFramePr>
-          <p:nvPr>
-            <p:ph idx="1"/>
-            <p:extLst>
-              <p:ext uri="{D42A27DB-BD31-4B8C-83A1-F6EECF244321}">
-                <p14:modId xmlns:p14="http://schemas.microsoft.com/office/powerpoint/2010/main" val="297005399"/>
-              </p:ext>
-            </p:extLst>
-          </p:nvPr>
-        </p:nvGraphicFramePr>
-        <p:xfrm>
-          <a:off x="1047145" y="2392681"/>
-          <a:ext cx="10535397" cy="1859280"/>
-        </p:xfrm>
-        <a:graphic>
-          <a:graphicData uri="http://schemas.openxmlformats.org/drawingml/2006/table">
-            <a:tbl>
-              <a:tblPr firstRow="1" bandRow="1">
-                <a:tableStyleId>{0660B408-B3CF-4A94-85FC-2B1E0A45F4A2}</a:tableStyleId>
-              </a:tblPr>
-              <a:tblGrid>
-                <a:gridCol w="731520">
-                  <a:extLst>
-                    <a:ext uri="{9D8B030D-6E8A-4147-A177-3AD203B41FA5}">
-                      <a16:colId xmlns:a16="http://schemas.microsoft.com/office/drawing/2014/main" val="1992855441"/>
-                    </a:ext>
-                  </a:extLst>
-                </a:gridCol>
-                <a:gridCol w="731520">
-                  <a:extLst>
-                    <a:ext uri="{9D8B030D-6E8A-4147-A177-3AD203B41FA5}">
-                      <a16:colId xmlns:a16="http://schemas.microsoft.com/office/drawing/2014/main" val="2776252282"/>
-                    </a:ext>
-                  </a:extLst>
-                </a:gridCol>
-                <a:gridCol w="1188720">
-                  <a:extLst>
-                    <a:ext uri="{9D8B030D-6E8A-4147-A177-3AD203B41FA5}">
-                      <a16:colId xmlns:a16="http://schemas.microsoft.com/office/drawing/2014/main" val="1857189033"/>
-                    </a:ext>
-                  </a:extLst>
-                </a:gridCol>
-                <a:gridCol w="4480560">
-                  <a:extLst>
-                    <a:ext uri="{9D8B030D-6E8A-4147-A177-3AD203B41FA5}">
-                      <a16:colId xmlns:a16="http://schemas.microsoft.com/office/drawing/2014/main" val="3943478546"/>
-                    </a:ext>
-                  </a:extLst>
-                </a:gridCol>
-                <a:gridCol w="3403077">
-                  <a:extLst>
-                    <a:ext uri="{9D8B030D-6E8A-4147-A177-3AD203B41FA5}">
-                      <a16:colId xmlns:a16="http://schemas.microsoft.com/office/drawing/2014/main" val="4014212960"/>
-                    </a:ext>
-                  </a:extLst>
-                </a:gridCol>
-              </a:tblGrid>
-              <a:tr h="457200">
-                <a:tc>
-                  <a:txBody>
-                    <a:bodyPr/>
-                    <a:lstStyle/>
-                    <a:p>
-                      <a:pPr algn="ctr" fontAlgn="ctr">
-                        <a:buNone/>
-                      </a:pPr>
-                      <a:br>
-                        <a:rPr lang="en-GB" sz="1400" dirty="0">
-                          <a:effectLst/>
-                        </a:rPr>
-                      </a:br>
-                      <a:r>
-                        <a:rPr lang="en-GB" sz="1400" dirty="0">
-                          <a:effectLst/>
-                        </a:rPr>
-                        <a:t>cluster</a:t>
-                      </a:r>
-                    </a:p>
-                  </a:txBody>
-                  <a:tcPr marL="60960" marR="60960" marT="30480" marB="30480" anchor="ctr"/>
-                </a:tc>
-                <a:tc>
-                  <a:txBody>
-                    <a:bodyPr/>
-                    <a:lstStyle/>
-                    <a:p>
-                      <a:pPr algn="ctr" fontAlgn="ctr">
-                        <a:buNone/>
-                      </a:pPr>
-                      <a:r>
-                        <a:rPr lang="en-GB" sz="1400" dirty="0">
-                          <a:effectLst/>
-                        </a:rPr>
-                        <a:t>size</a:t>
-                      </a:r>
-                    </a:p>
-                  </a:txBody>
-                  <a:tcPr marL="60960" marR="60960" marT="30480" marB="30480" anchor="ctr"/>
-                </a:tc>
-                <a:tc>
-                  <a:txBody>
-                    <a:bodyPr/>
-                    <a:lstStyle/>
-                    <a:p>
-                      <a:pPr algn="ctr" fontAlgn="ctr">
-                        <a:buNone/>
-                      </a:pPr>
-                      <a:r>
-                        <a:rPr lang="en-GB" sz="1400" dirty="0">
-                          <a:effectLst/>
-                        </a:rPr>
-                        <a:t>answer rate</a:t>
-                      </a:r>
-                    </a:p>
-                  </a:txBody>
-                  <a:tcPr marL="60960" marR="60960" marT="30480" marB="30480" anchor="ctr"/>
-                </a:tc>
-                <a:tc>
-                  <a:txBody>
-                    <a:bodyPr/>
-                    <a:lstStyle/>
-                    <a:p>
-                      <a:pPr algn="ctr" fontAlgn="ctr">
-                        <a:buNone/>
-                      </a:pPr>
-                      <a:r>
-                        <a:rPr lang="en-GB" sz="1400" dirty="0">
-                          <a:effectLst/>
-                        </a:rPr>
-                        <a:t>key pattern</a:t>
-                      </a:r>
-                    </a:p>
-                  </a:txBody>
-                  <a:tcPr marL="60960" marR="60960" marT="30480" marB="30480" anchor="ctr"/>
-                </a:tc>
-                <a:tc>
-                  <a:txBody>
-                    <a:bodyPr/>
-                    <a:lstStyle/>
-                    <a:p>
-                      <a:pPr algn="ctr" fontAlgn="ctr">
-                        <a:buNone/>
-                      </a:pPr>
-                      <a:r>
-                        <a:rPr lang="en-GB" sz="1400" dirty="0">
-                          <a:effectLst/>
-                        </a:rPr>
-                        <a:t>descriptive name</a:t>
-                      </a:r>
-                    </a:p>
-                  </a:txBody>
-                  <a:tcPr marL="60960" marR="60960" marT="30480" marB="30480" anchor="ctr"/>
-                </a:tc>
-                <a:extLst>
-                  <a:ext uri="{0D108BD9-81ED-4DB2-BD59-A6C34878D82A}">
-                    <a16:rowId xmlns:a16="http://schemas.microsoft.com/office/drawing/2014/main" val="10814174"/>
-                  </a:ext>
-                </a:extLst>
-              </a:tr>
-              <a:tr h="457200">
-                <a:tc>
-                  <a:txBody>
-                    <a:bodyPr/>
-                    <a:lstStyle/>
-                    <a:p>
-                      <a:pPr algn="ctr">
-                        <a:buNone/>
-                      </a:pPr>
-                      <a:r>
-                        <a:rPr lang="en-GB" sz="1400">
-                          <a:effectLst/>
-                        </a:rPr>
-                        <a:t>1</a:t>
-                      </a:r>
-                    </a:p>
-                  </a:txBody>
-                  <a:tcPr marL="60960" marR="60960" marT="30480" marB="30480" anchor="ctr"/>
-                </a:tc>
-                <a:tc>
-                  <a:txBody>
-                    <a:bodyPr/>
-                    <a:lstStyle/>
-                    <a:p>
-                      <a:pPr algn="ctr">
-                        <a:buNone/>
-                      </a:pPr>
-                      <a:r>
-                        <a:rPr lang="en-GB" sz="1400" dirty="0">
-                          <a:effectLst/>
-                        </a:rPr>
-                        <a:t>3</a:t>
-                      </a:r>
-                    </a:p>
-                  </a:txBody>
-                  <a:tcPr marL="60960" marR="60960" marT="30480" marB="30480" anchor="ctr"/>
-                </a:tc>
-                <a:tc>
-                  <a:txBody>
-                    <a:bodyPr/>
-                    <a:lstStyle/>
-                    <a:p>
-                      <a:pPr algn="ctr">
-                        <a:buNone/>
-                      </a:pPr>
-                      <a:r>
-                        <a:rPr lang="en-GB" sz="1400" dirty="0">
-                          <a:effectLst/>
-                        </a:rPr>
-                        <a:t>0.0%</a:t>
-                      </a:r>
-                    </a:p>
-                  </a:txBody>
-                  <a:tcPr marL="60960" marR="60960" marT="30480" marB="30480" anchor="ctr"/>
-                </a:tc>
-                <a:tc>
-                  <a:txBody>
-                    <a:bodyPr/>
-                    <a:lstStyle/>
-                    <a:p>
-                      <a:pPr>
-                        <a:buNone/>
-                      </a:pPr>
-                      <a:r>
-                        <a:rPr lang="en-GB" sz="1400" dirty="0">
-                          <a:effectLst/>
-                        </a:rPr>
-                        <a:t>Low aspect coverage, zero Jaccard similarity, ...</a:t>
-                      </a:r>
-                    </a:p>
-                  </a:txBody>
-                  <a:tcPr marL="60960" marR="60960" marT="30480" marB="30480" anchor="ctr"/>
-                </a:tc>
-                <a:tc>
-                  <a:txBody>
-                    <a:bodyPr/>
-                    <a:lstStyle/>
-                    <a:p>
-                      <a:pPr>
-                        <a:buNone/>
-                      </a:pPr>
-                      <a:r>
-                        <a:rPr lang="en-GB" sz="1400" dirty="0">
-                          <a:effectLst/>
-                        </a:rPr>
-                        <a:t>Unmatched / Refusal Candidates</a:t>
-                      </a:r>
-                    </a:p>
-                  </a:txBody>
-                  <a:tcPr marL="60960" marR="60960" marT="30480" marB="30480" anchor="ctr"/>
-                </a:tc>
-                <a:extLst>
-                  <a:ext uri="{0D108BD9-81ED-4DB2-BD59-A6C34878D82A}">
-                    <a16:rowId xmlns:a16="http://schemas.microsoft.com/office/drawing/2014/main" val="1842338819"/>
-                  </a:ext>
-                </a:extLst>
-              </a:tr>
-              <a:tr h="457200">
-                <a:tc>
-                  <a:txBody>
-                    <a:bodyPr/>
-                    <a:lstStyle/>
-                    <a:p>
-                      <a:pPr algn="ctr">
-                        <a:buNone/>
-                      </a:pPr>
-                      <a:r>
-                        <a:rPr lang="en-GB" sz="1400">
-                          <a:effectLst/>
-                        </a:rPr>
-                        <a:t>0</a:t>
-                      </a:r>
-                    </a:p>
-                  </a:txBody>
-                  <a:tcPr marL="60960" marR="60960" marT="30480" marB="30480" anchor="ctr"/>
-                </a:tc>
-                <a:tc>
-                  <a:txBody>
-                    <a:bodyPr/>
-                    <a:lstStyle/>
-                    <a:p>
-                      <a:pPr algn="ctr">
-                        <a:buNone/>
-                      </a:pPr>
-                      <a:r>
-                        <a:rPr lang="en-GB" sz="1400" dirty="0">
-                          <a:effectLst/>
-                        </a:rPr>
-                        <a:t>2555</a:t>
-                      </a:r>
-                    </a:p>
-                  </a:txBody>
-                  <a:tcPr marL="60960" marR="60960" marT="30480" marB="30480" anchor="ctr"/>
-                </a:tc>
-                <a:tc>
-                  <a:txBody>
-                    <a:bodyPr/>
-                    <a:lstStyle/>
-                    <a:p>
-                      <a:pPr algn="ctr">
-                        <a:buNone/>
-                      </a:pPr>
-                      <a:r>
-                        <a:rPr lang="en-GB" sz="1400" dirty="0">
-                          <a:effectLst/>
-                        </a:rPr>
-                        <a:t>65.6%</a:t>
-                      </a:r>
-                    </a:p>
-                  </a:txBody>
-                  <a:tcPr marL="60960" marR="60960" marT="30480" marB="30480" anchor="ctr"/>
-                </a:tc>
-                <a:tc>
-                  <a:txBody>
-                    <a:bodyPr/>
-                    <a:lstStyle/>
-                    <a:p>
-                      <a:pPr>
-                        <a:buNone/>
-                      </a:pPr>
-                      <a:r>
-                        <a:rPr lang="en-GB" sz="1400">
-                          <a:effectLst/>
-                        </a:rPr>
-                        <a:t>High tool count, high params, long complex que...</a:t>
-                      </a:r>
-                    </a:p>
-                  </a:txBody>
-                  <a:tcPr marL="60960" marR="60960" marT="30480" marB="30480" anchor="ctr"/>
-                </a:tc>
-                <a:tc>
-                  <a:txBody>
-                    <a:bodyPr/>
-                    <a:lstStyle/>
-                    <a:p>
-                      <a:pPr>
-                        <a:buNone/>
-                      </a:pPr>
-                      <a:r>
-                        <a:rPr lang="en-GB" sz="1400" dirty="0">
-                          <a:effectLst/>
-                        </a:rPr>
-                        <a:t>Complex Multi-Tool Scenarios</a:t>
-                      </a:r>
-                    </a:p>
-                  </a:txBody>
-                  <a:tcPr marL="60960" marR="60960" marT="30480" marB="30480" anchor="ctr"/>
-                </a:tc>
-                <a:extLst>
-                  <a:ext uri="{0D108BD9-81ED-4DB2-BD59-A6C34878D82A}">
-                    <a16:rowId xmlns:a16="http://schemas.microsoft.com/office/drawing/2014/main" val="3447888965"/>
-                  </a:ext>
-                </a:extLst>
-              </a:tr>
-              <a:tr h="457200">
-                <a:tc>
-                  <a:txBody>
-                    <a:bodyPr/>
-                    <a:lstStyle/>
-                    <a:p>
-                      <a:pPr algn="ctr">
-                        <a:buNone/>
-                      </a:pPr>
-                      <a:r>
-                        <a:rPr lang="en-GB" sz="1400" dirty="0">
-                          <a:effectLst/>
-                        </a:rPr>
-                        <a:t>2</a:t>
-                      </a:r>
-                    </a:p>
-                  </a:txBody>
-                  <a:tcPr marL="60960" marR="60960" marT="30480" marB="30480" anchor="ctr"/>
-                </a:tc>
-                <a:tc>
-                  <a:txBody>
-                    <a:bodyPr/>
-                    <a:lstStyle/>
-                    <a:p>
-                      <a:pPr algn="ctr">
-                        <a:buNone/>
-                      </a:pPr>
-                      <a:r>
-                        <a:rPr lang="en-GB" sz="1400" dirty="0">
-                          <a:effectLst/>
-                        </a:rPr>
-                        <a:t>933</a:t>
-                      </a:r>
-                    </a:p>
-                  </a:txBody>
-                  <a:tcPr marL="60960" marR="60960" marT="30480" marB="30480" anchor="ctr"/>
-                </a:tc>
-                <a:tc>
-                  <a:txBody>
-                    <a:bodyPr/>
-                    <a:lstStyle/>
-                    <a:p>
-                      <a:pPr algn="ctr">
-                        <a:buNone/>
-                      </a:pPr>
-                      <a:r>
-                        <a:rPr lang="en-GB" sz="1400" dirty="0">
-                          <a:effectLst/>
-                        </a:rPr>
-                        <a:t>74.0%</a:t>
-                      </a:r>
-                    </a:p>
-                  </a:txBody>
-                  <a:tcPr marL="60960" marR="60960" marT="30480" marB="30480" anchor="ctr"/>
-                </a:tc>
-                <a:tc>
-                  <a:txBody>
-                    <a:bodyPr/>
-                    <a:lstStyle/>
-                    <a:p>
-                      <a:pPr>
-                        <a:buNone/>
-                      </a:pPr>
-                      <a:r>
-                        <a:rPr lang="en-GB" sz="1400">
-                          <a:effectLst/>
-                        </a:rPr>
-                        <a:t>High aspect coverage, few tools, direct token ...</a:t>
-                      </a:r>
-                    </a:p>
-                  </a:txBody>
-                  <a:tcPr marL="60960" marR="60960" marT="30480" marB="30480" anchor="ctr"/>
-                </a:tc>
-                <a:tc>
-                  <a:txBody>
-                    <a:bodyPr/>
-                    <a:lstStyle/>
-                    <a:p>
-                      <a:pPr>
-                        <a:buNone/>
-                      </a:pPr>
-                      <a:r>
-                        <a:rPr lang="en-GB" sz="1400" dirty="0">
-                          <a:effectLst/>
-                        </a:rPr>
-                        <a:t>Simple Direct Matches</a:t>
-                      </a:r>
-                    </a:p>
-                  </a:txBody>
-                  <a:tcPr marL="60960" marR="60960" marT="30480" marB="30480" anchor="ctr"/>
-                </a:tc>
-                <a:extLst>
-                  <a:ext uri="{0D108BD9-81ED-4DB2-BD59-A6C34878D82A}">
-                    <a16:rowId xmlns:a16="http://schemas.microsoft.com/office/drawing/2014/main" val="4197678085"/>
-                  </a:ext>
-                </a:extLst>
-              </a:tr>
-            </a:tbl>
-          </a:graphicData>
-        </a:graphic>
-      </p:graphicFrame>
-      <p:sp>
-        <p:nvSpPr>
-          <p:cNvPr id="7" name="Content Placeholder 2">
-            <a:extLst>
-              <a:ext uri="{FF2B5EF4-FFF2-40B4-BE49-F238E27FC236}">
-                <a16:creationId xmlns:a16="http://schemas.microsoft.com/office/drawing/2014/main" id="{2CF7EE47-944B-89A6-068C-7C8B5C086B00}"/>
-              </a:ext>
-            </a:extLst>
-          </p:cNvPr>
-          <p:cNvSpPr txBox="1">
-            <a:spLocks/>
-          </p:cNvSpPr>
-          <p:nvPr/>
-        </p:nvSpPr>
-        <p:spPr>
-          <a:xfrm>
-            <a:off x="546754" y="4775583"/>
-            <a:ext cx="11246177" cy="1362745"/>
-          </a:xfrm>
-          <a:prstGeom prst="rect">
-            <a:avLst/>
-          </a:prstGeom>
-        </p:spPr>
-        <p:txBody>
-          <a:bodyPr vert="horz" lIns="91440" tIns="45720" rIns="91440" bIns="45720" rtlCol="0" anchor="ctr">
-            <a:normAutofit lnSpcReduction="10000"/>
-          </a:bodyPr>
-          <a:lstStyle>
-            <a:lvl1pPr marL="285750" indent="-285750" algn="l" defTabSz="457200" rtl="0" eaLnBrk="1" latinLnBrk="0" hangingPunct="1">
-              <a:spcBef>
-                <a:spcPct val="20000"/>
-              </a:spcBef>
-              <a:spcAft>
-                <a:spcPts val="600"/>
-              </a:spcAft>
-              <a:buClr>
-                <a:schemeClr val="tx1"/>
-              </a:buClr>
-              <a:buSzPct val="100000"/>
-              <a:buFont typeface="Arial"/>
-              <a:buChar char="•"/>
-              <a:defRPr sz="2000" kern="1200" cap="small">
-                <a:gradFill flip="none" rotWithShape="1">
-                  <a:gsLst>
-                    <a:gs pos="0">
-                      <a:schemeClr val="tx1"/>
-                    </a:gs>
-                    <a:gs pos="100000">
-                      <a:schemeClr val="tx1">
-                        <a:lumMod val="75000"/>
-                      </a:schemeClr>
-                    </a:gs>
-                  </a:gsLst>
-                  <a:lin ang="5580000" scaled="0"/>
-                  <a:tileRect/>
-                </a:gradFill>
-                <a:effectLst>
-                  <a:glow rad="38100">
-                    <a:schemeClr val="bg1">
-                      <a:lumMod val="50000"/>
-                      <a:lumOff val="50000"/>
-                      <a:alpha val="20000"/>
-                    </a:schemeClr>
-                  </a:glow>
-                  <a:outerShdw blurRad="44450" dist="12700" dir="13860000" algn="tl" rotWithShape="0">
-                    <a:srgbClr val="000000">
-                      <a:alpha val="20000"/>
-                    </a:srgbClr>
-                  </a:outerShdw>
-                </a:effectLst>
-                <a:latin typeface="+mn-lt"/>
-                <a:ea typeface="+mn-ea"/>
-                <a:cs typeface="+mn-cs"/>
-              </a:defRPr>
-            </a:lvl1pPr>
-            <a:lvl2pPr marL="742950" indent="-285750" algn="l" defTabSz="457200" rtl="0" eaLnBrk="1" latinLnBrk="0" hangingPunct="1">
-              <a:spcBef>
-                <a:spcPct val="20000"/>
-              </a:spcBef>
-              <a:spcAft>
-                <a:spcPts val="600"/>
-              </a:spcAft>
-              <a:buClr>
-                <a:schemeClr val="tx1"/>
-              </a:buClr>
-              <a:buSzPct val="100000"/>
-              <a:buFont typeface="Arial"/>
-              <a:buChar char="•"/>
-              <a:defRPr sz="1800" kern="1200" cap="small">
-                <a:gradFill flip="none" rotWithShape="1">
-                  <a:gsLst>
-                    <a:gs pos="0">
-                      <a:schemeClr val="tx1"/>
-                    </a:gs>
-                    <a:gs pos="100000">
-                      <a:schemeClr val="tx1">
-                        <a:lumMod val="75000"/>
-                      </a:schemeClr>
-                    </a:gs>
-                  </a:gsLst>
-                  <a:lin ang="5580000" scaled="0"/>
-                  <a:tileRect/>
-                </a:gradFill>
-                <a:effectLst>
-                  <a:glow rad="38100">
-                    <a:schemeClr val="bg1">
-                      <a:lumMod val="50000"/>
-                      <a:lumOff val="50000"/>
-                      <a:alpha val="20000"/>
-                    </a:schemeClr>
-                  </a:glow>
-                  <a:outerShdw blurRad="44450" dist="12700" dir="13860000" algn="tl" rotWithShape="0">
-                    <a:srgbClr val="000000">
-                      <a:alpha val="20000"/>
-                    </a:srgbClr>
-                  </a:outerShdw>
-                </a:effectLst>
-                <a:latin typeface="+mn-lt"/>
-                <a:ea typeface="+mn-ea"/>
-                <a:cs typeface="+mn-cs"/>
-              </a:defRPr>
-            </a:lvl2pPr>
-            <a:lvl3pPr marL="1200150" indent="-285750" algn="l" defTabSz="457200" rtl="0" eaLnBrk="1" latinLnBrk="0" hangingPunct="1">
-              <a:spcBef>
-                <a:spcPct val="20000"/>
-              </a:spcBef>
-              <a:spcAft>
-                <a:spcPts val="600"/>
-              </a:spcAft>
-              <a:buClr>
-                <a:schemeClr val="tx1"/>
-              </a:buClr>
-              <a:buSzPct val="100000"/>
-              <a:buFont typeface="Arial"/>
-              <a:buChar char="•"/>
-              <a:defRPr sz="1600" kern="1200" cap="small">
-                <a:gradFill flip="none" rotWithShape="1">
-                  <a:gsLst>
-                    <a:gs pos="0">
-                      <a:schemeClr val="tx1"/>
-                    </a:gs>
-                    <a:gs pos="100000">
-                      <a:schemeClr val="tx1">
-                        <a:lumMod val="75000"/>
-                      </a:schemeClr>
-                    </a:gs>
-                  </a:gsLst>
-                  <a:lin ang="5580000" scaled="0"/>
-                  <a:tileRect/>
-                </a:gradFill>
-                <a:effectLst>
-                  <a:glow rad="38100">
-                    <a:schemeClr val="bg1">
-                      <a:lumMod val="50000"/>
-                      <a:lumOff val="50000"/>
-                      <a:alpha val="20000"/>
-                    </a:schemeClr>
-                  </a:glow>
-                  <a:outerShdw blurRad="44450" dist="12700" dir="13860000" algn="tl" rotWithShape="0">
-                    <a:srgbClr val="000000">
-                      <a:alpha val="20000"/>
-                    </a:srgbClr>
-                  </a:outerShdw>
-                </a:effectLst>
-                <a:latin typeface="+mn-lt"/>
-                <a:ea typeface="+mn-ea"/>
-                <a:cs typeface="+mn-cs"/>
-              </a:defRPr>
-            </a:lvl3pPr>
-            <a:lvl4pPr marL="1543050" indent="-171450" algn="l" defTabSz="457200" rtl="0" eaLnBrk="1" latinLnBrk="0" hangingPunct="1">
-              <a:spcBef>
-                <a:spcPct val="20000"/>
-              </a:spcBef>
-              <a:spcAft>
-                <a:spcPts val="600"/>
-              </a:spcAft>
-              <a:buClr>
-                <a:schemeClr val="tx1"/>
-              </a:buClr>
-              <a:buSzPct val="100000"/>
-              <a:buFont typeface="Arial"/>
-              <a:buChar char="•"/>
-              <a:defRPr sz="1400" kern="1200" cap="small">
-                <a:gradFill flip="none" rotWithShape="1">
-                  <a:gsLst>
-                    <a:gs pos="0">
-                      <a:schemeClr val="tx1"/>
-                    </a:gs>
-                    <a:gs pos="100000">
-                      <a:schemeClr val="tx1">
-                        <a:lumMod val="75000"/>
-                      </a:schemeClr>
-                    </a:gs>
-                  </a:gsLst>
-                  <a:lin ang="5580000" scaled="0"/>
-                  <a:tileRect/>
-                </a:gradFill>
-                <a:effectLst>
-                  <a:glow rad="38100">
-                    <a:schemeClr val="bg1">
-                      <a:lumMod val="50000"/>
-                      <a:lumOff val="50000"/>
-                      <a:alpha val="20000"/>
-                    </a:schemeClr>
-                  </a:glow>
-                  <a:outerShdw blurRad="44450" dist="12700" dir="13860000" algn="tl" rotWithShape="0">
-                    <a:srgbClr val="000000">
-                      <a:alpha val="20000"/>
-                    </a:srgbClr>
-                  </a:outerShdw>
-                </a:effectLst>
-                <a:latin typeface="+mn-lt"/>
-                <a:ea typeface="+mn-ea"/>
-                <a:cs typeface="+mn-cs"/>
-              </a:defRPr>
-            </a:lvl4pPr>
-            <a:lvl5pPr marL="2000250" indent="-171450" algn="l" defTabSz="457200" rtl="0" eaLnBrk="1" latinLnBrk="0" hangingPunct="1">
-              <a:spcBef>
-                <a:spcPct val="20000"/>
-              </a:spcBef>
-              <a:spcAft>
-                <a:spcPts val="600"/>
-              </a:spcAft>
-              <a:buClr>
-                <a:schemeClr val="tx1"/>
-              </a:buClr>
-              <a:buSzPct val="100000"/>
-              <a:buFont typeface="Arial"/>
-              <a:buChar char="•"/>
-              <a:defRPr sz="1400" kern="1200" cap="small">
-                <a:gradFill flip="none" rotWithShape="1">
-                  <a:gsLst>
-                    <a:gs pos="0">
-                      <a:schemeClr val="tx1"/>
-                    </a:gs>
-                    <a:gs pos="100000">
-                      <a:schemeClr val="tx1">
-                        <a:lumMod val="75000"/>
-                      </a:schemeClr>
-                    </a:gs>
-                  </a:gsLst>
-                  <a:lin ang="5580000" scaled="0"/>
-                  <a:tileRect/>
-                </a:gradFill>
-                <a:effectLst>
-                  <a:glow rad="38100">
-                    <a:schemeClr val="bg1">
-                      <a:lumMod val="50000"/>
-                      <a:lumOff val="50000"/>
-                      <a:alpha val="20000"/>
-                    </a:schemeClr>
-                  </a:glow>
-                  <a:outerShdw blurRad="44450" dist="12700" dir="13860000" algn="tl" rotWithShape="0">
-                    <a:srgbClr val="000000">
-                      <a:alpha val="20000"/>
-                    </a:srgbClr>
-                  </a:outerShdw>
-                </a:effectLst>
-                <a:latin typeface="+mn-lt"/>
-                <a:ea typeface="+mn-ea"/>
-                <a:cs typeface="+mn-cs"/>
-              </a:defRPr>
-            </a:lvl5pPr>
-            <a:lvl6pPr marL="2514600" indent="-228600" algn="l" defTabSz="457200" rtl="0" eaLnBrk="1" latinLnBrk="0" hangingPunct="1">
-              <a:spcBef>
-                <a:spcPct val="20000"/>
-              </a:spcBef>
-              <a:spcAft>
-                <a:spcPts val="600"/>
-              </a:spcAft>
-              <a:buClr>
-                <a:schemeClr val="tx1"/>
-              </a:buClr>
-              <a:buSzPct val="100000"/>
-              <a:buFont typeface="Arial"/>
-              <a:buChar char="•"/>
-              <a:defRPr sz="1200" kern="1200" cap="small">
-                <a:gradFill flip="none" rotWithShape="1">
-                  <a:gsLst>
-                    <a:gs pos="0">
-                      <a:schemeClr val="tx1"/>
-                    </a:gs>
-                    <a:gs pos="100000">
-                      <a:schemeClr val="tx1">
-                        <a:lumMod val="75000"/>
-                      </a:schemeClr>
-                    </a:gs>
-                  </a:gsLst>
-                  <a:lin ang="5580000" scaled="0"/>
-                  <a:tileRect/>
-                </a:gradFill>
-                <a:effectLst>
-                  <a:glow rad="38100">
-                    <a:schemeClr val="bg1">
-                      <a:lumMod val="50000"/>
-                      <a:lumOff val="50000"/>
-                      <a:alpha val="20000"/>
-                    </a:schemeClr>
-                  </a:glow>
-                  <a:outerShdw blurRad="44450" dist="12700" dir="13860000" algn="tl" rotWithShape="0">
-                    <a:srgbClr val="000000">
-                      <a:alpha val="20000"/>
-                    </a:srgbClr>
-                  </a:outerShdw>
-                </a:effectLst>
-                <a:latin typeface="+mn-lt"/>
-                <a:ea typeface="+mn-ea"/>
-                <a:cs typeface="+mn-cs"/>
-              </a:defRPr>
-            </a:lvl6pPr>
-            <a:lvl7pPr marL="2971800" indent="-228600" algn="l" defTabSz="457200" rtl="0" eaLnBrk="1" latinLnBrk="0" hangingPunct="1">
-              <a:spcBef>
-                <a:spcPct val="20000"/>
-              </a:spcBef>
-              <a:spcAft>
-                <a:spcPts val="600"/>
-              </a:spcAft>
-              <a:buClr>
-                <a:schemeClr val="tx1"/>
-              </a:buClr>
-              <a:buSzPct val="100000"/>
-              <a:buFont typeface="Arial"/>
-              <a:buChar char="•"/>
-              <a:defRPr sz="1200" kern="1200" cap="small">
-                <a:gradFill flip="none" rotWithShape="1">
-                  <a:gsLst>
-                    <a:gs pos="0">
-                      <a:schemeClr val="tx1"/>
-                    </a:gs>
-                    <a:gs pos="100000">
-                      <a:schemeClr val="tx1">
-                        <a:lumMod val="75000"/>
-                      </a:schemeClr>
-                    </a:gs>
-                  </a:gsLst>
-                  <a:lin ang="5580000" scaled="0"/>
-                  <a:tileRect/>
-                </a:gradFill>
-                <a:effectLst>
-                  <a:glow rad="38100">
-                    <a:schemeClr val="bg1">
-                      <a:lumMod val="50000"/>
-                      <a:lumOff val="50000"/>
-                      <a:alpha val="20000"/>
-                    </a:schemeClr>
-                  </a:glow>
-                  <a:outerShdw blurRad="44450" dist="12700" dir="13860000" algn="tl" rotWithShape="0">
-                    <a:srgbClr val="000000">
-                      <a:alpha val="20000"/>
-                    </a:srgbClr>
-                  </a:outerShdw>
-                </a:effectLst>
-                <a:latin typeface="+mn-lt"/>
-                <a:ea typeface="+mn-ea"/>
-                <a:cs typeface="+mn-cs"/>
-              </a:defRPr>
-            </a:lvl7pPr>
-            <a:lvl8pPr marL="3429000" indent="-228600" algn="l" defTabSz="457200" rtl="0" eaLnBrk="1" latinLnBrk="0" hangingPunct="1">
-              <a:spcBef>
-                <a:spcPct val="20000"/>
-              </a:spcBef>
-              <a:spcAft>
-                <a:spcPts val="600"/>
-              </a:spcAft>
-              <a:buClr>
-                <a:schemeClr val="tx1"/>
-              </a:buClr>
-              <a:buSzPct val="100000"/>
-              <a:buFont typeface="Arial"/>
-              <a:buChar char="•"/>
-              <a:defRPr sz="1200" kern="1200" cap="small">
-                <a:gradFill flip="none" rotWithShape="1">
-                  <a:gsLst>
-                    <a:gs pos="0">
-                      <a:schemeClr val="tx1"/>
-                    </a:gs>
-                    <a:gs pos="100000">
-                      <a:schemeClr val="tx1">
-                        <a:lumMod val="75000"/>
-                      </a:schemeClr>
-                    </a:gs>
-                  </a:gsLst>
-                  <a:lin ang="5580000" scaled="0"/>
-                  <a:tileRect/>
-                </a:gradFill>
-                <a:effectLst>
-                  <a:glow rad="38100">
-                    <a:schemeClr val="bg1">
-                      <a:lumMod val="50000"/>
-                      <a:lumOff val="50000"/>
-                      <a:alpha val="20000"/>
-                    </a:schemeClr>
-                  </a:glow>
-                  <a:outerShdw blurRad="44450" dist="12700" dir="13860000" algn="tl" rotWithShape="0">
-                    <a:srgbClr val="000000">
-                      <a:alpha val="20000"/>
-                    </a:srgbClr>
-                  </a:outerShdw>
-                </a:effectLst>
-                <a:latin typeface="+mn-lt"/>
-                <a:ea typeface="+mn-ea"/>
-                <a:cs typeface="+mn-cs"/>
-              </a:defRPr>
-            </a:lvl8pPr>
-            <a:lvl9pPr marL="3886200" indent="-228600" algn="l" defTabSz="457200" rtl="0" eaLnBrk="1" latinLnBrk="0" hangingPunct="1">
-              <a:spcBef>
-                <a:spcPct val="20000"/>
-              </a:spcBef>
-              <a:spcAft>
-                <a:spcPts val="600"/>
-              </a:spcAft>
-              <a:buClr>
-                <a:schemeClr val="tx1"/>
-              </a:buClr>
-              <a:buSzPct val="100000"/>
-              <a:buFont typeface="Arial"/>
-              <a:buChar char="•"/>
-              <a:defRPr sz="1200" kern="1200" cap="small">
-                <a:gradFill flip="none" rotWithShape="1">
-                  <a:gsLst>
-                    <a:gs pos="0">
-                      <a:schemeClr val="tx1"/>
-                    </a:gs>
-                    <a:gs pos="100000">
-                      <a:schemeClr val="tx1">
-                        <a:lumMod val="75000"/>
-                      </a:schemeClr>
-                    </a:gs>
-                  </a:gsLst>
-                  <a:lin ang="5580000" scaled="0"/>
-                  <a:tileRect/>
-                </a:gradFill>
-                <a:effectLst>
-                  <a:glow rad="38100">
-                    <a:schemeClr val="bg1">
-                      <a:lumMod val="50000"/>
-                      <a:lumOff val="50000"/>
-                      <a:alpha val="20000"/>
-                    </a:schemeClr>
-                  </a:glow>
-                  <a:outerShdw blurRad="44450" dist="12700" dir="13860000" algn="tl" rotWithShape="0">
-                    <a:srgbClr val="000000">
-                      <a:alpha val="20000"/>
-                    </a:srgbClr>
-                  </a:outerShdw>
-                </a:effectLst>
-                <a:latin typeface="+mn-lt"/>
-                <a:ea typeface="+mn-ea"/>
-                <a:cs typeface="+mn-cs"/>
-              </a:defRPr>
-            </a:lvl9pPr>
-          </a:lstStyle>
-          <a:p>
-            <a:pPr marL="0" indent="0">
-              <a:buNone/>
-            </a:pPr>
-            <a:r>
-              <a:rPr lang="en-US" dirty="0"/>
-              <a:t>We know that lower token similarity is a strong indicator for refusal to answer and so We isolated the pure refusal group, which will have 0% answerable rate, using ward linkage clustering. Picking those with token </a:t>
-            </a:r>
-            <a:r>
-              <a:rPr lang="en-US" dirty="0" err="1"/>
-              <a:t>jaccard</a:t>
-            </a:r>
-            <a:r>
-              <a:rPr lang="en-US" dirty="0"/>
-              <a:t> →0 meaning it has almost no overlap between the user’s words and the tokens.</a:t>
-            </a:r>
-          </a:p>
-          <a:p>
-            <a:pPr marL="0" indent="0">
-              <a:buNone/>
-            </a:pPr>
-            <a:endParaRPr lang="en-US" dirty="0"/>
-          </a:p>
-        </p:txBody>
-      </p:sp>
-    </p:spTree>
-    <p:extLst>
-      <p:ext uri="{BB962C8B-B14F-4D97-AF65-F5344CB8AC3E}">
-        <p14:creationId xmlns:p14="http://schemas.microsoft.com/office/powerpoint/2010/main" val="1097784871"/>
-      </p:ext>
-    </p:extLst>
-  </p:cSld>
-  <p:clrMapOvr>
-    <a:masterClrMapping/>
-  </p:clrMapOvr>
-</p:sld>
-</file>
-
-<file path=ppt/slides/slide6.xml><?xml version="1.0" encoding="utf-8"?>
-<p:sld xmlns:a="http://schemas.openxmlformats.org/drawingml/2006/main" xmlns:r="http://schemas.openxmlformats.org/officeDocument/2006/relationships" xmlns:p="http://schemas.openxmlformats.org/presentationml/2006/main">
-  <p:cSld>
-    <p:bg>
-      <p:bgPr>
-        <a:blipFill rotWithShape="1">
-          <a:blip r:embed="rId2">
-            <a:duotone>
-              <a:schemeClr val="bg2">
-                <a:shade val="28000"/>
-                <a:satMod val="94000"/>
-                <a:lumMod val="20000"/>
-              </a:schemeClr>
-              <a:schemeClr val="bg2">
-                <a:tint val="94000"/>
-                <a:shade val="84000"/>
-                <a:satMod val="148000"/>
-                <a:lumMod val="114000"/>
-              </a:schemeClr>
-            </a:duotone>
-          </a:blip>
-          <a:stretch/>
-        </a:blipFill>
-        <a:effectLst/>
-      </p:bgPr>
-    </p:bg>
-    <p:spTree>
-      <p:nvGrpSpPr>
-        <p:cNvPr id="1" name=""/>
-        <p:cNvGrpSpPr/>
-        <p:nvPr/>
-      </p:nvGrpSpPr>
-      <p:grpSpPr>
-        <a:xfrm>
-          <a:off x="0" y="0"/>
-          <a:ext cx="0" cy="0"/>
-          <a:chOff x="0" y="0"/>
-          <a:chExt cx="0" cy="0"/>
-        </a:xfrm>
-      </p:grpSpPr>
-      <p:sp>
-        <p:nvSpPr>
-          <p:cNvPr id="2" name="Title 1">
-            <a:extLst>
-              <a:ext uri="{FF2B5EF4-FFF2-40B4-BE49-F238E27FC236}">
-                <a16:creationId xmlns:a16="http://schemas.microsoft.com/office/drawing/2014/main" id="{DF705ED6-164E-6ED4-97AB-B7B5A62CD61A}"/>
-              </a:ext>
-            </a:extLst>
-          </p:cNvPr>
-          <p:cNvSpPr>
-            <a:spLocks noGrp="1"/>
-          </p:cNvSpPr>
-          <p:nvPr>
-            <p:ph type="title"/>
-          </p:nvPr>
-        </p:nvSpPr>
-        <p:spPr>
-          <a:xfrm>
-            <a:off x="669851" y="1430179"/>
-            <a:ext cx="3029313" cy="3675908"/>
-          </a:xfrm>
-        </p:spPr>
-        <p:txBody>
-          <a:bodyPr anchor="ctr">
-            <a:normAutofit/>
-          </a:bodyPr>
-          <a:lstStyle/>
-          <a:p>
-            <a:r>
-              <a:rPr lang="en-US" sz="4000" b="1" dirty="0"/>
-              <a:t>summary</a:t>
-            </a:r>
-            <a:endParaRPr lang="en-GB" sz="4000" b="1" dirty="0"/>
-          </a:p>
-        </p:txBody>
-      </p:sp>
-      <p:sp>
-        <p:nvSpPr>
-          <p:cNvPr id="18" name="Rectangle 17">
-            <a:extLst>
-              <a:ext uri="{FF2B5EF4-FFF2-40B4-BE49-F238E27FC236}">
-                <a16:creationId xmlns:a16="http://schemas.microsoft.com/office/drawing/2014/main" id="{7E475056-B0EB-44BE-8568-61ABEFB2E99D}"/>
-              </a:ext>
-              <a:ext uri="{C183D7F6-B498-43B3-948B-1728B52AA6E4}">
-                <adec:decorative xmlns:adec="http://schemas.microsoft.com/office/drawing/2017/decorative" val="1"/>
-              </a:ext>
-            </a:extLst>
-          </p:cNvPr>
-          <p:cNvSpPr>
-            <a:spLocks noGrp="1" noRot="1" noChangeAspect="1" noMove="1" noResize="1" noEditPoints="1" noAdjustHandles="1" noChangeArrowheads="1" noChangeShapeType="1" noTextEdit="1"/>
-          </p:cNvSpPr>
-          <p:nvPr>
-            <p:extLst>
-              <p:ext uri="{386F3935-93C4-4BCD-93E2-E3B085C9AB24}">
-                <p16:designElem xmlns:p16="http://schemas.microsoft.com/office/powerpoint/2015/main" val="1"/>
-              </p:ext>
-            </p:extLst>
-          </p:nvPr>
-        </p:nvSpPr>
-        <p:spPr>
-          <a:xfrm>
-            <a:off x="4059934" y="0"/>
-            <a:ext cx="8132066" cy="6858000"/>
-          </a:xfrm>
-          <a:prstGeom prst="rect">
-            <a:avLst/>
-          </a:prstGeom>
-          <a:solidFill>
-            <a:schemeClr val="bg2"/>
-          </a:solidFill>
-          <a:ln>
-            <a:noFill/>
-          </a:ln>
-          <a:effectLst>
-            <a:innerShdw blurRad="63500" dist="50800" dir="10800000">
-              <a:prstClr val="black">
-                <a:alpha val="50000"/>
-              </a:prstClr>
-            </a:innerShdw>
-          </a:effectLst>
-        </p:spPr>
-        <p:style>
-          <a:lnRef idx="2">
-            <a:schemeClr val="accent1">
-              <a:shade val="50000"/>
-            </a:schemeClr>
-          </a:lnRef>
-          <a:fillRef idx="1">
-            <a:schemeClr val="accent1"/>
-          </a:fillRef>
-          <a:effectRef idx="0">
-            <a:schemeClr val="accent1"/>
-          </a:effectRef>
-          <a:fontRef idx="minor">
-            <a:schemeClr val="lt1"/>
-          </a:fontRef>
-        </p:style>
-        <p:txBody>
-          <a:bodyPr rtlCol="0" anchor="ctr"/>
-          <a:lstStyle/>
-          <a:p>
-            <a:pPr algn="ctr"/>
-            <a:endParaRPr lang="en-US"/>
-          </a:p>
-        </p:txBody>
-      </p:sp>
-      <p:cxnSp>
-        <p:nvCxnSpPr>
-          <p:cNvPr id="20" name="Straight Connector 19">
-            <a:extLst>
-              <a:ext uri="{FF2B5EF4-FFF2-40B4-BE49-F238E27FC236}">
-                <a16:creationId xmlns:a16="http://schemas.microsoft.com/office/drawing/2014/main" id="{F2C8E2EC-73A4-48C2-B4D7-D7726BD908EE}"/>
-              </a:ext>
-              <a:ext uri="{C183D7F6-B498-43B3-948B-1728B52AA6E4}">
-                <adec:decorative xmlns:adec="http://schemas.microsoft.com/office/drawing/2017/decorative" val="1"/>
-              </a:ext>
-            </a:extLst>
-          </p:cNvPr>
-          <p:cNvCxnSpPr>
-            <a:cxnSpLocks noGrp="1" noRot="1" noChangeAspect="1" noMove="1" noResize="1" noEditPoints="1" noAdjustHandles="1" noChangeArrowheads="1" noChangeShapeType="1"/>
-          </p:cNvCxnSpPr>
-          <p:nvPr>
-            <p:extLst>
-              <p:ext uri="{386F3935-93C4-4BCD-93E2-E3B085C9AB24}">
-                <p16:designElem xmlns:p16="http://schemas.microsoft.com/office/powerpoint/2015/main" val="1"/>
-              </p:ext>
-            </p:extLst>
-          </p:nvPr>
-        </p:nvCxnSpPr>
-        <p:spPr>
-          <a:xfrm>
-            <a:off x="4069971" y="0"/>
-            <a:ext cx="0" cy="6858000"/>
-          </a:xfrm>
-          <a:prstGeom prst="line">
-            <a:avLst/>
-          </a:prstGeom>
-          <a:solidFill>
-            <a:srgbClr val="FFFFFF"/>
-          </a:solidFill>
-          <a:ln w="38100" cap="flat">
-            <a:gradFill flip="none" rotWithShape="1">
-              <a:gsLst>
-                <a:gs pos="0">
-                  <a:srgbClr val="363D46"/>
-                </a:gs>
-                <a:gs pos="100000">
-                  <a:srgbClr val="363D46">
-                    <a:lumMod val="75000"/>
-                  </a:srgbClr>
-                </a:gs>
-              </a:gsLst>
-              <a:lin ang="5400000" scaled="0"/>
-              <a:tileRect/>
-            </a:gradFill>
-            <a:miter lim="800000"/>
-          </a:ln>
-          <a:effectLst>
-            <a:innerShdw blurRad="57150" dist="38100" dir="14460000">
-              <a:srgbClr val="000000">
-                <a:alpha val="70000"/>
-              </a:srgbClr>
-            </a:innerShdw>
-          </a:effectLst>
-        </p:spPr>
-        <p:style>
-          <a:lnRef idx="2">
-            <a:schemeClr val="accent1">
-              <a:shade val="50000"/>
-            </a:schemeClr>
-          </a:lnRef>
-          <a:fillRef idx="1">
-            <a:schemeClr val="accent1"/>
-          </a:fillRef>
-          <a:effectRef idx="0">
-            <a:schemeClr val="accent1"/>
-          </a:effectRef>
-          <a:fontRef idx="minor">
-            <a:schemeClr val="lt1"/>
-          </a:fontRef>
-        </p:style>
-      </p:cxnSp>
-      <p:sp>
-        <p:nvSpPr>
-          <p:cNvPr id="22" name="Rectangle 21">
-            <a:extLst>
-              <a:ext uri="{FF2B5EF4-FFF2-40B4-BE49-F238E27FC236}">
-                <a16:creationId xmlns:a16="http://schemas.microsoft.com/office/drawing/2014/main" id="{E82ABBDC-7A44-4AE8-A04F-B5495481B9F2}"/>
-              </a:ext>
-              <a:ext uri="{C183D7F6-B498-43B3-948B-1728B52AA6E4}">
-                <adec:decorative xmlns:adec="http://schemas.microsoft.com/office/drawing/2017/decorative" val="1"/>
-              </a:ext>
-            </a:extLst>
-          </p:cNvPr>
-          <p:cNvSpPr>
-            <a:spLocks noGrp="1" noRot="1" noChangeAspect="1" noMove="1" noResize="1" noEditPoints="1" noAdjustHandles="1" noChangeArrowheads="1" noChangeShapeType="1" noTextEdit="1"/>
-          </p:cNvSpPr>
-          <p:nvPr>
-            <p:extLst>
-              <p:ext uri="{386F3935-93C4-4BCD-93E2-E3B085C9AB24}">
-                <p16:designElem xmlns:p16="http://schemas.microsoft.com/office/powerpoint/2015/main" val="1"/>
-              </p:ext>
-            </p:extLst>
-          </p:nvPr>
-        </p:nvSpPr>
-        <p:spPr>
-          <a:xfrm rot="5400000" flipH="1">
-            <a:off x="894952" y="3195797"/>
-            <a:ext cx="6858000" cy="466406"/>
-          </a:xfrm>
-          <a:prstGeom prst="rect">
-            <a:avLst/>
-          </a:prstGeom>
-          <a:gradFill>
-            <a:gsLst>
-              <a:gs pos="0">
-                <a:srgbClr val="363D46">
-                  <a:alpha val="0"/>
-                </a:srgbClr>
-              </a:gs>
-              <a:gs pos="100000">
-                <a:srgbClr val="363D46">
-                  <a:lumMod val="75000"/>
-                </a:srgbClr>
-              </a:gs>
-            </a:gsLst>
-            <a:lin ang="5400000" scaled="0"/>
-          </a:gradFill>
-          <a:ln>
-            <a:noFill/>
-          </a:ln>
-          <a:effectLst/>
-        </p:spPr>
-        <p:style>
-          <a:lnRef idx="2">
-            <a:schemeClr val="accent1">
-              <a:shade val="50000"/>
-            </a:schemeClr>
-          </a:lnRef>
-          <a:fillRef idx="1">
-            <a:schemeClr val="accent1"/>
-          </a:fillRef>
-          <a:effectRef idx="0">
-            <a:schemeClr val="accent1"/>
-          </a:effectRef>
-          <a:fontRef idx="minor">
-            <a:schemeClr val="lt1"/>
-          </a:fontRef>
-        </p:style>
-        <p:txBody>
-          <a:bodyPr rot="0" spcFirstLastPara="0" vertOverflow="overflow" horzOverflow="overflow" vert="horz" wrap="square" lIns="91440" tIns="45720" rIns="91440" bIns="45720" numCol="1" spcCol="0" rtlCol="0" fromWordArt="0" anchor="ctr" anchorCtr="0" forceAA="0" compatLnSpc="1">
-            <a:prstTxWarp prst="textNoShape">
-              <a:avLst/>
-            </a:prstTxWarp>
-            <a:noAutofit/>
-          </a:bodyPr>
-          <a:lstStyle/>
-          <a:p>
-            <a:pPr algn="ctr"/>
-            <a:endParaRPr lang="en-US"/>
-          </a:p>
-        </p:txBody>
-      </p:sp>
-      <p:graphicFrame>
-        <p:nvGraphicFramePr>
-          <p:cNvPr id="4" name="Content Placeholder 3">
-            <a:extLst>
-              <a:ext uri="{FF2B5EF4-FFF2-40B4-BE49-F238E27FC236}">
-                <a16:creationId xmlns:a16="http://schemas.microsoft.com/office/drawing/2014/main" id="{5024BF29-434D-AAB1-392E-1D35284C2953}"/>
-              </a:ext>
-            </a:extLst>
-          </p:cNvPr>
-          <p:cNvGraphicFramePr>
-            <a:graphicFrameLocks noGrp="1"/>
-          </p:cNvGraphicFramePr>
-          <p:nvPr>
-            <p:ph idx="1"/>
-            <p:extLst>
-              <p:ext uri="{D42A27DB-BD31-4B8C-83A1-F6EECF244321}">
-                <p14:modId xmlns:p14="http://schemas.microsoft.com/office/powerpoint/2010/main" val="711282493"/>
-              </p:ext>
-            </p:extLst>
-          </p:nvPr>
-        </p:nvGraphicFramePr>
-        <p:xfrm>
-          <a:off x="5054375" y="1998535"/>
-          <a:ext cx="6046134" cy="3087726"/>
-        </p:xfrm>
-        <a:graphic>
-          <a:graphicData uri="http://schemas.openxmlformats.org/drawingml/2006/table">
-            <a:tbl>
-              <a:tblPr firstRow="1" bandRow="1">
-                <a:tableStyleId>{0660B408-B3CF-4A94-85FC-2B1E0A45F4A2}</a:tableStyleId>
-              </a:tblPr>
-              <a:tblGrid>
-                <a:gridCol w="1760343">
-                  <a:extLst>
-                    <a:ext uri="{9D8B030D-6E8A-4147-A177-3AD203B41FA5}">
-                      <a16:colId xmlns:a16="http://schemas.microsoft.com/office/drawing/2014/main" val="4130571992"/>
-                    </a:ext>
-                  </a:extLst>
-                </a:gridCol>
-                <a:gridCol w="4285791">
-                  <a:extLst>
-                    <a:ext uri="{9D8B030D-6E8A-4147-A177-3AD203B41FA5}">
-                      <a16:colId xmlns:a16="http://schemas.microsoft.com/office/drawing/2014/main" val="3030552245"/>
-                    </a:ext>
-                  </a:extLst>
-                </a:gridCol>
-              </a:tblGrid>
-              <a:tr h="473410">
-                <a:tc>
-                  <a:txBody>
-                    <a:bodyPr/>
-                    <a:lstStyle/>
-                    <a:p>
-                      <a:pPr marL="0" algn="l" defTabSz="457200" rtl="0" eaLnBrk="1" latinLnBrk="0" hangingPunct="1"/>
-                      <a:r>
-                        <a:rPr lang="en-US" sz="2100" b="0" kern="1200" dirty="0">
-                          <a:ln>
-                            <a:solidFill>
-                              <a:schemeClr val="tx1"/>
-                            </a:solidFill>
-                          </a:ln>
-                          <a:solidFill>
-                            <a:schemeClr val="tx1"/>
-                          </a:solidFill>
-                          <a:latin typeface="+mn-lt"/>
-                          <a:ea typeface="+mn-ea"/>
-                          <a:cs typeface="+mn-cs"/>
-                        </a:rPr>
-                        <a:t>Best model</a:t>
-                      </a:r>
-                      <a:endParaRPr lang="en-GB" sz="2100" b="0" kern="1200" dirty="0">
-                        <a:ln>
-                          <a:solidFill>
-                            <a:schemeClr val="tx1"/>
-                          </a:solidFill>
-                        </a:ln>
-                        <a:solidFill>
-                          <a:schemeClr val="tx1"/>
-                        </a:solidFill>
-                        <a:latin typeface="+mn-lt"/>
-                        <a:ea typeface="+mn-ea"/>
-                        <a:cs typeface="+mn-cs"/>
-                      </a:endParaRPr>
-                    </a:p>
-                  </a:txBody>
-                  <a:tcPr marL="107593" marR="107593" marT="53797" marB="53797">
-                    <a:solidFill>
-                      <a:srgbClr val="000000">
-                        <a:alpha val="30196"/>
-                      </a:srgbClr>
-                    </a:solidFill>
-                  </a:tcPr>
-                </a:tc>
-                <a:tc>
-                  <a:txBody>
-                    <a:bodyPr/>
-                    <a:lstStyle/>
-                    <a:p>
-                      <a:pPr marL="0" algn="l" defTabSz="457200" rtl="0" eaLnBrk="1" latinLnBrk="0" hangingPunct="1"/>
-                      <a:r>
-                        <a:rPr lang="en-US" sz="2100" b="0" kern="1200" dirty="0">
-                          <a:ln>
-                            <a:solidFill>
-                              <a:schemeClr val="tx1"/>
-                            </a:solidFill>
-                          </a:ln>
-                          <a:solidFill>
-                            <a:schemeClr val="tx1"/>
-                          </a:solidFill>
-                          <a:latin typeface="+mn-lt"/>
-                          <a:ea typeface="+mn-ea"/>
-                          <a:cs typeface="+mn-cs"/>
-                        </a:rPr>
-                        <a:t>Random forest - 90.8% accuracy</a:t>
-                      </a:r>
-                      <a:endParaRPr lang="en-GB" sz="2100" b="0" kern="1200" dirty="0">
-                        <a:ln>
-                          <a:solidFill>
-                            <a:schemeClr val="tx1"/>
-                          </a:solidFill>
-                        </a:ln>
-                        <a:solidFill>
-                          <a:schemeClr val="tx1"/>
-                        </a:solidFill>
-                        <a:latin typeface="+mn-lt"/>
-                        <a:ea typeface="+mn-ea"/>
-                        <a:cs typeface="+mn-cs"/>
-                      </a:endParaRPr>
-                    </a:p>
-                  </a:txBody>
-                  <a:tcPr marL="107593" marR="107593" marT="53797" marB="53797">
-                    <a:solidFill>
-                      <a:srgbClr val="000000">
-                        <a:alpha val="30196"/>
-                      </a:srgbClr>
-                    </a:solidFill>
-                  </a:tcPr>
-                </a:tc>
-                <a:extLst>
-                  <a:ext uri="{0D108BD9-81ED-4DB2-BD59-A6C34878D82A}">
-                    <a16:rowId xmlns:a16="http://schemas.microsoft.com/office/drawing/2014/main" val="1316902998"/>
-                  </a:ext>
-                </a:extLst>
-              </a:tr>
-              <a:tr h="796189">
-                <a:tc>
-                  <a:txBody>
-                    <a:bodyPr/>
-                    <a:lstStyle/>
-                    <a:p>
-                      <a:r>
-                        <a:rPr lang="en-US" sz="2100" dirty="0">
-                          <a:ln>
-                            <a:solidFill>
-                              <a:schemeClr val="tx1"/>
-                            </a:solidFill>
-                          </a:ln>
-                          <a:solidFill>
-                            <a:schemeClr val="tx1"/>
-                          </a:solidFill>
-                        </a:rPr>
-                        <a:t>Main metric</a:t>
-                      </a:r>
-                      <a:endParaRPr lang="en-GB" sz="2100" dirty="0">
-                        <a:ln>
-                          <a:solidFill>
-                            <a:schemeClr val="tx1"/>
-                          </a:solidFill>
-                        </a:ln>
-                        <a:solidFill>
-                          <a:schemeClr val="tx1"/>
-                        </a:solidFill>
-                      </a:endParaRPr>
-                    </a:p>
-                  </a:txBody>
-                  <a:tcPr marL="107593" marR="107593" marT="53797" marB="53797">
-                    <a:solidFill>
-                      <a:schemeClr val="tx1">
-                        <a:alpha val="30196"/>
-                      </a:schemeClr>
-                    </a:solidFill>
-                  </a:tcPr>
-                </a:tc>
-                <a:tc>
-                  <a:txBody>
-                    <a:bodyPr/>
-                    <a:lstStyle/>
-                    <a:p>
-                      <a:r>
-                        <a:rPr lang="en-US" sz="2100" dirty="0">
-                          <a:ln>
-                            <a:solidFill>
-                              <a:schemeClr val="tx1"/>
-                            </a:solidFill>
-                          </a:ln>
-                          <a:solidFill>
-                            <a:schemeClr val="tx1"/>
-                          </a:solidFill>
-                        </a:rPr>
-                        <a:t>F1 score</a:t>
-                      </a:r>
-                      <a:r>
-                        <a:rPr lang="he-IL" sz="2100" dirty="0">
-                          <a:ln>
-                            <a:solidFill>
-                              <a:schemeClr val="tx1"/>
-                            </a:solidFill>
-                          </a:ln>
-                          <a:solidFill>
-                            <a:schemeClr val="tx1"/>
-                          </a:solidFill>
-                        </a:rPr>
-                        <a:t> 0.934</a:t>
-                      </a:r>
-                      <a:r>
-                        <a:rPr lang="en-US" sz="2100" dirty="0">
-                          <a:ln>
-                            <a:solidFill>
-                              <a:schemeClr val="tx1"/>
-                            </a:solidFill>
-                          </a:ln>
-                          <a:solidFill>
-                            <a:schemeClr val="tx1"/>
-                          </a:solidFill>
-                        </a:rPr>
-                        <a:t> – robust to class imbalance</a:t>
-                      </a:r>
-                      <a:endParaRPr lang="en-GB" sz="2100" dirty="0">
-                        <a:ln>
-                          <a:solidFill>
-                            <a:schemeClr val="tx1"/>
-                          </a:solidFill>
-                        </a:ln>
-                        <a:solidFill>
-                          <a:schemeClr val="tx1"/>
-                        </a:solidFill>
-                      </a:endParaRPr>
-                    </a:p>
-                  </a:txBody>
-                  <a:tcPr marL="107593" marR="107593" marT="53797" marB="53797">
-                    <a:solidFill>
-                      <a:schemeClr val="tx1">
-                        <a:alpha val="30196"/>
-                      </a:schemeClr>
-                    </a:solidFill>
-                  </a:tcPr>
-                </a:tc>
-                <a:extLst>
-                  <a:ext uri="{0D108BD9-81ED-4DB2-BD59-A6C34878D82A}">
-                    <a16:rowId xmlns:a16="http://schemas.microsoft.com/office/drawing/2014/main" val="1025177339"/>
-                  </a:ext>
-                </a:extLst>
-              </a:tr>
-              <a:tr h="473410">
-                <a:tc>
-                  <a:txBody>
-                    <a:bodyPr/>
-                    <a:lstStyle/>
-                    <a:p>
-                      <a:r>
-                        <a:rPr lang="en-US" sz="2100">
-                          <a:ln>
-                            <a:solidFill>
-                              <a:schemeClr val="tx1"/>
-                            </a:solidFill>
-                          </a:ln>
-                          <a:solidFill>
-                            <a:schemeClr val="tx1"/>
-                          </a:solidFill>
-                        </a:rPr>
-                        <a:t>Critical error</a:t>
-                      </a:r>
-                      <a:endParaRPr lang="en-GB" sz="2100">
-                        <a:ln>
-                          <a:solidFill>
-                            <a:schemeClr val="tx1"/>
-                          </a:solidFill>
-                        </a:ln>
-                        <a:solidFill>
-                          <a:schemeClr val="tx1"/>
-                        </a:solidFill>
-                      </a:endParaRPr>
-                    </a:p>
-                  </a:txBody>
-                  <a:tcPr marL="107593" marR="107593" marT="53797" marB="53797">
-                    <a:solidFill>
-                      <a:srgbClr val="000000">
-                        <a:alpha val="30196"/>
-                      </a:srgbClr>
-                    </a:solidFill>
-                  </a:tcPr>
-                </a:tc>
-                <a:tc>
-                  <a:txBody>
-                    <a:bodyPr/>
-                    <a:lstStyle/>
-                    <a:p>
-                      <a:r>
-                        <a:rPr lang="en-US" sz="2100" dirty="0">
-                          <a:ln>
-                            <a:solidFill>
-                              <a:schemeClr val="tx1"/>
-                            </a:solidFill>
-                          </a:ln>
-                          <a:solidFill>
-                            <a:schemeClr val="tx1"/>
-                          </a:solidFill>
-                        </a:rPr>
-                        <a:t>False positive</a:t>
-                      </a:r>
-                      <a:endParaRPr lang="en-GB" sz="2100" dirty="0">
-                        <a:ln>
-                          <a:solidFill>
-                            <a:schemeClr val="tx1"/>
-                          </a:solidFill>
-                        </a:ln>
-                        <a:solidFill>
-                          <a:schemeClr val="tx1"/>
-                        </a:solidFill>
-                      </a:endParaRPr>
-                    </a:p>
-                  </a:txBody>
-                  <a:tcPr marL="107593" marR="107593" marT="53797" marB="53797">
-                    <a:solidFill>
-                      <a:srgbClr val="000000">
-                        <a:alpha val="30196"/>
-                      </a:srgbClr>
-                    </a:solidFill>
-                  </a:tcPr>
-                </a:tc>
-                <a:extLst>
-                  <a:ext uri="{0D108BD9-81ED-4DB2-BD59-A6C34878D82A}">
-                    <a16:rowId xmlns:a16="http://schemas.microsoft.com/office/drawing/2014/main" val="1412165078"/>
-                  </a:ext>
-                </a:extLst>
-              </a:tr>
-              <a:tr h="796189">
-                <a:tc>
-                  <a:txBody>
-                    <a:bodyPr/>
-                    <a:lstStyle/>
-                    <a:p>
-                      <a:r>
-                        <a:rPr lang="en-US" sz="2100" dirty="0">
-                          <a:ln>
-                            <a:solidFill>
-                              <a:schemeClr val="tx1"/>
-                            </a:solidFill>
-                          </a:ln>
-                          <a:solidFill>
-                            <a:schemeClr val="tx1"/>
-                          </a:solidFill>
-                        </a:rPr>
-                        <a:t>Data noise</a:t>
-                      </a:r>
-                      <a:endParaRPr lang="en-GB" sz="2100" dirty="0">
-                        <a:ln>
-                          <a:solidFill>
-                            <a:schemeClr val="tx1"/>
-                          </a:solidFill>
-                        </a:ln>
-                        <a:solidFill>
-                          <a:schemeClr val="tx1"/>
-                        </a:solidFill>
-                      </a:endParaRPr>
-                    </a:p>
-                  </a:txBody>
-                  <a:tcPr marL="107593" marR="107593" marT="53797" marB="53797">
-                    <a:solidFill>
-                      <a:schemeClr val="tx1">
-                        <a:alpha val="30196"/>
-                      </a:schemeClr>
-                    </a:solidFill>
-                  </a:tcPr>
-                </a:tc>
-                <a:tc>
-                  <a:txBody>
-                    <a:bodyPr/>
-                    <a:lstStyle/>
-                    <a:p>
-                      <a:r>
-                        <a:rPr lang="en-US" sz="2100" dirty="0">
-                          <a:ln>
-                            <a:solidFill>
-                              <a:schemeClr val="tx1"/>
-                            </a:solidFill>
-                          </a:ln>
-                          <a:solidFill>
-                            <a:schemeClr val="tx1"/>
-                          </a:solidFill>
-                        </a:rPr>
-                        <a:t>Too many of “other”  domain, </a:t>
-                      </a:r>
-                      <a:r>
-                        <a:rPr lang="en-US" sz="2100" dirty="0" err="1">
-                          <a:ln>
-                            <a:solidFill>
-                              <a:schemeClr val="tx1"/>
-                            </a:solidFill>
-                          </a:ln>
-                          <a:solidFill>
-                            <a:schemeClr val="tx1"/>
-                          </a:solidFill>
-                        </a:rPr>
-                        <a:t>thowing</a:t>
-                      </a:r>
-                      <a:r>
-                        <a:rPr lang="en-US" sz="2100" dirty="0">
-                          <a:ln>
-                            <a:solidFill>
-                              <a:schemeClr val="tx1"/>
-                            </a:solidFill>
-                          </a:ln>
-                          <a:solidFill>
-                            <a:schemeClr val="tx1"/>
-                          </a:solidFill>
-                        </a:rPr>
-                        <a:t> off the system</a:t>
-                      </a:r>
-                      <a:endParaRPr lang="en-GB" sz="2100" dirty="0">
-                        <a:ln>
-                          <a:solidFill>
-                            <a:schemeClr val="tx1"/>
-                          </a:solidFill>
-                        </a:ln>
-                        <a:solidFill>
-                          <a:schemeClr val="tx1"/>
-                        </a:solidFill>
-                      </a:endParaRPr>
-                    </a:p>
-                  </a:txBody>
-                  <a:tcPr marL="107593" marR="107593" marT="53797" marB="53797">
-                    <a:solidFill>
-                      <a:schemeClr val="tx1">
-                        <a:alpha val="30196"/>
-                      </a:schemeClr>
-                    </a:solidFill>
-                  </a:tcPr>
-                </a:tc>
-                <a:extLst>
-                  <a:ext uri="{0D108BD9-81ED-4DB2-BD59-A6C34878D82A}">
-                    <a16:rowId xmlns:a16="http://schemas.microsoft.com/office/drawing/2014/main" val="492238510"/>
-                  </a:ext>
-                </a:extLst>
-              </a:tr>
-            </a:tbl>
-          </a:graphicData>
-        </a:graphic>
-      </p:graphicFrame>
-    </p:spTree>
-    <p:extLst>
-      <p:ext uri="{BB962C8B-B14F-4D97-AF65-F5344CB8AC3E}">
-        <p14:creationId xmlns:p14="http://schemas.microsoft.com/office/powerpoint/2010/main" val="3576788779"/>
       </p:ext>
     </p:extLst>
   </p:cSld>
